--- a/documents/Mid-Progress-PPT.pptx
+++ b/documents/Mid-Progress-PPT.pptx
@@ -5,7 +5,7 @@
     <p:sldMasterId id="2147483648" r:id="rId1"/>
   </p:sldMasterIdLst>
   <p:notesMasterIdLst>
-    <p:notesMasterId r:id="rId14"/>
+    <p:notesMasterId r:id="rId17"/>
   </p:notesMasterIdLst>
   <p:sldIdLst>
     <p:sldId id="256" r:id="rId2"/>
@@ -13,13 +13,16 @@
     <p:sldId id="499" r:id="rId4"/>
     <p:sldId id="500" r:id="rId5"/>
     <p:sldId id="501" r:id="rId6"/>
-    <p:sldId id="503" r:id="rId7"/>
-    <p:sldId id="504" r:id="rId8"/>
-    <p:sldId id="507" r:id="rId9"/>
-    <p:sldId id="502" r:id="rId10"/>
-    <p:sldId id="505" r:id="rId11"/>
-    <p:sldId id="506" r:id="rId12"/>
-    <p:sldId id="269" r:id="rId13"/>
+    <p:sldId id="512" r:id="rId7"/>
+    <p:sldId id="513" r:id="rId8"/>
+    <p:sldId id="505" r:id="rId9"/>
+    <p:sldId id="508" r:id="rId10"/>
+    <p:sldId id="507" r:id="rId11"/>
+    <p:sldId id="514" r:id="rId12"/>
+    <p:sldId id="504" r:id="rId13"/>
+    <p:sldId id="502" r:id="rId14"/>
+    <p:sldId id="506" r:id="rId15"/>
+    <p:sldId id="269" r:id="rId16"/>
   </p:sldIdLst>
   <p:sldSz cx="9144000" cy="6858000" type="screen4x3"/>
   <p:notesSz cx="6761163" cy="9942513"/>
@@ -137,6 +140,62 @@
 </p:presentation>
 </file>
 
+<file path=ppt/ink/ink1.xml><?xml version="1.0" encoding="utf-8"?>
+<inkml:ink xmlns:inkml="http://www.w3.org/2003/InkML">
+  <inkml:definitions>
+    <inkml:context xml:id="ctx0">
+      <inkml:inkSource xml:id="inkSrc0">
+        <inkml:traceFormat>
+          <inkml:channel name="X" type="integer" min="-2.14748E9" max="2.14748E9" units="cm"/>
+          <inkml:channel name="Y" type="integer" min="-2.14748E9" max="2.14748E9" units="cm"/>
+          <inkml:channel name="F" type="integer" max="32767" units="dev"/>
+        </inkml:traceFormat>
+        <inkml:channelProperties>
+          <inkml:channelProperty channel="X" name="resolution" value="1000" units="1/cm"/>
+          <inkml:channelProperty channel="Y" name="resolution" value="1000" units="1/cm"/>
+          <inkml:channelProperty channel="F" name="resolution" value="0" units="1/dev"/>
+        </inkml:channelProperties>
+      </inkml:inkSource>
+      <inkml:timestamp xml:id="ts0" timeString="2025-08-20T15:54:58.644"/>
+    </inkml:context>
+    <inkml:brush xml:id="br0">
+      <inkml:brushProperty name="width" value="0.35" units="cm"/>
+      <inkml:brushProperty name="height" value="0.35" units="cm"/>
+      <inkml:brushProperty name="color" value="#FFFFFF"/>
+    </inkml:brush>
+  </inkml:definitions>
+  <inkml:trace contextRef="#ctx0" brushRef="#br0">1 0 24575,'50'2'0,"58"11"0,47 1 0,-132-12 0,0 0 0,31 8 0,-30-5 0,48 4 0,-32-6 0,41 8 0,-43-5 0,57 2 0,-85-7 0,1-1 0,-1-1 0,1 0 0,-1 0 0,1-1 0,-1 0 0,0-1 0,0 0 0,0-1 0,17-8 0,-13 5 0,-1 2 0,1 0 0,1 0 0,-1 1 0,1 1 0,-1 1 0,1 0 0,0 1 0,0 0 0,26 3 0,-13 1 0,0 1 0,-1 1 0,1 2 0,45 17 0,-40-14 291,-25-8-622,0 1 0,0-1-1,0 2 1,10 4 0</inkml:trace>
+</inkml:ink>
+</file>
+
+<file path=ppt/ink/ink2.xml><?xml version="1.0" encoding="utf-8"?>
+<inkml:ink xmlns:inkml="http://www.w3.org/2003/InkML">
+  <inkml:definitions>
+    <inkml:context xml:id="ctx0">
+      <inkml:inkSource xml:id="inkSrc0">
+        <inkml:traceFormat>
+          <inkml:channel name="X" type="integer" min="-2.14748E9" max="2.14748E9" units="cm"/>
+          <inkml:channel name="Y" type="integer" min="-2.14748E9" max="2.14748E9" units="cm"/>
+          <inkml:channel name="F" type="integer" max="32767" units="dev"/>
+        </inkml:traceFormat>
+        <inkml:channelProperties>
+          <inkml:channelProperty channel="X" name="resolution" value="1000" units="1/cm"/>
+          <inkml:channelProperty channel="Y" name="resolution" value="1000" units="1/cm"/>
+          <inkml:channelProperty channel="F" name="resolution" value="0" units="1/dev"/>
+        </inkml:channelProperties>
+      </inkml:inkSource>
+      <inkml:timestamp xml:id="ts0" timeString="2025-08-20T15:54:58.644"/>
+    </inkml:context>
+    <inkml:brush xml:id="br0">
+      <inkml:brushProperty name="width" value="0.35" units="cm"/>
+      <inkml:brushProperty name="height" value="0.35" units="cm"/>
+      <inkml:brushProperty name="color" value="#FFFFFF"/>
+    </inkml:brush>
+  </inkml:definitions>
+  <inkml:trace contextRef="#ctx0" brushRef="#br0">1 0 24575,'50'2'0,"58"11"0,47 1 0,-132-12 0,0 0 0,31 8 0,-30-5 0,48 4 0,-32-6 0,41 8 0,-43-5 0,57 2 0,-85-7 0,1-1 0,-1-1 0,1 0 0,-1 0 0,1-1 0,-1 0 0,0-1 0,0 0 0,0-1 0,17-8 0,-13 5 0,-1 2 0,1 0 0,1 0 0,-1 1 0,1 1 0,-1 1 0,1 0 0,0 1 0,0 0 0,26 3 0,-13 1 0,0 1 0,-1 1 0,1 2 0,45 17 0,-40-14 291,-25-8-622,0 1 0,0-1-1,0 2 1,10 4 0</inkml:trace>
+</inkml:ink>
+</file>
+
 <file path=ppt/notesMasters/notesMaster1.xml><?xml version="1.0" encoding="utf-8"?>
 <p:notesMaster xmlns:a="http://schemas.openxmlformats.org/drawingml/2006/main" xmlns:r="http://schemas.openxmlformats.org/officeDocument/2006/relationships" xmlns:p="http://schemas.openxmlformats.org/presentationml/2006/main">
   <p:cSld>
@@ -219,7 +278,7 @@
           <a:p>
             <a:fld id="{42668431-CD35-4516-818D-B41B2C4843CF}" type="datetimeFigureOut">
               <a:rPr lang="en-IN" smtClean="0"/>
-              <a:t>02-03-2026</a:t>
+              <a:t>06-03-2026</a:t>
             </a:fld>
             <a:endParaRPr lang="en-IN"/>
           </a:p>
@@ -580,6 +639,118 @@
   <p:cSld>
     <p:spTree>
       <p:nvGrpSpPr>
+        <p:cNvPr id="1" name="">
+          <a:extLst>
+            <a:ext uri="{FF2B5EF4-FFF2-40B4-BE49-F238E27FC236}">
+              <a16:creationId xmlns:a16="http://schemas.microsoft.com/office/drawing/2014/main" id="{2B03C315-2F31-0964-567A-7316CBA1CF76}"/>
+            </a:ext>
+          </a:extLst>
+        </p:cNvPr>
+        <p:cNvGrpSpPr/>
+        <p:nvPr/>
+      </p:nvGrpSpPr>
+      <p:grpSpPr>
+        <a:xfrm>
+          <a:off x="0" y="0"/>
+          <a:ext cx="0" cy="0"/>
+          <a:chOff x="0" y="0"/>
+          <a:chExt cx="0" cy="0"/>
+        </a:xfrm>
+      </p:grpSpPr>
+      <p:sp>
+        <p:nvSpPr>
+          <p:cNvPr id="2" name="Slide Image Placeholder 1">
+            <a:extLst>
+              <a:ext uri="{FF2B5EF4-FFF2-40B4-BE49-F238E27FC236}">
+                <a16:creationId xmlns:a16="http://schemas.microsoft.com/office/drawing/2014/main" id="{BAFFF20B-31C2-4485-B341-8D4BE37D5E77}"/>
+              </a:ext>
+            </a:extLst>
+          </p:cNvPr>
+          <p:cNvSpPr>
+            <a:spLocks noGrp="1" noRot="1" noChangeAspect="1"/>
+          </p:cNvSpPr>
+          <p:nvPr>
+            <p:ph type="sldImg"/>
+          </p:nvPr>
+        </p:nvSpPr>
+        <p:spPr/>
+      </p:sp>
+      <p:sp>
+        <p:nvSpPr>
+          <p:cNvPr id="3" name="Notes Placeholder 2">
+            <a:extLst>
+              <a:ext uri="{FF2B5EF4-FFF2-40B4-BE49-F238E27FC236}">
+                <a16:creationId xmlns:a16="http://schemas.microsoft.com/office/drawing/2014/main" id="{61E42BF9-76F7-7E12-CA6C-411D0EA633F3}"/>
+              </a:ext>
+            </a:extLst>
+          </p:cNvPr>
+          <p:cNvSpPr>
+            <a:spLocks noGrp="1"/>
+          </p:cNvSpPr>
+          <p:nvPr>
+            <p:ph type="body" idx="1"/>
+          </p:nvPr>
+        </p:nvSpPr>
+        <p:spPr/>
+        <p:txBody>
+          <a:bodyPr/>
+          <a:lstStyle/>
+          <a:p>
+            <a:r>
+              <a:rPr lang="en-US" dirty="0"/>
+              <a:t>New Courses replaced with New Programmes</a:t>
+            </a:r>
+            <a:endParaRPr lang="en-IN" dirty="0"/>
+          </a:p>
+        </p:txBody>
+      </p:sp>
+      <p:sp>
+        <p:nvSpPr>
+          <p:cNvPr id="4" name="Slide Number Placeholder 3">
+            <a:extLst>
+              <a:ext uri="{FF2B5EF4-FFF2-40B4-BE49-F238E27FC236}">
+                <a16:creationId xmlns:a16="http://schemas.microsoft.com/office/drawing/2014/main" id="{83E48A72-B066-3B79-5AF6-739496354C8B}"/>
+              </a:ext>
+            </a:extLst>
+          </p:cNvPr>
+          <p:cNvSpPr>
+            <a:spLocks noGrp="1"/>
+          </p:cNvSpPr>
+          <p:nvPr>
+            <p:ph type="sldNum" sz="quarter" idx="5"/>
+          </p:nvPr>
+        </p:nvSpPr>
+        <p:spPr/>
+        <p:txBody>
+          <a:bodyPr/>
+          <a:lstStyle/>
+          <a:p>
+            <a:fld id="{DAB949B3-C4AB-4FB2-8B24-B07A558BD59F}" type="slidenum">
+              <a:rPr lang="en-IN" smtClean="0"/>
+              <a:t>11</a:t>
+            </a:fld>
+            <a:endParaRPr lang="en-IN"/>
+          </a:p>
+        </p:txBody>
+      </p:sp>
+    </p:spTree>
+    <p:extLst>
+      <p:ext uri="{BB962C8B-B14F-4D97-AF65-F5344CB8AC3E}">
+        <p14:creationId xmlns:p14="http://schemas.microsoft.com/office/powerpoint/2010/main" val="457875738"/>
+      </p:ext>
+    </p:extLst>
+  </p:cSld>
+  <p:clrMapOvr>
+    <a:masterClrMapping/>
+  </p:clrMapOvr>
+</p:notes>
+</file>
+
+<file path=ppt/notesSlides/notesSlide11.xml><?xml version="1.0" encoding="utf-8"?>
+<p:notes xmlns:a="http://schemas.openxmlformats.org/drawingml/2006/main" xmlns:r="http://schemas.openxmlformats.org/officeDocument/2006/relationships" xmlns:p="http://schemas.openxmlformats.org/presentationml/2006/main">
+  <p:cSld>
+    <p:spTree>
+      <p:nvGrpSpPr>
         <p:cNvPr id="1" name=""/>
         <p:cNvGrpSpPr/>
         <p:nvPr/>
@@ -644,7 +815,183 @@
           <a:p>
             <a:fld id="{DAB949B3-C4AB-4FB2-8B24-B07A558BD59F}" type="slidenum">
               <a:rPr lang="en-IN" smtClean="0"/>
-              <a:t>11</a:t>
+              <a:t>12</a:t>
+            </a:fld>
+            <a:endParaRPr lang="en-IN"/>
+          </a:p>
+        </p:txBody>
+      </p:sp>
+    </p:spTree>
+    <p:extLst>
+      <p:ext uri="{BB962C8B-B14F-4D97-AF65-F5344CB8AC3E}">
+        <p14:creationId xmlns:p14="http://schemas.microsoft.com/office/powerpoint/2010/main" val="3636050451"/>
+      </p:ext>
+    </p:extLst>
+  </p:cSld>
+  <p:clrMapOvr>
+    <a:masterClrMapping/>
+  </p:clrMapOvr>
+</p:notes>
+</file>
+
+<file path=ppt/notesSlides/notesSlide12.xml><?xml version="1.0" encoding="utf-8"?>
+<p:notes xmlns:a="http://schemas.openxmlformats.org/drawingml/2006/main" xmlns:r="http://schemas.openxmlformats.org/officeDocument/2006/relationships" xmlns:p="http://schemas.openxmlformats.org/presentationml/2006/main">
+  <p:cSld>
+    <p:spTree>
+      <p:nvGrpSpPr>
+        <p:cNvPr id="1" name=""/>
+        <p:cNvGrpSpPr/>
+        <p:nvPr/>
+      </p:nvGrpSpPr>
+      <p:grpSpPr>
+        <a:xfrm>
+          <a:off x="0" y="0"/>
+          <a:ext cx="0" cy="0"/>
+          <a:chOff x="0" y="0"/>
+          <a:chExt cx="0" cy="0"/>
+        </a:xfrm>
+      </p:grpSpPr>
+      <p:sp>
+        <p:nvSpPr>
+          <p:cNvPr id="2" name="Slide Image Placeholder 1"/>
+          <p:cNvSpPr>
+            <a:spLocks noGrp="1" noRot="1" noChangeAspect="1"/>
+          </p:cNvSpPr>
+          <p:nvPr>
+            <p:ph type="sldImg"/>
+          </p:nvPr>
+        </p:nvSpPr>
+        <p:spPr/>
+      </p:sp>
+      <p:sp>
+        <p:nvSpPr>
+          <p:cNvPr id="3" name="Notes Placeholder 2"/>
+          <p:cNvSpPr>
+            <a:spLocks noGrp="1"/>
+          </p:cNvSpPr>
+          <p:nvPr>
+            <p:ph type="body" idx="1"/>
+          </p:nvPr>
+        </p:nvSpPr>
+        <p:spPr/>
+        <p:txBody>
+          <a:bodyPr/>
+          <a:lstStyle/>
+          <a:p>
+            <a:r>
+              <a:rPr lang="en-US" dirty="0"/>
+              <a:t>New Courses replaced with New Programmes</a:t>
+            </a:r>
+            <a:endParaRPr lang="en-IN" dirty="0"/>
+          </a:p>
+        </p:txBody>
+      </p:sp>
+      <p:sp>
+        <p:nvSpPr>
+          <p:cNvPr id="4" name="Slide Number Placeholder 3"/>
+          <p:cNvSpPr>
+            <a:spLocks noGrp="1"/>
+          </p:cNvSpPr>
+          <p:nvPr>
+            <p:ph type="sldNum" sz="quarter" idx="5"/>
+          </p:nvPr>
+        </p:nvSpPr>
+        <p:spPr/>
+        <p:txBody>
+          <a:bodyPr/>
+          <a:lstStyle/>
+          <a:p>
+            <a:fld id="{DAB949B3-C4AB-4FB2-8B24-B07A558BD59F}" type="slidenum">
+              <a:rPr lang="en-IN" smtClean="0"/>
+              <a:t>13</a:t>
+            </a:fld>
+            <a:endParaRPr lang="en-IN"/>
+          </a:p>
+        </p:txBody>
+      </p:sp>
+    </p:spTree>
+    <p:extLst>
+      <p:ext uri="{BB962C8B-B14F-4D97-AF65-F5344CB8AC3E}">
+        <p14:creationId xmlns:p14="http://schemas.microsoft.com/office/powerpoint/2010/main" val="1623754413"/>
+      </p:ext>
+    </p:extLst>
+  </p:cSld>
+  <p:clrMapOvr>
+    <a:masterClrMapping/>
+  </p:clrMapOvr>
+</p:notes>
+</file>
+
+<file path=ppt/notesSlides/notesSlide13.xml><?xml version="1.0" encoding="utf-8"?>
+<p:notes xmlns:a="http://schemas.openxmlformats.org/drawingml/2006/main" xmlns:r="http://schemas.openxmlformats.org/officeDocument/2006/relationships" xmlns:p="http://schemas.openxmlformats.org/presentationml/2006/main">
+  <p:cSld>
+    <p:spTree>
+      <p:nvGrpSpPr>
+        <p:cNvPr id="1" name=""/>
+        <p:cNvGrpSpPr/>
+        <p:nvPr/>
+      </p:nvGrpSpPr>
+      <p:grpSpPr>
+        <a:xfrm>
+          <a:off x="0" y="0"/>
+          <a:ext cx="0" cy="0"/>
+          <a:chOff x="0" y="0"/>
+          <a:chExt cx="0" cy="0"/>
+        </a:xfrm>
+      </p:grpSpPr>
+      <p:sp>
+        <p:nvSpPr>
+          <p:cNvPr id="2" name="Slide Image Placeholder 1"/>
+          <p:cNvSpPr>
+            <a:spLocks noGrp="1" noRot="1" noChangeAspect="1"/>
+          </p:cNvSpPr>
+          <p:nvPr>
+            <p:ph type="sldImg"/>
+          </p:nvPr>
+        </p:nvSpPr>
+        <p:spPr/>
+      </p:sp>
+      <p:sp>
+        <p:nvSpPr>
+          <p:cNvPr id="3" name="Notes Placeholder 2"/>
+          <p:cNvSpPr>
+            <a:spLocks noGrp="1"/>
+          </p:cNvSpPr>
+          <p:nvPr>
+            <p:ph type="body" idx="1"/>
+          </p:nvPr>
+        </p:nvSpPr>
+        <p:spPr/>
+        <p:txBody>
+          <a:bodyPr/>
+          <a:lstStyle/>
+          <a:p>
+            <a:r>
+              <a:rPr lang="en-US" dirty="0"/>
+              <a:t>New Courses replaced with New Programmes</a:t>
+            </a:r>
+            <a:endParaRPr lang="en-IN" dirty="0"/>
+          </a:p>
+        </p:txBody>
+      </p:sp>
+      <p:sp>
+        <p:nvSpPr>
+          <p:cNvPr id="4" name="Slide Number Placeholder 3"/>
+          <p:cNvSpPr>
+            <a:spLocks noGrp="1"/>
+          </p:cNvSpPr>
+          <p:nvPr>
+            <p:ph type="sldNum" sz="quarter" idx="5"/>
+          </p:nvPr>
+        </p:nvSpPr>
+        <p:spPr/>
+        <p:txBody>
+          <a:bodyPr/>
+          <a:lstStyle/>
+          <a:p>
+            <a:fld id="{DAB949B3-C4AB-4FB2-8B24-B07A558BD59F}" type="slidenum">
+              <a:rPr lang="en-IN" smtClean="0"/>
+              <a:t>14</a:t>
             </a:fld>
             <a:endParaRPr lang="en-IN"/>
           </a:p>
@@ -932,7 +1279,13 @@
   <p:cSld>
     <p:spTree>
       <p:nvGrpSpPr>
-        <p:cNvPr id="1" name=""/>
+        <p:cNvPr id="1" name="">
+          <a:extLst>
+            <a:ext uri="{FF2B5EF4-FFF2-40B4-BE49-F238E27FC236}">
+              <a16:creationId xmlns:a16="http://schemas.microsoft.com/office/drawing/2014/main" id="{A193BE92-2836-2377-AC03-A2DE9BD92B00}"/>
+            </a:ext>
+          </a:extLst>
+        </p:cNvPr>
         <p:cNvGrpSpPr/>
         <p:nvPr/>
       </p:nvGrpSpPr>
@@ -946,7 +1299,13 @@
       </p:grpSpPr>
       <p:sp>
         <p:nvSpPr>
-          <p:cNvPr id="2" name="Slide Image Placeholder 1"/>
+          <p:cNvPr id="2" name="Slide Image Placeholder 1">
+            <a:extLst>
+              <a:ext uri="{FF2B5EF4-FFF2-40B4-BE49-F238E27FC236}">
+                <a16:creationId xmlns:a16="http://schemas.microsoft.com/office/drawing/2014/main" id="{49BC9794-528F-622F-43DD-4480761AC265}"/>
+              </a:ext>
+            </a:extLst>
+          </p:cNvPr>
           <p:cNvSpPr>
             <a:spLocks noGrp="1" noRot="1" noChangeAspect="1"/>
           </p:cNvSpPr>
@@ -958,7 +1317,13 @@
       </p:sp>
       <p:sp>
         <p:nvSpPr>
-          <p:cNvPr id="3" name="Notes Placeholder 2"/>
+          <p:cNvPr id="3" name="Notes Placeholder 2">
+            <a:extLst>
+              <a:ext uri="{FF2B5EF4-FFF2-40B4-BE49-F238E27FC236}">
+                <a16:creationId xmlns:a16="http://schemas.microsoft.com/office/drawing/2014/main" id="{030C919C-92B7-D9DB-548B-F07A4AA3A29C}"/>
+              </a:ext>
+            </a:extLst>
+          </p:cNvPr>
           <p:cNvSpPr>
             <a:spLocks noGrp="1"/>
           </p:cNvSpPr>
@@ -981,7 +1346,13 @@
       </p:sp>
       <p:sp>
         <p:nvSpPr>
-          <p:cNvPr id="4" name="Slide Number Placeholder 3"/>
+          <p:cNvPr id="4" name="Slide Number Placeholder 3">
+            <a:extLst>
+              <a:ext uri="{FF2B5EF4-FFF2-40B4-BE49-F238E27FC236}">
+                <a16:creationId xmlns:a16="http://schemas.microsoft.com/office/drawing/2014/main" id="{13746616-91E6-EEB7-1856-D004D3BB5C8A}"/>
+              </a:ext>
+            </a:extLst>
+          </p:cNvPr>
           <p:cNvSpPr>
             <a:spLocks noGrp="1"/>
           </p:cNvSpPr>
@@ -1005,7 +1376,7 @@
     </p:spTree>
     <p:extLst>
       <p:ext uri="{BB962C8B-B14F-4D97-AF65-F5344CB8AC3E}">
-        <p14:creationId xmlns:p14="http://schemas.microsoft.com/office/powerpoint/2010/main" val="1469640102"/>
+        <p14:creationId xmlns:p14="http://schemas.microsoft.com/office/powerpoint/2010/main" val="996527169"/>
       </p:ext>
     </p:extLst>
   </p:cSld>
@@ -1016,6 +1387,118 @@
 </file>
 
 <file path=ppt/notesSlides/notesSlide6.xml><?xml version="1.0" encoding="utf-8"?>
+<p:notes xmlns:a="http://schemas.openxmlformats.org/drawingml/2006/main" xmlns:r="http://schemas.openxmlformats.org/officeDocument/2006/relationships" xmlns:p="http://schemas.openxmlformats.org/presentationml/2006/main">
+  <p:cSld>
+    <p:spTree>
+      <p:nvGrpSpPr>
+        <p:cNvPr id="1" name="">
+          <a:extLst>
+            <a:ext uri="{FF2B5EF4-FFF2-40B4-BE49-F238E27FC236}">
+              <a16:creationId xmlns:a16="http://schemas.microsoft.com/office/drawing/2014/main" id="{212EE8AE-6B96-A0B7-5B01-1E66F70918F4}"/>
+            </a:ext>
+          </a:extLst>
+        </p:cNvPr>
+        <p:cNvGrpSpPr/>
+        <p:nvPr/>
+      </p:nvGrpSpPr>
+      <p:grpSpPr>
+        <a:xfrm>
+          <a:off x="0" y="0"/>
+          <a:ext cx="0" cy="0"/>
+          <a:chOff x="0" y="0"/>
+          <a:chExt cx="0" cy="0"/>
+        </a:xfrm>
+      </p:grpSpPr>
+      <p:sp>
+        <p:nvSpPr>
+          <p:cNvPr id="2" name="Slide Image Placeholder 1">
+            <a:extLst>
+              <a:ext uri="{FF2B5EF4-FFF2-40B4-BE49-F238E27FC236}">
+                <a16:creationId xmlns:a16="http://schemas.microsoft.com/office/drawing/2014/main" id="{196B1102-F4C9-B3F6-1EBC-67E21A0E1FA1}"/>
+              </a:ext>
+            </a:extLst>
+          </p:cNvPr>
+          <p:cNvSpPr>
+            <a:spLocks noGrp="1" noRot="1" noChangeAspect="1"/>
+          </p:cNvSpPr>
+          <p:nvPr>
+            <p:ph type="sldImg"/>
+          </p:nvPr>
+        </p:nvSpPr>
+        <p:spPr/>
+      </p:sp>
+      <p:sp>
+        <p:nvSpPr>
+          <p:cNvPr id="3" name="Notes Placeholder 2">
+            <a:extLst>
+              <a:ext uri="{FF2B5EF4-FFF2-40B4-BE49-F238E27FC236}">
+                <a16:creationId xmlns:a16="http://schemas.microsoft.com/office/drawing/2014/main" id="{48509EEB-322A-5BF0-4BAB-89D92C041C1E}"/>
+              </a:ext>
+            </a:extLst>
+          </p:cNvPr>
+          <p:cNvSpPr>
+            <a:spLocks noGrp="1"/>
+          </p:cNvSpPr>
+          <p:nvPr>
+            <p:ph type="body" idx="1"/>
+          </p:nvPr>
+        </p:nvSpPr>
+        <p:spPr/>
+        <p:txBody>
+          <a:bodyPr/>
+          <a:lstStyle/>
+          <a:p>
+            <a:r>
+              <a:rPr lang="en-US" dirty="0"/>
+              <a:t>New Courses replaced with New Programmes</a:t>
+            </a:r>
+            <a:endParaRPr lang="en-IN" dirty="0"/>
+          </a:p>
+        </p:txBody>
+      </p:sp>
+      <p:sp>
+        <p:nvSpPr>
+          <p:cNvPr id="4" name="Slide Number Placeholder 3">
+            <a:extLst>
+              <a:ext uri="{FF2B5EF4-FFF2-40B4-BE49-F238E27FC236}">
+                <a16:creationId xmlns:a16="http://schemas.microsoft.com/office/drawing/2014/main" id="{160D25FF-334B-A586-E002-BDB8BEB75D2B}"/>
+              </a:ext>
+            </a:extLst>
+          </p:cNvPr>
+          <p:cNvSpPr>
+            <a:spLocks noGrp="1"/>
+          </p:cNvSpPr>
+          <p:nvPr>
+            <p:ph type="sldNum" sz="quarter" idx="5"/>
+          </p:nvPr>
+        </p:nvSpPr>
+        <p:spPr/>
+        <p:txBody>
+          <a:bodyPr/>
+          <a:lstStyle/>
+          <a:p>
+            <a:fld id="{DAB949B3-C4AB-4FB2-8B24-B07A558BD59F}" type="slidenum">
+              <a:rPr lang="en-IN" smtClean="0"/>
+              <a:t>7</a:t>
+            </a:fld>
+            <a:endParaRPr lang="en-IN"/>
+          </a:p>
+        </p:txBody>
+      </p:sp>
+    </p:spTree>
+    <p:extLst>
+      <p:ext uri="{BB962C8B-B14F-4D97-AF65-F5344CB8AC3E}">
+        <p14:creationId xmlns:p14="http://schemas.microsoft.com/office/powerpoint/2010/main" val="4163471663"/>
+      </p:ext>
+    </p:extLst>
+  </p:cSld>
+  <p:clrMapOvr>
+    <a:masterClrMapping/>
+  </p:clrMapOvr>
+</p:notes>
+</file>
+
+<file path=ppt/notesSlides/notesSlide7.xml><?xml version="1.0" encoding="utf-8"?>
 <p:notes xmlns:a="http://schemas.openxmlformats.org/drawingml/2006/main" xmlns:r="http://schemas.openxmlformats.org/officeDocument/2006/relationships" xmlns:p="http://schemas.openxmlformats.org/presentationml/2006/main">
   <p:cSld>
     <p:spTree>
@@ -1084,7 +1567,7 @@
           <a:p>
             <a:fld id="{DAB949B3-C4AB-4FB2-8B24-B07A558BD59F}" type="slidenum">
               <a:rPr lang="en-IN" smtClean="0"/>
-              <a:t>7</a:t>
+              <a:t>8</a:t>
             </a:fld>
             <a:endParaRPr lang="en-IN"/>
           </a:p>
@@ -1093,7 +1576,7 @@
     </p:spTree>
     <p:extLst>
       <p:ext uri="{BB962C8B-B14F-4D97-AF65-F5344CB8AC3E}">
-        <p14:creationId xmlns:p14="http://schemas.microsoft.com/office/powerpoint/2010/main" val="3636050451"/>
+        <p14:creationId xmlns:p14="http://schemas.microsoft.com/office/powerpoint/2010/main" val="4271546448"/>
       </p:ext>
     </p:extLst>
   </p:cSld>
@@ -1103,7 +1586,119 @@
 </p:notes>
 </file>
 
-<file path=ppt/notesSlides/notesSlide7.xml><?xml version="1.0" encoding="utf-8"?>
+<file path=ppt/notesSlides/notesSlide8.xml><?xml version="1.0" encoding="utf-8"?>
+<p:notes xmlns:a="http://schemas.openxmlformats.org/drawingml/2006/main" xmlns:r="http://schemas.openxmlformats.org/officeDocument/2006/relationships" xmlns:p="http://schemas.openxmlformats.org/presentationml/2006/main">
+  <p:cSld>
+    <p:spTree>
+      <p:nvGrpSpPr>
+        <p:cNvPr id="1" name="">
+          <a:extLst>
+            <a:ext uri="{FF2B5EF4-FFF2-40B4-BE49-F238E27FC236}">
+              <a16:creationId xmlns:a16="http://schemas.microsoft.com/office/drawing/2014/main" id="{DCAA661C-EE8E-4550-79FC-6D2DE6283726}"/>
+            </a:ext>
+          </a:extLst>
+        </p:cNvPr>
+        <p:cNvGrpSpPr/>
+        <p:nvPr/>
+      </p:nvGrpSpPr>
+      <p:grpSpPr>
+        <a:xfrm>
+          <a:off x="0" y="0"/>
+          <a:ext cx="0" cy="0"/>
+          <a:chOff x="0" y="0"/>
+          <a:chExt cx="0" cy="0"/>
+        </a:xfrm>
+      </p:grpSpPr>
+      <p:sp>
+        <p:nvSpPr>
+          <p:cNvPr id="2" name="Slide Image Placeholder 1">
+            <a:extLst>
+              <a:ext uri="{FF2B5EF4-FFF2-40B4-BE49-F238E27FC236}">
+                <a16:creationId xmlns:a16="http://schemas.microsoft.com/office/drawing/2014/main" id="{08A3BE65-ABC2-C31E-F7BF-5074E255AABC}"/>
+              </a:ext>
+            </a:extLst>
+          </p:cNvPr>
+          <p:cNvSpPr>
+            <a:spLocks noGrp="1" noRot="1" noChangeAspect="1"/>
+          </p:cNvSpPr>
+          <p:nvPr>
+            <p:ph type="sldImg"/>
+          </p:nvPr>
+        </p:nvSpPr>
+        <p:spPr/>
+      </p:sp>
+      <p:sp>
+        <p:nvSpPr>
+          <p:cNvPr id="3" name="Notes Placeholder 2">
+            <a:extLst>
+              <a:ext uri="{FF2B5EF4-FFF2-40B4-BE49-F238E27FC236}">
+                <a16:creationId xmlns:a16="http://schemas.microsoft.com/office/drawing/2014/main" id="{E1E0FA71-42DC-F866-0B0B-A1E7E3AEB701}"/>
+              </a:ext>
+            </a:extLst>
+          </p:cNvPr>
+          <p:cNvSpPr>
+            <a:spLocks noGrp="1"/>
+          </p:cNvSpPr>
+          <p:nvPr>
+            <p:ph type="body" idx="1"/>
+          </p:nvPr>
+        </p:nvSpPr>
+        <p:spPr/>
+        <p:txBody>
+          <a:bodyPr/>
+          <a:lstStyle/>
+          <a:p>
+            <a:r>
+              <a:rPr lang="en-US" dirty="0"/>
+              <a:t>New Courses replaced with New Programmes</a:t>
+            </a:r>
+            <a:endParaRPr lang="en-IN" dirty="0"/>
+          </a:p>
+        </p:txBody>
+      </p:sp>
+      <p:sp>
+        <p:nvSpPr>
+          <p:cNvPr id="4" name="Slide Number Placeholder 3">
+            <a:extLst>
+              <a:ext uri="{FF2B5EF4-FFF2-40B4-BE49-F238E27FC236}">
+                <a16:creationId xmlns:a16="http://schemas.microsoft.com/office/drawing/2014/main" id="{4A24EB81-AFC1-22F2-9431-A4C105BD9B2A}"/>
+              </a:ext>
+            </a:extLst>
+          </p:cNvPr>
+          <p:cNvSpPr>
+            <a:spLocks noGrp="1"/>
+          </p:cNvSpPr>
+          <p:nvPr>
+            <p:ph type="sldNum" sz="quarter" idx="5"/>
+          </p:nvPr>
+        </p:nvSpPr>
+        <p:spPr/>
+        <p:txBody>
+          <a:bodyPr/>
+          <a:lstStyle/>
+          <a:p>
+            <a:fld id="{DAB949B3-C4AB-4FB2-8B24-B07A558BD59F}" type="slidenum">
+              <a:rPr lang="en-IN" smtClean="0"/>
+              <a:t>9</a:t>
+            </a:fld>
+            <a:endParaRPr lang="en-IN"/>
+          </a:p>
+        </p:txBody>
+      </p:sp>
+    </p:spTree>
+    <p:extLst>
+      <p:ext uri="{BB962C8B-B14F-4D97-AF65-F5344CB8AC3E}">
+        <p14:creationId xmlns:p14="http://schemas.microsoft.com/office/powerpoint/2010/main" val="793938371"/>
+      </p:ext>
+    </p:extLst>
+  </p:cSld>
+  <p:clrMapOvr>
+    <a:masterClrMapping/>
+  </p:clrMapOvr>
+</p:notes>
+</file>
+
+<file path=ppt/notesSlides/notesSlide9.xml><?xml version="1.0" encoding="utf-8"?>
 <p:notes xmlns:a="http://schemas.openxmlformats.org/drawingml/2006/main" xmlns:r="http://schemas.openxmlformats.org/officeDocument/2006/relationships" xmlns:p="http://schemas.openxmlformats.org/presentationml/2006/main">
   <p:cSld>
     <p:spTree>
@@ -1196,7 +1791,7 @@
           <a:p>
             <a:fld id="{DAB949B3-C4AB-4FB2-8B24-B07A558BD59F}" type="slidenum">
               <a:rPr lang="en-IN" smtClean="0"/>
-              <a:t>8</a:t>
+              <a:t>10</a:t>
             </a:fld>
             <a:endParaRPr lang="en-IN"/>
           </a:p>
@@ -1206,182 +1801,6 @@
     <p:extLst>
       <p:ext uri="{BB962C8B-B14F-4D97-AF65-F5344CB8AC3E}">
         <p14:creationId xmlns:p14="http://schemas.microsoft.com/office/powerpoint/2010/main" val="3277129637"/>
-      </p:ext>
-    </p:extLst>
-  </p:cSld>
-  <p:clrMapOvr>
-    <a:masterClrMapping/>
-  </p:clrMapOvr>
-</p:notes>
-</file>
-
-<file path=ppt/notesSlides/notesSlide8.xml><?xml version="1.0" encoding="utf-8"?>
-<p:notes xmlns:a="http://schemas.openxmlformats.org/drawingml/2006/main" xmlns:r="http://schemas.openxmlformats.org/officeDocument/2006/relationships" xmlns:p="http://schemas.openxmlformats.org/presentationml/2006/main">
-  <p:cSld>
-    <p:spTree>
-      <p:nvGrpSpPr>
-        <p:cNvPr id="1" name=""/>
-        <p:cNvGrpSpPr/>
-        <p:nvPr/>
-      </p:nvGrpSpPr>
-      <p:grpSpPr>
-        <a:xfrm>
-          <a:off x="0" y="0"/>
-          <a:ext cx="0" cy="0"/>
-          <a:chOff x="0" y="0"/>
-          <a:chExt cx="0" cy="0"/>
-        </a:xfrm>
-      </p:grpSpPr>
-      <p:sp>
-        <p:nvSpPr>
-          <p:cNvPr id="2" name="Slide Image Placeholder 1"/>
-          <p:cNvSpPr>
-            <a:spLocks noGrp="1" noRot="1" noChangeAspect="1"/>
-          </p:cNvSpPr>
-          <p:nvPr>
-            <p:ph type="sldImg"/>
-          </p:nvPr>
-        </p:nvSpPr>
-        <p:spPr/>
-      </p:sp>
-      <p:sp>
-        <p:nvSpPr>
-          <p:cNvPr id="3" name="Notes Placeholder 2"/>
-          <p:cNvSpPr>
-            <a:spLocks noGrp="1"/>
-          </p:cNvSpPr>
-          <p:nvPr>
-            <p:ph type="body" idx="1"/>
-          </p:nvPr>
-        </p:nvSpPr>
-        <p:spPr/>
-        <p:txBody>
-          <a:bodyPr/>
-          <a:lstStyle/>
-          <a:p>
-            <a:r>
-              <a:rPr lang="en-US" dirty="0"/>
-              <a:t>New Courses replaced with New Programmes</a:t>
-            </a:r>
-            <a:endParaRPr lang="en-IN" dirty="0"/>
-          </a:p>
-        </p:txBody>
-      </p:sp>
-      <p:sp>
-        <p:nvSpPr>
-          <p:cNvPr id="4" name="Slide Number Placeholder 3"/>
-          <p:cNvSpPr>
-            <a:spLocks noGrp="1"/>
-          </p:cNvSpPr>
-          <p:nvPr>
-            <p:ph type="sldNum" sz="quarter" idx="5"/>
-          </p:nvPr>
-        </p:nvSpPr>
-        <p:spPr/>
-        <p:txBody>
-          <a:bodyPr/>
-          <a:lstStyle/>
-          <a:p>
-            <a:fld id="{DAB949B3-C4AB-4FB2-8B24-B07A558BD59F}" type="slidenum">
-              <a:rPr lang="en-IN" smtClean="0"/>
-              <a:t>9</a:t>
-            </a:fld>
-            <a:endParaRPr lang="en-IN"/>
-          </a:p>
-        </p:txBody>
-      </p:sp>
-    </p:spTree>
-    <p:extLst>
-      <p:ext uri="{BB962C8B-B14F-4D97-AF65-F5344CB8AC3E}">
-        <p14:creationId xmlns:p14="http://schemas.microsoft.com/office/powerpoint/2010/main" val="1623754413"/>
-      </p:ext>
-    </p:extLst>
-  </p:cSld>
-  <p:clrMapOvr>
-    <a:masterClrMapping/>
-  </p:clrMapOvr>
-</p:notes>
-</file>
-
-<file path=ppt/notesSlides/notesSlide9.xml><?xml version="1.0" encoding="utf-8"?>
-<p:notes xmlns:a="http://schemas.openxmlformats.org/drawingml/2006/main" xmlns:r="http://schemas.openxmlformats.org/officeDocument/2006/relationships" xmlns:p="http://schemas.openxmlformats.org/presentationml/2006/main">
-  <p:cSld>
-    <p:spTree>
-      <p:nvGrpSpPr>
-        <p:cNvPr id="1" name=""/>
-        <p:cNvGrpSpPr/>
-        <p:nvPr/>
-      </p:nvGrpSpPr>
-      <p:grpSpPr>
-        <a:xfrm>
-          <a:off x="0" y="0"/>
-          <a:ext cx="0" cy="0"/>
-          <a:chOff x="0" y="0"/>
-          <a:chExt cx="0" cy="0"/>
-        </a:xfrm>
-      </p:grpSpPr>
-      <p:sp>
-        <p:nvSpPr>
-          <p:cNvPr id="2" name="Slide Image Placeholder 1"/>
-          <p:cNvSpPr>
-            <a:spLocks noGrp="1" noRot="1" noChangeAspect="1"/>
-          </p:cNvSpPr>
-          <p:nvPr>
-            <p:ph type="sldImg"/>
-          </p:nvPr>
-        </p:nvSpPr>
-        <p:spPr/>
-      </p:sp>
-      <p:sp>
-        <p:nvSpPr>
-          <p:cNvPr id="3" name="Notes Placeholder 2"/>
-          <p:cNvSpPr>
-            <a:spLocks noGrp="1"/>
-          </p:cNvSpPr>
-          <p:nvPr>
-            <p:ph type="body" idx="1"/>
-          </p:nvPr>
-        </p:nvSpPr>
-        <p:spPr/>
-        <p:txBody>
-          <a:bodyPr/>
-          <a:lstStyle/>
-          <a:p>
-            <a:r>
-              <a:rPr lang="en-US" dirty="0"/>
-              <a:t>New Courses replaced with New Programmes</a:t>
-            </a:r>
-            <a:endParaRPr lang="en-IN" dirty="0"/>
-          </a:p>
-        </p:txBody>
-      </p:sp>
-      <p:sp>
-        <p:nvSpPr>
-          <p:cNvPr id="4" name="Slide Number Placeholder 3"/>
-          <p:cNvSpPr>
-            <a:spLocks noGrp="1"/>
-          </p:cNvSpPr>
-          <p:nvPr>
-            <p:ph type="sldNum" sz="quarter" idx="5"/>
-          </p:nvPr>
-        </p:nvSpPr>
-        <p:spPr/>
-        <p:txBody>
-          <a:bodyPr/>
-          <a:lstStyle/>
-          <a:p>
-            <a:fld id="{DAB949B3-C4AB-4FB2-8B24-B07A558BD59F}" type="slidenum">
-              <a:rPr lang="en-IN" smtClean="0"/>
-              <a:t>10</a:t>
-            </a:fld>
-            <a:endParaRPr lang="en-IN"/>
-          </a:p>
-        </p:txBody>
-      </p:sp>
-    </p:spTree>
-    <p:extLst>
-      <p:ext uri="{BB962C8B-B14F-4D97-AF65-F5344CB8AC3E}">
-        <p14:creationId xmlns:p14="http://schemas.microsoft.com/office/powerpoint/2010/main" val="4271546448"/>
       </p:ext>
     </p:extLst>
   </p:cSld>
@@ -1572,7 +1991,7 @@
           <a:p>
             <a:fld id="{F4AA89A1-F17A-4D3D-AC08-D16056C16514}" type="datetimeFigureOut">
               <a:rPr lang="en-IN" smtClean="0"/>
-              <a:t>02-03-2026</a:t>
+              <a:t>06-03-2026</a:t>
             </a:fld>
             <a:endParaRPr lang="en-IN"/>
           </a:p>
@@ -1742,7 +2161,7 @@
           <a:p>
             <a:fld id="{F4AA89A1-F17A-4D3D-AC08-D16056C16514}" type="datetimeFigureOut">
               <a:rPr lang="en-IN" smtClean="0"/>
-              <a:t>02-03-2026</a:t>
+              <a:t>06-03-2026</a:t>
             </a:fld>
             <a:endParaRPr lang="en-IN"/>
           </a:p>
@@ -1922,7 +2341,7 @@
           <a:p>
             <a:fld id="{F4AA89A1-F17A-4D3D-AC08-D16056C16514}" type="datetimeFigureOut">
               <a:rPr lang="en-IN" smtClean="0"/>
-              <a:t>02-03-2026</a:t>
+              <a:t>06-03-2026</a:t>
             </a:fld>
             <a:endParaRPr lang="en-IN"/>
           </a:p>
@@ -2092,7 +2511,7 @@
           <a:p>
             <a:fld id="{F4AA89A1-F17A-4D3D-AC08-D16056C16514}" type="datetimeFigureOut">
               <a:rPr lang="en-IN" smtClean="0"/>
-              <a:t>02-03-2026</a:t>
+              <a:t>06-03-2026</a:t>
             </a:fld>
             <a:endParaRPr lang="en-IN"/>
           </a:p>
@@ -2338,7 +2757,7 @@
           <a:p>
             <a:fld id="{F4AA89A1-F17A-4D3D-AC08-D16056C16514}" type="datetimeFigureOut">
               <a:rPr lang="en-IN" smtClean="0"/>
-              <a:t>02-03-2026</a:t>
+              <a:t>06-03-2026</a:t>
             </a:fld>
             <a:endParaRPr lang="en-IN"/>
           </a:p>
@@ -2626,7 +3045,7 @@
           <a:p>
             <a:fld id="{F4AA89A1-F17A-4D3D-AC08-D16056C16514}" type="datetimeFigureOut">
               <a:rPr lang="en-IN" smtClean="0"/>
-              <a:t>02-03-2026</a:t>
+              <a:t>06-03-2026</a:t>
             </a:fld>
             <a:endParaRPr lang="en-IN"/>
           </a:p>
@@ -3048,7 +3467,7 @@
           <a:p>
             <a:fld id="{F4AA89A1-F17A-4D3D-AC08-D16056C16514}" type="datetimeFigureOut">
               <a:rPr lang="en-IN" smtClean="0"/>
-              <a:t>02-03-2026</a:t>
+              <a:t>06-03-2026</a:t>
             </a:fld>
             <a:endParaRPr lang="en-IN"/>
           </a:p>
@@ -3166,7 +3585,7 @@
           <a:p>
             <a:fld id="{F4AA89A1-F17A-4D3D-AC08-D16056C16514}" type="datetimeFigureOut">
               <a:rPr lang="en-IN" smtClean="0"/>
-              <a:t>02-03-2026</a:t>
+              <a:t>06-03-2026</a:t>
             </a:fld>
             <a:endParaRPr lang="en-IN"/>
           </a:p>
@@ -3261,7 +3680,7 @@
           <a:p>
             <a:fld id="{F4AA89A1-F17A-4D3D-AC08-D16056C16514}" type="datetimeFigureOut">
               <a:rPr lang="en-IN" smtClean="0"/>
-              <a:t>02-03-2026</a:t>
+              <a:t>06-03-2026</a:t>
             </a:fld>
             <a:endParaRPr lang="en-IN"/>
           </a:p>
@@ -3538,7 +3957,7 @@
           <a:p>
             <a:fld id="{F4AA89A1-F17A-4D3D-AC08-D16056C16514}" type="datetimeFigureOut">
               <a:rPr lang="en-IN" smtClean="0"/>
-              <a:t>02-03-2026</a:t>
+              <a:t>06-03-2026</a:t>
             </a:fld>
             <a:endParaRPr lang="en-IN"/>
           </a:p>
@@ -3791,7 +4210,7 @@
           <a:p>
             <a:fld id="{F4AA89A1-F17A-4D3D-AC08-D16056C16514}" type="datetimeFigureOut">
               <a:rPr lang="en-IN" smtClean="0"/>
-              <a:t>02-03-2026</a:t>
+              <a:t>06-03-2026</a:t>
             </a:fld>
             <a:endParaRPr lang="en-IN"/>
           </a:p>
@@ -4004,7 +4423,7 @@
           <a:p>
             <a:fld id="{F4AA89A1-F17A-4D3D-AC08-D16056C16514}" type="datetimeFigureOut">
               <a:rPr lang="en-IN" smtClean="0"/>
-              <a:t>02-03-2026</a:t>
+              <a:t>06-03-2026</a:t>
             </a:fld>
             <a:endParaRPr lang="en-IN"/>
           </a:p>
@@ -4419,7 +4838,13 @@
   <p:cSld>
     <p:spTree>
       <p:nvGrpSpPr>
-        <p:cNvPr id="1" name=""/>
+        <p:cNvPr id="1" name="">
+          <a:extLst>
+            <a:ext uri="{FF2B5EF4-FFF2-40B4-BE49-F238E27FC236}">
+              <a16:creationId xmlns:a16="http://schemas.microsoft.com/office/drawing/2014/main" id="{BDBD42DB-FF71-D8E6-630F-399C60C5361D}"/>
+            </a:ext>
+          </a:extLst>
+        </p:cNvPr>
         <p:cNvGrpSpPr/>
         <p:nvPr/>
       </p:nvGrpSpPr>
@@ -4433,410 +4858,13 @@
       </p:grpSpPr>
       <p:pic>
         <p:nvPicPr>
-          <p:cNvPr id="4" name="Content Placeholder 3"/>
-          <p:cNvPicPr>
-            <a:picLocks noGrp="1" noChangeAspect="1"/>
-          </p:cNvPicPr>
-          <p:nvPr>
-            <p:ph idx="1"/>
-          </p:nvPr>
-        </p:nvPicPr>
-        <p:blipFill>
-          <a:blip r:embed="rId3" cstate="print">
-            <a:extLst>
-              <a:ext uri="{28A0092B-C50C-407E-A947-70E740481C1C}">
-                <a14:useLocalDpi xmlns:a14="http://schemas.microsoft.com/office/drawing/2010/main" val="0"/>
-              </a:ext>
-            </a:extLst>
-          </a:blip>
-          <a:stretch>
-            <a:fillRect/>
-          </a:stretch>
-        </p:blipFill>
-        <p:spPr>
-          <a:xfrm>
-            <a:off x="44047" y="0"/>
-            <a:ext cx="9180512" cy="6885384"/>
-          </a:xfrm>
-        </p:spPr>
-      </p:pic>
-      <p:sp>
-        <p:nvSpPr>
-          <p:cNvPr id="5" name="Rectangle 1"/>
-          <p:cNvSpPr>
-            <a:spLocks noChangeArrowheads="1"/>
-          </p:cNvSpPr>
-          <p:nvPr/>
-        </p:nvSpPr>
-        <p:spPr bwMode="auto">
-          <a:xfrm>
-            <a:off x="103414" y="298972"/>
-            <a:ext cx="6844849" cy="584775"/>
-          </a:xfrm>
-          <a:prstGeom prst="rect">
-            <a:avLst/>
-          </a:prstGeom>
-          <a:noFill/>
-          <a:ln>
-            <a:noFill/>
-          </a:ln>
-          <a:effectLst/>
-          <a:extLst>
-            <a:ext uri="{909E8E84-426E-40DD-AFC4-6F175D3DCCD1}">
-              <a14:hiddenFill xmlns:a14="http://schemas.microsoft.com/office/drawing/2010/main">
-                <a:solidFill>
-                  <a:schemeClr val="accent1"/>
-                </a:solidFill>
-              </a14:hiddenFill>
-            </a:ext>
-            <a:ext uri="{91240B29-F687-4F45-9708-019B960494DF}">
-              <a14:hiddenLine xmlns:a14="http://schemas.microsoft.com/office/drawing/2010/main" w="9525">
-                <a:solidFill>
-                  <a:schemeClr val="tx1"/>
-                </a:solidFill>
-                <a:miter lim="800000"/>
-                <a:headEnd/>
-                <a:tailEnd/>
-              </a14:hiddenLine>
-            </a:ext>
-            <a:ext uri="{AF507438-7753-43E0-B8FC-AC1667EBCBE1}">
-              <a14:hiddenEffects xmlns:a14="http://schemas.microsoft.com/office/drawing/2010/main">
-                <a:effectLst>
-                  <a:outerShdw dist="35921" dir="2700000" algn="ctr" rotWithShape="0">
-                    <a:schemeClr val="bg2"/>
-                  </a:outerShdw>
-                </a:effectLst>
-              </a14:hiddenEffects>
-            </a:ext>
-          </a:extLst>
-        </p:spPr>
-        <p:txBody>
-          <a:bodyPr vert="horz" wrap="square" lIns="91440" tIns="45720" rIns="91440" bIns="45720" numCol="1" anchor="ctr" anchorCtr="0" compatLnSpc="1">
-            <a:prstTxWarp prst="textNoShape">
-              <a:avLst/>
-            </a:prstTxWarp>
-            <a:spAutoFit/>
-          </a:bodyPr>
-          <a:lstStyle/>
-          <a:p>
-            <a:pPr lvl="0">
-              <a:buSzPct val="25000"/>
-            </a:pPr>
-            <a:r>
-              <a:rPr lang="en-IN" sz="3200" b="1" dirty="0">
-                <a:latin typeface="Verdana" panose="020B0604030504040204" pitchFamily="34" charset="0"/>
-                <a:ea typeface="Verdana" panose="020B0604030504040204" pitchFamily="34" charset="0"/>
-              </a:rPr>
-              <a:t>Expected Results &amp; Impact</a:t>
-            </a:r>
-            <a:endParaRPr lang="en-IN" sz="3200" b="1" dirty="0">
-              <a:solidFill>
-                <a:srgbClr val="E31E24"/>
-              </a:solidFill>
-              <a:latin typeface="Verdana" panose="020B0604030504040204" pitchFamily="34" charset="0"/>
-              <a:ea typeface="Verdana" panose="020B0604030504040204" pitchFamily="34" charset="0"/>
-              <a:cs typeface="Times New Roman" panose="02020603050405020304" pitchFamily="18" charset="0"/>
-              <a:sym typeface="Arial"/>
-            </a:endParaRPr>
-          </a:p>
-        </p:txBody>
-      </p:sp>
-      <p:cxnSp>
-        <p:nvCxnSpPr>
-          <p:cNvPr id="7" name="Straight Connector 6"/>
-          <p:cNvCxnSpPr/>
-          <p:nvPr/>
-        </p:nvCxnSpPr>
-        <p:spPr>
-          <a:xfrm>
-            <a:off x="0" y="1061448"/>
-            <a:ext cx="9180513" cy="0"/>
-          </a:xfrm>
-          <a:prstGeom prst="line">
-            <a:avLst/>
-          </a:prstGeom>
-          <a:ln w="25400">
-            <a:solidFill>
-              <a:srgbClr val="0060AA"/>
-            </a:solidFill>
-          </a:ln>
-        </p:spPr>
-        <p:style>
-          <a:lnRef idx="1">
-            <a:schemeClr val="accent1"/>
-          </a:lnRef>
-          <a:fillRef idx="0">
-            <a:schemeClr val="accent1"/>
-          </a:fillRef>
-          <a:effectRef idx="0">
-            <a:schemeClr val="accent1"/>
-          </a:effectRef>
-          <a:fontRef idx="minor">
-            <a:schemeClr val="tx1"/>
-          </a:fontRef>
-        </p:style>
-      </p:cxnSp>
-      <p:pic>
-        <p:nvPicPr>
-          <p:cNvPr id="9" name="Picture 8"/>
-          <p:cNvPicPr>
-            <a:picLocks noChangeAspect="1"/>
-          </p:cNvPicPr>
-          <p:nvPr/>
-        </p:nvPicPr>
-        <p:blipFill>
-          <a:blip r:embed="rId4" cstate="print">
-            <a:extLst>
-              <a:ext uri="{28A0092B-C50C-407E-A947-70E740481C1C}">
-                <a14:useLocalDpi xmlns:a14="http://schemas.microsoft.com/office/drawing/2010/main" val="0"/>
-              </a:ext>
-            </a:extLst>
-          </a:blip>
-          <a:stretch>
-            <a:fillRect/>
-          </a:stretch>
-        </p:blipFill>
-        <p:spPr>
-          <a:xfrm>
-            <a:off x="72008" y="6309320"/>
-            <a:ext cx="2411760" cy="346691"/>
-          </a:xfrm>
-          <a:prstGeom prst="rect">
-            <a:avLst/>
-          </a:prstGeom>
-        </p:spPr>
-      </p:pic>
-      <p:sp>
-        <p:nvSpPr>
-          <p:cNvPr id="6" name="TextBox 5">
+          <p:cNvPr id="4" name="Content Placeholder 3">
             <a:extLst>
               <a:ext uri="{FF2B5EF4-FFF2-40B4-BE49-F238E27FC236}">
-                <a16:creationId xmlns:a16="http://schemas.microsoft.com/office/drawing/2014/main" id="{AE24D516-77C6-C96A-5F77-D099623448D8}"/>
+                <a16:creationId xmlns:a16="http://schemas.microsoft.com/office/drawing/2014/main" id="{52FB631E-E469-C80D-C58A-99E545F3785B}"/>
               </a:ext>
             </a:extLst>
           </p:cNvPr>
-          <p:cNvSpPr txBox="1"/>
-          <p:nvPr/>
-        </p:nvSpPr>
-        <p:spPr>
-          <a:xfrm>
-            <a:off x="179512" y="1293834"/>
-            <a:ext cx="8784976" cy="372794"/>
-          </a:xfrm>
-          <a:prstGeom prst="rect">
-            <a:avLst/>
-          </a:prstGeom>
-          <a:noFill/>
-        </p:spPr>
-        <p:txBody>
-          <a:bodyPr wrap="square">
-            <a:spAutoFit/>
-          </a:bodyPr>
-          <a:lstStyle/>
-          <a:p>
-            <a:pPr marL="0" marR="0" algn="just" fontAlgn="base">
-              <a:lnSpc>
-                <a:spcPct val="107000"/>
-              </a:lnSpc>
-              <a:spcBef>
-                <a:spcPts val="0"/>
-              </a:spcBef>
-              <a:spcAft>
-                <a:spcPts val="0"/>
-              </a:spcAft>
-            </a:pPr>
-            <a:r>
-              <a:rPr lang="en-US" sz="1800" kern="100" dirty="0">
-                <a:solidFill>
-                  <a:srgbClr val="000000"/>
-                </a:solidFill>
-                <a:effectLst/>
-                <a:latin typeface="Verdana" panose="020B0604030504040204" pitchFamily="34" charset="0"/>
-                <a:ea typeface="Times New Roman" panose="02020603050405020304" pitchFamily="18" charset="0"/>
-                <a:cs typeface="Times New Roman" panose="02020603050405020304" pitchFamily="18" charset="0"/>
-              </a:rPr>
-              <a:t> </a:t>
-            </a:r>
-            <a:endParaRPr lang="en-US" sz="2800" kern="100" dirty="0">
-              <a:effectLst/>
-              <a:latin typeface="+mj-lt"/>
-              <a:ea typeface="Calibri" panose="020F0502020204030204" pitchFamily="34" charset="0"/>
-              <a:cs typeface="Times New Roman" panose="02020603050405020304" pitchFamily="18" charset="0"/>
-            </a:endParaRPr>
-          </a:p>
-        </p:txBody>
-      </p:sp>
-      <p:sp>
-        <p:nvSpPr>
-          <p:cNvPr id="3" name="TextBox 2">
-            <a:extLst>
-              <a:ext uri="{FF2B5EF4-FFF2-40B4-BE49-F238E27FC236}">
-                <a16:creationId xmlns:a16="http://schemas.microsoft.com/office/drawing/2014/main" id="{659AC123-1FF4-759B-44D8-95C077A7D7D5}"/>
-              </a:ext>
-            </a:extLst>
-          </p:cNvPr>
-          <p:cNvSpPr txBox="1"/>
-          <p:nvPr/>
-        </p:nvSpPr>
-        <p:spPr>
-          <a:xfrm>
-            <a:off x="286882" y="1824167"/>
-            <a:ext cx="8606747" cy="3693319"/>
-          </a:xfrm>
-          <a:prstGeom prst="rect">
-            <a:avLst/>
-          </a:prstGeom>
-          <a:noFill/>
-        </p:spPr>
-        <p:txBody>
-          <a:bodyPr wrap="square">
-            <a:spAutoFit/>
-          </a:bodyPr>
-          <a:lstStyle/>
-          <a:p>
-            <a:pPr marL="285750" indent="-285750">
-              <a:buFont typeface="Arial" panose="020B0604020202020204" pitchFamily="34" charset="0"/>
-              <a:buChar char="•"/>
-            </a:pPr>
-            <a:r>
-              <a:rPr lang="en-US" dirty="0"/>
-              <a:t>The final system will provide an efficient Distributed Rate Limiter to control and manage API traffic.</a:t>
-            </a:r>
-          </a:p>
-          <a:p>
-            <a:pPr marL="285750" indent="-285750">
-              <a:buFont typeface="Arial" panose="020B0604020202020204" pitchFamily="34" charset="0"/>
-              <a:buChar char="•"/>
-            </a:pPr>
-            <a:endParaRPr lang="en-US" b="0" i="0" dirty="0">
-              <a:solidFill>
-                <a:srgbClr val="374151"/>
-              </a:solidFill>
-              <a:effectLst/>
-              <a:latin typeface="Söhne"/>
-            </a:endParaRPr>
-          </a:p>
-          <a:p>
-            <a:pPr marL="285750" indent="-285750">
-              <a:buFont typeface="Arial" panose="020B0604020202020204" pitchFamily="34" charset="0"/>
-              <a:buChar char="•"/>
-            </a:pPr>
-            <a:r>
-              <a:rPr lang="en-US" dirty="0"/>
-              <a:t>Users and services will experience stable and reliable API performance under high request loads.</a:t>
-            </a:r>
-          </a:p>
-          <a:p>
-            <a:pPr marL="285750" indent="-285750">
-              <a:buFont typeface="Arial" panose="020B0604020202020204" pitchFamily="34" charset="0"/>
-              <a:buChar char="•"/>
-            </a:pPr>
-            <a:endParaRPr lang="en-US" b="0" i="0" dirty="0">
-              <a:solidFill>
-                <a:srgbClr val="374151"/>
-              </a:solidFill>
-              <a:effectLst/>
-              <a:latin typeface="Söhne"/>
-            </a:endParaRPr>
-          </a:p>
-          <a:p>
-            <a:pPr marL="285750" indent="-285750">
-              <a:buFont typeface="Arial" panose="020B0604020202020204" pitchFamily="34" charset="0"/>
-              <a:buChar char="•"/>
-            </a:pPr>
-            <a:r>
-              <a:rPr lang="en-US" dirty="0"/>
-              <a:t>Secure authentication and API key management will ensure controlled and authorized access.</a:t>
-            </a:r>
-          </a:p>
-          <a:p>
-            <a:pPr marL="285750" indent="-285750">
-              <a:buFont typeface="Arial" panose="020B0604020202020204" pitchFamily="34" charset="0"/>
-              <a:buChar char="•"/>
-            </a:pPr>
-            <a:endParaRPr lang="en-US" i="0" dirty="0">
-              <a:solidFill>
-                <a:srgbClr val="374151"/>
-              </a:solidFill>
-              <a:effectLst/>
-              <a:latin typeface="Söhne"/>
-            </a:endParaRPr>
-          </a:p>
-          <a:p>
-            <a:pPr marL="285750" indent="-285750">
-              <a:buFont typeface="Arial" panose="020B0604020202020204" pitchFamily="34" charset="0"/>
-              <a:buChar char="•"/>
-            </a:pPr>
-            <a:r>
-              <a:rPr lang="en-US" dirty="0"/>
-              <a:t>Redis caching will reduce response time and improve request handling performance.</a:t>
-            </a:r>
-          </a:p>
-          <a:p>
-            <a:pPr marL="285750" indent="-285750">
-              <a:buFont typeface="Arial" panose="020B0604020202020204" pitchFamily="34" charset="0"/>
-              <a:buChar char="•"/>
-            </a:pPr>
-            <a:endParaRPr lang="en-US" i="0" dirty="0">
-              <a:solidFill>
-                <a:srgbClr val="374151"/>
-              </a:solidFill>
-              <a:effectLst/>
-              <a:latin typeface="Söhne"/>
-            </a:endParaRPr>
-          </a:p>
-          <a:p>
-            <a:pPr marL="285750" indent="-285750">
-              <a:buFont typeface="Arial" panose="020B0604020202020204" pitchFamily="34" charset="0"/>
-              <a:buChar char="•"/>
-            </a:pPr>
-            <a:r>
-              <a:rPr lang="en-US" dirty="0"/>
-              <a:t>Prometheus and Grafana monitoring will provide real-time system insights and reliability tracking.</a:t>
-            </a:r>
-            <a:endParaRPr lang="en-US" i="0" dirty="0">
-              <a:solidFill>
-                <a:srgbClr val="374151"/>
-              </a:solidFill>
-              <a:effectLst/>
-              <a:latin typeface="Söhne"/>
-            </a:endParaRPr>
-          </a:p>
-        </p:txBody>
-      </p:sp>
-    </p:spTree>
-    <p:extLst>
-      <p:ext uri="{BB962C8B-B14F-4D97-AF65-F5344CB8AC3E}">
-        <p14:creationId xmlns:p14="http://schemas.microsoft.com/office/powerpoint/2010/main" val="1099878333"/>
-      </p:ext>
-    </p:extLst>
-  </p:cSld>
-  <p:clrMapOvr>
-    <a:masterClrMapping/>
-  </p:clrMapOvr>
-</p:sld>
-</file>
-
-<file path=ppt/slides/slide11.xml><?xml version="1.0" encoding="utf-8"?>
-<p:sld xmlns:a="http://schemas.openxmlformats.org/drawingml/2006/main" xmlns:r="http://schemas.openxmlformats.org/officeDocument/2006/relationships" xmlns:p="http://schemas.openxmlformats.org/presentationml/2006/main">
-  <p:cSld>
-    <p:spTree>
-      <p:nvGrpSpPr>
-        <p:cNvPr id="1" name=""/>
-        <p:cNvGrpSpPr/>
-        <p:nvPr/>
-      </p:nvGrpSpPr>
-      <p:grpSpPr>
-        <a:xfrm>
-          <a:off x="0" y="0"/>
-          <a:ext cx="0" cy="0"/>
-          <a:chOff x="0" y="0"/>
-          <a:chExt cx="0" cy="0"/>
-        </a:xfrm>
-      </p:grpSpPr>
-      <p:pic>
-        <p:nvPicPr>
-          <p:cNvPr id="4" name="Content Placeholder 3"/>
           <p:cNvPicPr>
             <a:picLocks noGrp="1" noChangeAspect="1"/>
           </p:cNvPicPr>
@@ -4865,7 +4893,13 @@
       </p:pic>
       <p:sp>
         <p:nvSpPr>
-          <p:cNvPr id="5" name="Rectangle 1"/>
+          <p:cNvPr id="5" name="Rectangle 1">
+            <a:extLst>
+              <a:ext uri="{FF2B5EF4-FFF2-40B4-BE49-F238E27FC236}">
+                <a16:creationId xmlns:a16="http://schemas.microsoft.com/office/drawing/2014/main" id="{3B6D9598-AD90-B9CA-8610-998CE22F1CA3}"/>
+              </a:ext>
+            </a:extLst>
+          </p:cNvPr>
           <p:cNvSpPr>
             <a:spLocks noChangeArrowheads="1"/>
           </p:cNvSpPr>
@@ -4926,2990 +4960,18 @@
               <a:buSzPct val="25000"/>
             </a:pPr>
             <a:r>
-              <a:rPr lang="en-IN" sz="3200" b="1" dirty="0">
-                <a:latin typeface="Verdana" panose="020B0604030504040204" pitchFamily="34" charset="0"/>
-                <a:ea typeface="Verdana" panose="020B0604030504040204" pitchFamily="34" charset="0"/>
-              </a:rPr>
-              <a:t>Learning Outcomes So Far</a:t>
-            </a:r>
-            <a:endParaRPr lang="en-IN" sz="3200" b="1" dirty="0">
-              <a:solidFill>
-                <a:srgbClr val="E31E24"/>
-              </a:solidFill>
-              <a:latin typeface="Verdana" panose="020B0604030504040204" pitchFamily="34" charset="0"/>
-              <a:ea typeface="Verdana" panose="020B0604030504040204" pitchFamily="34" charset="0"/>
-              <a:cs typeface="Times New Roman" panose="02020603050405020304" pitchFamily="18" charset="0"/>
-              <a:sym typeface="Arial"/>
-            </a:endParaRPr>
-          </a:p>
-        </p:txBody>
-      </p:sp>
-      <p:cxnSp>
-        <p:nvCxnSpPr>
-          <p:cNvPr id="7" name="Straight Connector 6"/>
-          <p:cNvCxnSpPr/>
-          <p:nvPr/>
-        </p:nvCxnSpPr>
-        <p:spPr>
-          <a:xfrm>
-            <a:off x="0" y="1061448"/>
-            <a:ext cx="9180513" cy="0"/>
-          </a:xfrm>
-          <a:prstGeom prst="line">
-            <a:avLst/>
-          </a:prstGeom>
-          <a:ln w="25400">
-            <a:solidFill>
-              <a:srgbClr val="0060AA"/>
-            </a:solidFill>
-          </a:ln>
-        </p:spPr>
-        <p:style>
-          <a:lnRef idx="1">
-            <a:schemeClr val="accent1"/>
-          </a:lnRef>
-          <a:fillRef idx="0">
-            <a:schemeClr val="accent1"/>
-          </a:fillRef>
-          <a:effectRef idx="0">
-            <a:schemeClr val="accent1"/>
-          </a:effectRef>
-          <a:fontRef idx="minor">
-            <a:schemeClr val="tx1"/>
-          </a:fontRef>
-        </p:style>
-      </p:cxnSp>
-      <p:pic>
-        <p:nvPicPr>
-          <p:cNvPr id="9" name="Picture 8"/>
-          <p:cNvPicPr>
-            <a:picLocks noChangeAspect="1"/>
-          </p:cNvPicPr>
-          <p:nvPr/>
-        </p:nvPicPr>
-        <p:blipFill>
-          <a:blip r:embed="rId4" cstate="print">
-            <a:extLst>
-              <a:ext uri="{28A0092B-C50C-407E-A947-70E740481C1C}">
-                <a14:useLocalDpi xmlns:a14="http://schemas.microsoft.com/office/drawing/2010/main" val="0"/>
-              </a:ext>
-            </a:extLst>
-          </a:blip>
-          <a:stretch>
-            <a:fillRect/>
-          </a:stretch>
-        </p:blipFill>
-        <p:spPr>
-          <a:xfrm>
-            <a:off x="72008" y="6309320"/>
-            <a:ext cx="2411760" cy="346691"/>
-          </a:xfrm>
-          <a:prstGeom prst="rect">
-            <a:avLst/>
-          </a:prstGeom>
-        </p:spPr>
-      </p:pic>
-      <p:sp>
-        <p:nvSpPr>
-          <p:cNvPr id="6" name="TextBox 5">
-            <a:extLst>
-              <a:ext uri="{FF2B5EF4-FFF2-40B4-BE49-F238E27FC236}">
-                <a16:creationId xmlns:a16="http://schemas.microsoft.com/office/drawing/2014/main" id="{AE24D516-77C6-C96A-5F77-D099623448D8}"/>
-              </a:ext>
-            </a:extLst>
-          </p:cNvPr>
-          <p:cNvSpPr txBox="1"/>
-          <p:nvPr/>
-        </p:nvSpPr>
-        <p:spPr>
-          <a:xfrm>
-            <a:off x="103414" y="1686863"/>
-            <a:ext cx="8964487" cy="3931910"/>
-          </a:xfrm>
-          <a:prstGeom prst="rect">
-            <a:avLst/>
-          </a:prstGeom>
-          <a:noFill/>
-        </p:spPr>
-        <p:txBody>
-          <a:bodyPr wrap="square">
-            <a:spAutoFit/>
-          </a:bodyPr>
-          <a:lstStyle/>
-          <a:p>
-            <a:pPr marL="285750" indent="-285750" algn="just" fontAlgn="base">
-              <a:lnSpc>
-                <a:spcPct val="107000"/>
-              </a:lnSpc>
-              <a:buFont typeface="Arial" panose="020B0604020202020204" pitchFamily="34" charset="0"/>
-              <a:buChar char="•"/>
-            </a:pPr>
-            <a:r>
-              <a:rPr lang="en-US" dirty="0"/>
-              <a:t>Gained practical experience in developing a distributed full-stack system using React.js and Spring Boot.</a:t>
-            </a:r>
-          </a:p>
-          <a:p>
-            <a:pPr marL="285750" indent="-285750" algn="just" fontAlgn="base">
-              <a:lnSpc>
-                <a:spcPct val="107000"/>
-              </a:lnSpc>
-              <a:buFont typeface="Arial" panose="020B0604020202020204" pitchFamily="34" charset="0"/>
-              <a:buChar char="•"/>
-            </a:pPr>
-            <a:endParaRPr lang="en-US" kern="100" dirty="0">
-              <a:effectLst/>
-              <a:latin typeface="+mj-lt"/>
-              <a:ea typeface="Calibri" panose="020F0502020204030204" pitchFamily="34" charset="0"/>
-              <a:cs typeface="Times New Roman" panose="02020603050405020304" pitchFamily="18" charset="0"/>
-            </a:endParaRPr>
-          </a:p>
-          <a:p>
-            <a:pPr marL="285750" indent="-285750" algn="just" fontAlgn="base">
-              <a:lnSpc>
-                <a:spcPct val="107000"/>
-              </a:lnSpc>
-              <a:buFont typeface="Arial" panose="020B0604020202020204" pitchFamily="34" charset="0"/>
-              <a:buChar char="•"/>
-            </a:pPr>
-            <a:r>
-              <a:rPr lang="en-US" dirty="0"/>
-              <a:t>Improved understanding of API security, authentication, and API key management.</a:t>
-            </a:r>
-          </a:p>
-          <a:p>
-            <a:pPr marL="285750" indent="-285750" algn="just" fontAlgn="base">
-              <a:lnSpc>
-                <a:spcPct val="107000"/>
-              </a:lnSpc>
-              <a:buFont typeface="Arial" panose="020B0604020202020204" pitchFamily="34" charset="0"/>
-              <a:buChar char="•"/>
-            </a:pPr>
-            <a:endParaRPr lang="en-US" kern="100" dirty="0">
-              <a:effectLst/>
-              <a:latin typeface="+mj-lt"/>
-              <a:ea typeface="Calibri" panose="020F0502020204030204" pitchFamily="34" charset="0"/>
-              <a:cs typeface="Times New Roman" panose="02020603050405020304" pitchFamily="18" charset="0"/>
-            </a:endParaRPr>
-          </a:p>
-          <a:p>
-            <a:pPr marL="285750" indent="-285750" algn="just" fontAlgn="base">
-              <a:lnSpc>
-                <a:spcPct val="107000"/>
-              </a:lnSpc>
-              <a:buFont typeface="Arial" panose="020B0604020202020204" pitchFamily="34" charset="0"/>
-              <a:buChar char="•"/>
-            </a:pPr>
-            <a:r>
-              <a:rPr lang="en-US" dirty="0"/>
-              <a:t>Learned efficient database handling with PostgreSQL and performance optimization using Redis caching.</a:t>
-            </a:r>
-          </a:p>
-          <a:p>
-            <a:pPr marL="285750" indent="-285750" algn="just" fontAlgn="base">
-              <a:lnSpc>
-                <a:spcPct val="107000"/>
-              </a:lnSpc>
-              <a:buFont typeface="Arial" panose="020B0604020202020204" pitchFamily="34" charset="0"/>
-              <a:buChar char="•"/>
-            </a:pPr>
-            <a:endParaRPr lang="en-US" kern="100" dirty="0">
-              <a:effectLst/>
-              <a:latin typeface="+mj-lt"/>
-              <a:ea typeface="Calibri" panose="020F0502020204030204" pitchFamily="34" charset="0"/>
-              <a:cs typeface="Times New Roman" panose="02020603050405020304" pitchFamily="18" charset="0"/>
-            </a:endParaRPr>
-          </a:p>
-          <a:p>
-            <a:pPr marL="285750" indent="-285750" algn="just" fontAlgn="base">
-              <a:lnSpc>
-                <a:spcPct val="107000"/>
-              </a:lnSpc>
-              <a:buFont typeface="Arial" panose="020B0604020202020204" pitchFamily="34" charset="0"/>
-              <a:buChar char="•"/>
-            </a:pPr>
-            <a:r>
-              <a:rPr lang="en-US" dirty="0"/>
-              <a:t>Developed knowledge of distributed rate limiting concepts and system scalability.</a:t>
-            </a:r>
-          </a:p>
-          <a:p>
-            <a:pPr marL="285750" indent="-285750" algn="just" fontAlgn="base">
-              <a:lnSpc>
-                <a:spcPct val="107000"/>
-              </a:lnSpc>
-              <a:buFont typeface="Arial" panose="020B0604020202020204" pitchFamily="34" charset="0"/>
-              <a:buChar char="•"/>
-            </a:pPr>
-            <a:endParaRPr lang="en-US" kern="100" dirty="0">
-              <a:effectLst/>
-              <a:latin typeface="+mj-lt"/>
-              <a:ea typeface="Calibri" panose="020F0502020204030204" pitchFamily="34" charset="0"/>
-              <a:cs typeface="Times New Roman" panose="02020603050405020304" pitchFamily="18" charset="0"/>
-            </a:endParaRPr>
-          </a:p>
-          <a:p>
-            <a:pPr marL="285750" indent="-285750" algn="just" fontAlgn="base">
-              <a:lnSpc>
-                <a:spcPct val="107000"/>
-              </a:lnSpc>
-              <a:buFont typeface="Arial" panose="020B0604020202020204" pitchFamily="34" charset="0"/>
-              <a:buChar char="•"/>
-            </a:pPr>
-            <a:r>
-              <a:rPr lang="en-US" dirty="0"/>
-              <a:t>Strengthened version control and collaborative development practices using Git.</a:t>
-            </a:r>
-          </a:p>
-          <a:p>
-            <a:pPr marL="285750" indent="-285750" algn="just" fontAlgn="base">
-              <a:lnSpc>
-                <a:spcPct val="107000"/>
-              </a:lnSpc>
-              <a:buFont typeface="Arial" panose="020B0604020202020204" pitchFamily="34" charset="0"/>
-              <a:buChar char="•"/>
-            </a:pPr>
-            <a:endParaRPr lang="en-US" kern="100" dirty="0">
-              <a:effectLst/>
-              <a:latin typeface="+mj-lt"/>
-              <a:ea typeface="Calibri" panose="020F0502020204030204" pitchFamily="34" charset="0"/>
-              <a:cs typeface="Times New Roman" panose="02020603050405020304" pitchFamily="18" charset="0"/>
-            </a:endParaRPr>
-          </a:p>
-          <a:p>
-            <a:pPr marL="285750" indent="-285750" algn="just" fontAlgn="base">
-              <a:lnSpc>
-                <a:spcPct val="107000"/>
-              </a:lnSpc>
-              <a:buFont typeface="Arial" panose="020B0604020202020204" pitchFamily="34" charset="0"/>
-              <a:buChar char="•"/>
-            </a:pPr>
-            <a:r>
-              <a:rPr lang="en-US" dirty="0"/>
-              <a:t>Enhanced debugging, testing, and API validation skills through Postman and system testing.</a:t>
-            </a:r>
-            <a:endParaRPr lang="en-US" kern="100" dirty="0">
-              <a:effectLst/>
-              <a:latin typeface="+mj-lt"/>
-              <a:ea typeface="Calibri" panose="020F0502020204030204" pitchFamily="34" charset="0"/>
-              <a:cs typeface="Times New Roman" panose="02020603050405020304" pitchFamily="18" charset="0"/>
-            </a:endParaRPr>
-          </a:p>
-        </p:txBody>
-      </p:sp>
-    </p:spTree>
-    <p:extLst>
-      <p:ext uri="{BB962C8B-B14F-4D97-AF65-F5344CB8AC3E}">
-        <p14:creationId xmlns:p14="http://schemas.microsoft.com/office/powerpoint/2010/main" val="256260487"/>
-      </p:ext>
-    </p:extLst>
-  </p:cSld>
-  <p:clrMapOvr>
-    <a:masterClrMapping/>
-  </p:clrMapOvr>
-</p:sld>
-</file>
-
-<file path=ppt/slides/slide12.xml><?xml version="1.0" encoding="utf-8"?>
-<p:sld xmlns:a="http://schemas.openxmlformats.org/drawingml/2006/main" xmlns:r="http://schemas.openxmlformats.org/officeDocument/2006/relationships" xmlns:p="http://schemas.openxmlformats.org/presentationml/2006/main">
-  <p:cSld>
-    <p:spTree>
-      <p:nvGrpSpPr>
-        <p:cNvPr id="1" name=""/>
-        <p:cNvGrpSpPr/>
-        <p:nvPr/>
-      </p:nvGrpSpPr>
-      <p:grpSpPr>
-        <a:xfrm>
-          <a:off x="0" y="0"/>
-          <a:ext cx="0" cy="0"/>
-          <a:chOff x="0" y="0"/>
-          <a:chExt cx="0" cy="0"/>
-        </a:xfrm>
-      </p:grpSpPr>
-      <p:pic>
-        <p:nvPicPr>
-          <p:cNvPr id="4" name="Content Placeholder 3"/>
-          <p:cNvPicPr>
-            <a:picLocks noGrp="1" noChangeAspect="1"/>
-          </p:cNvPicPr>
-          <p:nvPr>
-            <p:ph idx="1"/>
-          </p:nvPr>
-        </p:nvPicPr>
-        <p:blipFill>
-          <a:blip r:embed="rId2" cstate="print">
-            <a:extLst>
-              <a:ext uri="{28A0092B-C50C-407E-A947-70E740481C1C}">
-                <a14:useLocalDpi xmlns:a14="http://schemas.microsoft.com/office/drawing/2010/main" val="0"/>
-              </a:ext>
-            </a:extLst>
-          </a:blip>
-          <a:stretch>
-            <a:fillRect/>
-          </a:stretch>
-        </p:blipFill>
-        <p:spPr>
-          <a:xfrm>
-            <a:off x="0" y="0"/>
-            <a:ext cx="9180512" cy="6858000"/>
-          </a:xfrm>
-        </p:spPr>
-      </p:pic>
-      <p:pic>
-        <p:nvPicPr>
-          <p:cNvPr id="6" name="Picture 5"/>
-          <p:cNvPicPr>
-            <a:picLocks noChangeAspect="1"/>
-          </p:cNvPicPr>
-          <p:nvPr/>
-        </p:nvPicPr>
-        <p:blipFill>
-          <a:blip r:embed="rId3" cstate="print">
-            <a:extLst>
-              <a:ext uri="{28A0092B-C50C-407E-A947-70E740481C1C}">
-                <a14:useLocalDpi xmlns:a14="http://schemas.microsoft.com/office/drawing/2010/main" val="0"/>
-              </a:ext>
-            </a:extLst>
-          </a:blip>
-          <a:stretch>
-            <a:fillRect/>
-          </a:stretch>
-        </p:blipFill>
-        <p:spPr>
-          <a:xfrm>
-            <a:off x="72008" y="6309320"/>
-            <a:ext cx="2411760" cy="346691"/>
-          </a:xfrm>
-          <a:prstGeom prst="rect">
-            <a:avLst/>
-          </a:prstGeom>
-        </p:spPr>
-      </p:pic>
-      <p:sp>
-        <p:nvSpPr>
-          <p:cNvPr id="2" name="TextBox 1"/>
-          <p:cNvSpPr txBox="1"/>
-          <p:nvPr/>
-        </p:nvSpPr>
-        <p:spPr>
-          <a:xfrm>
-            <a:off x="1835696" y="2708920"/>
-            <a:ext cx="5651034" cy="1200329"/>
-          </a:xfrm>
-          <a:prstGeom prst="rect">
-            <a:avLst/>
-          </a:prstGeom>
-          <a:noFill/>
-        </p:spPr>
-        <p:txBody>
-          <a:bodyPr wrap="none" rtlCol="0">
-            <a:spAutoFit/>
-          </a:bodyPr>
-          <a:lstStyle/>
-          <a:p>
-            <a:pPr algn="ctr"/>
-            <a:r>
-              <a:rPr lang="en-US" sz="7200" dirty="0">
-                <a:solidFill>
-                  <a:srgbClr val="0060AA"/>
-                </a:solidFill>
-                <a:latin typeface="Garamond" pitchFamily="18" charset="0"/>
-              </a:rPr>
-              <a:t>THANK</a:t>
-            </a:r>
-            <a:r>
-              <a:rPr lang="en-US" sz="7200" dirty="0">
-                <a:latin typeface="Garamond" pitchFamily="18" charset="0"/>
-              </a:rPr>
-              <a:t> </a:t>
-            </a:r>
-            <a:r>
-              <a:rPr lang="en-US" sz="7200" dirty="0">
-                <a:solidFill>
-                  <a:srgbClr val="E31E24"/>
-                </a:solidFill>
-                <a:latin typeface="Garamond" pitchFamily="18" charset="0"/>
-              </a:rPr>
-              <a:t>YOU</a:t>
-            </a:r>
-            <a:endParaRPr lang="en-IN" sz="7200" dirty="0">
-              <a:latin typeface="Garamond" pitchFamily="18" charset="0"/>
-            </a:endParaRPr>
-          </a:p>
-        </p:txBody>
-      </p:sp>
-    </p:spTree>
-    <p:extLst>
-      <p:ext uri="{BB962C8B-B14F-4D97-AF65-F5344CB8AC3E}">
-        <p14:creationId xmlns:p14="http://schemas.microsoft.com/office/powerpoint/2010/main" val="3858198192"/>
-      </p:ext>
-    </p:extLst>
-  </p:cSld>
-  <p:clrMapOvr>
-    <a:masterClrMapping/>
-  </p:clrMapOvr>
-</p:sld>
-</file>
-
-<file path=ppt/slides/slide2.xml><?xml version="1.0" encoding="utf-8"?>
-<p:sld xmlns:a="http://schemas.openxmlformats.org/drawingml/2006/main" xmlns:r="http://schemas.openxmlformats.org/officeDocument/2006/relationships" xmlns:p="http://schemas.openxmlformats.org/presentationml/2006/main">
-  <p:cSld>
-    <p:spTree>
-      <p:nvGrpSpPr>
-        <p:cNvPr id="1" name=""/>
-        <p:cNvGrpSpPr/>
-        <p:nvPr/>
-      </p:nvGrpSpPr>
-      <p:grpSpPr>
-        <a:xfrm>
-          <a:off x="0" y="0"/>
-          <a:ext cx="0" cy="0"/>
-          <a:chOff x="0" y="0"/>
-          <a:chExt cx="0" cy="0"/>
-        </a:xfrm>
-      </p:grpSpPr>
-      <p:pic>
-        <p:nvPicPr>
-          <p:cNvPr id="4" name="Content Placeholder 3"/>
-          <p:cNvPicPr>
-            <a:picLocks noGrp="1" noChangeAspect="1"/>
-          </p:cNvPicPr>
-          <p:nvPr>
-            <p:ph idx="1"/>
-          </p:nvPr>
-        </p:nvPicPr>
-        <p:blipFill>
-          <a:blip r:embed="rId3" cstate="print">
-            <a:extLst>
-              <a:ext uri="{28A0092B-C50C-407E-A947-70E740481C1C}">
-                <a14:useLocalDpi xmlns:a14="http://schemas.microsoft.com/office/drawing/2010/main" val="0"/>
-              </a:ext>
-            </a:extLst>
-          </a:blip>
-          <a:stretch>
-            <a:fillRect/>
-          </a:stretch>
-        </p:blipFill>
-        <p:spPr>
-          <a:xfrm>
-            <a:off x="-54260" y="-27384"/>
-            <a:ext cx="9180512" cy="6885384"/>
-          </a:xfrm>
-        </p:spPr>
-      </p:pic>
-      <p:cxnSp>
-        <p:nvCxnSpPr>
-          <p:cNvPr id="11" name="Straight Connector 10"/>
-          <p:cNvCxnSpPr/>
-          <p:nvPr/>
-        </p:nvCxnSpPr>
-        <p:spPr>
-          <a:xfrm>
-            <a:off x="1520415" y="2060848"/>
-            <a:ext cx="6306546" cy="0"/>
-          </a:xfrm>
-          <a:prstGeom prst="line">
-            <a:avLst/>
-          </a:prstGeom>
-        </p:spPr>
-        <p:style>
-          <a:lnRef idx="1">
-            <a:schemeClr val="accent1"/>
-          </a:lnRef>
-          <a:fillRef idx="0">
-            <a:schemeClr val="accent1"/>
-          </a:fillRef>
-          <a:effectRef idx="0">
-            <a:schemeClr val="accent1"/>
-          </a:effectRef>
-          <a:fontRef idx="minor">
-            <a:schemeClr val="tx1"/>
-          </a:fontRef>
-        </p:style>
-      </p:cxnSp>
-      <p:pic>
-        <p:nvPicPr>
-          <p:cNvPr id="12" name="Picture 11"/>
-          <p:cNvPicPr>
-            <a:picLocks noChangeAspect="1"/>
-          </p:cNvPicPr>
-          <p:nvPr/>
-        </p:nvPicPr>
-        <p:blipFill>
-          <a:blip r:embed="rId4" cstate="print">
-            <a:extLst>
-              <a:ext uri="{28A0092B-C50C-407E-A947-70E740481C1C}">
-                <a14:useLocalDpi xmlns:a14="http://schemas.microsoft.com/office/drawing/2010/main" val="0"/>
-              </a:ext>
-            </a:extLst>
-          </a:blip>
-          <a:stretch>
-            <a:fillRect/>
-          </a:stretch>
-        </p:blipFill>
-        <p:spPr>
-          <a:xfrm>
-            <a:off x="1370382" y="150274"/>
-            <a:ext cx="6396065" cy="920873"/>
-          </a:xfrm>
-          <a:prstGeom prst="rect">
-            <a:avLst/>
-          </a:prstGeom>
-        </p:spPr>
-      </p:pic>
-      <p:sp>
-        <p:nvSpPr>
-          <p:cNvPr id="13" name="TextBox 12"/>
-          <p:cNvSpPr txBox="1"/>
-          <p:nvPr/>
-        </p:nvSpPr>
-        <p:spPr>
-          <a:xfrm>
-            <a:off x="236440" y="2219553"/>
-            <a:ext cx="8784976" cy="461665"/>
-          </a:xfrm>
-          <a:prstGeom prst="rect">
-            <a:avLst/>
-          </a:prstGeom>
-          <a:noFill/>
-        </p:spPr>
-        <p:txBody>
-          <a:bodyPr wrap="square" rtlCol="0">
-            <a:spAutoFit/>
-          </a:bodyPr>
-          <a:lstStyle/>
-          <a:p>
-            <a:pPr lvl="0" algn="ctr">
-              <a:buSzPct val="25000"/>
-            </a:pPr>
-            <a:r>
-              <a:rPr lang="en-IN" sz="2400" dirty="0">
-                <a:solidFill>
-                  <a:srgbClr val="0070C0"/>
-                </a:solidFill>
-              </a:rPr>
-              <a:t>Mid-Term Project Progress Presentation</a:t>
-            </a:r>
-            <a:endParaRPr lang="en-IN" sz="2400" b="1" dirty="0">
-              <a:solidFill>
-                <a:srgbClr val="0070C0"/>
-              </a:solidFill>
-              <a:ea typeface="Cambria" panose="02040503050406030204" pitchFamily="18" charset="0"/>
-              <a:cs typeface="Times New Roman" panose="02020603050405020304" pitchFamily="18" charset="0"/>
-              <a:sym typeface="Arial"/>
-            </a:endParaRPr>
-          </a:p>
-        </p:txBody>
-      </p:sp>
-      <p:graphicFrame>
-        <p:nvGraphicFramePr>
-          <p:cNvPr id="2" name="Table 2">
-            <a:extLst>
-              <a:ext uri="{FF2B5EF4-FFF2-40B4-BE49-F238E27FC236}">
-                <a16:creationId xmlns:a16="http://schemas.microsoft.com/office/drawing/2014/main" id="{232DFD41-0025-28B4-FE3B-A54FAEE28F42}"/>
-              </a:ext>
-            </a:extLst>
-          </p:cNvPr>
-          <p:cNvGraphicFramePr>
-            <a:graphicFrameLocks noGrp="1"/>
-          </p:cNvGraphicFramePr>
-          <p:nvPr>
-            <p:extLst>
-              <p:ext uri="{D42A27DB-BD31-4B8C-83A1-F6EECF244321}">
-                <p14:modId xmlns:p14="http://schemas.microsoft.com/office/powerpoint/2010/main" val="3617805339"/>
-              </p:ext>
-            </p:extLst>
-          </p:nvPr>
-        </p:nvGraphicFramePr>
-        <p:xfrm>
-          <a:off x="1696134" y="3086002"/>
-          <a:ext cx="6096000" cy="2123440"/>
-        </p:xfrm>
-        <a:graphic>
-          <a:graphicData uri="http://schemas.openxmlformats.org/drawingml/2006/table">
-            <a:tbl>
-              <a:tblPr firstRow="1" bandRow="1">
-                <a:tableStyleId>{5C22544A-7EE6-4342-B048-85BDC9FD1C3A}</a:tableStyleId>
-              </a:tblPr>
-              <a:tblGrid>
-                <a:gridCol w="3048000">
-                  <a:extLst>
-                    <a:ext uri="{9D8B030D-6E8A-4147-A177-3AD203B41FA5}">
-                      <a16:colId xmlns:a16="http://schemas.microsoft.com/office/drawing/2014/main" val="3537270469"/>
-                    </a:ext>
-                  </a:extLst>
-                </a:gridCol>
-                <a:gridCol w="3048000">
-                  <a:extLst>
-                    <a:ext uri="{9D8B030D-6E8A-4147-A177-3AD203B41FA5}">
-                      <a16:colId xmlns:a16="http://schemas.microsoft.com/office/drawing/2014/main" val="3305024946"/>
-                    </a:ext>
-                  </a:extLst>
-                </a:gridCol>
-              </a:tblGrid>
-              <a:tr h="370840">
-                <a:tc>
-                  <a:txBody>
-                    <a:bodyPr/>
-                    <a:lstStyle/>
-                    <a:p>
-                      <a:pPr algn="ctr"/>
-                      <a:r>
-                        <a:rPr lang="en-US" dirty="0"/>
-                        <a:t>ROLL</a:t>
-                      </a:r>
-                    </a:p>
-                  </a:txBody>
-                  <a:tcPr/>
-                </a:tc>
-                <a:tc>
-                  <a:txBody>
-                    <a:bodyPr/>
-                    <a:lstStyle/>
-                    <a:p>
-                      <a:pPr algn="ctr"/>
-                      <a:r>
-                        <a:rPr lang="en-US" dirty="0"/>
-                        <a:t>NAME</a:t>
-                      </a:r>
-                    </a:p>
-                  </a:txBody>
-                  <a:tcPr/>
-                </a:tc>
-                <a:extLst>
-                  <a:ext uri="{0D108BD9-81ED-4DB2-BD59-A6C34878D82A}">
-                    <a16:rowId xmlns:a16="http://schemas.microsoft.com/office/drawing/2014/main" val="1765898331"/>
-                  </a:ext>
-                </a:extLst>
-              </a:tr>
-              <a:tr h="370840">
-                <a:tc>
-                  <a:txBody>
-                    <a:bodyPr/>
-                    <a:lstStyle/>
-                    <a:p>
-                      <a:r>
-                        <a:rPr lang="en-US" dirty="0"/>
-                        <a:t>2401720003</a:t>
-                      </a:r>
-                    </a:p>
-                  </a:txBody>
-                  <a:tcPr/>
-                </a:tc>
-                <a:tc>
-                  <a:txBody>
-                    <a:bodyPr/>
-                    <a:lstStyle/>
-                    <a:p>
-                      <a:r>
-                        <a:rPr lang="en-US" dirty="0"/>
-                        <a:t>Sidharth Krishna S</a:t>
-                      </a:r>
-                    </a:p>
-                  </a:txBody>
-                  <a:tcPr/>
-                </a:tc>
-                <a:extLst>
-                  <a:ext uri="{0D108BD9-81ED-4DB2-BD59-A6C34878D82A}">
-                    <a16:rowId xmlns:a16="http://schemas.microsoft.com/office/drawing/2014/main" val="4176101868"/>
-                  </a:ext>
-                </a:extLst>
-              </a:tr>
-              <a:tr h="370840">
-                <a:tc>
-                  <a:txBody>
-                    <a:bodyPr/>
-                    <a:lstStyle/>
-                    <a:p>
-                      <a:r>
-                        <a:rPr lang="en-US" dirty="0"/>
-                        <a:t>2401720012</a:t>
-                      </a:r>
-                    </a:p>
-                  </a:txBody>
-                  <a:tcPr/>
-                </a:tc>
-                <a:tc>
-                  <a:txBody>
-                    <a:bodyPr/>
-                    <a:lstStyle/>
-                    <a:p>
-                      <a:r>
-                        <a:rPr lang="en-US" dirty="0"/>
-                        <a:t>Ankit Kumar Yadav</a:t>
-                      </a:r>
-                    </a:p>
-                  </a:txBody>
-                  <a:tcPr/>
-                </a:tc>
-                <a:extLst>
-                  <a:ext uri="{0D108BD9-81ED-4DB2-BD59-A6C34878D82A}">
-                    <a16:rowId xmlns:a16="http://schemas.microsoft.com/office/drawing/2014/main" val="1958206324"/>
-                  </a:ext>
-                </a:extLst>
-              </a:tr>
-              <a:tr h="370840">
-                <a:tc>
-                  <a:txBody>
-                    <a:bodyPr/>
-                    <a:lstStyle/>
-                    <a:p>
-                      <a:r>
-                        <a:rPr lang="en-US" dirty="0"/>
-                        <a:t>2401720013</a:t>
-                      </a:r>
-                    </a:p>
-                  </a:txBody>
-                  <a:tcPr/>
-                </a:tc>
-                <a:tc>
-                  <a:txBody>
-                    <a:bodyPr/>
-                    <a:lstStyle/>
-                    <a:p>
-                      <a:r>
-                        <a:rPr lang="en-US" dirty="0"/>
-                        <a:t>Diwakar</a:t>
-                      </a:r>
-                    </a:p>
-                  </a:txBody>
-                  <a:tcPr/>
-                </a:tc>
-                <a:extLst>
-                  <a:ext uri="{0D108BD9-81ED-4DB2-BD59-A6C34878D82A}">
-                    <a16:rowId xmlns:a16="http://schemas.microsoft.com/office/drawing/2014/main" val="441949598"/>
-                  </a:ext>
-                </a:extLst>
-              </a:tr>
-              <a:tr h="370840">
-                <a:tc>
-                  <a:txBody>
-                    <a:bodyPr/>
-                    <a:lstStyle/>
-                    <a:p>
-                      <a:r>
-                        <a:rPr lang="en-US" dirty="0"/>
-                        <a:t>2401840007</a:t>
-                      </a:r>
-                    </a:p>
-                    <a:p>
-                      <a:r>
-                        <a:rPr lang="en-US" dirty="0"/>
-                        <a:t>2401720001</a:t>
-                      </a:r>
-                    </a:p>
-                  </a:txBody>
-                  <a:tcPr/>
-                </a:tc>
-                <a:tc>
-                  <a:txBody>
-                    <a:bodyPr/>
-                    <a:lstStyle/>
-                    <a:p>
-                      <a:r>
-                        <a:rPr lang="en-US" dirty="0"/>
-                        <a:t>Palak Kashyap </a:t>
-                      </a:r>
-                    </a:p>
-                    <a:p>
-                      <a:r>
-                        <a:rPr lang="en-US" dirty="0" err="1"/>
-                        <a:t>Devasya</a:t>
-                      </a:r>
-                      <a:endParaRPr lang="en-US" dirty="0"/>
-                    </a:p>
-                  </a:txBody>
-                  <a:tcPr/>
-                </a:tc>
-                <a:extLst>
-                  <a:ext uri="{0D108BD9-81ED-4DB2-BD59-A6C34878D82A}">
-                    <a16:rowId xmlns:a16="http://schemas.microsoft.com/office/drawing/2014/main" val="3043375068"/>
-                  </a:ext>
-                </a:extLst>
-              </a:tr>
-            </a:tbl>
-          </a:graphicData>
-        </a:graphic>
-      </p:graphicFrame>
-      <p:sp>
-        <p:nvSpPr>
-          <p:cNvPr id="5" name="TextBox 4">
-            <a:extLst>
-              <a:ext uri="{FF2B5EF4-FFF2-40B4-BE49-F238E27FC236}">
-                <a16:creationId xmlns:a16="http://schemas.microsoft.com/office/drawing/2014/main" id="{3DF18845-4075-32C5-8F4A-4F40F86E837F}"/>
-              </a:ext>
-            </a:extLst>
-          </p:cNvPr>
-          <p:cNvSpPr txBox="1"/>
-          <p:nvPr/>
-        </p:nvSpPr>
-        <p:spPr>
-          <a:xfrm>
-            <a:off x="755576" y="1212054"/>
-            <a:ext cx="7560840" cy="707886"/>
-          </a:xfrm>
-          <a:prstGeom prst="rect">
-            <a:avLst/>
-          </a:prstGeom>
-          <a:noFill/>
-        </p:spPr>
-        <p:txBody>
-          <a:bodyPr wrap="square">
-            <a:spAutoFit/>
-          </a:bodyPr>
-          <a:lstStyle/>
-          <a:p>
-            <a:pPr lvl="0" algn="ctr">
-              <a:buSzPct val="25000"/>
-            </a:pPr>
-            <a:r>
-              <a:rPr lang="en-US" sz="4000" b="1" dirty="0">
-                <a:solidFill>
-                  <a:srgbClr val="C00000"/>
-                </a:solidFill>
-                <a:ea typeface="Cambria" panose="02040503050406030204" pitchFamily="18" charset="0"/>
-                <a:cs typeface="Times New Roman" panose="02020603050405020304" pitchFamily="18" charset="0"/>
-                <a:sym typeface="Arial"/>
-              </a:rPr>
-              <a:t>Distributed-Rate-Limiter System</a:t>
-            </a:r>
-            <a:endParaRPr lang="en-IN" sz="4000" b="1" dirty="0">
-              <a:solidFill>
-                <a:srgbClr val="C00000"/>
-              </a:solidFill>
-              <a:ea typeface="Cambria" panose="02040503050406030204" pitchFamily="18" charset="0"/>
-              <a:cs typeface="Times New Roman" panose="02020603050405020304" pitchFamily="18" charset="0"/>
-              <a:sym typeface="Arial"/>
-            </a:endParaRPr>
-          </a:p>
-        </p:txBody>
-      </p:sp>
-      <p:sp>
-        <p:nvSpPr>
-          <p:cNvPr id="8" name="TextBox 7">
-            <a:extLst>
-              <a:ext uri="{FF2B5EF4-FFF2-40B4-BE49-F238E27FC236}">
-                <a16:creationId xmlns:a16="http://schemas.microsoft.com/office/drawing/2014/main" id="{40D4C745-33B7-0116-E20F-11A7F0DFD46F}"/>
-              </a:ext>
-            </a:extLst>
-          </p:cNvPr>
-          <p:cNvSpPr txBox="1"/>
-          <p:nvPr/>
-        </p:nvSpPr>
-        <p:spPr>
-          <a:xfrm>
-            <a:off x="276398" y="5849055"/>
-            <a:ext cx="8584032" cy="369332"/>
-          </a:xfrm>
-          <a:prstGeom prst="rect">
-            <a:avLst/>
-          </a:prstGeom>
-          <a:noFill/>
-        </p:spPr>
-        <p:txBody>
-          <a:bodyPr wrap="square">
-            <a:spAutoFit/>
-          </a:bodyPr>
-          <a:lstStyle/>
-          <a:p>
-            <a:pPr>
-              <a:buSzPct val="25000"/>
-            </a:pPr>
-            <a:r>
-              <a:rPr lang="en-IN" b="1" dirty="0">
-                <a:solidFill>
-                  <a:srgbClr val="006CB4"/>
-                </a:solidFill>
-                <a:ea typeface="Cambria" panose="02040503050406030204" pitchFamily="18" charset="0"/>
-                <a:cs typeface="Times New Roman" panose="02020603050405020304" pitchFamily="18" charset="0"/>
-                <a:sym typeface="Arial"/>
-              </a:rPr>
-              <a:t>Faculty Mentor:</a:t>
-            </a:r>
-            <a:r>
-              <a:rPr lang="en-IN" sz="1800" b="1" dirty="0">
-                <a:solidFill>
-                  <a:srgbClr val="006CB4"/>
-                </a:solidFill>
-                <a:ea typeface="Cambria" panose="02040503050406030204" pitchFamily="18" charset="0"/>
-                <a:cs typeface="Times New Roman" panose="02020603050405020304" pitchFamily="18" charset="0"/>
-                <a:sym typeface="Arial"/>
-              </a:rPr>
-              <a:t>  </a:t>
-            </a:r>
-            <a:r>
-              <a:rPr lang="en-IN" dirty="0">
-                <a:solidFill>
-                  <a:srgbClr val="006CB4"/>
-                </a:solidFill>
-              </a:rPr>
-              <a:t>Dr. Ravinder Beniwal</a:t>
-            </a:r>
-          </a:p>
-        </p:txBody>
-      </p:sp>
-    </p:spTree>
-    <p:extLst>
-      <p:ext uri="{BB962C8B-B14F-4D97-AF65-F5344CB8AC3E}">
-        <p14:creationId xmlns:p14="http://schemas.microsoft.com/office/powerpoint/2010/main" val="4142536426"/>
-      </p:ext>
-    </p:extLst>
-  </p:cSld>
-  <p:clrMapOvr>
-    <a:masterClrMapping/>
-  </p:clrMapOvr>
-</p:sld>
-</file>
-
-<file path=ppt/slides/slide3.xml><?xml version="1.0" encoding="utf-8"?>
-<p:sld xmlns:a="http://schemas.openxmlformats.org/drawingml/2006/main" xmlns:r="http://schemas.openxmlformats.org/officeDocument/2006/relationships" xmlns:p="http://schemas.openxmlformats.org/presentationml/2006/main">
-  <p:cSld>
-    <p:spTree>
-      <p:nvGrpSpPr>
-        <p:cNvPr id="1" name=""/>
-        <p:cNvGrpSpPr/>
-        <p:nvPr/>
-      </p:nvGrpSpPr>
-      <p:grpSpPr>
-        <a:xfrm>
-          <a:off x="0" y="0"/>
-          <a:ext cx="0" cy="0"/>
-          <a:chOff x="0" y="0"/>
-          <a:chExt cx="0" cy="0"/>
-        </a:xfrm>
-      </p:grpSpPr>
-      <p:pic>
-        <p:nvPicPr>
-          <p:cNvPr id="4" name="Content Placeholder 3"/>
-          <p:cNvPicPr>
-            <a:picLocks noGrp="1" noChangeAspect="1"/>
-          </p:cNvPicPr>
-          <p:nvPr>
-            <p:ph idx="1"/>
-          </p:nvPr>
-        </p:nvPicPr>
-        <p:blipFill>
-          <a:blip r:embed="rId3" cstate="print">
-            <a:extLst>
-              <a:ext uri="{28A0092B-C50C-407E-A947-70E740481C1C}">
-                <a14:useLocalDpi xmlns:a14="http://schemas.microsoft.com/office/drawing/2010/main" val="0"/>
-              </a:ext>
-            </a:extLst>
-          </a:blip>
-          <a:stretch>
-            <a:fillRect/>
-          </a:stretch>
-        </p:blipFill>
-        <p:spPr>
-          <a:xfrm>
-            <a:off x="1" y="0"/>
-            <a:ext cx="9180512" cy="6885384"/>
-          </a:xfrm>
-        </p:spPr>
-      </p:pic>
-      <p:sp>
-        <p:nvSpPr>
-          <p:cNvPr id="5" name="Rectangle 1"/>
-          <p:cNvSpPr>
-            <a:spLocks noChangeArrowheads="1"/>
-          </p:cNvSpPr>
-          <p:nvPr/>
-        </p:nvSpPr>
-        <p:spPr bwMode="auto">
-          <a:xfrm>
-            <a:off x="179512" y="151593"/>
-            <a:ext cx="4153701" cy="584775"/>
-          </a:xfrm>
-          <a:prstGeom prst="rect">
-            <a:avLst/>
-          </a:prstGeom>
-          <a:noFill/>
-          <a:ln>
-            <a:noFill/>
-          </a:ln>
-          <a:effectLst/>
-          <a:extLst>
-            <a:ext uri="{909E8E84-426E-40DD-AFC4-6F175D3DCCD1}">
-              <a14:hiddenFill xmlns:a14="http://schemas.microsoft.com/office/drawing/2010/main">
-                <a:solidFill>
-                  <a:schemeClr val="accent1"/>
-                </a:solidFill>
-              </a14:hiddenFill>
-            </a:ext>
-            <a:ext uri="{91240B29-F687-4F45-9708-019B960494DF}">
-              <a14:hiddenLine xmlns:a14="http://schemas.microsoft.com/office/drawing/2010/main" w="9525">
-                <a:solidFill>
-                  <a:schemeClr val="tx1"/>
-                </a:solidFill>
-                <a:miter lim="800000"/>
-                <a:headEnd/>
-                <a:tailEnd/>
-              </a14:hiddenLine>
-            </a:ext>
-            <a:ext uri="{AF507438-7753-43E0-B8FC-AC1667EBCBE1}">
-              <a14:hiddenEffects xmlns:a14="http://schemas.microsoft.com/office/drawing/2010/main">
-                <a:effectLst>
-                  <a:outerShdw dist="35921" dir="2700000" algn="ctr" rotWithShape="0">
-                    <a:schemeClr val="bg2"/>
-                  </a:outerShdw>
-                </a:effectLst>
-              </a14:hiddenEffects>
-            </a:ext>
-          </a:extLst>
-        </p:spPr>
-        <p:txBody>
-          <a:bodyPr vert="horz" wrap="none" lIns="91440" tIns="45720" rIns="91440" bIns="45720" numCol="1" anchor="ctr" anchorCtr="0" compatLnSpc="1">
-            <a:prstTxWarp prst="textNoShape">
-              <a:avLst/>
-            </a:prstTxWarp>
-            <a:spAutoFit/>
-          </a:bodyPr>
-          <a:lstStyle/>
-          <a:p>
-            <a:pPr lvl="0">
-              <a:buSzPct val="25000"/>
-            </a:pPr>
-            <a:r>
               <a:rPr lang="en-US" sz="3200" b="1" kern="100" dirty="0">
                 <a:effectLst/>
                 <a:latin typeface="Verdana" panose="020B0604030504040204" pitchFamily="34" charset="0"/>
                 <a:ea typeface="Times New Roman" panose="02020603050405020304" pitchFamily="18" charset="0"/>
                 <a:cs typeface="Times New Roman" panose="02020603050405020304" pitchFamily="18" charset="0"/>
               </a:rPr>
-              <a:t>Project Overview</a:t>
+              <a:t>Project Timeline</a:t>
             </a:r>
             <a:endParaRPr lang="en-IN" sz="3200" b="1" dirty="0">
               <a:solidFill>
                 <a:srgbClr val="E31E24"/>
               </a:solidFill>
-              <a:cs typeface="Times New Roman" panose="02020603050405020304" pitchFamily="18" charset="0"/>
-              <a:sym typeface="Arial"/>
-            </a:endParaRPr>
-          </a:p>
-        </p:txBody>
-      </p:sp>
-      <p:cxnSp>
-        <p:nvCxnSpPr>
-          <p:cNvPr id="7" name="Straight Connector 6"/>
-          <p:cNvCxnSpPr/>
-          <p:nvPr/>
-        </p:nvCxnSpPr>
-        <p:spPr>
-          <a:xfrm>
-            <a:off x="0" y="1061448"/>
-            <a:ext cx="9180513" cy="0"/>
-          </a:xfrm>
-          <a:prstGeom prst="line">
-            <a:avLst/>
-          </a:prstGeom>
-          <a:ln w="25400">
-            <a:solidFill>
-              <a:srgbClr val="0060AA"/>
-            </a:solidFill>
-          </a:ln>
-        </p:spPr>
-        <p:style>
-          <a:lnRef idx="1">
-            <a:schemeClr val="accent1"/>
-          </a:lnRef>
-          <a:fillRef idx="0">
-            <a:schemeClr val="accent1"/>
-          </a:fillRef>
-          <a:effectRef idx="0">
-            <a:schemeClr val="accent1"/>
-          </a:effectRef>
-          <a:fontRef idx="minor">
-            <a:schemeClr val="tx1"/>
-          </a:fontRef>
-        </p:style>
-      </p:cxnSp>
-      <p:pic>
-        <p:nvPicPr>
-          <p:cNvPr id="9" name="Picture 8"/>
-          <p:cNvPicPr>
-            <a:picLocks noChangeAspect="1"/>
-          </p:cNvPicPr>
-          <p:nvPr/>
-        </p:nvPicPr>
-        <p:blipFill>
-          <a:blip r:embed="rId4" cstate="print">
-            <a:extLst>
-              <a:ext uri="{28A0092B-C50C-407E-A947-70E740481C1C}">
-                <a14:useLocalDpi xmlns:a14="http://schemas.microsoft.com/office/drawing/2010/main" val="0"/>
-              </a:ext>
-            </a:extLst>
-          </a:blip>
-          <a:stretch>
-            <a:fillRect/>
-          </a:stretch>
-        </p:blipFill>
-        <p:spPr>
-          <a:xfrm>
-            <a:off x="72008" y="6309320"/>
-            <a:ext cx="2411760" cy="346691"/>
-          </a:xfrm>
-          <a:prstGeom prst="rect">
-            <a:avLst/>
-          </a:prstGeom>
-        </p:spPr>
-      </p:pic>
-      <p:sp>
-        <p:nvSpPr>
-          <p:cNvPr id="6" name="TextBox 5">
-            <a:extLst>
-              <a:ext uri="{FF2B5EF4-FFF2-40B4-BE49-F238E27FC236}">
-                <a16:creationId xmlns:a16="http://schemas.microsoft.com/office/drawing/2014/main" id="{AE24D516-77C6-C96A-5F77-D099623448D8}"/>
-              </a:ext>
-            </a:extLst>
-          </p:cNvPr>
-          <p:cNvSpPr txBox="1"/>
-          <p:nvPr/>
-        </p:nvSpPr>
-        <p:spPr>
-          <a:xfrm>
-            <a:off x="179512" y="1293834"/>
-            <a:ext cx="8784976" cy="372794"/>
-          </a:xfrm>
-          <a:prstGeom prst="rect">
-            <a:avLst/>
-          </a:prstGeom>
-          <a:noFill/>
-        </p:spPr>
-        <p:txBody>
-          <a:bodyPr wrap="square">
-            <a:spAutoFit/>
-          </a:bodyPr>
-          <a:lstStyle/>
-          <a:p>
-            <a:pPr marL="0" marR="0" algn="just" fontAlgn="base">
-              <a:lnSpc>
-                <a:spcPct val="107000"/>
-              </a:lnSpc>
-              <a:spcBef>
-                <a:spcPts val="0"/>
-              </a:spcBef>
-              <a:spcAft>
-                <a:spcPts val="0"/>
-              </a:spcAft>
-            </a:pPr>
-            <a:r>
-              <a:rPr lang="en-US" sz="1800" kern="100" dirty="0">
-                <a:solidFill>
-                  <a:srgbClr val="000000"/>
-                </a:solidFill>
-                <a:effectLst/>
-                <a:latin typeface="Verdana" panose="020B0604030504040204" pitchFamily="34" charset="0"/>
-                <a:ea typeface="Times New Roman" panose="02020603050405020304" pitchFamily="18" charset="0"/>
-                <a:cs typeface="Times New Roman" panose="02020603050405020304" pitchFamily="18" charset="0"/>
-              </a:rPr>
-              <a:t> </a:t>
-            </a:r>
-            <a:endParaRPr lang="en-US" sz="2800" kern="100" dirty="0">
-              <a:effectLst/>
-              <a:latin typeface="+mj-lt"/>
-              <a:ea typeface="Calibri" panose="020F0502020204030204" pitchFamily="34" charset="0"/>
-              <a:cs typeface="Times New Roman" panose="02020603050405020304" pitchFamily="18" charset="0"/>
-            </a:endParaRPr>
-          </a:p>
-        </p:txBody>
-      </p:sp>
-      <p:sp>
-        <p:nvSpPr>
-          <p:cNvPr id="3" name="TextBox 2">
-            <a:extLst>
-              <a:ext uri="{FF2B5EF4-FFF2-40B4-BE49-F238E27FC236}">
-                <a16:creationId xmlns:a16="http://schemas.microsoft.com/office/drawing/2014/main" id="{DC89CD11-CE10-037A-E324-4CC1A00D0E72}"/>
-              </a:ext>
-            </a:extLst>
-          </p:cNvPr>
-          <p:cNvSpPr txBox="1"/>
-          <p:nvPr/>
-        </p:nvSpPr>
-        <p:spPr>
-          <a:xfrm>
-            <a:off x="345670" y="1579160"/>
-            <a:ext cx="8452659" cy="3970318"/>
-          </a:xfrm>
-          <a:prstGeom prst="rect">
-            <a:avLst/>
-          </a:prstGeom>
-          <a:noFill/>
-        </p:spPr>
-        <p:txBody>
-          <a:bodyPr wrap="square" rtlCol="0">
-            <a:spAutoFit/>
-          </a:bodyPr>
-          <a:lstStyle/>
-          <a:p>
-            <a:pPr marL="285750" indent="-285750">
-              <a:buFont typeface="Arial" panose="020B0604020202020204" pitchFamily="34" charset="0"/>
-              <a:buChar char="•"/>
-            </a:pPr>
-            <a:r>
-              <a:rPr lang="en-US" dirty="0"/>
-              <a:t>The project focuses on developing a Distributed Rate Limiter System to control and manage API request traffic.</a:t>
-            </a:r>
-          </a:p>
-          <a:p>
-            <a:pPr marL="285750" indent="-285750">
-              <a:buFont typeface="Arial" panose="020B0604020202020204" pitchFamily="34" charset="0"/>
-              <a:buChar char="•"/>
-            </a:pPr>
-            <a:endParaRPr lang="en-US" dirty="0"/>
-          </a:p>
-          <a:p>
-            <a:pPr marL="285750" indent="-285750">
-              <a:buFont typeface="Arial" panose="020B0604020202020204" pitchFamily="34" charset="0"/>
-              <a:buChar char="•"/>
-            </a:pPr>
-            <a:r>
-              <a:rPr lang="en-US" dirty="0"/>
-              <a:t>It prevents system overload by limiting requests within a defined time window.</a:t>
-            </a:r>
-          </a:p>
-          <a:p>
-            <a:pPr marL="285750" indent="-285750">
-              <a:buFont typeface="Arial" panose="020B0604020202020204" pitchFamily="34" charset="0"/>
-              <a:buChar char="•"/>
-            </a:pPr>
-            <a:endParaRPr lang="en-US" dirty="0"/>
-          </a:p>
-          <a:p>
-            <a:pPr marL="285750" indent="-285750">
-              <a:buFont typeface="Arial" panose="020B0604020202020204" pitchFamily="34" charset="0"/>
-              <a:buChar char="•"/>
-            </a:pPr>
-            <a:r>
-              <a:rPr lang="en-US" dirty="0"/>
-              <a:t>Spring Boot is used for backend API development and rate limiting logic implementation.</a:t>
-            </a:r>
-          </a:p>
-          <a:p>
-            <a:pPr marL="285750" indent="-285750">
-              <a:buFont typeface="Arial" panose="020B0604020202020204" pitchFamily="34" charset="0"/>
-              <a:buChar char="•"/>
-            </a:pPr>
-            <a:endParaRPr lang="en-US" dirty="0"/>
-          </a:p>
-          <a:p>
-            <a:pPr marL="285750" indent="-285750">
-              <a:buFont typeface="Arial" panose="020B0604020202020204" pitchFamily="34" charset="0"/>
-              <a:buChar char="•"/>
-            </a:pPr>
-            <a:r>
-              <a:rPr lang="en-US" dirty="0"/>
-              <a:t>Redis enables distributed request tracking and high-performance caching.</a:t>
-            </a:r>
-          </a:p>
-          <a:p>
-            <a:pPr marL="285750" indent="-285750">
-              <a:buFont typeface="Arial" panose="020B0604020202020204" pitchFamily="34" charset="0"/>
-              <a:buChar char="•"/>
-            </a:pPr>
-            <a:endParaRPr lang="en-US" dirty="0"/>
-          </a:p>
-          <a:p>
-            <a:pPr marL="285750" indent="-285750">
-              <a:buFont typeface="Arial" panose="020B0604020202020204" pitchFamily="34" charset="0"/>
-              <a:buChar char="•"/>
-            </a:pPr>
-            <a:r>
-              <a:rPr lang="en-US" dirty="0"/>
-              <a:t>Monitoring is implemented using Prometheus and Grafana for real-time system metrics.</a:t>
-            </a:r>
-          </a:p>
-          <a:p>
-            <a:pPr marL="285750" indent="-285750">
-              <a:buFont typeface="Arial" panose="020B0604020202020204" pitchFamily="34" charset="0"/>
-              <a:buChar char="•"/>
-            </a:pPr>
-            <a:endParaRPr lang="en-US" dirty="0"/>
-          </a:p>
-          <a:p>
-            <a:pPr marL="285750" indent="-285750">
-              <a:buFont typeface="Arial" panose="020B0604020202020204" pitchFamily="34" charset="0"/>
-              <a:buChar char="•"/>
-            </a:pPr>
-            <a:r>
-              <a:rPr lang="en-US" dirty="0"/>
-              <a:t>A React.js frontend is used for interaction and testing purposes.</a:t>
-            </a:r>
-            <a:endParaRPr lang="en-IN" dirty="0"/>
-          </a:p>
-        </p:txBody>
-      </p:sp>
-    </p:spTree>
-    <p:extLst>
-      <p:ext uri="{BB962C8B-B14F-4D97-AF65-F5344CB8AC3E}">
-        <p14:creationId xmlns:p14="http://schemas.microsoft.com/office/powerpoint/2010/main" val="3353784259"/>
-      </p:ext>
-    </p:extLst>
-  </p:cSld>
-  <p:clrMapOvr>
-    <a:masterClrMapping/>
-  </p:clrMapOvr>
-</p:sld>
-</file>
-
-<file path=ppt/slides/slide4.xml><?xml version="1.0" encoding="utf-8"?>
-<p:sld xmlns:a="http://schemas.openxmlformats.org/drawingml/2006/main" xmlns:r="http://schemas.openxmlformats.org/officeDocument/2006/relationships" xmlns:p="http://schemas.openxmlformats.org/presentationml/2006/main">
-  <p:cSld>
-    <p:spTree>
-      <p:nvGrpSpPr>
-        <p:cNvPr id="1" name=""/>
-        <p:cNvGrpSpPr/>
-        <p:nvPr/>
-      </p:nvGrpSpPr>
-      <p:grpSpPr>
-        <a:xfrm>
-          <a:off x="0" y="0"/>
-          <a:ext cx="0" cy="0"/>
-          <a:chOff x="0" y="0"/>
-          <a:chExt cx="0" cy="0"/>
-        </a:xfrm>
-      </p:grpSpPr>
-      <p:pic>
-        <p:nvPicPr>
-          <p:cNvPr id="4" name="Content Placeholder 3"/>
-          <p:cNvPicPr>
-            <a:picLocks noGrp="1" noChangeAspect="1"/>
-          </p:cNvPicPr>
-          <p:nvPr>
-            <p:ph idx="1"/>
-          </p:nvPr>
-        </p:nvPicPr>
-        <p:blipFill>
-          <a:blip r:embed="rId3" cstate="print">
-            <a:extLst>
-              <a:ext uri="{28A0092B-C50C-407E-A947-70E740481C1C}">
-                <a14:useLocalDpi xmlns:a14="http://schemas.microsoft.com/office/drawing/2010/main" val="0"/>
-              </a:ext>
-            </a:extLst>
-          </a:blip>
-          <a:stretch>
-            <a:fillRect/>
-          </a:stretch>
-        </p:blipFill>
-        <p:spPr>
-          <a:xfrm>
-            <a:off x="1" y="0"/>
-            <a:ext cx="9180512" cy="6885384"/>
-          </a:xfrm>
-        </p:spPr>
-      </p:pic>
-      <p:sp>
-        <p:nvSpPr>
-          <p:cNvPr id="5" name="Rectangle 1"/>
-          <p:cNvSpPr>
-            <a:spLocks noChangeArrowheads="1"/>
-          </p:cNvSpPr>
-          <p:nvPr/>
-        </p:nvSpPr>
-        <p:spPr bwMode="auto">
-          <a:xfrm>
-            <a:off x="179512" y="151593"/>
-            <a:ext cx="6260047" cy="584775"/>
-          </a:xfrm>
-          <a:prstGeom prst="rect">
-            <a:avLst/>
-          </a:prstGeom>
-          <a:noFill/>
-          <a:ln>
-            <a:noFill/>
-          </a:ln>
-          <a:effectLst/>
-          <a:extLst>
-            <a:ext uri="{909E8E84-426E-40DD-AFC4-6F175D3DCCD1}">
-              <a14:hiddenFill xmlns:a14="http://schemas.microsoft.com/office/drawing/2010/main">
-                <a:solidFill>
-                  <a:schemeClr val="accent1"/>
-                </a:solidFill>
-              </a14:hiddenFill>
-            </a:ext>
-            <a:ext uri="{91240B29-F687-4F45-9708-019B960494DF}">
-              <a14:hiddenLine xmlns:a14="http://schemas.microsoft.com/office/drawing/2010/main" w="9525">
-                <a:solidFill>
-                  <a:schemeClr val="tx1"/>
-                </a:solidFill>
-                <a:miter lim="800000"/>
-                <a:headEnd/>
-                <a:tailEnd/>
-              </a14:hiddenLine>
-            </a:ext>
-            <a:ext uri="{AF507438-7753-43E0-B8FC-AC1667EBCBE1}">
-              <a14:hiddenEffects xmlns:a14="http://schemas.microsoft.com/office/drawing/2010/main">
-                <a:effectLst>
-                  <a:outerShdw dist="35921" dir="2700000" algn="ctr" rotWithShape="0">
-                    <a:schemeClr val="bg2"/>
-                  </a:outerShdw>
-                </a:effectLst>
-              </a14:hiddenEffects>
-            </a:ext>
-          </a:extLst>
-        </p:spPr>
-        <p:txBody>
-          <a:bodyPr vert="horz" wrap="none" lIns="91440" tIns="45720" rIns="91440" bIns="45720" numCol="1" anchor="ctr" anchorCtr="0" compatLnSpc="1">
-            <a:prstTxWarp prst="textNoShape">
-              <a:avLst/>
-            </a:prstTxWarp>
-            <a:spAutoFit/>
-          </a:bodyPr>
-          <a:lstStyle/>
-          <a:p>
-            <a:pPr lvl="0">
-              <a:buSzPct val="25000"/>
-            </a:pPr>
-            <a:r>
-              <a:rPr lang="en-IN" sz="3200" b="1" dirty="0">
-                <a:latin typeface="Verdana" panose="020B0604030504040204" pitchFamily="34" charset="0"/>
-                <a:ea typeface="Verdana" panose="020B0604030504040204" pitchFamily="34" charset="0"/>
-              </a:rPr>
-              <a:t>Project</a:t>
-            </a:r>
-            <a:r>
-              <a:rPr lang="en-IN" sz="3200" b="1" dirty="0"/>
-              <a:t> </a:t>
-            </a:r>
-            <a:r>
-              <a:rPr lang="en-IN" sz="3200" b="1" dirty="0">
-                <a:latin typeface="Verdana" panose="020B0604030504040204" pitchFamily="34" charset="0"/>
-                <a:ea typeface="Verdana" panose="020B0604030504040204" pitchFamily="34" charset="0"/>
-              </a:rPr>
-              <a:t>Progress</a:t>
-            </a:r>
-            <a:r>
-              <a:rPr lang="en-IN" sz="3200" b="1" dirty="0"/>
-              <a:t> </a:t>
-            </a:r>
-            <a:r>
-              <a:rPr lang="en-IN" sz="3200" b="1" dirty="0">
-                <a:latin typeface="Verdana" panose="020B0604030504040204" pitchFamily="34" charset="0"/>
-                <a:ea typeface="Verdana" panose="020B0604030504040204" pitchFamily="34" charset="0"/>
-              </a:rPr>
-              <a:t>Summary</a:t>
-            </a:r>
-            <a:endParaRPr lang="en-IN" sz="3200" b="1" dirty="0">
-              <a:solidFill>
-                <a:srgbClr val="E31E24"/>
-              </a:solidFill>
-              <a:latin typeface="Verdana" panose="020B0604030504040204" pitchFamily="34" charset="0"/>
-              <a:ea typeface="Verdana" panose="020B0604030504040204" pitchFamily="34" charset="0"/>
-              <a:cs typeface="Times New Roman" panose="02020603050405020304" pitchFamily="18" charset="0"/>
-              <a:sym typeface="Arial"/>
-            </a:endParaRPr>
-          </a:p>
-        </p:txBody>
-      </p:sp>
-      <p:cxnSp>
-        <p:nvCxnSpPr>
-          <p:cNvPr id="7" name="Straight Connector 6"/>
-          <p:cNvCxnSpPr/>
-          <p:nvPr/>
-        </p:nvCxnSpPr>
-        <p:spPr>
-          <a:xfrm>
-            <a:off x="0" y="1061448"/>
-            <a:ext cx="9180513" cy="0"/>
-          </a:xfrm>
-          <a:prstGeom prst="line">
-            <a:avLst/>
-          </a:prstGeom>
-          <a:ln w="25400">
-            <a:solidFill>
-              <a:srgbClr val="0060AA"/>
-            </a:solidFill>
-          </a:ln>
-        </p:spPr>
-        <p:style>
-          <a:lnRef idx="1">
-            <a:schemeClr val="accent1"/>
-          </a:lnRef>
-          <a:fillRef idx="0">
-            <a:schemeClr val="accent1"/>
-          </a:fillRef>
-          <a:effectRef idx="0">
-            <a:schemeClr val="accent1"/>
-          </a:effectRef>
-          <a:fontRef idx="minor">
-            <a:schemeClr val="tx1"/>
-          </a:fontRef>
-        </p:style>
-      </p:cxnSp>
-      <p:pic>
-        <p:nvPicPr>
-          <p:cNvPr id="9" name="Picture 8"/>
-          <p:cNvPicPr>
-            <a:picLocks noChangeAspect="1"/>
-          </p:cNvPicPr>
-          <p:nvPr/>
-        </p:nvPicPr>
-        <p:blipFill>
-          <a:blip r:embed="rId4" cstate="print">
-            <a:extLst>
-              <a:ext uri="{28A0092B-C50C-407E-A947-70E740481C1C}">
-                <a14:useLocalDpi xmlns:a14="http://schemas.microsoft.com/office/drawing/2010/main" val="0"/>
-              </a:ext>
-            </a:extLst>
-          </a:blip>
-          <a:stretch>
-            <a:fillRect/>
-          </a:stretch>
-        </p:blipFill>
-        <p:spPr>
-          <a:xfrm>
-            <a:off x="72008" y="6309320"/>
-            <a:ext cx="2411760" cy="346691"/>
-          </a:xfrm>
-          <a:prstGeom prst="rect">
-            <a:avLst/>
-          </a:prstGeom>
-        </p:spPr>
-      </p:pic>
-      <p:sp>
-        <p:nvSpPr>
-          <p:cNvPr id="6" name="TextBox 5">
-            <a:extLst>
-              <a:ext uri="{FF2B5EF4-FFF2-40B4-BE49-F238E27FC236}">
-                <a16:creationId xmlns:a16="http://schemas.microsoft.com/office/drawing/2014/main" id="{AE24D516-77C6-C96A-5F77-D099623448D8}"/>
-              </a:ext>
-            </a:extLst>
-          </p:cNvPr>
-          <p:cNvSpPr txBox="1"/>
-          <p:nvPr/>
-        </p:nvSpPr>
-        <p:spPr>
-          <a:xfrm>
-            <a:off x="179512" y="1293834"/>
-            <a:ext cx="8784976" cy="372794"/>
-          </a:xfrm>
-          <a:prstGeom prst="rect">
-            <a:avLst/>
-          </a:prstGeom>
-          <a:noFill/>
-        </p:spPr>
-        <p:txBody>
-          <a:bodyPr wrap="square">
-            <a:spAutoFit/>
-          </a:bodyPr>
-          <a:lstStyle/>
-          <a:p>
-            <a:pPr marL="0" marR="0" algn="just" fontAlgn="base">
-              <a:lnSpc>
-                <a:spcPct val="107000"/>
-              </a:lnSpc>
-              <a:spcBef>
-                <a:spcPts val="0"/>
-              </a:spcBef>
-              <a:spcAft>
-                <a:spcPts val="0"/>
-              </a:spcAft>
-            </a:pPr>
-            <a:r>
-              <a:rPr lang="en-US" sz="1800" kern="100" dirty="0">
-                <a:solidFill>
-                  <a:srgbClr val="000000"/>
-                </a:solidFill>
-                <a:effectLst/>
-                <a:latin typeface="Verdana" panose="020B0604030504040204" pitchFamily="34" charset="0"/>
-                <a:ea typeface="Times New Roman" panose="02020603050405020304" pitchFamily="18" charset="0"/>
-                <a:cs typeface="Times New Roman" panose="02020603050405020304" pitchFamily="18" charset="0"/>
-              </a:rPr>
-              <a:t> </a:t>
-            </a:r>
-            <a:endParaRPr lang="en-US" sz="2800" kern="100" dirty="0">
-              <a:effectLst/>
-              <a:latin typeface="+mj-lt"/>
-              <a:ea typeface="Calibri" panose="020F0502020204030204" pitchFamily="34" charset="0"/>
-              <a:cs typeface="Times New Roman" panose="02020603050405020304" pitchFamily="18" charset="0"/>
-            </a:endParaRPr>
-          </a:p>
-        </p:txBody>
-      </p:sp>
-      <p:sp>
-        <p:nvSpPr>
-          <p:cNvPr id="3" name="TextBox 2">
-            <a:extLst>
-              <a:ext uri="{FF2B5EF4-FFF2-40B4-BE49-F238E27FC236}">
-                <a16:creationId xmlns:a16="http://schemas.microsoft.com/office/drawing/2014/main" id="{AD939DB9-8452-FDDC-7E8F-221C36C2B4CF}"/>
-              </a:ext>
-            </a:extLst>
-          </p:cNvPr>
-          <p:cNvSpPr txBox="1"/>
-          <p:nvPr/>
-        </p:nvSpPr>
-        <p:spPr>
-          <a:xfrm>
-            <a:off x="359532" y="1666628"/>
-            <a:ext cx="8460940" cy="3416320"/>
-          </a:xfrm>
-          <a:prstGeom prst="rect">
-            <a:avLst/>
-          </a:prstGeom>
-          <a:noFill/>
-        </p:spPr>
-        <p:txBody>
-          <a:bodyPr wrap="square" rtlCol="0">
-            <a:spAutoFit/>
-          </a:bodyPr>
-          <a:lstStyle/>
-          <a:p>
-            <a:endParaRPr lang="en-US" dirty="0"/>
-          </a:p>
-          <a:p>
-            <a:pPr marL="285750" indent="-285750">
-              <a:buFont typeface="Arial" panose="020B0604020202020204" pitchFamily="34" charset="0"/>
-              <a:buChar char="•"/>
-            </a:pPr>
-            <a:r>
-              <a:rPr lang="en-US" dirty="0"/>
-              <a:t>Implemented User Authentication for secure user access.</a:t>
-            </a:r>
-          </a:p>
-          <a:p>
-            <a:pPr marL="285750" indent="-285750">
-              <a:buFont typeface="Arial" panose="020B0604020202020204" pitchFamily="34" charset="0"/>
-              <a:buChar char="•"/>
-            </a:pPr>
-            <a:endParaRPr lang="en-US" dirty="0"/>
-          </a:p>
-          <a:p>
-            <a:pPr marL="285750" indent="-285750">
-              <a:buFont typeface="Arial" panose="020B0604020202020204" pitchFamily="34" charset="0"/>
-              <a:buChar char="•"/>
-            </a:pPr>
-            <a:r>
-              <a:rPr lang="en-US" dirty="0"/>
-              <a:t>Developed functionality to create and manage API Keys.</a:t>
-            </a:r>
-          </a:p>
-          <a:p>
-            <a:pPr marL="285750" indent="-285750">
-              <a:buFont typeface="Arial" panose="020B0604020202020204" pitchFamily="34" charset="0"/>
-              <a:buChar char="•"/>
-            </a:pPr>
-            <a:endParaRPr lang="en-US" dirty="0"/>
-          </a:p>
-          <a:p>
-            <a:pPr marL="285750" indent="-285750">
-              <a:buFont typeface="Arial" panose="020B0604020202020204" pitchFamily="34" charset="0"/>
-              <a:buChar char="•"/>
-            </a:pPr>
-            <a:r>
-              <a:rPr lang="en-US" dirty="0"/>
-              <a:t>Successfully integrated PostgreSQL for database management.</a:t>
-            </a:r>
-          </a:p>
-          <a:p>
-            <a:pPr marL="285750" indent="-285750">
-              <a:buFont typeface="Arial" panose="020B0604020202020204" pitchFamily="34" charset="0"/>
-              <a:buChar char="•"/>
-            </a:pPr>
-            <a:endParaRPr lang="en-US" dirty="0"/>
-          </a:p>
-          <a:p>
-            <a:pPr marL="285750" indent="-285750">
-              <a:buFont typeface="Arial" panose="020B0604020202020204" pitchFamily="34" charset="0"/>
-              <a:buChar char="•"/>
-            </a:pPr>
-            <a:r>
-              <a:rPr lang="en-US" dirty="0"/>
-              <a:t>Connected Prometheus and Grafana for monitoring and performance metrics. </a:t>
-            </a:r>
-            <a:br>
-              <a:rPr lang="en-US" dirty="0"/>
-            </a:br>
-            <a:endParaRPr lang="en-US" dirty="0"/>
-          </a:p>
-          <a:p>
-            <a:pPr marL="285750" indent="-285750">
-              <a:buFont typeface="Arial" panose="020B0604020202020204" pitchFamily="34" charset="0"/>
-              <a:buChar char="•"/>
-            </a:pPr>
-            <a:r>
-              <a:rPr lang="en-US" dirty="0"/>
-              <a:t>Almost completed the User Interface development using React.js for system interaction and testing.</a:t>
-            </a:r>
-          </a:p>
-          <a:p>
-            <a:endParaRPr lang="en-IN" dirty="0"/>
-          </a:p>
-        </p:txBody>
-      </p:sp>
-    </p:spTree>
-    <p:extLst>
-      <p:ext uri="{BB962C8B-B14F-4D97-AF65-F5344CB8AC3E}">
-        <p14:creationId xmlns:p14="http://schemas.microsoft.com/office/powerpoint/2010/main" val="1047329288"/>
-      </p:ext>
-    </p:extLst>
-  </p:cSld>
-  <p:clrMapOvr>
-    <a:masterClrMapping/>
-  </p:clrMapOvr>
-</p:sld>
-</file>
-
-<file path=ppt/slides/slide5.xml><?xml version="1.0" encoding="utf-8"?>
-<p:sld xmlns:a="http://schemas.openxmlformats.org/drawingml/2006/main" xmlns:r="http://schemas.openxmlformats.org/officeDocument/2006/relationships" xmlns:p="http://schemas.openxmlformats.org/presentationml/2006/main">
-  <p:cSld>
-    <p:spTree>
-      <p:nvGrpSpPr>
-        <p:cNvPr id="1" name=""/>
-        <p:cNvGrpSpPr/>
-        <p:nvPr/>
-      </p:nvGrpSpPr>
-      <p:grpSpPr>
-        <a:xfrm>
-          <a:off x="0" y="0"/>
-          <a:ext cx="0" cy="0"/>
-          <a:chOff x="0" y="0"/>
-          <a:chExt cx="0" cy="0"/>
-        </a:xfrm>
-      </p:grpSpPr>
-      <p:pic>
-        <p:nvPicPr>
-          <p:cNvPr id="4" name="Content Placeholder 3"/>
-          <p:cNvPicPr>
-            <a:picLocks noGrp="1" noChangeAspect="1"/>
-          </p:cNvPicPr>
-          <p:nvPr>
-            <p:ph idx="1"/>
-          </p:nvPr>
-        </p:nvPicPr>
-        <p:blipFill>
-          <a:blip r:embed="rId3" cstate="print">
-            <a:extLst>
-              <a:ext uri="{28A0092B-C50C-407E-A947-70E740481C1C}">
-                <a14:useLocalDpi xmlns:a14="http://schemas.microsoft.com/office/drawing/2010/main" val="0"/>
-              </a:ext>
-            </a:extLst>
-          </a:blip>
-          <a:stretch>
-            <a:fillRect/>
-          </a:stretch>
-        </p:blipFill>
-        <p:spPr>
-          <a:xfrm>
-            <a:off x="1" y="0"/>
-            <a:ext cx="9180512" cy="6885384"/>
-          </a:xfrm>
-        </p:spPr>
-      </p:pic>
-      <p:sp>
-        <p:nvSpPr>
-          <p:cNvPr id="5" name="Rectangle 1"/>
-          <p:cNvSpPr>
-            <a:spLocks noChangeArrowheads="1"/>
-          </p:cNvSpPr>
-          <p:nvPr/>
-        </p:nvSpPr>
-        <p:spPr bwMode="auto">
-          <a:xfrm>
-            <a:off x="179512" y="151592"/>
-            <a:ext cx="7920880" cy="584775"/>
-          </a:xfrm>
-          <a:prstGeom prst="rect">
-            <a:avLst/>
-          </a:prstGeom>
-          <a:noFill/>
-          <a:ln>
-            <a:noFill/>
-          </a:ln>
-          <a:effectLst/>
-          <a:extLst>
-            <a:ext uri="{909E8E84-426E-40DD-AFC4-6F175D3DCCD1}">
-              <a14:hiddenFill xmlns:a14="http://schemas.microsoft.com/office/drawing/2010/main">
-                <a:solidFill>
-                  <a:schemeClr val="accent1"/>
-                </a:solidFill>
-              </a14:hiddenFill>
-            </a:ext>
-            <a:ext uri="{91240B29-F687-4F45-9708-019B960494DF}">
-              <a14:hiddenLine xmlns:a14="http://schemas.microsoft.com/office/drawing/2010/main" w="9525">
-                <a:solidFill>
-                  <a:schemeClr val="tx1"/>
-                </a:solidFill>
-                <a:miter lim="800000"/>
-                <a:headEnd/>
-                <a:tailEnd/>
-              </a14:hiddenLine>
-            </a:ext>
-            <a:ext uri="{AF507438-7753-43E0-B8FC-AC1667EBCBE1}">
-              <a14:hiddenEffects xmlns:a14="http://schemas.microsoft.com/office/drawing/2010/main">
-                <a:effectLst>
-                  <a:outerShdw dist="35921" dir="2700000" algn="ctr" rotWithShape="0">
-                    <a:schemeClr val="bg2"/>
-                  </a:outerShdw>
-                </a:effectLst>
-              </a14:hiddenEffects>
-            </a:ext>
-          </a:extLst>
-        </p:spPr>
-        <p:txBody>
-          <a:bodyPr vert="horz" wrap="square" lIns="91440" tIns="45720" rIns="91440" bIns="45720" numCol="1" anchor="ctr" anchorCtr="0" compatLnSpc="1">
-            <a:prstTxWarp prst="textNoShape">
-              <a:avLst/>
-            </a:prstTxWarp>
-            <a:spAutoFit/>
-          </a:bodyPr>
-          <a:lstStyle/>
-          <a:p>
-            <a:pPr lvl="0">
-              <a:buSzPct val="25000"/>
-            </a:pPr>
-            <a:r>
-              <a:rPr lang="en-IN" sz="3200" b="1" dirty="0">
-                <a:latin typeface="Verdana" panose="020B0604030504040204" pitchFamily="34" charset="0"/>
-                <a:ea typeface="Verdana" panose="020B0604030504040204" pitchFamily="34" charset="0"/>
-              </a:rPr>
-              <a:t>Challenges Faced and Solutions</a:t>
-            </a:r>
-            <a:endParaRPr lang="en-IN" sz="3200" b="1" dirty="0">
-              <a:solidFill>
-                <a:srgbClr val="E31E24"/>
-              </a:solidFill>
-              <a:latin typeface="Verdana" panose="020B0604030504040204" pitchFamily="34" charset="0"/>
-              <a:ea typeface="Verdana" panose="020B0604030504040204" pitchFamily="34" charset="0"/>
-              <a:cs typeface="Times New Roman" panose="02020603050405020304" pitchFamily="18" charset="0"/>
-              <a:sym typeface="Arial"/>
-            </a:endParaRPr>
-          </a:p>
-        </p:txBody>
-      </p:sp>
-      <p:cxnSp>
-        <p:nvCxnSpPr>
-          <p:cNvPr id="7" name="Straight Connector 6"/>
-          <p:cNvCxnSpPr/>
-          <p:nvPr/>
-        </p:nvCxnSpPr>
-        <p:spPr>
-          <a:xfrm>
-            <a:off x="0" y="1061448"/>
-            <a:ext cx="9180513" cy="0"/>
-          </a:xfrm>
-          <a:prstGeom prst="line">
-            <a:avLst/>
-          </a:prstGeom>
-          <a:ln w="25400">
-            <a:solidFill>
-              <a:srgbClr val="0060AA"/>
-            </a:solidFill>
-          </a:ln>
-        </p:spPr>
-        <p:style>
-          <a:lnRef idx="1">
-            <a:schemeClr val="accent1"/>
-          </a:lnRef>
-          <a:fillRef idx="0">
-            <a:schemeClr val="accent1"/>
-          </a:fillRef>
-          <a:effectRef idx="0">
-            <a:schemeClr val="accent1"/>
-          </a:effectRef>
-          <a:fontRef idx="minor">
-            <a:schemeClr val="tx1"/>
-          </a:fontRef>
-        </p:style>
-      </p:cxnSp>
-      <p:pic>
-        <p:nvPicPr>
-          <p:cNvPr id="9" name="Picture 8"/>
-          <p:cNvPicPr>
-            <a:picLocks noChangeAspect="1"/>
-          </p:cNvPicPr>
-          <p:nvPr/>
-        </p:nvPicPr>
-        <p:blipFill>
-          <a:blip r:embed="rId4" cstate="print">
-            <a:extLst>
-              <a:ext uri="{28A0092B-C50C-407E-A947-70E740481C1C}">
-                <a14:useLocalDpi xmlns:a14="http://schemas.microsoft.com/office/drawing/2010/main" val="0"/>
-              </a:ext>
-            </a:extLst>
-          </a:blip>
-          <a:stretch>
-            <a:fillRect/>
-          </a:stretch>
-        </p:blipFill>
-        <p:spPr>
-          <a:xfrm>
-            <a:off x="72008" y="6309320"/>
-            <a:ext cx="2411760" cy="346691"/>
-          </a:xfrm>
-          <a:prstGeom prst="rect">
-            <a:avLst/>
-          </a:prstGeom>
-        </p:spPr>
-      </p:pic>
-      <p:sp>
-        <p:nvSpPr>
-          <p:cNvPr id="6" name="TextBox 5">
-            <a:extLst>
-              <a:ext uri="{FF2B5EF4-FFF2-40B4-BE49-F238E27FC236}">
-                <a16:creationId xmlns:a16="http://schemas.microsoft.com/office/drawing/2014/main" id="{AE24D516-77C6-C96A-5F77-D099623448D8}"/>
-              </a:ext>
-            </a:extLst>
-          </p:cNvPr>
-          <p:cNvSpPr txBox="1"/>
-          <p:nvPr/>
-        </p:nvSpPr>
-        <p:spPr>
-          <a:xfrm>
-            <a:off x="179512" y="1293834"/>
-            <a:ext cx="8784976" cy="372794"/>
-          </a:xfrm>
-          <a:prstGeom prst="rect">
-            <a:avLst/>
-          </a:prstGeom>
-          <a:noFill/>
-        </p:spPr>
-        <p:txBody>
-          <a:bodyPr wrap="square">
-            <a:spAutoFit/>
-          </a:bodyPr>
-          <a:lstStyle/>
-          <a:p>
-            <a:pPr marL="0" marR="0" algn="just" fontAlgn="base">
-              <a:lnSpc>
-                <a:spcPct val="107000"/>
-              </a:lnSpc>
-              <a:spcBef>
-                <a:spcPts val="0"/>
-              </a:spcBef>
-              <a:spcAft>
-                <a:spcPts val="0"/>
-              </a:spcAft>
-            </a:pPr>
-            <a:r>
-              <a:rPr lang="en-US" sz="1800" kern="100" dirty="0">
-                <a:solidFill>
-                  <a:srgbClr val="000000"/>
-                </a:solidFill>
-                <a:effectLst/>
-                <a:latin typeface="Verdana" panose="020B0604030504040204" pitchFamily="34" charset="0"/>
-                <a:ea typeface="Times New Roman" panose="02020603050405020304" pitchFamily="18" charset="0"/>
-                <a:cs typeface="Times New Roman" panose="02020603050405020304" pitchFamily="18" charset="0"/>
-              </a:rPr>
-              <a:t> </a:t>
-            </a:r>
-            <a:endParaRPr lang="en-US" sz="2800" kern="100" dirty="0">
-              <a:effectLst/>
-              <a:latin typeface="+mj-lt"/>
-              <a:ea typeface="Calibri" panose="020F0502020204030204" pitchFamily="34" charset="0"/>
-              <a:cs typeface="Times New Roman" panose="02020603050405020304" pitchFamily="18" charset="0"/>
-            </a:endParaRPr>
-          </a:p>
-        </p:txBody>
-      </p:sp>
-      <p:sp>
-        <p:nvSpPr>
-          <p:cNvPr id="3" name="TextBox 2">
-            <a:extLst>
-              <a:ext uri="{FF2B5EF4-FFF2-40B4-BE49-F238E27FC236}">
-                <a16:creationId xmlns:a16="http://schemas.microsoft.com/office/drawing/2014/main" id="{FB4B5F7C-B886-F13B-EAAF-20F31CB585C8}"/>
-              </a:ext>
-            </a:extLst>
-          </p:cNvPr>
-          <p:cNvSpPr txBox="1"/>
-          <p:nvPr/>
-        </p:nvSpPr>
-        <p:spPr>
-          <a:xfrm>
-            <a:off x="32965" y="1666628"/>
-            <a:ext cx="8784975" cy="4524315"/>
-          </a:xfrm>
-          <a:prstGeom prst="rect">
-            <a:avLst/>
-          </a:prstGeom>
-          <a:noFill/>
-        </p:spPr>
-        <p:txBody>
-          <a:bodyPr wrap="square" rtlCol="0">
-            <a:spAutoFit/>
-          </a:bodyPr>
-          <a:lstStyle/>
-          <a:p>
-            <a:pPr marL="285750" indent="-285750">
-              <a:buFont typeface="Arial" panose="020B0604020202020204" pitchFamily="34" charset="0"/>
-              <a:buChar char="•"/>
-            </a:pPr>
-            <a:r>
-              <a:rPr lang="en-US" dirty="0"/>
-              <a:t>Designing a scalable distributed architecture → Addressed by following a modular system structure separating backend, caching, and monitoring components.</a:t>
-            </a:r>
-          </a:p>
-          <a:p>
-            <a:pPr marL="285750" indent="-285750">
-              <a:buFont typeface="Arial" panose="020B0604020202020204" pitchFamily="34" charset="0"/>
-              <a:buChar char="•"/>
-            </a:pPr>
-            <a:endParaRPr lang="en-US" dirty="0"/>
-          </a:p>
-          <a:p>
-            <a:pPr marL="285750" indent="-285750">
-              <a:buFont typeface="Arial" panose="020B0604020202020204" pitchFamily="34" charset="0"/>
-              <a:buChar char="•"/>
-            </a:pPr>
-            <a:r>
-              <a:rPr lang="en-US" dirty="0"/>
-              <a:t>Implementing secure user authentication → Resolved using proper validation mechanisms and secure access control practices.</a:t>
-            </a:r>
-          </a:p>
-          <a:p>
-            <a:pPr marL="285750" indent="-285750">
-              <a:buFont typeface="Arial" panose="020B0604020202020204" pitchFamily="34" charset="0"/>
-              <a:buChar char="•"/>
-            </a:pPr>
-            <a:endParaRPr lang="en-US" dirty="0"/>
-          </a:p>
-          <a:p>
-            <a:pPr marL="285750" indent="-285750">
-              <a:buFont typeface="Arial" panose="020B0604020202020204" pitchFamily="34" charset="0"/>
-              <a:buChar char="•"/>
-            </a:pPr>
-            <a:r>
-              <a:rPr lang="en-US" dirty="0"/>
-              <a:t>Managing secure API Key generation → Ensured uniqueness and reliability through database constraints and structured validation logic.</a:t>
-            </a:r>
-          </a:p>
-          <a:p>
-            <a:pPr marL="285750" indent="-285750">
-              <a:buFont typeface="Arial" panose="020B0604020202020204" pitchFamily="34" charset="0"/>
-              <a:buChar char="•"/>
-            </a:pPr>
-            <a:endParaRPr lang="en-US" dirty="0"/>
-          </a:p>
-          <a:p>
-            <a:pPr marL="285750" indent="-285750">
-              <a:buFont typeface="Arial" panose="020B0604020202020204" pitchFamily="34" charset="0"/>
-              <a:buChar char="•"/>
-            </a:pPr>
-            <a:r>
-              <a:rPr lang="en-US" dirty="0"/>
-              <a:t>Setting up Prometheus and Grafana monitoring → Achieved by exposing application metrics correctly and creating dashboards for real-time system monitoring.</a:t>
-            </a:r>
-            <a:br>
-              <a:rPr lang="en-US" dirty="0"/>
-            </a:br>
-            <a:endParaRPr lang="en-US" dirty="0"/>
-          </a:p>
-          <a:p>
-            <a:pPr marL="285750" indent="-285750">
-              <a:buFont typeface="Arial" panose="020B0604020202020204" pitchFamily="34" charset="0"/>
-              <a:buChar char="•"/>
-            </a:pPr>
-            <a:r>
-              <a:rPr lang="en-US" dirty="0"/>
-              <a:t>Integrating Redis for distributed request tracking → Solved using optimized key expiration and atomic operations.</a:t>
-            </a:r>
-          </a:p>
-          <a:p>
-            <a:endParaRPr lang="en-US" dirty="0"/>
-          </a:p>
-          <a:p>
-            <a:endParaRPr lang="en-IN" dirty="0"/>
-          </a:p>
-        </p:txBody>
-      </p:sp>
-    </p:spTree>
-    <p:extLst>
-      <p:ext uri="{BB962C8B-B14F-4D97-AF65-F5344CB8AC3E}">
-        <p14:creationId xmlns:p14="http://schemas.microsoft.com/office/powerpoint/2010/main" val="957423197"/>
-      </p:ext>
-    </p:extLst>
-  </p:cSld>
-  <p:clrMapOvr>
-    <a:masterClrMapping/>
-  </p:clrMapOvr>
-</p:sld>
-</file>
-
-<file path=ppt/slides/slide6.xml><?xml version="1.0" encoding="utf-8"?>
-<p:sld xmlns:a="http://schemas.openxmlformats.org/drawingml/2006/main" xmlns:r="http://schemas.openxmlformats.org/officeDocument/2006/relationships" xmlns:p="http://schemas.openxmlformats.org/presentationml/2006/main">
-  <p:cSld>
-    <p:spTree>
-      <p:nvGrpSpPr>
-        <p:cNvPr id="1" name=""/>
-        <p:cNvGrpSpPr/>
-        <p:nvPr/>
-      </p:nvGrpSpPr>
-      <p:grpSpPr>
-        <a:xfrm>
-          <a:off x="0" y="0"/>
-          <a:ext cx="0" cy="0"/>
-          <a:chOff x="0" y="0"/>
-          <a:chExt cx="0" cy="0"/>
-        </a:xfrm>
-      </p:grpSpPr>
-      <p:pic>
-        <p:nvPicPr>
-          <p:cNvPr id="4" name="Content Placeholder 3"/>
-          <p:cNvPicPr>
-            <a:picLocks noGrp="1" noChangeAspect="1"/>
-          </p:cNvPicPr>
-          <p:nvPr>
-            <p:ph idx="1"/>
-          </p:nvPr>
-        </p:nvPicPr>
-        <p:blipFill>
-          <a:blip r:embed="rId3" cstate="print">
-            <a:extLst>
-              <a:ext uri="{28A0092B-C50C-407E-A947-70E740481C1C}">
-                <a14:useLocalDpi xmlns:a14="http://schemas.microsoft.com/office/drawing/2010/main" val="0"/>
-              </a:ext>
-            </a:extLst>
-          </a:blip>
-          <a:stretch>
-            <a:fillRect/>
-          </a:stretch>
-        </p:blipFill>
-        <p:spPr>
-          <a:xfrm>
-            <a:off x="1" y="0"/>
-            <a:ext cx="9180512" cy="6885384"/>
-          </a:xfrm>
-        </p:spPr>
-      </p:pic>
-      <p:sp>
-        <p:nvSpPr>
-          <p:cNvPr id="5" name="Rectangle 1"/>
-          <p:cNvSpPr>
-            <a:spLocks noChangeArrowheads="1"/>
-          </p:cNvSpPr>
-          <p:nvPr/>
-        </p:nvSpPr>
-        <p:spPr bwMode="auto">
-          <a:xfrm>
-            <a:off x="177133" y="346645"/>
-            <a:ext cx="8280920" cy="584775"/>
-          </a:xfrm>
-          <a:prstGeom prst="rect">
-            <a:avLst/>
-          </a:prstGeom>
-          <a:noFill/>
-          <a:ln>
-            <a:noFill/>
-          </a:ln>
-          <a:effectLst/>
-          <a:extLst>
-            <a:ext uri="{909E8E84-426E-40DD-AFC4-6F175D3DCCD1}">
-              <a14:hiddenFill xmlns:a14="http://schemas.microsoft.com/office/drawing/2010/main">
-                <a:solidFill>
-                  <a:schemeClr val="accent1"/>
-                </a:solidFill>
-              </a14:hiddenFill>
-            </a:ext>
-            <a:ext uri="{91240B29-F687-4F45-9708-019B960494DF}">
-              <a14:hiddenLine xmlns:a14="http://schemas.microsoft.com/office/drawing/2010/main" w="9525">
-                <a:solidFill>
-                  <a:schemeClr val="tx1"/>
-                </a:solidFill>
-                <a:miter lim="800000"/>
-                <a:headEnd/>
-                <a:tailEnd/>
-              </a14:hiddenLine>
-            </a:ext>
-            <a:ext uri="{AF507438-7753-43E0-B8FC-AC1667EBCBE1}">
-              <a14:hiddenEffects xmlns:a14="http://schemas.microsoft.com/office/drawing/2010/main">
-                <a:effectLst>
-                  <a:outerShdw dist="35921" dir="2700000" algn="ctr" rotWithShape="0">
-                    <a:schemeClr val="bg2"/>
-                  </a:outerShdw>
-                </a:effectLst>
-              </a14:hiddenEffects>
-            </a:ext>
-          </a:extLst>
-        </p:spPr>
-        <p:txBody>
-          <a:bodyPr vert="horz" wrap="square" lIns="91440" tIns="45720" rIns="91440" bIns="45720" numCol="1" anchor="ctr" anchorCtr="0" compatLnSpc="1">
-            <a:prstTxWarp prst="textNoShape">
-              <a:avLst/>
-            </a:prstTxWarp>
-            <a:spAutoFit/>
-          </a:bodyPr>
-          <a:lstStyle/>
-          <a:p>
-            <a:pPr lvl="0">
-              <a:buSzPct val="25000"/>
-            </a:pPr>
-            <a:r>
-              <a:rPr lang="en-IN" sz="3200" b="1" dirty="0">
-                <a:latin typeface="Verdana" panose="020B0604030504040204" pitchFamily="34" charset="0"/>
-                <a:ea typeface="Verdana" panose="020B0604030504040204" pitchFamily="34" charset="0"/>
-              </a:rPr>
-              <a:t>Technology Stack</a:t>
-            </a:r>
-            <a:endParaRPr lang="en-IN" sz="3200" b="1" dirty="0">
-              <a:solidFill>
-                <a:srgbClr val="E31E24"/>
-              </a:solidFill>
-              <a:latin typeface="Verdana" panose="020B0604030504040204" pitchFamily="34" charset="0"/>
-              <a:ea typeface="Verdana" panose="020B0604030504040204" pitchFamily="34" charset="0"/>
-              <a:cs typeface="Times New Roman" panose="02020603050405020304" pitchFamily="18" charset="0"/>
-              <a:sym typeface="Arial"/>
-            </a:endParaRPr>
-          </a:p>
-        </p:txBody>
-      </p:sp>
-      <p:cxnSp>
-        <p:nvCxnSpPr>
-          <p:cNvPr id="7" name="Straight Connector 6"/>
-          <p:cNvCxnSpPr/>
-          <p:nvPr/>
-        </p:nvCxnSpPr>
-        <p:spPr>
-          <a:xfrm>
-            <a:off x="0" y="1061448"/>
-            <a:ext cx="9180513" cy="0"/>
-          </a:xfrm>
-          <a:prstGeom prst="line">
-            <a:avLst/>
-          </a:prstGeom>
-          <a:ln w="25400">
-            <a:solidFill>
-              <a:srgbClr val="0060AA"/>
-            </a:solidFill>
-          </a:ln>
-        </p:spPr>
-        <p:style>
-          <a:lnRef idx="1">
-            <a:schemeClr val="accent1"/>
-          </a:lnRef>
-          <a:fillRef idx="0">
-            <a:schemeClr val="accent1"/>
-          </a:fillRef>
-          <a:effectRef idx="0">
-            <a:schemeClr val="accent1"/>
-          </a:effectRef>
-          <a:fontRef idx="minor">
-            <a:schemeClr val="tx1"/>
-          </a:fontRef>
-        </p:style>
-      </p:cxnSp>
-      <p:pic>
-        <p:nvPicPr>
-          <p:cNvPr id="9" name="Picture 8"/>
-          <p:cNvPicPr>
-            <a:picLocks noChangeAspect="1"/>
-          </p:cNvPicPr>
-          <p:nvPr/>
-        </p:nvPicPr>
-        <p:blipFill>
-          <a:blip r:embed="rId4" cstate="print">
-            <a:extLst>
-              <a:ext uri="{28A0092B-C50C-407E-A947-70E740481C1C}">
-                <a14:useLocalDpi xmlns:a14="http://schemas.microsoft.com/office/drawing/2010/main" val="0"/>
-              </a:ext>
-            </a:extLst>
-          </a:blip>
-          <a:stretch>
-            <a:fillRect/>
-          </a:stretch>
-        </p:blipFill>
-        <p:spPr>
-          <a:xfrm>
-            <a:off x="72008" y="6309320"/>
-            <a:ext cx="2411760" cy="346691"/>
-          </a:xfrm>
-          <a:prstGeom prst="rect">
-            <a:avLst/>
-          </a:prstGeom>
-        </p:spPr>
-      </p:pic>
-      <p:sp>
-        <p:nvSpPr>
-          <p:cNvPr id="6" name="TextBox 5">
-            <a:extLst>
-              <a:ext uri="{FF2B5EF4-FFF2-40B4-BE49-F238E27FC236}">
-                <a16:creationId xmlns:a16="http://schemas.microsoft.com/office/drawing/2014/main" id="{AE24D516-77C6-C96A-5F77-D099623448D8}"/>
-              </a:ext>
-            </a:extLst>
-          </p:cNvPr>
-          <p:cNvSpPr txBox="1"/>
-          <p:nvPr/>
-        </p:nvSpPr>
-        <p:spPr>
-          <a:xfrm>
-            <a:off x="179512" y="1293834"/>
-            <a:ext cx="8784976" cy="372794"/>
-          </a:xfrm>
-          <a:prstGeom prst="rect">
-            <a:avLst/>
-          </a:prstGeom>
-          <a:noFill/>
-        </p:spPr>
-        <p:txBody>
-          <a:bodyPr wrap="square">
-            <a:spAutoFit/>
-          </a:bodyPr>
-          <a:lstStyle/>
-          <a:p>
-            <a:pPr marL="0" marR="0" algn="just" fontAlgn="base">
-              <a:lnSpc>
-                <a:spcPct val="107000"/>
-              </a:lnSpc>
-              <a:spcBef>
-                <a:spcPts val="0"/>
-              </a:spcBef>
-              <a:spcAft>
-                <a:spcPts val="0"/>
-              </a:spcAft>
-            </a:pPr>
-            <a:r>
-              <a:rPr lang="en-US" sz="1800" kern="100" dirty="0">
-                <a:solidFill>
-                  <a:srgbClr val="000000"/>
-                </a:solidFill>
-                <a:effectLst/>
-                <a:latin typeface="Verdana" panose="020B0604030504040204" pitchFamily="34" charset="0"/>
-                <a:ea typeface="Times New Roman" panose="02020603050405020304" pitchFamily="18" charset="0"/>
-                <a:cs typeface="Times New Roman" panose="02020603050405020304" pitchFamily="18" charset="0"/>
-              </a:rPr>
-              <a:t> </a:t>
-            </a:r>
-            <a:endParaRPr lang="en-US" sz="2800" kern="100" dirty="0">
-              <a:effectLst/>
-              <a:latin typeface="+mj-lt"/>
-              <a:ea typeface="Calibri" panose="020F0502020204030204" pitchFamily="34" charset="0"/>
-              <a:cs typeface="Times New Roman" panose="02020603050405020304" pitchFamily="18" charset="0"/>
-            </a:endParaRPr>
-          </a:p>
-        </p:txBody>
-      </p:sp>
-      <p:sp>
-        <p:nvSpPr>
-          <p:cNvPr id="2" name="TextBox 1">
-            <a:extLst>
-              <a:ext uri="{FF2B5EF4-FFF2-40B4-BE49-F238E27FC236}">
-                <a16:creationId xmlns:a16="http://schemas.microsoft.com/office/drawing/2014/main" id="{67181C4B-558C-7494-2C10-DA04B4C0AC4F}"/>
-              </a:ext>
-            </a:extLst>
-          </p:cNvPr>
-          <p:cNvSpPr txBox="1"/>
-          <p:nvPr/>
-        </p:nvSpPr>
-        <p:spPr>
-          <a:xfrm>
-            <a:off x="395536" y="1899013"/>
-            <a:ext cx="8352928" cy="2862322"/>
-          </a:xfrm>
-          <a:prstGeom prst="rect">
-            <a:avLst/>
-          </a:prstGeom>
-          <a:noFill/>
-        </p:spPr>
-        <p:txBody>
-          <a:bodyPr wrap="square" rtlCol="0">
-            <a:spAutoFit/>
-          </a:bodyPr>
-          <a:lstStyle/>
-          <a:p>
-            <a:pPr marL="285750" indent="-285750">
-              <a:buFont typeface="Arial" panose="020B0604020202020204" pitchFamily="34" charset="0"/>
-              <a:buChar char="•"/>
-            </a:pPr>
-            <a:r>
-              <a:rPr lang="en-IN" b="1" dirty="0"/>
-              <a:t>Frontend:</a:t>
-            </a:r>
-            <a:r>
-              <a:rPr lang="en-IN" dirty="0"/>
-              <a:t> HTML, CSS, Bootstrap, React.js</a:t>
-            </a:r>
-          </a:p>
-          <a:p>
-            <a:pPr marL="285750" indent="-285750">
-              <a:buFont typeface="Arial" panose="020B0604020202020204" pitchFamily="34" charset="0"/>
-              <a:buChar char="•"/>
-            </a:pPr>
-            <a:endParaRPr lang="en-IN" dirty="0"/>
-          </a:p>
-          <a:p>
-            <a:pPr marL="285750" indent="-285750">
-              <a:buFont typeface="Arial" panose="020B0604020202020204" pitchFamily="34" charset="0"/>
-              <a:buChar char="•"/>
-            </a:pPr>
-            <a:r>
-              <a:rPr lang="en-IN" b="1" dirty="0"/>
-              <a:t>Backend:</a:t>
-            </a:r>
-            <a:r>
-              <a:rPr lang="en-IN" dirty="0"/>
-              <a:t> Java Spring Boot</a:t>
-            </a:r>
-          </a:p>
-          <a:p>
-            <a:pPr marL="285750" indent="-285750">
-              <a:buFont typeface="Arial" panose="020B0604020202020204" pitchFamily="34" charset="0"/>
-              <a:buChar char="•"/>
-            </a:pPr>
-            <a:endParaRPr lang="en-IN" dirty="0"/>
-          </a:p>
-          <a:p>
-            <a:pPr marL="285750" indent="-285750">
-              <a:buFont typeface="Arial" panose="020B0604020202020204" pitchFamily="34" charset="0"/>
-              <a:buChar char="•"/>
-            </a:pPr>
-            <a:r>
-              <a:rPr lang="en-IN" b="1" dirty="0"/>
-              <a:t>Database:</a:t>
-            </a:r>
-            <a:r>
-              <a:rPr lang="en-IN" dirty="0"/>
-              <a:t> PostgreSQL (Primary Database), Redis (Caching)</a:t>
-            </a:r>
-          </a:p>
-          <a:p>
-            <a:pPr marL="285750" indent="-285750">
-              <a:buFont typeface="Arial" panose="020B0604020202020204" pitchFamily="34" charset="0"/>
-              <a:buChar char="•"/>
-            </a:pPr>
-            <a:endParaRPr lang="en-IN" dirty="0"/>
-          </a:p>
-          <a:p>
-            <a:pPr marL="285750" indent="-285750">
-              <a:buFont typeface="Arial" panose="020B0604020202020204" pitchFamily="34" charset="0"/>
-              <a:buChar char="•"/>
-            </a:pPr>
-            <a:r>
-              <a:rPr lang="en-IN" b="1" dirty="0"/>
-              <a:t>Monitoring &amp; Metrics:</a:t>
-            </a:r>
-            <a:r>
-              <a:rPr lang="en-IN" dirty="0"/>
-              <a:t> Prometheus, Grafana</a:t>
-            </a:r>
-          </a:p>
-          <a:p>
-            <a:pPr marL="285750" indent="-285750">
-              <a:buFont typeface="Arial" panose="020B0604020202020204" pitchFamily="34" charset="0"/>
-              <a:buChar char="•"/>
-            </a:pPr>
-            <a:endParaRPr lang="en-IN" dirty="0"/>
-          </a:p>
-          <a:p>
-            <a:pPr marL="285750" indent="-285750">
-              <a:buFont typeface="Arial" panose="020B0604020202020204" pitchFamily="34" charset="0"/>
-              <a:buChar char="•"/>
-            </a:pPr>
-            <a:r>
-              <a:rPr lang="en-IN" b="1" dirty="0"/>
-              <a:t>API Testing:</a:t>
-            </a:r>
-            <a:r>
-              <a:rPr lang="en-IN" dirty="0"/>
-              <a:t> Postman</a:t>
-            </a:r>
-          </a:p>
-          <a:p>
-            <a:endParaRPr lang="en-IN" dirty="0"/>
-          </a:p>
-        </p:txBody>
-      </p:sp>
-    </p:spTree>
-    <p:extLst>
-      <p:ext uri="{BB962C8B-B14F-4D97-AF65-F5344CB8AC3E}">
-        <p14:creationId xmlns:p14="http://schemas.microsoft.com/office/powerpoint/2010/main" val="2093371696"/>
-      </p:ext>
-    </p:extLst>
-  </p:cSld>
-  <p:clrMapOvr>
-    <a:masterClrMapping/>
-  </p:clrMapOvr>
-</p:sld>
-</file>
-
-<file path=ppt/slides/slide7.xml><?xml version="1.0" encoding="utf-8"?>
-<p:sld xmlns:a="http://schemas.openxmlformats.org/drawingml/2006/main" xmlns:r="http://schemas.openxmlformats.org/officeDocument/2006/relationships" xmlns:p="http://schemas.openxmlformats.org/presentationml/2006/main">
-  <p:cSld>
-    <p:spTree>
-      <p:nvGrpSpPr>
-        <p:cNvPr id="1" name=""/>
-        <p:cNvGrpSpPr/>
-        <p:nvPr/>
-      </p:nvGrpSpPr>
-      <p:grpSpPr>
-        <a:xfrm>
-          <a:off x="0" y="0"/>
-          <a:ext cx="0" cy="0"/>
-          <a:chOff x="0" y="0"/>
-          <a:chExt cx="0" cy="0"/>
-        </a:xfrm>
-      </p:grpSpPr>
-      <p:pic>
-        <p:nvPicPr>
-          <p:cNvPr id="4" name="Content Placeholder 3"/>
-          <p:cNvPicPr>
-            <a:picLocks noGrp="1" noChangeAspect="1"/>
-          </p:cNvPicPr>
-          <p:nvPr>
-            <p:ph idx="1"/>
-          </p:nvPr>
-        </p:nvPicPr>
-        <p:blipFill>
-          <a:blip r:embed="rId3" cstate="print">
-            <a:extLst>
-              <a:ext uri="{28A0092B-C50C-407E-A947-70E740481C1C}">
-                <a14:useLocalDpi xmlns:a14="http://schemas.microsoft.com/office/drawing/2010/main" val="0"/>
-              </a:ext>
-            </a:extLst>
-          </a:blip>
-          <a:stretch>
-            <a:fillRect/>
-          </a:stretch>
-        </p:blipFill>
-        <p:spPr>
-          <a:xfrm>
-            <a:off x="-36512" y="-27384"/>
-            <a:ext cx="9180512" cy="6885384"/>
-          </a:xfrm>
-        </p:spPr>
-      </p:pic>
-      <p:sp>
-        <p:nvSpPr>
-          <p:cNvPr id="5" name="Rectangle 1"/>
-          <p:cNvSpPr>
-            <a:spLocks noChangeArrowheads="1"/>
-          </p:cNvSpPr>
-          <p:nvPr/>
-        </p:nvSpPr>
-        <p:spPr bwMode="auto">
-          <a:xfrm>
-            <a:off x="103414" y="52751"/>
-            <a:ext cx="7420913" cy="1077218"/>
-          </a:xfrm>
-          <a:prstGeom prst="rect">
-            <a:avLst/>
-          </a:prstGeom>
-          <a:noFill/>
-          <a:ln>
-            <a:noFill/>
-          </a:ln>
-          <a:effectLst/>
-          <a:extLst>
-            <a:ext uri="{909E8E84-426E-40DD-AFC4-6F175D3DCCD1}">
-              <a14:hiddenFill xmlns:a14="http://schemas.microsoft.com/office/drawing/2010/main">
-                <a:solidFill>
-                  <a:schemeClr val="accent1"/>
-                </a:solidFill>
-              </a14:hiddenFill>
-            </a:ext>
-            <a:ext uri="{91240B29-F687-4F45-9708-019B960494DF}">
-              <a14:hiddenLine xmlns:a14="http://schemas.microsoft.com/office/drawing/2010/main" w="9525">
-                <a:solidFill>
-                  <a:schemeClr val="tx1"/>
-                </a:solidFill>
-                <a:miter lim="800000"/>
-                <a:headEnd/>
-                <a:tailEnd/>
-              </a14:hiddenLine>
-            </a:ext>
-            <a:ext uri="{AF507438-7753-43E0-B8FC-AC1667EBCBE1}">
-              <a14:hiddenEffects xmlns:a14="http://schemas.microsoft.com/office/drawing/2010/main">
-                <a:effectLst>
-                  <a:outerShdw dist="35921" dir="2700000" algn="ctr" rotWithShape="0">
-                    <a:schemeClr val="bg2"/>
-                  </a:outerShdw>
-                </a:effectLst>
-              </a14:hiddenEffects>
-            </a:ext>
-          </a:extLst>
-        </p:spPr>
-        <p:txBody>
-          <a:bodyPr vert="horz" wrap="square" lIns="91440" tIns="45720" rIns="91440" bIns="45720" numCol="1" anchor="ctr" anchorCtr="0" compatLnSpc="1">
-            <a:prstTxWarp prst="textNoShape">
-              <a:avLst/>
-            </a:prstTxWarp>
-            <a:spAutoFit/>
-          </a:bodyPr>
-          <a:lstStyle/>
-          <a:p>
-            <a:pPr lvl="0">
-              <a:buSzPct val="25000"/>
-            </a:pPr>
-            <a:r>
-              <a:rPr lang="en-IN" sz="3200" b="1" dirty="0">
-                <a:latin typeface="Verdana" panose="020B0604030504040204" pitchFamily="34" charset="0"/>
-                <a:ea typeface="Verdana" panose="020B0604030504040204" pitchFamily="34" charset="0"/>
-              </a:rPr>
-              <a:t>Coding Practices &amp; Version Control</a:t>
-            </a:r>
-            <a:endParaRPr lang="en-IN" sz="3200" b="1" dirty="0">
-              <a:solidFill>
-                <a:srgbClr val="E31E24"/>
-              </a:solidFill>
-              <a:latin typeface="Verdana" panose="020B0604030504040204" pitchFamily="34" charset="0"/>
-              <a:ea typeface="Verdana" panose="020B0604030504040204" pitchFamily="34" charset="0"/>
-              <a:cs typeface="Times New Roman" panose="02020603050405020304" pitchFamily="18" charset="0"/>
-              <a:sym typeface="Arial"/>
-            </a:endParaRPr>
-          </a:p>
-        </p:txBody>
-      </p:sp>
-      <p:cxnSp>
-        <p:nvCxnSpPr>
-          <p:cNvPr id="7" name="Straight Connector 6"/>
-          <p:cNvCxnSpPr/>
-          <p:nvPr/>
-        </p:nvCxnSpPr>
-        <p:spPr>
-          <a:xfrm>
-            <a:off x="0" y="1061448"/>
-            <a:ext cx="9180513" cy="0"/>
-          </a:xfrm>
-          <a:prstGeom prst="line">
-            <a:avLst/>
-          </a:prstGeom>
-          <a:ln w="25400">
-            <a:solidFill>
-              <a:srgbClr val="0060AA"/>
-            </a:solidFill>
-          </a:ln>
-        </p:spPr>
-        <p:style>
-          <a:lnRef idx="1">
-            <a:schemeClr val="accent1"/>
-          </a:lnRef>
-          <a:fillRef idx="0">
-            <a:schemeClr val="accent1"/>
-          </a:fillRef>
-          <a:effectRef idx="0">
-            <a:schemeClr val="accent1"/>
-          </a:effectRef>
-          <a:fontRef idx="minor">
-            <a:schemeClr val="tx1"/>
-          </a:fontRef>
-        </p:style>
-      </p:cxnSp>
-      <p:pic>
-        <p:nvPicPr>
-          <p:cNvPr id="9" name="Picture 8"/>
-          <p:cNvPicPr>
-            <a:picLocks noChangeAspect="1"/>
-          </p:cNvPicPr>
-          <p:nvPr/>
-        </p:nvPicPr>
-        <p:blipFill>
-          <a:blip r:embed="rId4" cstate="print">
-            <a:extLst>
-              <a:ext uri="{28A0092B-C50C-407E-A947-70E740481C1C}">
-                <a14:useLocalDpi xmlns:a14="http://schemas.microsoft.com/office/drawing/2010/main" val="0"/>
-              </a:ext>
-            </a:extLst>
-          </a:blip>
-          <a:stretch>
-            <a:fillRect/>
-          </a:stretch>
-        </p:blipFill>
-        <p:spPr>
-          <a:xfrm>
-            <a:off x="72008" y="6309320"/>
-            <a:ext cx="2411760" cy="346691"/>
-          </a:xfrm>
-          <a:prstGeom prst="rect">
-            <a:avLst/>
-          </a:prstGeom>
-        </p:spPr>
-      </p:pic>
-      <p:sp>
-        <p:nvSpPr>
-          <p:cNvPr id="6" name="TextBox 5">
-            <a:extLst>
-              <a:ext uri="{FF2B5EF4-FFF2-40B4-BE49-F238E27FC236}">
-                <a16:creationId xmlns:a16="http://schemas.microsoft.com/office/drawing/2014/main" id="{AE24D516-77C6-C96A-5F77-D099623448D8}"/>
-              </a:ext>
-            </a:extLst>
-          </p:cNvPr>
-          <p:cNvSpPr txBox="1"/>
-          <p:nvPr/>
-        </p:nvSpPr>
-        <p:spPr>
-          <a:xfrm>
-            <a:off x="179512" y="1293834"/>
-            <a:ext cx="8784976" cy="372794"/>
-          </a:xfrm>
-          <a:prstGeom prst="rect">
-            <a:avLst/>
-          </a:prstGeom>
-          <a:noFill/>
-        </p:spPr>
-        <p:txBody>
-          <a:bodyPr wrap="square">
-            <a:spAutoFit/>
-          </a:bodyPr>
-          <a:lstStyle/>
-          <a:p>
-            <a:pPr marL="0" marR="0" algn="just" fontAlgn="base">
-              <a:lnSpc>
-                <a:spcPct val="107000"/>
-              </a:lnSpc>
-              <a:spcBef>
-                <a:spcPts val="0"/>
-              </a:spcBef>
-              <a:spcAft>
-                <a:spcPts val="0"/>
-              </a:spcAft>
-            </a:pPr>
-            <a:r>
-              <a:rPr lang="en-US" sz="1800" kern="100" dirty="0">
-                <a:solidFill>
-                  <a:srgbClr val="000000"/>
-                </a:solidFill>
-                <a:effectLst/>
-                <a:latin typeface="Verdana" panose="020B0604030504040204" pitchFamily="34" charset="0"/>
-                <a:ea typeface="Times New Roman" panose="02020603050405020304" pitchFamily="18" charset="0"/>
-                <a:cs typeface="Times New Roman" panose="02020603050405020304" pitchFamily="18" charset="0"/>
-              </a:rPr>
-              <a:t> </a:t>
-            </a:r>
-            <a:endParaRPr lang="en-US" sz="2800" kern="100" dirty="0">
-              <a:effectLst/>
-              <a:latin typeface="+mj-lt"/>
-              <a:ea typeface="Calibri" panose="020F0502020204030204" pitchFamily="34" charset="0"/>
-              <a:cs typeface="Times New Roman" panose="02020603050405020304" pitchFamily="18" charset="0"/>
-            </a:endParaRPr>
-          </a:p>
-        </p:txBody>
-      </p:sp>
-      <p:sp>
-        <p:nvSpPr>
-          <p:cNvPr id="3" name="TextBox 2">
-            <a:extLst>
-              <a:ext uri="{FF2B5EF4-FFF2-40B4-BE49-F238E27FC236}">
-                <a16:creationId xmlns:a16="http://schemas.microsoft.com/office/drawing/2014/main" id="{C67A919E-7DB1-E6B8-D950-8901A88C816D}"/>
-              </a:ext>
-            </a:extLst>
-          </p:cNvPr>
-          <p:cNvSpPr txBox="1"/>
-          <p:nvPr/>
-        </p:nvSpPr>
-        <p:spPr>
-          <a:xfrm>
-            <a:off x="611560" y="1700225"/>
-            <a:ext cx="7344816" cy="3139321"/>
-          </a:xfrm>
-          <a:prstGeom prst="rect">
-            <a:avLst/>
-          </a:prstGeom>
-          <a:noFill/>
-        </p:spPr>
-        <p:txBody>
-          <a:bodyPr wrap="square">
-            <a:spAutoFit/>
-          </a:bodyPr>
-          <a:lstStyle/>
-          <a:p>
-            <a:pPr marL="285750" indent="-285750">
-              <a:buFont typeface="Arial" panose="020B0604020202020204" pitchFamily="34" charset="0"/>
-              <a:buChar char="•"/>
-            </a:pPr>
-            <a:r>
-              <a:rPr lang="en-US" dirty="0"/>
-              <a:t>Followed a modular architecture separating authentication, rate limiting, and monitoring components. </a:t>
-            </a:r>
-          </a:p>
-          <a:p>
-            <a:endParaRPr lang="en-US" dirty="0"/>
-          </a:p>
-          <a:p>
-            <a:pPr marL="285750" indent="-285750">
-              <a:buFont typeface="Arial" panose="020B0604020202020204" pitchFamily="34" charset="0"/>
-              <a:buChar char="•"/>
-            </a:pPr>
-            <a:r>
-              <a:rPr lang="en-US" dirty="0"/>
-              <a:t>Maintained clear frontend (React.js) and backend (Spring Boot) separation. </a:t>
-            </a:r>
-            <a:br>
-              <a:rPr lang="en-US" dirty="0"/>
-            </a:br>
-            <a:endParaRPr lang="en-US" dirty="0"/>
-          </a:p>
-          <a:p>
-            <a:pPr marL="285750" indent="-285750">
-              <a:buFont typeface="Arial" panose="020B0604020202020204" pitchFamily="34" charset="0"/>
-              <a:buChar char="•"/>
-            </a:pPr>
-            <a:r>
-              <a:rPr lang="en-US" dirty="0"/>
-              <a:t>Implemented clean coding practices with consistent naming and reusable components. </a:t>
-            </a:r>
-            <a:br>
-              <a:rPr lang="en-US" dirty="0"/>
-            </a:br>
-            <a:endParaRPr lang="en-US" dirty="0"/>
-          </a:p>
-          <a:p>
-            <a:pPr marL="285750" indent="-285750">
-              <a:buFont typeface="Arial" panose="020B0604020202020204" pitchFamily="34" charset="0"/>
-              <a:buChar char="•"/>
-            </a:pPr>
-            <a:r>
-              <a:rPr lang="en-US" dirty="0"/>
-              <a:t>Used Git for version control with regular commits and feature-based branching.</a:t>
-            </a:r>
-            <a:endParaRPr lang="en-US" i="0" dirty="0">
-              <a:solidFill>
-                <a:srgbClr val="374151"/>
-              </a:solidFill>
-              <a:effectLst/>
-              <a:latin typeface="Söhne"/>
-            </a:endParaRPr>
-          </a:p>
-        </p:txBody>
-      </p:sp>
-    </p:spTree>
-    <p:extLst>
-      <p:ext uri="{BB962C8B-B14F-4D97-AF65-F5344CB8AC3E}">
-        <p14:creationId xmlns:p14="http://schemas.microsoft.com/office/powerpoint/2010/main" val="3449068858"/>
-      </p:ext>
-    </p:extLst>
-  </p:cSld>
-  <p:clrMapOvr>
-    <a:masterClrMapping/>
-  </p:clrMapOvr>
-</p:sld>
-</file>
-
-<file path=ppt/slides/slide8.xml><?xml version="1.0" encoding="utf-8"?>
-<p:sld xmlns:a="http://schemas.openxmlformats.org/drawingml/2006/main" xmlns:r="http://schemas.openxmlformats.org/officeDocument/2006/relationships" xmlns:p="http://schemas.openxmlformats.org/presentationml/2006/main">
-  <p:cSld>
-    <p:spTree>
-      <p:nvGrpSpPr>
-        <p:cNvPr id="1" name="">
-          <a:extLst>
-            <a:ext uri="{FF2B5EF4-FFF2-40B4-BE49-F238E27FC236}">
-              <a16:creationId xmlns:a16="http://schemas.microsoft.com/office/drawing/2014/main" id="{BDBD42DB-FF71-D8E6-630F-399C60C5361D}"/>
-            </a:ext>
-          </a:extLst>
-        </p:cNvPr>
-        <p:cNvGrpSpPr/>
-        <p:nvPr/>
-      </p:nvGrpSpPr>
-      <p:grpSpPr>
-        <a:xfrm>
-          <a:off x="0" y="0"/>
-          <a:ext cx="0" cy="0"/>
-          <a:chOff x="0" y="0"/>
-          <a:chExt cx="0" cy="0"/>
-        </a:xfrm>
-      </p:grpSpPr>
-      <p:pic>
-        <p:nvPicPr>
-          <p:cNvPr id="4" name="Content Placeholder 3">
-            <a:extLst>
-              <a:ext uri="{FF2B5EF4-FFF2-40B4-BE49-F238E27FC236}">
-                <a16:creationId xmlns:a16="http://schemas.microsoft.com/office/drawing/2014/main" id="{52FB631E-E469-C80D-C58A-99E545F3785B}"/>
-              </a:ext>
-            </a:extLst>
-          </p:cNvPr>
-          <p:cNvPicPr>
-            <a:picLocks noGrp="1" noChangeAspect="1"/>
-          </p:cNvPicPr>
-          <p:nvPr>
-            <p:ph idx="1"/>
-          </p:nvPr>
-        </p:nvPicPr>
-        <p:blipFill>
-          <a:blip r:embed="rId3" cstate="print">
-            <a:extLst>
-              <a:ext uri="{28A0092B-C50C-407E-A947-70E740481C1C}">
-                <a14:useLocalDpi xmlns:a14="http://schemas.microsoft.com/office/drawing/2010/main" val="0"/>
-              </a:ext>
-            </a:extLst>
-          </a:blip>
-          <a:stretch>
-            <a:fillRect/>
-          </a:stretch>
-        </p:blipFill>
-        <p:spPr>
-          <a:xfrm>
-            <a:off x="-36512" y="0"/>
-            <a:ext cx="9180512" cy="6885384"/>
-          </a:xfrm>
-        </p:spPr>
-      </p:pic>
-      <p:sp>
-        <p:nvSpPr>
-          <p:cNvPr id="5" name="Rectangle 1">
-            <a:extLst>
-              <a:ext uri="{FF2B5EF4-FFF2-40B4-BE49-F238E27FC236}">
-                <a16:creationId xmlns:a16="http://schemas.microsoft.com/office/drawing/2014/main" id="{3B6D9598-AD90-B9CA-8610-998CE22F1CA3}"/>
-              </a:ext>
-            </a:extLst>
-          </p:cNvPr>
-          <p:cNvSpPr>
-            <a:spLocks noChangeArrowheads="1"/>
-          </p:cNvSpPr>
-          <p:nvPr/>
-        </p:nvSpPr>
-        <p:spPr bwMode="auto">
-          <a:xfrm>
-            <a:off x="103414" y="298973"/>
-            <a:ext cx="8429026" cy="584775"/>
-          </a:xfrm>
-          <a:prstGeom prst="rect">
-            <a:avLst/>
-          </a:prstGeom>
-          <a:noFill/>
-          <a:ln>
-            <a:noFill/>
-          </a:ln>
-          <a:effectLst/>
-          <a:extLst>
-            <a:ext uri="{909E8E84-426E-40DD-AFC4-6F175D3DCCD1}">
-              <a14:hiddenFill xmlns:a14="http://schemas.microsoft.com/office/drawing/2010/main">
-                <a:solidFill>
-                  <a:schemeClr val="accent1"/>
-                </a:solidFill>
-              </a14:hiddenFill>
-            </a:ext>
-            <a:ext uri="{91240B29-F687-4F45-9708-019B960494DF}">
-              <a14:hiddenLine xmlns:a14="http://schemas.microsoft.com/office/drawing/2010/main" w="9525">
-                <a:solidFill>
-                  <a:schemeClr val="tx1"/>
-                </a:solidFill>
-                <a:miter lim="800000"/>
-                <a:headEnd/>
-                <a:tailEnd/>
-              </a14:hiddenLine>
-            </a:ext>
-            <a:ext uri="{AF507438-7753-43E0-B8FC-AC1667EBCBE1}">
-              <a14:hiddenEffects xmlns:a14="http://schemas.microsoft.com/office/drawing/2010/main">
-                <a:effectLst>
-                  <a:outerShdw dist="35921" dir="2700000" algn="ctr" rotWithShape="0">
-                    <a:schemeClr val="bg2"/>
-                  </a:outerShdw>
-                </a:effectLst>
-              </a14:hiddenEffects>
-            </a:ext>
-          </a:extLst>
-        </p:spPr>
-        <p:txBody>
-          <a:bodyPr vert="horz" wrap="square" lIns="91440" tIns="45720" rIns="91440" bIns="45720" numCol="1" anchor="ctr" anchorCtr="0" compatLnSpc="1">
-            <a:prstTxWarp prst="textNoShape">
-              <a:avLst/>
-            </a:prstTxWarp>
-            <a:spAutoFit/>
-          </a:bodyPr>
-          <a:lstStyle/>
-          <a:p>
-            <a:pPr lvl="0">
-              <a:buSzPct val="25000"/>
-            </a:pPr>
-            <a:r>
-              <a:rPr lang="en-IN" sz="3200" b="1" dirty="0">
-                <a:latin typeface="Verdana" panose="020B0604030504040204" pitchFamily="34" charset="0"/>
-                <a:ea typeface="Verdana" panose="020B0604030504040204" pitchFamily="34" charset="0"/>
-              </a:rPr>
-              <a:t>Remaining Development Roadmap</a:t>
-            </a:r>
-            <a:endParaRPr lang="en-IN" sz="3200" b="1" dirty="0">
-              <a:solidFill>
-                <a:srgbClr val="E31E24"/>
-              </a:solidFill>
-              <a:latin typeface="Verdana" panose="020B0604030504040204" pitchFamily="34" charset="0"/>
-              <a:ea typeface="Verdana" panose="020B0604030504040204" pitchFamily="34" charset="0"/>
               <a:cs typeface="Times New Roman" panose="02020603050405020304" pitchFamily="18" charset="0"/>
               <a:sym typeface="Arial"/>
             </a:endParaRPr>
@@ -8053,12 +5115,63 @@
           </a:p>
         </p:txBody>
       </p:sp>
+      <mc:AlternateContent xmlns:mc="http://schemas.openxmlformats.org/markup-compatibility/2006" xmlns:p14="http://schemas.microsoft.com/office/powerpoint/2010/main">
+        <mc:Choice Requires="p14">
+          <p:contentPart p14:bwMode="auto" r:id="rId5">
+            <p14:nvContentPartPr>
+              <p14:cNvPr id="11" name="Ink 10">
+                <a:extLst>
+                  <a:ext uri="{FF2B5EF4-FFF2-40B4-BE49-F238E27FC236}">
+                    <a16:creationId xmlns:a16="http://schemas.microsoft.com/office/drawing/2014/main" id="{D3A55479-5820-9331-B8CC-0F9A13C7AC18}"/>
+                  </a:ext>
+                </a:extLst>
+              </p14:cNvPr>
+              <p14:cNvContentPartPr/>
+              <p14:nvPr/>
+            </p14:nvContentPartPr>
+            <p14:xfrm>
+              <a:off x="7203160" y="2489200"/>
+              <a:ext cx="484560" cy="34920"/>
+            </p14:xfrm>
+          </p:contentPart>
+        </mc:Choice>
+        <mc:Fallback xmlns="">
+          <p:pic>
+            <p:nvPicPr>
+              <p:cNvPr id="11" name="Ink 10">
+                <a:extLst>
+                  <a:ext uri="{FF2B5EF4-FFF2-40B4-BE49-F238E27FC236}">
+                    <a16:creationId xmlns:a16="http://schemas.microsoft.com/office/drawing/2014/main" id="{D3A55479-5820-9331-B8CC-0F9A13C7AC18}"/>
+                  </a:ext>
+                </a:extLst>
+              </p:cNvPr>
+              <p:cNvPicPr/>
+              <p:nvPr/>
+            </p:nvPicPr>
+            <p:blipFill>
+              <a:blip r:embed="rId7"/>
+              <a:stretch>
+                <a:fillRect/>
+              </a:stretch>
+            </p:blipFill>
+            <p:spPr>
+              <a:xfrm>
+                <a:off x="7140520" y="2426200"/>
+                <a:ext cx="610200" cy="160560"/>
+              </a:xfrm>
+              <a:prstGeom prst="rect">
+                <a:avLst/>
+              </a:prstGeom>
+            </p:spPr>
+          </p:pic>
+        </mc:Fallback>
+      </mc:AlternateContent>
       <p:pic>
         <p:nvPicPr>
-          <p:cNvPr id="3" name="Picture 2" descr="A diagram of a software development">
+          <p:cNvPr id="3" name="Picture 2">
             <a:extLst>
               <a:ext uri="{FF2B5EF4-FFF2-40B4-BE49-F238E27FC236}">
-                <a16:creationId xmlns:a16="http://schemas.microsoft.com/office/drawing/2014/main" id="{3B9CF815-C760-75BD-B2E2-338E3835774C}"/>
+                <a16:creationId xmlns:a16="http://schemas.microsoft.com/office/drawing/2014/main" id="{FB3E4F52-57C0-C841-B8AF-A8CB891B3AE1}"/>
               </a:ext>
             </a:extLst>
           </p:cNvPr>
@@ -8068,7 +5181,7 @@
           <p:nvPr/>
         </p:nvPicPr>
         <p:blipFill>
-          <a:blip r:embed="rId5">
+          <a:blip r:embed="rId8">
             <a:extLst>
               <a:ext uri="{28A0092B-C50C-407E-A947-70E740481C1C}">
                 <a14:useLocalDpi xmlns:a14="http://schemas.microsoft.com/office/drawing/2010/main" val="0"/>
@@ -8081,8 +5194,8 @@
         </p:blipFill>
         <p:spPr>
           <a:xfrm>
-            <a:off x="179512" y="1182721"/>
-            <a:ext cx="8784976" cy="4948898"/>
+            <a:off x="0" y="1061448"/>
+            <a:ext cx="9144000" cy="5247872"/>
           </a:xfrm>
           <a:prstGeom prst="rect">
             <a:avLst/>
@@ -8102,12 +5215,18 @@
 </p:sld>
 </file>
 
-<file path=ppt/slides/slide9.xml><?xml version="1.0" encoding="utf-8"?>
+<file path=ppt/slides/slide11.xml><?xml version="1.0" encoding="utf-8"?>
 <p:sld xmlns:a="http://schemas.openxmlformats.org/drawingml/2006/main" xmlns:r="http://schemas.openxmlformats.org/officeDocument/2006/relationships" xmlns:p="http://schemas.openxmlformats.org/presentationml/2006/main">
   <p:cSld>
     <p:spTree>
       <p:nvGrpSpPr>
-        <p:cNvPr id="1" name=""/>
+        <p:cNvPr id="1" name="">
+          <a:extLst>
+            <a:ext uri="{FF2B5EF4-FFF2-40B4-BE49-F238E27FC236}">
+              <a16:creationId xmlns:a16="http://schemas.microsoft.com/office/drawing/2014/main" id="{0BBCDCA2-809E-6D83-D42D-750510F89F8D}"/>
+            </a:ext>
+          </a:extLst>
+        </p:cNvPr>
         <p:cNvGrpSpPr/>
         <p:nvPr/>
       </p:nvGrpSpPr>
@@ -8121,7 +5240,13 @@
       </p:grpSpPr>
       <p:pic>
         <p:nvPicPr>
-          <p:cNvPr id="4" name="Content Placeholder 3"/>
+          <p:cNvPr id="4" name="Content Placeholder 3">
+            <a:extLst>
+              <a:ext uri="{FF2B5EF4-FFF2-40B4-BE49-F238E27FC236}">
+                <a16:creationId xmlns:a16="http://schemas.microsoft.com/office/drawing/2014/main" id="{B1972655-A0FD-7923-EAE6-F8504228D9A7}"/>
+              </a:ext>
+            </a:extLst>
+          </p:cNvPr>
           <p:cNvPicPr>
             <a:picLocks noGrp="1" noChangeAspect="1"/>
           </p:cNvPicPr>
@@ -8150,7 +5275,13 @@
       </p:pic>
       <p:sp>
         <p:nvSpPr>
-          <p:cNvPr id="5" name="Rectangle 1"/>
+          <p:cNvPr id="5" name="Rectangle 1">
+            <a:extLst>
+              <a:ext uri="{FF2B5EF4-FFF2-40B4-BE49-F238E27FC236}">
+                <a16:creationId xmlns:a16="http://schemas.microsoft.com/office/drawing/2014/main" id="{B586354D-B57C-4AB5-50E5-D5E6E2A516C6}"/>
+              </a:ext>
+            </a:extLst>
+          </p:cNvPr>
           <p:cNvSpPr>
             <a:spLocks noChangeArrowheads="1"/>
           </p:cNvSpPr>
@@ -8158,8 +5289,8 @@
         </p:nvSpPr>
         <p:spPr bwMode="auto">
           <a:xfrm>
-            <a:off x="-17338" y="-7884"/>
-            <a:ext cx="9161338" cy="1077218"/>
+            <a:off x="103414" y="298973"/>
+            <a:ext cx="6844849" cy="584775"/>
           </a:xfrm>
           <a:prstGeom prst="rect">
             <a:avLst/>
@@ -8211,18 +5342,471 @@
               <a:buSzPct val="25000"/>
             </a:pPr>
             <a:r>
-              <a:rPr lang="en-US" sz="3200" b="1" dirty="0">
+              <a:rPr lang="en-US" sz="3200" b="1" kern="100" dirty="0">
+                <a:effectLst/>
                 <a:latin typeface="Verdana" panose="020B0604030504040204" pitchFamily="34" charset="0"/>
-                <a:ea typeface="Verdana" panose="020B0604030504040204" pitchFamily="34" charset="0"/>
+                <a:ea typeface="Times New Roman" panose="02020603050405020304" pitchFamily="18" charset="0"/>
+                <a:cs typeface="Times New Roman" panose="02020603050405020304" pitchFamily="18" charset="0"/>
               </a:rPr>
-              <a:t>Planned Roadmap for Remaining Development</a:t>
+              <a:t>Next Steps and Goals</a:t>
             </a:r>
             <a:endParaRPr lang="en-IN" sz="3200" b="1" dirty="0">
               <a:solidFill>
                 <a:srgbClr val="E31E24"/>
               </a:solidFill>
-              <a:latin typeface="Verdana" panose="020B0604030504040204" pitchFamily="34" charset="0"/>
-              <a:ea typeface="Verdana" panose="020B0604030504040204" pitchFamily="34" charset="0"/>
+              <a:cs typeface="Times New Roman" panose="02020603050405020304" pitchFamily="18" charset="0"/>
+              <a:sym typeface="Arial"/>
+            </a:endParaRPr>
+          </a:p>
+        </p:txBody>
+      </p:sp>
+      <p:cxnSp>
+        <p:nvCxnSpPr>
+          <p:cNvPr id="7" name="Straight Connector 6">
+            <a:extLst>
+              <a:ext uri="{FF2B5EF4-FFF2-40B4-BE49-F238E27FC236}">
+                <a16:creationId xmlns:a16="http://schemas.microsoft.com/office/drawing/2014/main" id="{9AA045F8-58D6-32DE-1A78-7BF61B468745}"/>
+              </a:ext>
+            </a:extLst>
+          </p:cNvPr>
+          <p:cNvCxnSpPr/>
+          <p:nvPr/>
+        </p:nvCxnSpPr>
+        <p:spPr>
+          <a:xfrm>
+            <a:off x="0" y="1061448"/>
+            <a:ext cx="9180513" cy="0"/>
+          </a:xfrm>
+          <a:prstGeom prst="line">
+            <a:avLst/>
+          </a:prstGeom>
+          <a:ln w="25400">
+            <a:solidFill>
+              <a:srgbClr val="0060AA"/>
+            </a:solidFill>
+          </a:ln>
+        </p:spPr>
+        <p:style>
+          <a:lnRef idx="1">
+            <a:schemeClr val="accent1"/>
+          </a:lnRef>
+          <a:fillRef idx="0">
+            <a:schemeClr val="accent1"/>
+          </a:fillRef>
+          <a:effectRef idx="0">
+            <a:schemeClr val="accent1"/>
+          </a:effectRef>
+          <a:fontRef idx="minor">
+            <a:schemeClr val="tx1"/>
+          </a:fontRef>
+        </p:style>
+      </p:cxnSp>
+      <p:pic>
+        <p:nvPicPr>
+          <p:cNvPr id="9" name="Picture 8">
+            <a:extLst>
+              <a:ext uri="{FF2B5EF4-FFF2-40B4-BE49-F238E27FC236}">
+                <a16:creationId xmlns:a16="http://schemas.microsoft.com/office/drawing/2014/main" id="{92C63B0B-38AB-BDC6-BC45-A8B7244E2861}"/>
+              </a:ext>
+            </a:extLst>
+          </p:cNvPr>
+          <p:cNvPicPr>
+            <a:picLocks noChangeAspect="1"/>
+          </p:cNvPicPr>
+          <p:nvPr/>
+        </p:nvPicPr>
+        <p:blipFill>
+          <a:blip r:embed="rId4" cstate="print">
+            <a:extLst>
+              <a:ext uri="{28A0092B-C50C-407E-A947-70E740481C1C}">
+                <a14:useLocalDpi xmlns:a14="http://schemas.microsoft.com/office/drawing/2010/main" val="0"/>
+              </a:ext>
+            </a:extLst>
+          </a:blip>
+          <a:stretch>
+            <a:fillRect/>
+          </a:stretch>
+        </p:blipFill>
+        <p:spPr>
+          <a:xfrm>
+            <a:off x="72008" y="6309320"/>
+            <a:ext cx="2411760" cy="346691"/>
+          </a:xfrm>
+          <a:prstGeom prst="rect">
+            <a:avLst/>
+          </a:prstGeom>
+        </p:spPr>
+      </p:pic>
+      <p:sp>
+        <p:nvSpPr>
+          <p:cNvPr id="6" name="TextBox 5">
+            <a:extLst>
+              <a:ext uri="{FF2B5EF4-FFF2-40B4-BE49-F238E27FC236}">
+                <a16:creationId xmlns:a16="http://schemas.microsoft.com/office/drawing/2014/main" id="{7305AE5B-E43E-CFC9-59E3-0853A368E8B8}"/>
+              </a:ext>
+            </a:extLst>
+          </p:cNvPr>
+          <p:cNvSpPr txBox="1"/>
+          <p:nvPr/>
+        </p:nvSpPr>
+        <p:spPr>
+          <a:xfrm>
+            <a:off x="179512" y="1293834"/>
+            <a:ext cx="8784976" cy="372794"/>
+          </a:xfrm>
+          <a:prstGeom prst="rect">
+            <a:avLst/>
+          </a:prstGeom>
+          <a:noFill/>
+        </p:spPr>
+        <p:txBody>
+          <a:bodyPr wrap="square">
+            <a:spAutoFit/>
+          </a:bodyPr>
+          <a:lstStyle/>
+          <a:p>
+            <a:pPr marL="0" marR="0" algn="just" fontAlgn="base">
+              <a:lnSpc>
+                <a:spcPct val="107000"/>
+              </a:lnSpc>
+              <a:spcBef>
+                <a:spcPts val="0"/>
+              </a:spcBef>
+              <a:spcAft>
+                <a:spcPts val="0"/>
+              </a:spcAft>
+            </a:pPr>
+            <a:r>
+              <a:rPr lang="en-US" sz="1800" kern="100" dirty="0">
+                <a:solidFill>
+                  <a:srgbClr val="000000"/>
+                </a:solidFill>
+                <a:effectLst/>
+                <a:latin typeface="Verdana" panose="020B0604030504040204" pitchFamily="34" charset="0"/>
+                <a:ea typeface="Times New Roman" panose="02020603050405020304" pitchFamily="18" charset="0"/>
+                <a:cs typeface="Times New Roman" panose="02020603050405020304" pitchFamily="18" charset="0"/>
+              </a:rPr>
+              <a:t> </a:t>
+            </a:r>
+            <a:endParaRPr lang="en-US" sz="2800" kern="100" dirty="0">
+              <a:effectLst/>
+              <a:latin typeface="+mj-lt"/>
+              <a:ea typeface="Calibri" panose="020F0502020204030204" pitchFamily="34" charset="0"/>
+              <a:cs typeface="Times New Roman" panose="02020603050405020304" pitchFamily="18" charset="0"/>
+            </a:endParaRPr>
+          </a:p>
+        </p:txBody>
+      </p:sp>
+      <mc:AlternateContent xmlns:mc="http://schemas.openxmlformats.org/markup-compatibility/2006" xmlns:p14="http://schemas.microsoft.com/office/powerpoint/2010/main">
+        <mc:Choice Requires="p14">
+          <p:contentPart p14:bwMode="auto" r:id="rId5">
+            <p14:nvContentPartPr>
+              <p14:cNvPr id="11" name="Ink 10">
+                <a:extLst>
+                  <a:ext uri="{FF2B5EF4-FFF2-40B4-BE49-F238E27FC236}">
+                    <a16:creationId xmlns:a16="http://schemas.microsoft.com/office/drawing/2014/main" id="{871A80A2-EA03-6476-D9C3-239857EC94CB}"/>
+                  </a:ext>
+                </a:extLst>
+              </p14:cNvPr>
+              <p14:cNvContentPartPr/>
+              <p14:nvPr/>
+            </p14:nvContentPartPr>
+            <p14:xfrm>
+              <a:off x="7203160" y="2489200"/>
+              <a:ext cx="484560" cy="34920"/>
+            </p14:xfrm>
+          </p:contentPart>
+        </mc:Choice>
+        <mc:Fallback xmlns="">
+          <p:pic>
+            <p:nvPicPr>
+              <p:cNvPr id="11" name="Ink 10">
+                <a:extLst>
+                  <a:ext uri="{FF2B5EF4-FFF2-40B4-BE49-F238E27FC236}">
+                    <a16:creationId xmlns:a16="http://schemas.microsoft.com/office/drawing/2014/main" id="{871A80A2-EA03-6476-D9C3-239857EC94CB}"/>
+                  </a:ext>
+                </a:extLst>
+              </p:cNvPr>
+              <p:cNvPicPr/>
+              <p:nvPr/>
+            </p:nvPicPr>
+            <p:blipFill>
+              <a:blip r:embed="rId6"/>
+              <a:stretch>
+                <a:fillRect/>
+              </a:stretch>
+            </p:blipFill>
+            <p:spPr>
+              <a:xfrm>
+                <a:off x="7140160" y="2426200"/>
+                <a:ext cx="610200" cy="160560"/>
+              </a:xfrm>
+              <a:prstGeom prst="rect">
+                <a:avLst/>
+              </a:prstGeom>
+            </p:spPr>
+          </p:pic>
+        </mc:Fallback>
+      </mc:AlternateContent>
+      <p:sp>
+        <p:nvSpPr>
+          <p:cNvPr id="2" name="TextBox 1">
+            <a:extLst>
+              <a:ext uri="{FF2B5EF4-FFF2-40B4-BE49-F238E27FC236}">
+                <a16:creationId xmlns:a16="http://schemas.microsoft.com/office/drawing/2014/main" id="{EC14EE41-6C91-335F-42F8-20304A535A83}"/>
+              </a:ext>
+            </a:extLst>
+          </p:cNvPr>
+          <p:cNvSpPr txBox="1"/>
+          <p:nvPr/>
+        </p:nvSpPr>
+        <p:spPr>
+          <a:xfrm>
+            <a:off x="104291" y="1859339"/>
+            <a:ext cx="8784976" cy="3139321"/>
+          </a:xfrm>
+          <a:prstGeom prst="rect">
+            <a:avLst/>
+          </a:prstGeom>
+          <a:noFill/>
+        </p:spPr>
+        <p:txBody>
+          <a:bodyPr wrap="square" rtlCol="0">
+            <a:spAutoFit/>
+          </a:bodyPr>
+          <a:lstStyle/>
+          <a:p>
+            <a:pPr marL="285750" indent="-285750">
+              <a:buFont typeface="Arial" panose="020B0604020202020204" pitchFamily="34" charset="0"/>
+              <a:buChar char="•"/>
+            </a:pPr>
+            <a:r>
+              <a:rPr lang="en-US" dirty="0"/>
+              <a:t>Implement additional rate limiting algorithms such as Token Bucket and Fixed Window.</a:t>
+            </a:r>
+          </a:p>
+          <a:p>
+            <a:pPr marL="285750" indent="-285750">
+              <a:buFont typeface="Arial" panose="020B0604020202020204" pitchFamily="34" charset="0"/>
+              <a:buChar char="•"/>
+            </a:pPr>
+            <a:endParaRPr lang="en-US" dirty="0"/>
+          </a:p>
+          <a:p>
+            <a:pPr marL="285750" indent="-285750">
+              <a:buFont typeface="Arial" panose="020B0604020202020204" pitchFamily="34" charset="0"/>
+              <a:buChar char="•"/>
+            </a:pPr>
+            <a:r>
+              <a:rPr lang="en-US" dirty="0"/>
+              <a:t>Enhance the admin dashboard to improve visualization of API usage and system metrics.</a:t>
+            </a:r>
+          </a:p>
+          <a:p>
+            <a:pPr marL="285750" indent="-285750">
+              <a:buFont typeface="Arial" panose="020B0604020202020204" pitchFamily="34" charset="0"/>
+              <a:buChar char="•"/>
+            </a:pPr>
+            <a:endParaRPr lang="en-US" dirty="0"/>
+          </a:p>
+          <a:p>
+            <a:pPr marL="285750" indent="-285750">
+              <a:buFont typeface="Arial" panose="020B0604020202020204" pitchFamily="34" charset="0"/>
+              <a:buChar char="•"/>
+            </a:pPr>
+            <a:r>
+              <a:rPr lang="en-US" dirty="0"/>
+              <a:t>Strengthen distributed request handling to ensure system scalability.</a:t>
+            </a:r>
+          </a:p>
+          <a:p>
+            <a:pPr marL="285750" indent="-285750">
+              <a:buFont typeface="Arial" panose="020B0604020202020204" pitchFamily="34" charset="0"/>
+              <a:buChar char="•"/>
+            </a:pPr>
+            <a:endParaRPr lang="en-US" dirty="0"/>
+          </a:p>
+          <a:p>
+            <a:pPr marL="285750" indent="-285750">
+              <a:buFont typeface="Arial" panose="020B0604020202020204" pitchFamily="34" charset="0"/>
+              <a:buChar char="•"/>
+            </a:pPr>
+            <a:r>
+              <a:rPr lang="en-IN" dirty="0"/>
+              <a:t>Optimize Redis operations and database queries for better performance.</a:t>
+            </a:r>
+          </a:p>
+          <a:p>
+            <a:pPr marL="285750" indent="-285750">
+              <a:buFont typeface="Arial" panose="020B0604020202020204" pitchFamily="34" charset="0"/>
+              <a:buChar char="•"/>
+            </a:pPr>
+            <a:endParaRPr lang="en-IN" dirty="0"/>
+          </a:p>
+          <a:p>
+            <a:pPr marL="285750" indent="-285750">
+              <a:buFont typeface="Arial" panose="020B0604020202020204" pitchFamily="34" charset="0"/>
+              <a:buChar char="•"/>
+            </a:pPr>
+            <a:r>
+              <a:rPr lang="en-US" dirty="0"/>
+              <a:t>Conduct extensive testing under high traffic conditions to evaluate system reliability.</a:t>
+            </a:r>
+          </a:p>
+          <a:p>
+            <a:pPr marL="285750" indent="-285750">
+              <a:buFont typeface="Arial" panose="020B0604020202020204" pitchFamily="34" charset="0"/>
+              <a:buChar char="•"/>
+            </a:pPr>
+            <a:endParaRPr lang="en-US" dirty="0"/>
+          </a:p>
+          <a:p>
+            <a:pPr marL="285750" indent="-285750">
+              <a:buFont typeface="Arial" panose="020B0604020202020204" pitchFamily="34" charset="0"/>
+              <a:buChar char="•"/>
+            </a:pPr>
+            <a:r>
+              <a:rPr lang="en-US" dirty="0"/>
+              <a:t>Finalize documentation and system deployment preparation.</a:t>
+            </a:r>
+            <a:endParaRPr lang="en-IN" dirty="0"/>
+          </a:p>
+        </p:txBody>
+      </p:sp>
+    </p:spTree>
+    <p:extLst>
+      <p:ext uri="{BB962C8B-B14F-4D97-AF65-F5344CB8AC3E}">
+        <p14:creationId xmlns:p14="http://schemas.microsoft.com/office/powerpoint/2010/main" val="2366508381"/>
+      </p:ext>
+    </p:extLst>
+  </p:cSld>
+  <p:clrMapOvr>
+    <a:masterClrMapping/>
+  </p:clrMapOvr>
+</p:sld>
+</file>
+
+<file path=ppt/slides/slide12.xml><?xml version="1.0" encoding="utf-8"?>
+<p:sld xmlns:a="http://schemas.openxmlformats.org/drawingml/2006/main" xmlns:r="http://schemas.openxmlformats.org/officeDocument/2006/relationships" xmlns:p="http://schemas.openxmlformats.org/presentationml/2006/main">
+  <p:cSld>
+    <p:spTree>
+      <p:nvGrpSpPr>
+        <p:cNvPr id="1" name=""/>
+        <p:cNvGrpSpPr/>
+        <p:nvPr/>
+      </p:nvGrpSpPr>
+      <p:grpSpPr>
+        <a:xfrm>
+          <a:off x="0" y="0"/>
+          <a:ext cx="0" cy="0"/>
+          <a:chOff x="0" y="0"/>
+          <a:chExt cx="0" cy="0"/>
+        </a:xfrm>
+      </p:grpSpPr>
+      <p:pic>
+        <p:nvPicPr>
+          <p:cNvPr id="4" name="Content Placeholder 3"/>
+          <p:cNvPicPr>
+            <a:picLocks noGrp="1" noChangeAspect="1"/>
+          </p:cNvPicPr>
+          <p:nvPr>
+            <p:ph idx="1"/>
+          </p:nvPr>
+        </p:nvPicPr>
+        <p:blipFill>
+          <a:blip r:embed="rId3" cstate="print">
+            <a:extLst>
+              <a:ext uri="{28A0092B-C50C-407E-A947-70E740481C1C}">
+                <a14:useLocalDpi xmlns:a14="http://schemas.microsoft.com/office/drawing/2010/main" val="0"/>
+              </a:ext>
+            </a:extLst>
+          </a:blip>
+          <a:stretch>
+            <a:fillRect/>
+          </a:stretch>
+        </p:blipFill>
+        <p:spPr>
+          <a:xfrm>
+            <a:off x="1" y="0"/>
+            <a:ext cx="9180512" cy="6885384"/>
+          </a:xfrm>
+        </p:spPr>
+      </p:pic>
+      <p:sp>
+        <p:nvSpPr>
+          <p:cNvPr id="5" name="Rectangle 1"/>
+          <p:cNvSpPr>
+            <a:spLocks noChangeArrowheads="1"/>
+          </p:cNvSpPr>
+          <p:nvPr/>
+        </p:nvSpPr>
+        <p:spPr bwMode="auto">
+          <a:xfrm>
+            <a:off x="103415" y="298973"/>
+            <a:ext cx="4392488" cy="584775"/>
+          </a:xfrm>
+          <a:prstGeom prst="rect">
+            <a:avLst/>
+          </a:prstGeom>
+          <a:noFill/>
+          <a:ln>
+            <a:noFill/>
+          </a:ln>
+          <a:effectLst/>
+          <a:extLst>
+            <a:ext uri="{909E8E84-426E-40DD-AFC4-6F175D3DCCD1}">
+              <a14:hiddenFill xmlns:a14="http://schemas.microsoft.com/office/drawing/2010/main">
+                <a:solidFill>
+                  <a:schemeClr val="accent1"/>
+                </a:solidFill>
+              </a14:hiddenFill>
+            </a:ext>
+            <a:ext uri="{91240B29-F687-4F45-9708-019B960494DF}">
+              <a14:hiddenLine xmlns:a14="http://schemas.microsoft.com/office/drawing/2010/main" w="9525">
+                <a:solidFill>
+                  <a:schemeClr val="tx1"/>
+                </a:solidFill>
+                <a:miter lim="800000"/>
+                <a:headEnd/>
+                <a:tailEnd/>
+              </a14:hiddenLine>
+            </a:ext>
+            <a:ext uri="{AF507438-7753-43E0-B8FC-AC1667EBCBE1}">
+              <a14:hiddenEffects xmlns:a14="http://schemas.microsoft.com/office/drawing/2010/main">
+                <a:effectLst>
+                  <a:outerShdw dist="35921" dir="2700000" algn="ctr" rotWithShape="0">
+                    <a:schemeClr val="bg2"/>
+                  </a:outerShdw>
+                </a:effectLst>
+              </a14:hiddenEffects>
+            </a:ext>
+          </a:extLst>
+        </p:spPr>
+        <p:txBody>
+          <a:bodyPr vert="horz" wrap="square" lIns="91440" tIns="45720" rIns="91440" bIns="45720" numCol="1" anchor="ctr" anchorCtr="0" compatLnSpc="1">
+            <a:prstTxWarp prst="textNoShape">
+              <a:avLst/>
+            </a:prstTxWarp>
+            <a:spAutoFit/>
+          </a:bodyPr>
+          <a:lstStyle/>
+          <a:p>
+            <a:pPr lvl="0">
+              <a:buSzPct val="25000"/>
+            </a:pPr>
+            <a:r>
+              <a:rPr lang="en-US" sz="3200" b="1" kern="100" dirty="0">
+                <a:effectLst/>
+                <a:latin typeface="Verdana" panose="020B0604030504040204" pitchFamily="34" charset="0"/>
+                <a:ea typeface="Times New Roman" panose="02020603050405020304" pitchFamily="18" charset="0"/>
+                <a:cs typeface="Times New Roman" panose="02020603050405020304" pitchFamily="18" charset="0"/>
+              </a:rPr>
+              <a:t>Data &amp; Resources</a:t>
+            </a:r>
+            <a:endParaRPr lang="en-IN" sz="3200" b="1" dirty="0">
+              <a:solidFill>
+                <a:srgbClr val="E31E24"/>
+              </a:solidFill>
               <a:cs typeface="Times New Roman" panose="02020603050405020304" pitchFamily="18" charset="0"/>
               <a:sym typeface="Arial"/>
             </a:endParaRPr>
@@ -8308,7 +5892,7 @@
         </p:nvSpPr>
         <p:spPr>
           <a:xfrm>
-            <a:off x="197768" y="1527254"/>
+            <a:off x="179512" y="1293834"/>
             <a:ext cx="8784976" cy="372794"/>
           </a:xfrm>
           <a:prstGeom prst="rect">
@@ -8356,10 +5940,10 @@
       </p:sp>
       <p:sp>
         <p:nvSpPr>
-          <p:cNvPr id="3" name="TextBox 2">
+          <p:cNvPr id="2" name="TextBox 1">
             <a:extLst>
               <a:ext uri="{FF2B5EF4-FFF2-40B4-BE49-F238E27FC236}">
-                <a16:creationId xmlns:a16="http://schemas.microsoft.com/office/drawing/2014/main" id="{DE9A3DB5-595A-BDA2-AC2F-0CADE50C4548}"/>
+                <a16:creationId xmlns:a16="http://schemas.microsoft.com/office/drawing/2014/main" id="{E75921CF-4B5B-4883-A41F-73A188C01320}"/>
               </a:ext>
             </a:extLst>
           </p:cNvPr>
@@ -8368,8 +5952,8 @@
         </p:nvSpPr>
         <p:spPr>
           <a:xfrm>
-            <a:off x="341784" y="1831855"/>
-            <a:ext cx="8496944" cy="2862322"/>
+            <a:off x="72865" y="1457533"/>
+            <a:ext cx="8784976" cy="4247317"/>
           </a:xfrm>
           <a:prstGeom prst="rect">
             <a:avLst/>
@@ -8388,7 +5972,7 @@
             </a:pPr>
             <a:r>
               <a:rPr lang="en-US" dirty="0"/>
-              <a:t>Completion of remaining core rate limiting logic and advanced configurations</a:t>
+              <a:t>API Request Data: User ID or API key, IP address, endpoint name, and request timestamp.</a:t>
             </a:r>
           </a:p>
           <a:p>
@@ -8405,7 +5989,7 @@
             </a:pPr>
             <a:r>
               <a:rPr lang="en-US" dirty="0"/>
-              <a:t>Enhancement of UI dashboards for better clarity in API key usage and rate limit statistics.</a:t>
+              <a:t>Rate Limit Configuration Data: Maximum allowed requests, time window duration, and selected rate limiting algorithm.</a:t>
             </a:r>
           </a:p>
           <a:p>
@@ -8422,7 +6006,7 @@
             </a:pPr>
             <a:r>
               <a:rPr lang="en-US" dirty="0"/>
-              <a:t>Full implementation of distributed request handling and concurrency optimization.</a:t>
+              <a:t>Traffic &amp; Log Data: Allowed requests, denied requests, and rate limit violation statistics.</a:t>
             </a:r>
           </a:p>
           <a:p>
@@ -8439,7 +6023,7 @@
             </a:pPr>
             <a:r>
               <a:rPr lang="en-US" dirty="0"/>
-              <a:t>Performance optimization of Redis operations and database queries.</a:t>
+              <a:t>Backend Technologies: Java and Spring Boot for developing APIs and rate limiting services.</a:t>
             </a:r>
           </a:p>
           <a:p>
@@ -8456,9 +6040,449 @@
             </a:pPr>
             <a:r>
               <a:rPr lang="en-US" dirty="0"/>
-              <a:t>Thorough testing under high traffic scenarios to validate rate limiting accuracy.</a:t>
+              <a:t>Data Storage Systems: Redis for distributed request tracking and PostgreSQL for configuration storage.</a:t>
+            </a:r>
+          </a:p>
+          <a:p>
+            <a:pPr marL="285750" indent="-285750">
+              <a:buFont typeface="Arial" panose="020B0604020202020204" pitchFamily="34" charset="0"/>
+              <a:buChar char="•"/>
+            </a:pPr>
+            <a:endParaRPr lang="en-US" dirty="0"/>
+          </a:p>
+          <a:p>
+            <a:pPr marL="285750" indent="-285750">
+              <a:buFont typeface="Arial" panose="020B0604020202020204" pitchFamily="34" charset="0"/>
+              <a:buChar char="•"/>
+            </a:pPr>
+            <a:r>
+              <a:rPr lang="en-US" dirty="0"/>
+              <a:t>Monitoring &amp; Visualization Tools: Prometheus and Grafana for monitoring system metrics and performance.</a:t>
             </a:r>
             <a:endParaRPr lang="en-IN" dirty="0"/>
+          </a:p>
+        </p:txBody>
+      </p:sp>
+    </p:spTree>
+    <p:extLst>
+      <p:ext uri="{BB962C8B-B14F-4D97-AF65-F5344CB8AC3E}">
+        <p14:creationId xmlns:p14="http://schemas.microsoft.com/office/powerpoint/2010/main" val="3449068858"/>
+      </p:ext>
+    </p:extLst>
+  </p:cSld>
+  <p:clrMapOvr>
+    <a:masterClrMapping/>
+  </p:clrMapOvr>
+</p:sld>
+</file>
+
+<file path=ppt/slides/slide13.xml><?xml version="1.0" encoding="utf-8"?>
+<p:sld xmlns:a="http://schemas.openxmlformats.org/drawingml/2006/main" xmlns:r="http://schemas.openxmlformats.org/officeDocument/2006/relationships" xmlns:p="http://schemas.openxmlformats.org/presentationml/2006/main">
+  <p:cSld>
+    <p:spTree>
+      <p:nvGrpSpPr>
+        <p:cNvPr id="1" name=""/>
+        <p:cNvGrpSpPr/>
+        <p:nvPr/>
+      </p:nvGrpSpPr>
+      <p:grpSpPr>
+        <a:xfrm>
+          <a:off x="0" y="0"/>
+          <a:ext cx="0" cy="0"/>
+          <a:chOff x="0" y="0"/>
+          <a:chExt cx="0" cy="0"/>
+        </a:xfrm>
+      </p:grpSpPr>
+      <p:pic>
+        <p:nvPicPr>
+          <p:cNvPr id="4" name="Content Placeholder 3"/>
+          <p:cNvPicPr>
+            <a:picLocks noGrp="1" noChangeAspect="1"/>
+          </p:cNvPicPr>
+          <p:nvPr>
+            <p:ph idx="1"/>
+          </p:nvPr>
+        </p:nvPicPr>
+        <p:blipFill>
+          <a:blip r:embed="rId3" cstate="print">
+            <a:extLst>
+              <a:ext uri="{28A0092B-C50C-407E-A947-70E740481C1C}">
+                <a14:useLocalDpi xmlns:a14="http://schemas.microsoft.com/office/drawing/2010/main" val="0"/>
+              </a:ext>
+            </a:extLst>
+          </a:blip>
+          <a:stretch>
+            <a:fillRect/>
+          </a:stretch>
+        </p:blipFill>
+        <p:spPr>
+          <a:xfrm>
+            <a:off x="-94976" y="-13692"/>
+            <a:ext cx="9180512" cy="6885384"/>
+          </a:xfrm>
+        </p:spPr>
+      </p:pic>
+      <p:sp>
+        <p:nvSpPr>
+          <p:cNvPr id="5" name="Rectangle 1"/>
+          <p:cNvSpPr>
+            <a:spLocks noChangeArrowheads="1"/>
+          </p:cNvSpPr>
+          <p:nvPr/>
+        </p:nvSpPr>
+        <p:spPr bwMode="auto">
+          <a:xfrm>
+            <a:off x="179512" y="151593"/>
+            <a:ext cx="6117380" cy="584775"/>
+          </a:xfrm>
+          <a:prstGeom prst="rect">
+            <a:avLst/>
+          </a:prstGeom>
+          <a:noFill/>
+          <a:ln>
+            <a:noFill/>
+          </a:ln>
+          <a:effectLst/>
+          <a:extLst>
+            <a:ext uri="{909E8E84-426E-40DD-AFC4-6F175D3DCCD1}">
+              <a14:hiddenFill xmlns:a14="http://schemas.microsoft.com/office/drawing/2010/main">
+                <a:solidFill>
+                  <a:schemeClr val="accent1"/>
+                </a:solidFill>
+              </a14:hiddenFill>
+            </a:ext>
+            <a:ext uri="{91240B29-F687-4F45-9708-019B960494DF}">
+              <a14:hiddenLine xmlns:a14="http://schemas.microsoft.com/office/drawing/2010/main" w="9525">
+                <a:solidFill>
+                  <a:schemeClr val="tx1"/>
+                </a:solidFill>
+                <a:miter lim="800000"/>
+                <a:headEnd/>
+                <a:tailEnd/>
+              </a14:hiddenLine>
+            </a:ext>
+            <a:ext uri="{AF507438-7753-43E0-B8FC-AC1667EBCBE1}">
+              <a14:hiddenEffects xmlns:a14="http://schemas.microsoft.com/office/drawing/2010/main">
+                <a:effectLst>
+                  <a:outerShdw dist="35921" dir="2700000" algn="ctr" rotWithShape="0">
+                    <a:schemeClr val="bg2"/>
+                  </a:outerShdw>
+                </a:effectLst>
+              </a14:hiddenEffects>
+            </a:ext>
+          </a:extLst>
+        </p:spPr>
+        <p:txBody>
+          <a:bodyPr vert="horz" wrap="none" lIns="91440" tIns="45720" rIns="91440" bIns="45720" numCol="1" anchor="ctr" anchorCtr="0" compatLnSpc="1">
+            <a:prstTxWarp prst="textNoShape">
+              <a:avLst/>
+            </a:prstTxWarp>
+            <a:spAutoFit/>
+          </a:bodyPr>
+          <a:lstStyle/>
+          <a:p>
+            <a:pPr lvl="0">
+              <a:buSzPct val="25000"/>
+            </a:pPr>
+            <a:r>
+              <a:rPr lang="en-US" sz="3200" b="1" kern="100" dirty="0">
+                <a:effectLst/>
+                <a:latin typeface="Verdana" panose="020B0604030504040204" pitchFamily="34" charset="0"/>
+                <a:ea typeface="Times New Roman" panose="02020603050405020304" pitchFamily="18" charset="0"/>
+                <a:cs typeface="Times New Roman" panose="02020603050405020304" pitchFamily="18" charset="0"/>
+              </a:rPr>
+              <a:t>Project </a:t>
+            </a:r>
+            <a:r>
+              <a:rPr lang="en-US" sz="3200" b="1" kern="100" dirty="0" err="1">
+                <a:effectLst/>
+                <a:latin typeface="Verdana" panose="020B0604030504040204" pitchFamily="34" charset="0"/>
+                <a:ea typeface="Times New Roman" panose="02020603050405020304" pitchFamily="18" charset="0"/>
+                <a:cs typeface="Times New Roman" panose="02020603050405020304" pitchFamily="18" charset="0"/>
+              </a:rPr>
+              <a:t>Usecases</a:t>
+            </a:r>
+            <a:r>
+              <a:rPr lang="en-US" sz="3200" b="1" kern="100" dirty="0">
+                <a:effectLst/>
+                <a:latin typeface="Verdana" panose="020B0604030504040204" pitchFamily="34" charset="0"/>
+                <a:ea typeface="Times New Roman" panose="02020603050405020304" pitchFamily="18" charset="0"/>
+                <a:cs typeface="Times New Roman" panose="02020603050405020304" pitchFamily="18" charset="0"/>
+              </a:rPr>
+              <a:t> &amp; Scope</a:t>
+            </a:r>
+            <a:endParaRPr lang="en-IN" sz="3200" b="1" dirty="0">
+              <a:solidFill>
+                <a:srgbClr val="E31E24"/>
+              </a:solidFill>
+              <a:cs typeface="Times New Roman" panose="02020603050405020304" pitchFamily="18" charset="0"/>
+              <a:sym typeface="Arial"/>
+            </a:endParaRPr>
+          </a:p>
+        </p:txBody>
+      </p:sp>
+      <p:cxnSp>
+        <p:nvCxnSpPr>
+          <p:cNvPr id="7" name="Straight Connector 6"/>
+          <p:cNvCxnSpPr/>
+          <p:nvPr/>
+        </p:nvCxnSpPr>
+        <p:spPr>
+          <a:xfrm>
+            <a:off x="0" y="1061448"/>
+            <a:ext cx="9180513" cy="0"/>
+          </a:xfrm>
+          <a:prstGeom prst="line">
+            <a:avLst/>
+          </a:prstGeom>
+          <a:ln w="25400">
+            <a:solidFill>
+              <a:srgbClr val="0060AA"/>
+            </a:solidFill>
+          </a:ln>
+        </p:spPr>
+        <p:style>
+          <a:lnRef idx="1">
+            <a:schemeClr val="accent1"/>
+          </a:lnRef>
+          <a:fillRef idx="0">
+            <a:schemeClr val="accent1"/>
+          </a:fillRef>
+          <a:effectRef idx="0">
+            <a:schemeClr val="accent1"/>
+          </a:effectRef>
+          <a:fontRef idx="minor">
+            <a:schemeClr val="tx1"/>
+          </a:fontRef>
+        </p:style>
+      </p:cxnSp>
+      <p:pic>
+        <p:nvPicPr>
+          <p:cNvPr id="9" name="Picture 8"/>
+          <p:cNvPicPr>
+            <a:picLocks noChangeAspect="1"/>
+          </p:cNvPicPr>
+          <p:nvPr/>
+        </p:nvPicPr>
+        <p:blipFill>
+          <a:blip r:embed="rId4" cstate="print">
+            <a:extLst>
+              <a:ext uri="{28A0092B-C50C-407E-A947-70E740481C1C}">
+                <a14:useLocalDpi xmlns:a14="http://schemas.microsoft.com/office/drawing/2010/main" val="0"/>
+              </a:ext>
+            </a:extLst>
+          </a:blip>
+          <a:stretch>
+            <a:fillRect/>
+          </a:stretch>
+        </p:blipFill>
+        <p:spPr>
+          <a:xfrm>
+            <a:off x="72008" y="6309320"/>
+            <a:ext cx="2411760" cy="346691"/>
+          </a:xfrm>
+          <a:prstGeom prst="rect">
+            <a:avLst/>
+          </a:prstGeom>
+        </p:spPr>
+      </p:pic>
+      <p:sp>
+        <p:nvSpPr>
+          <p:cNvPr id="6" name="TextBox 5">
+            <a:extLst>
+              <a:ext uri="{FF2B5EF4-FFF2-40B4-BE49-F238E27FC236}">
+                <a16:creationId xmlns:a16="http://schemas.microsoft.com/office/drawing/2014/main" id="{AE24D516-77C6-C96A-5F77-D099623448D8}"/>
+              </a:ext>
+            </a:extLst>
+          </p:cNvPr>
+          <p:cNvSpPr txBox="1"/>
+          <p:nvPr/>
+        </p:nvSpPr>
+        <p:spPr>
+          <a:xfrm>
+            <a:off x="179512" y="1293834"/>
+            <a:ext cx="8784976" cy="372794"/>
+          </a:xfrm>
+          <a:prstGeom prst="rect">
+            <a:avLst/>
+          </a:prstGeom>
+          <a:noFill/>
+        </p:spPr>
+        <p:txBody>
+          <a:bodyPr wrap="square">
+            <a:spAutoFit/>
+          </a:bodyPr>
+          <a:lstStyle/>
+          <a:p>
+            <a:pPr marL="0" marR="0" algn="just" fontAlgn="base">
+              <a:lnSpc>
+                <a:spcPct val="107000"/>
+              </a:lnSpc>
+              <a:spcBef>
+                <a:spcPts val="0"/>
+              </a:spcBef>
+              <a:spcAft>
+                <a:spcPts val="0"/>
+              </a:spcAft>
+            </a:pPr>
+            <a:r>
+              <a:rPr lang="en-US" sz="1800" kern="100" dirty="0">
+                <a:solidFill>
+                  <a:srgbClr val="000000"/>
+                </a:solidFill>
+                <a:effectLst/>
+                <a:latin typeface="Verdana" panose="020B0604030504040204" pitchFamily="34" charset="0"/>
+                <a:ea typeface="Times New Roman" panose="02020603050405020304" pitchFamily="18" charset="0"/>
+                <a:cs typeface="Times New Roman" panose="02020603050405020304" pitchFamily="18" charset="0"/>
+              </a:rPr>
+              <a:t> </a:t>
+            </a:r>
+            <a:endParaRPr lang="en-US" sz="2800" kern="100" dirty="0">
+              <a:effectLst/>
+              <a:latin typeface="+mj-lt"/>
+              <a:ea typeface="Calibri" panose="020F0502020204030204" pitchFamily="34" charset="0"/>
+              <a:cs typeface="Times New Roman" panose="02020603050405020304" pitchFamily="18" charset="0"/>
+            </a:endParaRPr>
+          </a:p>
+        </p:txBody>
+      </p:sp>
+      <p:sp>
+        <p:nvSpPr>
+          <p:cNvPr id="2" name="TextBox 1">
+            <a:extLst>
+              <a:ext uri="{FF2B5EF4-FFF2-40B4-BE49-F238E27FC236}">
+                <a16:creationId xmlns:a16="http://schemas.microsoft.com/office/drawing/2014/main" id="{BD15BF41-06CD-2603-6885-CEC4FC2906BC}"/>
+              </a:ext>
+            </a:extLst>
+          </p:cNvPr>
+          <p:cNvSpPr txBox="1"/>
+          <p:nvPr/>
+        </p:nvSpPr>
+        <p:spPr>
+          <a:xfrm>
+            <a:off x="0" y="1305341"/>
+            <a:ext cx="8784976" cy="4247317"/>
+          </a:xfrm>
+          <a:prstGeom prst="rect">
+            <a:avLst/>
+          </a:prstGeom>
+          <a:noFill/>
+        </p:spPr>
+        <p:txBody>
+          <a:bodyPr wrap="square" rtlCol="0">
+            <a:spAutoFit/>
+          </a:bodyPr>
+          <a:lstStyle/>
+          <a:p>
+            <a:pPr marL="285750" indent="-285750">
+              <a:buFont typeface="Arial" panose="020B0604020202020204" pitchFamily="34" charset="0"/>
+              <a:buChar char="•"/>
+            </a:pPr>
+            <a:r>
+              <a:rPr lang="en-US" dirty="0"/>
+              <a:t>API Traffic Control</a:t>
+            </a:r>
+            <a:r>
+              <a:rPr lang="en-US" b="1" dirty="0"/>
+              <a:t>:</a:t>
+            </a:r>
+            <a:r>
+              <a:rPr lang="en-US" dirty="0"/>
+              <a:t> Limits the number of API requests to prevent server overload during high traffic.</a:t>
+            </a:r>
+          </a:p>
+          <a:p>
+            <a:pPr marL="285750" indent="-285750">
+              <a:buFont typeface="Arial" panose="020B0604020202020204" pitchFamily="34" charset="0"/>
+              <a:buChar char="•"/>
+            </a:pPr>
+            <a:endParaRPr lang="en-US" dirty="0"/>
+          </a:p>
+          <a:p>
+            <a:pPr marL="285750" indent="-285750">
+              <a:buFont typeface="Arial" panose="020B0604020202020204" pitchFamily="34" charset="0"/>
+              <a:buChar char="•"/>
+            </a:pPr>
+            <a:r>
+              <a:rPr lang="en-US" dirty="0"/>
+              <a:t>Protection Against Abuse: Prevents bots, spam requests, and malicious traffic from flooding the system</a:t>
+            </a:r>
+          </a:p>
+          <a:p>
+            <a:pPr marL="285750" indent="-285750">
+              <a:buFont typeface="Arial" panose="020B0604020202020204" pitchFamily="34" charset="0"/>
+              <a:buChar char="•"/>
+            </a:pPr>
+            <a:endParaRPr lang="en-US" dirty="0"/>
+          </a:p>
+          <a:p>
+            <a:pPr marL="285750" indent="-285750">
+              <a:buFont typeface="Arial" panose="020B0604020202020204" pitchFamily="34" charset="0"/>
+              <a:buChar char="•"/>
+            </a:pPr>
+            <a:r>
+              <a:rPr lang="en-US" dirty="0"/>
+              <a:t>Fair Resource Usage: Ensures equal API access for users by enforcing request limits.</a:t>
+            </a:r>
+          </a:p>
+          <a:p>
+            <a:pPr marL="285750" indent="-285750">
+              <a:buFont typeface="Arial" panose="020B0604020202020204" pitchFamily="34" charset="0"/>
+              <a:buChar char="•"/>
+            </a:pPr>
+            <a:endParaRPr lang="en-US" dirty="0"/>
+          </a:p>
+          <a:p>
+            <a:pPr marL="285750" indent="-285750">
+              <a:buFont typeface="Arial" panose="020B0604020202020204" pitchFamily="34" charset="0"/>
+              <a:buChar char="•"/>
+            </a:pPr>
+            <a:r>
+              <a:rPr lang="en-US" dirty="0"/>
+              <a:t>Authentication Systems: Restricts repeated login attempts to reduce brute-force attacks.</a:t>
+            </a:r>
+          </a:p>
+          <a:p>
+            <a:pPr marL="285750" indent="-285750">
+              <a:buFont typeface="Arial" panose="020B0604020202020204" pitchFamily="34" charset="0"/>
+              <a:buChar char="•"/>
+            </a:pPr>
+            <a:endParaRPr lang="en-US" dirty="0"/>
+          </a:p>
+          <a:p>
+            <a:pPr marL="285750" indent="-285750">
+              <a:buFont typeface="Arial" panose="020B0604020202020204" pitchFamily="34" charset="0"/>
+              <a:buChar char="•"/>
+            </a:pPr>
+            <a:r>
+              <a:rPr lang="en-US" dirty="0"/>
+              <a:t>High-Traffic Applications</a:t>
+            </a:r>
+            <a:r>
+              <a:rPr lang="en-US" b="1" dirty="0"/>
+              <a:t>:</a:t>
+            </a:r>
+            <a:r>
+              <a:rPr lang="en-US" dirty="0"/>
+              <a:t> Useful in systems like e-commerce platforms during flash sales or peak usage.</a:t>
+            </a:r>
+          </a:p>
+          <a:p>
+            <a:pPr marL="285750" indent="-285750">
+              <a:buFont typeface="Arial" panose="020B0604020202020204" pitchFamily="34" charset="0"/>
+              <a:buChar char="•"/>
+            </a:pPr>
+            <a:endParaRPr lang="en-US" dirty="0"/>
+          </a:p>
+          <a:p>
+            <a:pPr marL="285750" indent="-285750">
+              <a:buFont typeface="Arial" panose="020B0604020202020204" pitchFamily="34" charset="0"/>
+              <a:buChar char="•"/>
+            </a:pPr>
+            <a:r>
+              <a:rPr lang="en-IN" dirty="0"/>
+              <a:t>Distributed Systems &amp; Microservices: Maintains consistent rate limits across multiple servers and services.</a:t>
+            </a:r>
           </a:p>
         </p:txBody>
       </p:sp>
@@ -8466,6 +6490,3869 @@
     <p:extLst>
       <p:ext uri="{BB962C8B-B14F-4D97-AF65-F5344CB8AC3E}">
         <p14:creationId xmlns:p14="http://schemas.microsoft.com/office/powerpoint/2010/main" val="3295812248"/>
+      </p:ext>
+    </p:extLst>
+  </p:cSld>
+  <p:clrMapOvr>
+    <a:masterClrMapping/>
+  </p:clrMapOvr>
+</p:sld>
+</file>
+
+<file path=ppt/slides/slide14.xml><?xml version="1.0" encoding="utf-8"?>
+<p:sld xmlns:a="http://schemas.openxmlformats.org/drawingml/2006/main" xmlns:r="http://schemas.openxmlformats.org/officeDocument/2006/relationships" xmlns:p="http://schemas.openxmlformats.org/presentationml/2006/main">
+  <p:cSld>
+    <p:spTree>
+      <p:nvGrpSpPr>
+        <p:cNvPr id="1" name=""/>
+        <p:cNvGrpSpPr/>
+        <p:nvPr/>
+      </p:nvGrpSpPr>
+      <p:grpSpPr>
+        <a:xfrm>
+          <a:off x="0" y="0"/>
+          <a:ext cx="0" cy="0"/>
+          <a:chOff x="0" y="0"/>
+          <a:chExt cx="0" cy="0"/>
+        </a:xfrm>
+      </p:grpSpPr>
+      <p:pic>
+        <p:nvPicPr>
+          <p:cNvPr id="4" name="Content Placeholder 3"/>
+          <p:cNvPicPr>
+            <a:picLocks noGrp="1" noChangeAspect="1"/>
+          </p:cNvPicPr>
+          <p:nvPr>
+            <p:ph idx="1"/>
+          </p:nvPr>
+        </p:nvPicPr>
+        <p:blipFill>
+          <a:blip r:embed="rId3" cstate="print">
+            <a:extLst>
+              <a:ext uri="{28A0092B-C50C-407E-A947-70E740481C1C}">
+                <a14:useLocalDpi xmlns:a14="http://schemas.microsoft.com/office/drawing/2010/main" val="0"/>
+              </a:ext>
+            </a:extLst>
+          </a:blip>
+          <a:stretch>
+            <a:fillRect/>
+          </a:stretch>
+        </p:blipFill>
+        <p:spPr>
+          <a:xfrm>
+            <a:off x="1" y="0"/>
+            <a:ext cx="9180512" cy="6885384"/>
+          </a:xfrm>
+        </p:spPr>
+      </p:pic>
+      <p:sp>
+        <p:nvSpPr>
+          <p:cNvPr id="5" name="Rectangle 1"/>
+          <p:cNvSpPr>
+            <a:spLocks noChangeArrowheads="1"/>
+          </p:cNvSpPr>
+          <p:nvPr/>
+        </p:nvSpPr>
+        <p:spPr bwMode="auto">
+          <a:xfrm>
+            <a:off x="103414" y="298973"/>
+            <a:ext cx="6844849" cy="584775"/>
+          </a:xfrm>
+          <a:prstGeom prst="rect">
+            <a:avLst/>
+          </a:prstGeom>
+          <a:noFill/>
+          <a:ln>
+            <a:noFill/>
+          </a:ln>
+          <a:effectLst/>
+          <a:extLst>
+            <a:ext uri="{909E8E84-426E-40DD-AFC4-6F175D3DCCD1}">
+              <a14:hiddenFill xmlns:a14="http://schemas.microsoft.com/office/drawing/2010/main">
+                <a:solidFill>
+                  <a:schemeClr val="accent1"/>
+                </a:solidFill>
+              </a14:hiddenFill>
+            </a:ext>
+            <a:ext uri="{91240B29-F687-4F45-9708-019B960494DF}">
+              <a14:hiddenLine xmlns:a14="http://schemas.microsoft.com/office/drawing/2010/main" w="9525">
+                <a:solidFill>
+                  <a:schemeClr val="tx1"/>
+                </a:solidFill>
+                <a:miter lim="800000"/>
+                <a:headEnd/>
+                <a:tailEnd/>
+              </a14:hiddenLine>
+            </a:ext>
+            <a:ext uri="{AF507438-7753-43E0-B8FC-AC1667EBCBE1}">
+              <a14:hiddenEffects xmlns:a14="http://schemas.microsoft.com/office/drawing/2010/main">
+                <a:effectLst>
+                  <a:outerShdw dist="35921" dir="2700000" algn="ctr" rotWithShape="0">
+                    <a:schemeClr val="bg2"/>
+                  </a:outerShdw>
+                </a:effectLst>
+              </a14:hiddenEffects>
+            </a:ext>
+          </a:extLst>
+        </p:spPr>
+        <p:txBody>
+          <a:bodyPr vert="horz" wrap="square" lIns="91440" tIns="45720" rIns="91440" bIns="45720" numCol="1" anchor="ctr" anchorCtr="0" compatLnSpc="1">
+            <a:prstTxWarp prst="textNoShape">
+              <a:avLst/>
+            </a:prstTxWarp>
+            <a:spAutoFit/>
+          </a:bodyPr>
+          <a:lstStyle/>
+          <a:p>
+            <a:pPr lvl="0">
+              <a:buSzPct val="25000"/>
+            </a:pPr>
+            <a:r>
+              <a:rPr lang="en-US" sz="3200" b="1" kern="100" dirty="0">
+                <a:effectLst/>
+                <a:latin typeface="Verdana" panose="020B0604030504040204" pitchFamily="34" charset="0"/>
+                <a:ea typeface="Times New Roman" panose="02020603050405020304" pitchFamily="18" charset="0"/>
+                <a:cs typeface="Times New Roman" panose="02020603050405020304" pitchFamily="18" charset="0"/>
+              </a:rPr>
+              <a:t>Expected Results &amp; Impact</a:t>
+            </a:r>
+            <a:endParaRPr lang="en-IN" sz="3200" b="1" dirty="0">
+              <a:solidFill>
+                <a:srgbClr val="E31E24"/>
+              </a:solidFill>
+              <a:cs typeface="Times New Roman" panose="02020603050405020304" pitchFamily="18" charset="0"/>
+              <a:sym typeface="Arial"/>
+            </a:endParaRPr>
+          </a:p>
+        </p:txBody>
+      </p:sp>
+      <p:cxnSp>
+        <p:nvCxnSpPr>
+          <p:cNvPr id="7" name="Straight Connector 6"/>
+          <p:cNvCxnSpPr/>
+          <p:nvPr/>
+        </p:nvCxnSpPr>
+        <p:spPr>
+          <a:xfrm>
+            <a:off x="0" y="1061448"/>
+            <a:ext cx="9180513" cy="0"/>
+          </a:xfrm>
+          <a:prstGeom prst="line">
+            <a:avLst/>
+          </a:prstGeom>
+          <a:ln w="25400">
+            <a:solidFill>
+              <a:srgbClr val="0060AA"/>
+            </a:solidFill>
+          </a:ln>
+        </p:spPr>
+        <p:style>
+          <a:lnRef idx="1">
+            <a:schemeClr val="accent1"/>
+          </a:lnRef>
+          <a:fillRef idx="0">
+            <a:schemeClr val="accent1"/>
+          </a:fillRef>
+          <a:effectRef idx="0">
+            <a:schemeClr val="accent1"/>
+          </a:effectRef>
+          <a:fontRef idx="minor">
+            <a:schemeClr val="tx1"/>
+          </a:fontRef>
+        </p:style>
+      </p:cxnSp>
+      <p:pic>
+        <p:nvPicPr>
+          <p:cNvPr id="9" name="Picture 8"/>
+          <p:cNvPicPr>
+            <a:picLocks noChangeAspect="1"/>
+          </p:cNvPicPr>
+          <p:nvPr/>
+        </p:nvPicPr>
+        <p:blipFill>
+          <a:blip r:embed="rId4" cstate="print">
+            <a:extLst>
+              <a:ext uri="{28A0092B-C50C-407E-A947-70E740481C1C}">
+                <a14:useLocalDpi xmlns:a14="http://schemas.microsoft.com/office/drawing/2010/main" val="0"/>
+              </a:ext>
+            </a:extLst>
+          </a:blip>
+          <a:stretch>
+            <a:fillRect/>
+          </a:stretch>
+        </p:blipFill>
+        <p:spPr>
+          <a:xfrm>
+            <a:off x="72008" y="6309320"/>
+            <a:ext cx="2411760" cy="346691"/>
+          </a:xfrm>
+          <a:prstGeom prst="rect">
+            <a:avLst/>
+          </a:prstGeom>
+        </p:spPr>
+      </p:pic>
+      <p:sp>
+        <p:nvSpPr>
+          <p:cNvPr id="6" name="TextBox 5">
+            <a:extLst>
+              <a:ext uri="{FF2B5EF4-FFF2-40B4-BE49-F238E27FC236}">
+                <a16:creationId xmlns:a16="http://schemas.microsoft.com/office/drawing/2014/main" id="{AE24D516-77C6-C96A-5F77-D099623448D8}"/>
+              </a:ext>
+            </a:extLst>
+          </p:cNvPr>
+          <p:cNvSpPr txBox="1"/>
+          <p:nvPr/>
+        </p:nvSpPr>
+        <p:spPr>
+          <a:xfrm>
+            <a:off x="179512" y="1293834"/>
+            <a:ext cx="8784976" cy="372794"/>
+          </a:xfrm>
+          <a:prstGeom prst="rect">
+            <a:avLst/>
+          </a:prstGeom>
+          <a:noFill/>
+        </p:spPr>
+        <p:txBody>
+          <a:bodyPr wrap="square">
+            <a:spAutoFit/>
+          </a:bodyPr>
+          <a:lstStyle/>
+          <a:p>
+            <a:pPr marL="0" marR="0" algn="just" fontAlgn="base">
+              <a:lnSpc>
+                <a:spcPct val="107000"/>
+              </a:lnSpc>
+              <a:spcBef>
+                <a:spcPts val="0"/>
+              </a:spcBef>
+              <a:spcAft>
+                <a:spcPts val="0"/>
+              </a:spcAft>
+            </a:pPr>
+            <a:r>
+              <a:rPr lang="en-US" sz="1800" kern="100" dirty="0">
+                <a:solidFill>
+                  <a:srgbClr val="000000"/>
+                </a:solidFill>
+                <a:effectLst/>
+                <a:latin typeface="Verdana" panose="020B0604030504040204" pitchFamily="34" charset="0"/>
+                <a:ea typeface="Times New Roman" panose="02020603050405020304" pitchFamily="18" charset="0"/>
+                <a:cs typeface="Times New Roman" panose="02020603050405020304" pitchFamily="18" charset="0"/>
+              </a:rPr>
+              <a:t> </a:t>
+            </a:r>
+            <a:endParaRPr lang="en-US" sz="2800" kern="100" dirty="0">
+              <a:effectLst/>
+              <a:latin typeface="+mj-lt"/>
+              <a:ea typeface="Calibri" panose="020F0502020204030204" pitchFamily="34" charset="0"/>
+              <a:cs typeface="Times New Roman" panose="02020603050405020304" pitchFamily="18" charset="0"/>
+            </a:endParaRPr>
+          </a:p>
+        </p:txBody>
+      </p:sp>
+      <p:sp>
+        <p:nvSpPr>
+          <p:cNvPr id="2" name="TextBox 1">
+            <a:extLst>
+              <a:ext uri="{FF2B5EF4-FFF2-40B4-BE49-F238E27FC236}">
+                <a16:creationId xmlns:a16="http://schemas.microsoft.com/office/drawing/2014/main" id="{D8024626-DBAA-F8EA-6FE0-FD604127CF8C}"/>
+              </a:ext>
+            </a:extLst>
+          </p:cNvPr>
+          <p:cNvSpPr txBox="1"/>
+          <p:nvPr/>
+        </p:nvSpPr>
+        <p:spPr>
+          <a:xfrm>
+            <a:off x="66806" y="2150030"/>
+            <a:ext cx="8784976" cy="2585323"/>
+          </a:xfrm>
+          <a:prstGeom prst="rect">
+            <a:avLst/>
+          </a:prstGeom>
+          <a:noFill/>
+        </p:spPr>
+        <p:txBody>
+          <a:bodyPr wrap="square" rtlCol="0">
+            <a:spAutoFit/>
+          </a:bodyPr>
+          <a:lstStyle/>
+          <a:p>
+            <a:pPr marL="285750" indent="-285750">
+              <a:buFont typeface="Arial" panose="020B0604020202020204" pitchFamily="34" charset="0"/>
+              <a:buChar char="•"/>
+            </a:pPr>
+            <a:r>
+              <a:rPr lang="en-US" dirty="0"/>
+              <a:t>Ensure stable and controlled API traffic during high-load conditions.</a:t>
+            </a:r>
+          </a:p>
+          <a:p>
+            <a:pPr marL="285750" indent="-285750">
+              <a:buFont typeface="Arial" panose="020B0604020202020204" pitchFamily="34" charset="0"/>
+              <a:buChar char="•"/>
+            </a:pPr>
+            <a:endParaRPr lang="en-US" dirty="0"/>
+          </a:p>
+          <a:p>
+            <a:pPr marL="285750" indent="-285750">
+              <a:buFont typeface="Arial" panose="020B0604020202020204" pitchFamily="34" charset="0"/>
+              <a:buChar char="•"/>
+            </a:pPr>
+            <a:r>
+              <a:rPr lang="en-US" dirty="0"/>
+              <a:t>Prevent API abuse, spam requests, and malicious traffic.</a:t>
+            </a:r>
+          </a:p>
+          <a:p>
+            <a:pPr marL="285750" indent="-285750">
+              <a:buFont typeface="Arial" panose="020B0604020202020204" pitchFamily="34" charset="0"/>
+              <a:buChar char="•"/>
+            </a:pPr>
+            <a:endParaRPr lang="en-US" dirty="0"/>
+          </a:p>
+          <a:p>
+            <a:pPr marL="285750" indent="-285750">
+              <a:buFont typeface="Arial" panose="020B0604020202020204" pitchFamily="34" charset="0"/>
+              <a:buChar char="•"/>
+            </a:pPr>
+            <a:r>
+              <a:rPr lang="en-US" dirty="0"/>
+              <a:t>Maintain consistent rate limiting across distributed servers.</a:t>
+            </a:r>
+          </a:p>
+          <a:p>
+            <a:pPr marL="285750" indent="-285750">
+              <a:buFont typeface="Arial" panose="020B0604020202020204" pitchFamily="34" charset="0"/>
+              <a:buChar char="•"/>
+            </a:pPr>
+            <a:endParaRPr lang="en-US" dirty="0"/>
+          </a:p>
+          <a:p>
+            <a:pPr marL="285750" indent="-285750">
+              <a:buFont typeface="Arial" panose="020B0604020202020204" pitchFamily="34" charset="0"/>
+              <a:buChar char="•"/>
+            </a:pPr>
+            <a:r>
+              <a:rPr lang="en-US" dirty="0"/>
+              <a:t>Improve system performance and reduce server overload.</a:t>
+            </a:r>
+          </a:p>
+          <a:p>
+            <a:pPr marL="285750" indent="-285750">
+              <a:buFont typeface="Arial" panose="020B0604020202020204" pitchFamily="34" charset="0"/>
+              <a:buChar char="•"/>
+            </a:pPr>
+            <a:endParaRPr lang="en-US" dirty="0"/>
+          </a:p>
+          <a:p>
+            <a:pPr marL="285750" indent="-285750">
+              <a:buFont typeface="Arial" panose="020B0604020202020204" pitchFamily="34" charset="0"/>
+              <a:buChar char="•"/>
+            </a:pPr>
+            <a:r>
+              <a:rPr lang="en-US" dirty="0"/>
+              <a:t>Enhance overall system reliability, security, and scalability.</a:t>
+            </a:r>
+            <a:endParaRPr lang="en-IN" dirty="0"/>
+          </a:p>
+        </p:txBody>
+      </p:sp>
+    </p:spTree>
+    <p:extLst>
+      <p:ext uri="{BB962C8B-B14F-4D97-AF65-F5344CB8AC3E}">
+        <p14:creationId xmlns:p14="http://schemas.microsoft.com/office/powerpoint/2010/main" val="256260487"/>
+      </p:ext>
+    </p:extLst>
+  </p:cSld>
+  <p:clrMapOvr>
+    <a:masterClrMapping/>
+  </p:clrMapOvr>
+</p:sld>
+</file>
+
+<file path=ppt/slides/slide15.xml><?xml version="1.0" encoding="utf-8"?>
+<p:sld xmlns:a="http://schemas.openxmlformats.org/drawingml/2006/main" xmlns:r="http://schemas.openxmlformats.org/officeDocument/2006/relationships" xmlns:p="http://schemas.openxmlformats.org/presentationml/2006/main">
+  <p:cSld>
+    <p:spTree>
+      <p:nvGrpSpPr>
+        <p:cNvPr id="1" name=""/>
+        <p:cNvGrpSpPr/>
+        <p:nvPr/>
+      </p:nvGrpSpPr>
+      <p:grpSpPr>
+        <a:xfrm>
+          <a:off x="0" y="0"/>
+          <a:ext cx="0" cy="0"/>
+          <a:chOff x="0" y="0"/>
+          <a:chExt cx="0" cy="0"/>
+        </a:xfrm>
+      </p:grpSpPr>
+      <p:pic>
+        <p:nvPicPr>
+          <p:cNvPr id="4" name="Content Placeholder 3"/>
+          <p:cNvPicPr>
+            <a:picLocks noGrp="1" noChangeAspect="1"/>
+          </p:cNvPicPr>
+          <p:nvPr>
+            <p:ph idx="1"/>
+          </p:nvPr>
+        </p:nvPicPr>
+        <p:blipFill>
+          <a:blip r:embed="rId2" cstate="print">
+            <a:extLst>
+              <a:ext uri="{28A0092B-C50C-407E-A947-70E740481C1C}">
+                <a14:useLocalDpi xmlns:a14="http://schemas.microsoft.com/office/drawing/2010/main" val="0"/>
+              </a:ext>
+            </a:extLst>
+          </a:blip>
+          <a:stretch>
+            <a:fillRect/>
+          </a:stretch>
+        </p:blipFill>
+        <p:spPr>
+          <a:xfrm>
+            <a:off x="0" y="0"/>
+            <a:ext cx="9180512" cy="6858000"/>
+          </a:xfrm>
+        </p:spPr>
+      </p:pic>
+      <p:pic>
+        <p:nvPicPr>
+          <p:cNvPr id="6" name="Picture 5"/>
+          <p:cNvPicPr>
+            <a:picLocks noChangeAspect="1"/>
+          </p:cNvPicPr>
+          <p:nvPr/>
+        </p:nvPicPr>
+        <p:blipFill>
+          <a:blip r:embed="rId3" cstate="print">
+            <a:extLst>
+              <a:ext uri="{28A0092B-C50C-407E-A947-70E740481C1C}">
+                <a14:useLocalDpi xmlns:a14="http://schemas.microsoft.com/office/drawing/2010/main" val="0"/>
+              </a:ext>
+            </a:extLst>
+          </a:blip>
+          <a:stretch>
+            <a:fillRect/>
+          </a:stretch>
+        </p:blipFill>
+        <p:spPr>
+          <a:xfrm>
+            <a:off x="72008" y="6309320"/>
+            <a:ext cx="2411760" cy="346691"/>
+          </a:xfrm>
+          <a:prstGeom prst="rect">
+            <a:avLst/>
+          </a:prstGeom>
+        </p:spPr>
+      </p:pic>
+      <p:sp>
+        <p:nvSpPr>
+          <p:cNvPr id="2" name="TextBox 1"/>
+          <p:cNvSpPr txBox="1"/>
+          <p:nvPr/>
+        </p:nvSpPr>
+        <p:spPr>
+          <a:xfrm>
+            <a:off x="1835696" y="2708920"/>
+            <a:ext cx="5651034" cy="1200329"/>
+          </a:xfrm>
+          <a:prstGeom prst="rect">
+            <a:avLst/>
+          </a:prstGeom>
+          <a:noFill/>
+        </p:spPr>
+        <p:txBody>
+          <a:bodyPr wrap="none" rtlCol="0">
+            <a:spAutoFit/>
+          </a:bodyPr>
+          <a:lstStyle/>
+          <a:p>
+            <a:pPr algn="ctr"/>
+            <a:r>
+              <a:rPr lang="en-US" sz="7200" dirty="0">
+                <a:solidFill>
+                  <a:srgbClr val="0060AA"/>
+                </a:solidFill>
+                <a:latin typeface="Garamond" pitchFamily="18" charset="0"/>
+              </a:rPr>
+              <a:t>THANK</a:t>
+            </a:r>
+            <a:r>
+              <a:rPr lang="en-US" sz="7200" dirty="0">
+                <a:latin typeface="Garamond" pitchFamily="18" charset="0"/>
+              </a:rPr>
+              <a:t> </a:t>
+            </a:r>
+            <a:r>
+              <a:rPr lang="en-US" sz="7200" dirty="0">
+                <a:solidFill>
+                  <a:srgbClr val="E31E24"/>
+                </a:solidFill>
+                <a:latin typeface="Garamond" pitchFamily="18" charset="0"/>
+              </a:rPr>
+              <a:t>YOU</a:t>
+            </a:r>
+            <a:endParaRPr lang="en-IN" sz="7200" dirty="0">
+              <a:latin typeface="Garamond" pitchFamily="18" charset="0"/>
+            </a:endParaRPr>
+          </a:p>
+        </p:txBody>
+      </p:sp>
+    </p:spTree>
+    <p:extLst>
+      <p:ext uri="{BB962C8B-B14F-4D97-AF65-F5344CB8AC3E}">
+        <p14:creationId xmlns:p14="http://schemas.microsoft.com/office/powerpoint/2010/main" val="3858198192"/>
+      </p:ext>
+    </p:extLst>
+  </p:cSld>
+  <p:clrMapOvr>
+    <a:masterClrMapping/>
+  </p:clrMapOvr>
+</p:sld>
+</file>
+
+<file path=ppt/slides/slide2.xml><?xml version="1.0" encoding="utf-8"?>
+<p:sld xmlns:a="http://schemas.openxmlformats.org/drawingml/2006/main" xmlns:r="http://schemas.openxmlformats.org/officeDocument/2006/relationships" xmlns:p="http://schemas.openxmlformats.org/presentationml/2006/main">
+  <p:cSld>
+    <p:spTree>
+      <p:nvGrpSpPr>
+        <p:cNvPr id="1" name=""/>
+        <p:cNvGrpSpPr/>
+        <p:nvPr/>
+      </p:nvGrpSpPr>
+      <p:grpSpPr>
+        <a:xfrm>
+          <a:off x="0" y="0"/>
+          <a:ext cx="0" cy="0"/>
+          <a:chOff x="0" y="0"/>
+          <a:chExt cx="0" cy="0"/>
+        </a:xfrm>
+      </p:grpSpPr>
+      <p:pic>
+        <p:nvPicPr>
+          <p:cNvPr id="4" name="Content Placeholder 3"/>
+          <p:cNvPicPr>
+            <a:picLocks noGrp="1" noChangeAspect="1"/>
+          </p:cNvPicPr>
+          <p:nvPr>
+            <p:ph idx="1"/>
+          </p:nvPr>
+        </p:nvPicPr>
+        <p:blipFill>
+          <a:blip r:embed="rId3" cstate="print">
+            <a:extLst>
+              <a:ext uri="{28A0092B-C50C-407E-A947-70E740481C1C}">
+                <a14:useLocalDpi xmlns:a14="http://schemas.microsoft.com/office/drawing/2010/main" val="0"/>
+              </a:ext>
+            </a:extLst>
+          </a:blip>
+          <a:stretch>
+            <a:fillRect/>
+          </a:stretch>
+        </p:blipFill>
+        <p:spPr>
+          <a:xfrm>
+            <a:off x="-54260" y="-27384"/>
+            <a:ext cx="9180512" cy="6885384"/>
+          </a:xfrm>
+        </p:spPr>
+      </p:pic>
+      <p:cxnSp>
+        <p:nvCxnSpPr>
+          <p:cNvPr id="11" name="Straight Connector 10"/>
+          <p:cNvCxnSpPr/>
+          <p:nvPr/>
+        </p:nvCxnSpPr>
+        <p:spPr>
+          <a:xfrm>
+            <a:off x="1565174" y="2204864"/>
+            <a:ext cx="6306546" cy="0"/>
+          </a:xfrm>
+          <a:prstGeom prst="line">
+            <a:avLst/>
+          </a:prstGeom>
+        </p:spPr>
+        <p:style>
+          <a:lnRef idx="1">
+            <a:schemeClr val="accent1"/>
+          </a:lnRef>
+          <a:fillRef idx="0">
+            <a:schemeClr val="accent1"/>
+          </a:fillRef>
+          <a:effectRef idx="0">
+            <a:schemeClr val="accent1"/>
+          </a:effectRef>
+          <a:fontRef idx="minor">
+            <a:schemeClr val="tx1"/>
+          </a:fontRef>
+        </p:style>
+      </p:cxnSp>
+      <p:pic>
+        <p:nvPicPr>
+          <p:cNvPr id="12" name="Picture 11"/>
+          <p:cNvPicPr>
+            <a:picLocks noChangeAspect="1"/>
+          </p:cNvPicPr>
+          <p:nvPr/>
+        </p:nvPicPr>
+        <p:blipFill>
+          <a:blip r:embed="rId4" cstate="print">
+            <a:extLst>
+              <a:ext uri="{28A0092B-C50C-407E-A947-70E740481C1C}">
+                <a14:useLocalDpi xmlns:a14="http://schemas.microsoft.com/office/drawing/2010/main" val="0"/>
+              </a:ext>
+            </a:extLst>
+          </a:blip>
+          <a:stretch>
+            <a:fillRect/>
+          </a:stretch>
+        </p:blipFill>
+        <p:spPr>
+          <a:xfrm>
+            <a:off x="1370382" y="150274"/>
+            <a:ext cx="6396065" cy="920873"/>
+          </a:xfrm>
+          <a:prstGeom prst="rect">
+            <a:avLst/>
+          </a:prstGeom>
+        </p:spPr>
+      </p:pic>
+      <p:sp>
+        <p:nvSpPr>
+          <p:cNvPr id="13" name="TextBox 12"/>
+          <p:cNvSpPr txBox="1"/>
+          <p:nvPr/>
+        </p:nvSpPr>
+        <p:spPr>
+          <a:xfrm>
+            <a:off x="222061" y="2367609"/>
+            <a:ext cx="8784976" cy="830997"/>
+          </a:xfrm>
+          <a:prstGeom prst="rect">
+            <a:avLst/>
+          </a:prstGeom>
+          <a:noFill/>
+        </p:spPr>
+        <p:txBody>
+          <a:bodyPr wrap="square" rtlCol="0">
+            <a:spAutoFit/>
+          </a:bodyPr>
+          <a:lstStyle/>
+          <a:p>
+            <a:pPr lvl="0" algn="ctr">
+              <a:buSzPct val="25000"/>
+            </a:pPr>
+            <a:r>
+              <a:rPr lang="en-IN" sz="2400" b="1" dirty="0">
+                <a:solidFill>
+                  <a:srgbClr val="0070C0"/>
+                </a:solidFill>
+                <a:ea typeface="Cambria" panose="02040503050406030204" pitchFamily="18" charset="0"/>
+                <a:cs typeface="Times New Roman" panose="02020603050405020304" pitchFamily="18" charset="0"/>
+                <a:sym typeface="Arial"/>
+              </a:rPr>
+              <a:t>Pre-Final Year Project Progress</a:t>
+            </a:r>
+          </a:p>
+          <a:p>
+            <a:pPr lvl="0" algn="ctr">
+              <a:buSzPct val="25000"/>
+            </a:pPr>
+            <a:r>
+              <a:rPr lang="en-IN" sz="2400" b="1" dirty="0">
+                <a:solidFill>
+                  <a:srgbClr val="0070C0"/>
+                </a:solidFill>
+                <a:ea typeface="Cambria" panose="02040503050406030204" pitchFamily="18" charset="0"/>
+                <a:cs typeface="Times New Roman" panose="02020603050405020304" pitchFamily="18" charset="0"/>
+                <a:sym typeface="Arial"/>
+              </a:rPr>
+              <a:t>Submitted by</a:t>
+            </a:r>
+          </a:p>
+        </p:txBody>
+      </p:sp>
+      <p:graphicFrame>
+        <p:nvGraphicFramePr>
+          <p:cNvPr id="2" name="Table 2">
+            <a:extLst>
+              <a:ext uri="{FF2B5EF4-FFF2-40B4-BE49-F238E27FC236}">
+                <a16:creationId xmlns:a16="http://schemas.microsoft.com/office/drawing/2014/main" id="{232DFD41-0025-28B4-FE3B-A54FAEE28F42}"/>
+              </a:ext>
+            </a:extLst>
+          </p:cNvPr>
+          <p:cNvGraphicFramePr>
+            <a:graphicFrameLocks noGrp="1"/>
+          </p:cNvGraphicFramePr>
+          <p:nvPr>
+            <p:extLst>
+              <p:ext uri="{D42A27DB-BD31-4B8C-83A1-F6EECF244321}">
+                <p14:modId xmlns:p14="http://schemas.microsoft.com/office/powerpoint/2010/main" val="3995416611"/>
+              </p:ext>
+            </p:extLst>
+          </p:nvPr>
+        </p:nvGraphicFramePr>
+        <p:xfrm>
+          <a:off x="1566548" y="3240947"/>
+          <a:ext cx="6305172" cy="2194560"/>
+        </p:xfrm>
+        <a:graphic>
+          <a:graphicData uri="http://schemas.openxmlformats.org/drawingml/2006/table">
+            <a:tbl>
+              <a:tblPr firstRow="1" bandRow="1">
+                <a:tableStyleId>{5C22544A-7EE6-4342-B048-85BDC9FD1C3A}</a:tableStyleId>
+              </a:tblPr>
+              <a:tblGrid>
+                <a:gridCol w="3152586">
+                  <a:extLst>
+                    <a:ext uri="{9D8B030D-6E8A-4147-A177-3AD203B41FA5}">
+                      <a16:colId xmlns:a16="http://schemas.microsoft.com/office/drawing/2014/main" val="3537270469"/>
+                    </a:ext>
+                  </a:extLst>
+                </a:gridCol>
+                <a:gridCol w="3152586">
+                  <a:extLst>
+                    <a:ext uri="{9D8B030D-6E8A-4147-A177-3AD203B41FA5}">
+                      <a16:colId xmlns:a16="http://schemas.microsoft.com/office/drawing/2014/main" val="3305024946"/>
+                    </a:ext>
+                  </a:extLst>
+                </a:gridCol>
+              </a:tblGrid>
+              <a:tr h="365760">
+                <a:tc>
+                  <a:txBody>
+                    <a:bodyPr/>
+                    <a:lstStyle/>
+                    <a:p>
+                      <a:pPr algn="ctr"/>
+                      <a:r>
+                        <a:rPr lang="en-US" dirty="0"/>
+                        <a:t>ROLL</a:t>
+                      </a:r>
+                    </a:p>
+                  </a:txBody>
+                  <a:tcPr anchor="ctr"/>
+                </a:tc>
+                <a:tc>
+                  <a:txBody>
+                    <a:bodyPr/>
+                    <a:lstStyle/>
+                    <a:p>
+                      <a:pPr algn="ctr"/>
+                      <a:r>
+                        <a:rPr lang="en-US" dirty="0"/>
+                        <a:t>NAME</a:t>
+                      </a:r>
+                    </a:p>
+                  </a:txBody>
+                  <a:tcPr/>
+                </a:tc>
+                <a:extLst>
+                  <a:ext uri="{0D108BD9-81ED-4DB2-BD59-A6C34878D82A}">
+                    <a16:rowId xmlns:a16="http://schemas.microsoft.com/office/drawing/2014/main" val="1765898331"/>
+                  </a:ext>
+                </a:extLst>
+              </a:tr>
+              <a:tr h="365760">
+                <a:tc>
+                  <a:txBody>
+                    <a:bodyPr/>
+                    <a:lstStyle/>
+                    <a:p>
+                      <a:pPr marL="0" marR="0" lvl="0" indent="0" algn="ctr" defTabSz="914400" rtl="0" eaLnBrk="1" fontAlgn="auto" latinLnBrk="0" hangingPunct="1">
+                        <a:lnSpc>
+                          <a:spcPct val="100000"/>
+                        </a:lnSpc>
+                        <a:spcBef>
+                          <a:spcPts val="0"/>
+                        </a:spcBef>
+                        <a:spcAft>
+                          <a:spcPts val="0"/>
+                        </a:spcAft>
+                        <a:buClrTx/>
+                        <a:buSzTx/>
+                        <a:buFontTx/>
+                        <a:buNone/>
+                        <a:tabLst/>
+                        <a:defRPr/>
+                      </a:pPr>
+                      <a:r>
+                        <a:rPr lang="en-US" dirty="0"/>
+                        <a:t>2401720003</a:t>
+                      </a:r>
+                    </a:p>
+                  </a:txBody>
+                  <a:tcPr anchor="ctr"/>
+                </a:tc>
+                <a:tc>
+                  <a:txBody>
+                    <a:bodyPr/>
+                    <a:lstStyle/>
+                    <a:p>
+                      <a:pPr algn="ctr"/>
+                      <a:r>
+                        <a:rPr lang="en-US" dirty="0"/>
+                        <a:t>Sidharth Krishna S</a:t>
+                      </a:r>
+                    </a:p>
+                  </a:txBody>
+                  <a:tcPr anchor="ctr"/>
+                </a:tc>
+                <a:extLst>
+                  <a:ext uri="{0D108BD9-81ED-4DB2-BD59-A6C34878D82A}">
+                    <a16:rowId xmlns:a16="http://schemas.microsoft.com/office/drawing/2014/main" val="4176101868"/>
+                  </a:ext>
+                </a:extLst>
+              </a:tr>
+              <a:tr h="365760">
+                <a:tc>
+                  <a:txBody>
+                    <a:bodyPr/>
+                    <a:lstStyle/>
+                    <a:p>
+                      <a:pPr algn="ctr"/>
+                      <a:r>
+                        <a:rPr lang="en-IN" sz="1800" b="0" i="0" kern="1200" dirty="0">
+                          <a:solidFill>
+                            <a:schemeClr val="dk1"/>
+                          </a:solidFill>
+                          <a:effectLst/>
+                          <a:latin typeface="+mn-lt"/>
+                          <a:ea typeface="+mn-ea"/>
+                          <a:cs typeface="+mn-cs"/>
+                        </a:rPr>
+                        <a:t>2401720012</a:t>
+                      </a:r>
+                    </a:p>
+                  </a:txBody>
+                  <a:tcPr anchor="ctr"/>
+                </a:tc>
+                <a:tc>
+                  <a:txBody>
+                    <a:bodyPr/>
+                    <a:lstStyle/>
+                    <a:p>
+                      <a:pPr marL="0" marR="0" lvl="0" indent="0" algn="ctr" defTabSz="914400" rtl="0" eaLnBrk="1" fontAlgn="auto" latinLnBrk="0" hangingPunct="1">
+                        <a:lnSpc>
+                          <a:spcPct val="100000"/>
+                        </a:lnSpc>
+                        <a:spcBef>
+                          <a:spcPts val="0"/>
+                        </a:spcBef>
+                        <a:spcAft>
+                          <a:spcPts val="0"/>
+                        </a:spcAft>
+                        <a:buClrTx/>
+                        <a:buSzTx/>
+                        <a:buFontTx/>
+                        <a:buNone/>
+                        <a:tabLst/>
+                        <a:defRPr/>
+                      </a:pPr>
+                      <a:r>
+                        <a:rPr lang="en-IN" sz="1800" b="0" i="0" kern="1200" dirty="0">
+                          <a:solidFill>
+                            <a:schemeClr val="dk1"/>
+                          </a:solidFill>
+                          <a:effectLst/>
+                          <a:latin typeface="+mn-lt"/>
+                          <a:ea typeface="+mn-ea"/>
+                          <a:cs typeface="+mn-cs"/>
+                        </a:rPr>
+                        <a:t>Ankit Kumar Yadav</a:t>
+                      </a:r>
+                      <a:endParaRPr lang="en-US" sz="1800" b="0" i="0" kern="1200" dirty="0">
+                        <a:solidFill>
+                          <a:schemeClr val="dk1"/>
+                        </a:solidFill>
+                        <a:effectLst/>
+                        <a:latin typeface="+mn-lt"/>
+                        <a:ea typeface="+mn-ea"/>
+                        <a:cs typeface="+mn-cs"/>
+                      </a:endParaRPr>
+                    </a:p>
+                  </a:txBody>
+                  <a:tcPr anchor="ctr"/>
+                </a:tc>
+                <a:extLst>
+                  <a:ext uri="{0D108BD9-81ED-4DB2-BD59-A6C34878D82A}">
+                    <a16:rowId xmlns:a16="http://schemas.microsoft.com/office/drawing/2014/main" val="1958206324"/>
+                  </a:ext>
+                </a:extLst>
+              </a:tr>
+              <a:tr h="365760">
+                <a:tc>
+                  <a:txBody>
+                    <a:bodyPr/>
+                    <a:lstStyle/>
+                    <a:p>
+                      <a:pPr algn="ctr"/>
+                      <a:r>
+                        <a:rPr lang="en-IN" sz="1800" b="0" i="0" kern="1200" dirty="0">
+                          <a:solidFill>
+                            <a:schemeClr val="dk1"/>
+                          </a:solidFill>
+                          <a:effectLst/>
+                          <a:latin typeface="+mn-lt"/>
+                          <a:ea typeface="+mn-ea"/>
+                          <a:cs typeface="+mn-cs"/>
+                        </a:rPr>
+                        <a:t>2401840007</a:t>
+                      </a:r>
+                    </a:p>
+                  </a:txBody>
+                  <a:tcPr anchor="ctr"/>
+                </a:tc>
+                <a:tc>
+                  <a:txBody>
+                    <a:bodyPr/>
+                    <a:lstStyle/>
+                    <a:p>
+                      <a:pPr marL="0" marR="0" lvl="0" indent="0" algn="ctr" defTabSz="914400" rtl="0" eaLnBrk="1" fontAlgn="auto" latinLnBrk="0" hangingPunct="1">
+                        <a:lnSpc>
+                          <a:spcPct val="100000"/>
+                        </a:lnSpc>
+                        <a:spcBef>
+                          <a:spcPts val="0"/>
+                        </a:spcBef>
+                        <a:spcAft>
+                          <a:spcPts val="0"/>
+                        </a:spcAft>
+                        <a:buClrTx/>
+                        <a:buSzTx/>
+                        <a:buFontTx/>
+                        <a:buNone/>
+                        <a:tabLst/>
+                        <a:defRPr/>
+                      </a:pPr>
+                      <a:r>
+                        <a:rPr lang="en-IN" sz="1800" b="0" i="0" kern="1200" dirty="0">
+                          <a:solidFill>
+                            <a:schemeClr val="dk1"/>
+                          </a:solidFill>
+                          <a:effectLst/>
+                          <a:latin typeface="+mn-lt"/>
+                          <a:ea typeface="+mn-ea"/>
+                          <a:cs typeface="+mn-cs"/>
+                        </a:rPr>
+                        <a:t>Palak Kashyap</a:t>
+                      </a:r>
+                    </a:p>
+                  </a:txBody>
+                  <a:tcPr anchor="ctr"/>
+                </a:tc>
+                <a:extLst>
+                  <a:ext uri="{0D108BD9-81ED-4DB2-BD59-A6C34878D82A}">
+                    <a16:rowId xmlns:a16="http://schemas.microsoft.com/office/drawing/2014/main" val="2822279017"/>
+                  </a:ext>
+                </a:extLst>
+              </a:tr>
+              <a:tr h="365760">
+                <a:tc>
+                  <a:txBody>
+                    <a:bodyPr/>
+                    <a:lstStyle/>
+                    <a:p>
+                      <a:pPr algn="ctr"/>
+                      <a:r>
+                        <a:rPr lang="en-IN" sz="1800" b="0" i="0" kern="1200" dirty="0">
+                          <a:solidFill>
+                            <a:schemeClr val="dk1"/>
+                          </a:solidFill>
+                          <a:effectLst/>
+                          <a:latin typeface="+mn-lt"/>
+                          <a:ea typeface="+mn-ea"/>
+                          <a:cs typeface="+mn-cs"/>
+                        </a:rPr>
+                        <a:t>2401720013</a:t>
+                      </a:r>
+                    </a:p>
+                  </a:txBody>
+                  <a:tcPr anchor="ctr"/>
+                </a:tc>
+                <a:tc>
+                  <a:txBody>
+                    <a:bodyPr/>
+                    <a:lstStyle/>
+                    <a:p>
+                      <a:pPr marL="0" marR="0" lvl="0" indent="0" algn="ctr" defTabSz="914400" rtl="0" eaLnBrk="1" fontAlgn="auto" latinLnBrk="0" hangingPunct="1">
+                        <a:lnSpc>
+                          <a:spcPct val="100000"/>
+                        </a:lnSpc>
+                        <a:spcBef>
+                          <a:spcPts val="0"/>
+                        </a:spcBef>
+                        <a:spcAft>
+                          <a:spcPts val="0"/>
+                        </a:spcAft>
+                        <a:buClrTx/>
+                        <a:buSzTx/>
+                        <a:buFontTx/>
+                        <a:buNone/>
+                        <a:tabLst/>
+                        <a:defRPr/>
+                      </a:pPr>
+                      <a:r>
+                        <a:rPr lang="en-IN" sz="1800" b="0" i="0" kern="1200" dirty="0">
+                          <a:solidFill>
+                            <a:schemeClr val="dk1"/>
+                          </a:solidFill>
+                          <a:effectLst/>
+                          <a:latin typeface="+mn-lt"/>
+                          <a:ea typeface="+mn-ea"/>
+                          <a:cs typeface="+mn-cs"/>
+                        </a:rPr>
+                        <a:t>Diwakar</a:t>
+                      </a:r>
+                    </a:p>
+                  </a:txBody>
+                  <a:tcPr anchor="ctr"/>
+                </a:tc>
+                <a:extLst>
+                  <a:ext uri="{0D108BD9-81ED-4DB2-BD59-A6C34878D82A}">
+                    <a16:rowId xmlns:a16="http://schemas.microsoft.com/office/drawing/2014/main" val="673309361"/>
+                  </a:ext>
+                </a:extLst>
+              </a:tr>
+              <a:tr h="365760">
+                <a:tc>
+                  <a:txBody>
+                    <a:bodyPr/>
+                    <a:lstStyle/>
+                    <a:p>
+                      <a:pPr marL="0" marR="0" lvl="0" indent="0" algn="ctr" defTabSz="914400" rtl="0" eaLnBrk="1" fontAlgn="auto" latinLnBrk="0" hangingPunct="1">
+                        <a:lnSpc>
+                          <a:spcPct val="100000"/>
+                        </a:lnSpc>
+                        <a:spcBef>
+                          <a:spcPts val="0"/>
+                        </a:spcBef>
+                        <a:spcAft>
+                          <a:spcPts val="0"/>
+                        </a:spcAft>
+                        <a:buClrTx/>
+                        <a:buSzTx/>
+                        <a:buFontTx/>
+                        <a:buNone/>
+                        <a:tabLst/>
+                        <a:defRPr/>
+                      </a:pPr>
+                      <a:r>
+                        <a:rPr lang="en-IN" sz="1800" b="0" i="0" kern="1200" dirty="0">
+                          <a:solidFill>
+                            <a:schemeClr val="dk1"/>
+                          </a:solidFill>
+                          <a:effectLst/>
+                          <a:latin typeface="+mn-lt"/>
+                          <a:ea typeface="+mn-ea"/>
+                          <a:cs typeface="+mn-cs"/>
+                        </a:rPr>
+                        <a:t>2401720001</a:t>
+                      </a:r>
+                    </a:p>
+                  </a:txBody>
+                  <a:tcPr anchor="ctr"/>
+                </a:tc>
+                <a:tc>
+                  <a:txBody>
+                    <a:bodyPr/>
+                    <a:lstStyle/>
+                    <a:p>
+                      <a:pPr marL="0" marR="0" lvl="0" indent="0" algn="ctr" defTabSz="914400" rtl="0" eaLnBrk="1" fontAlgn="auto" latinLnBrk="0" hangingPunct="1">
+                        <a:lnSpc>
+                          <a:spcPct val="100000"/>
+                        </a:lnSpc>
+                        <a:spcBef>
+                          <a:spcPts val="0"/>
+                        </a:spcBef>
+                        <a:spcAft>
+                          <a:spcPts val="0"/>
+                        </a:spcAft>
+                        <a:buClrTx/>
+                        <a:buSzTx/>
+                        <a:buFontTx/>
+                        <a:buNone/>
+                        <a:tabLst/>
+                        <a:defRPr/>
+                      </a:pPr>
+                      <a:r>
+                        <a:rPr lang="en-US" sz="1800" b="0" i="0" kern="1200" dirty="0" err="1">
+                          <a:solidFill>
+                            <a:schemeClr val="dk1"/>
+                          </a:solidFill>
+                          <a:effectLst/>
+                          <a:latin typeface="+mn-lt"/>
+                          <a:ea typeface="+mn-ea"/>
+                          <a:cs typeface="+mn-cs"/>
+                        </a:rPr>
+                        <a:t>Devasya</a:t>
+                      </a:r>
+                      <a:endParaRPr lang="en-IN" sz="1800" b="0" i="0" kern="1200" dirty="0">
+                        <a:solidFill>
+                          <a:schemeClr val="dk1"/>
+                        </a:solidFill>
+                        <a:effectLst/>
+                        <a:latin typeface="+mn-lt"/>
+                        <a:ea typeface="+mn-ea"/>
+                        <a:cs typeface="+mn-cs"/>
+                      </a:endParaRPr>
+                    </a:p>
+                  </a:txBody>
+                  <a:tcPr anchor="ctr"/>
+                </a:tc>
+                <a:extLst>
+                  <a:ext uri="{0D108BD9-81ED-4DB2-BD59-A6C34878D82A}">
+                    <a16:rowId xmlns:a16="http://schemas.microsoft.com/office/drawing/2014/main" val="3513260185"/>
+                  </a:ext>
+                </a:extLst>
+              </a:tr>
+            </a:tbl>
+          </a:graphicData>
+        </a:graphic>
+      </p:graphicFrame>
+      <p:sp>
+        <p:nvSpPr>
+          <p:cNvPr id="5" name="TextBox 4">
+            <a:extLst>
+              <a:ext uri="{FF2B5EF4-FFF2-40B4-BE49-F238E27FC236}">
+                <a16:creationId xmlns:a16="http://schemas.microsoft.com/office/drawing/2014/main" id="{3DF18845-4075-32C5-8F4A-4F40F86E837F}"/>
+              </a:ext>
+            </a:extLst>
+          </p:cNvPr>
+          <p:cNvSpPr txBox="1"/>
+          <p:nvPr/>
+        </p:nvSpPr>
+        <p:spPr>
+          <a:xfrm>
+            <a:off x="0" y="1372508"/>
+            <a:ext cx="8820472" cy="707886"/>
+          </a:xfrm>
+          <a:prstGeom prst="rect">
+            <a:avLst/>
+          </a:prstGeom>
+          <a:noFill/>
+        </p:spPr>
+        <p:txBody>
+          <a:bodyPr wrap="square">
+            <a:spAutoFit/>
+          </a:bodyPr>
+          <a:lstStyle/>
+          <a:p>
+            <a:pPr lvl="0" algn="ctr">
+              <a:buSzPct val="25000"/>
+            </a:pPr>
+            <a:r>
+              <a:rPr lang="en-US" sz="4000" b="1" dirty="0">
+                <a:solidFill>
+                  <a:srgbClr val="C00000"/>
+                </a:solidFill>
+                <a:ea typeface="Cambria" panose="02040503050406030204" pitchFamily="18" charset="0"/>
+                <a:cs typeface="Times New Roman" panose="02020603050405020304" pitchFamily="18" charset="0"/>
+                <a:sym typeface="Arial"/>
+              </a:rPr>
+              <a:t>Distributed Rate Limiter System</a:t>
+            </a:r>
+            <a:endParaRPr lang="en-IN" sz="4000" b="1" dirty="0">
+              <a:solidFill>
+                <a:srgbClr val="C00000"/>
+              </a:solidFill>
+              <a:ea typeface="Cambria" panose="02040503050406030204" pitchFamily="18" charset="0"/>
+              <a:cs typeface="Times New Roman" panose="02020603050405020304" pitchFamily="18" charset="0"/>
+              <a:sym typeface="Arial"/>
+            </a:endParaRPr>
+          </a:p>
+        </p:txBody>
+      </p:sp>
+      <p:sp>
+        <p:nvSpPr>
+          <p:cNvPr id="8" name="TextBox 7">
+            <a:extLst>
+              <a:ext uri="{FF2B5EF4-FFF2-40B4-BE49-F238E27FC236}">
+                <a16:creationId xmlns:a16="http://schemas.microsoft.com/office/drawing/2014/main" id="{40D4C745-33B7-0116-E20F-11A7F0DFD46F}"/>
+              </a:ext>
+            </a:extLst>
+          </p:cNvPr>
+          <p:cNvSpPr txBox="1"/>
+          <p:nvPr/>
+        </p:nvSpPr>
+        <p:spPr>
+          <a:xfrm>
+            <a:off x="236440" y="5733256"/>
+            <a:ext cx="8584032" cy="369332"/>
+          </a:xfrm>
+          <a:prstGeom prst="rect">
+            <a:avLst/>
+          </a:prstGeom>
+          <a:noFill/>
+        </p:spPr>
+        <p:txBody>
+          <a:bodyPr wrap="square">
+            <a:spAutoFit/>
+          </a:bodyPr>
+          <a:lstStyle/>
+          <a:p>
+            <a:pPr lvl="0">
+              <a:buSzPct val="25000"/>
+            </a:pPr>
+            <a:r>
+              <a:rPr lang="en-IN" b="1" dirty="0">
+                <a:solidFill>
+                  <a:srgbClr val="006CB4"/>
+                </a:solidFill>
+                <a:ea typeface="Cambria" panose="02040503050406030204" pitchFamily="18" charset="0"/>
+                <a:cs typeface="Times New Roman" panose="02020603050405020304" pitchFamily="18" charset="0"/>
+                <a:sym typeface="Arial"/>
+              </a:rPr>
+              <a:t>Faculty Mentor: </a:t>
+            </a:r>
+            <a:r>
+              <a:rPr lang="en-IN" dirty="0">
+                <a:solidFill>
+                  <a:srgbClr val="006CB4"/>
+                </a:solidFill>
+              </a:rPr>
+              <a:t>Dr. Ravinder Beniwal</a:t>
+            </a:r>
+            <a:endParaRPr lang="en-IN" sz="1800" b="1" dirty="0">
+              <a:solidFill>
+                <a:srgbClr val="006CB4"/>
+              </a:solidFill>
+              <a:ea typeface="Cambria" panose="02040503050406030204" pitchFamily="18" charset="0"/>
+              <a:cs typeface="Times New Roman" panose="02020603050405020304" pitchFamily="18" charset="0"/>
+              <a:sym typeface="Arial"/>
+            </a:endParaRPr>
+          </a:p>
+        </p:txBody>
+      </p:sp>
+    </p:spTree>
+    <p:extLst>
+      <p:ext uri="{BB962C8B-B14F-4D97-AF65-F5344CB8AC3E}">
+        <p14:creationId xmlns:p14="http://schemas.microsoft.com/office/powerpoint/2010/main" val="4142536426"/>
+      </p:ext>
+    </p:extLst>
+  </p:cSld>
+  <p:clrMapOvr>
+    <a:masterClrMapping/>
+  </p:clrMapOvr>
+</p:sld>
+</file>
+
+<file path=ppt/slides/slide3.xml><?xml version="1.0" encoding="utf-8"?>
+<p:sld xmlns:a="http://schemas.openxmlformats.org/drawingml/2006/main" xmlns:r="http://schemas.openxmlformats.org/officeDocument/2006/relationships" xmlns:p="http://schemas.openxmlformats.org/presentationml/2006/main">
+  <p:cSld>
+    <p:spTree>
+      <p:nvGrpSpPr>
+        <p:cNvPr id="1" name=""/>
+        <p:cNvGrpSpPr/>
+        <p:nvPr/>
+      </p:nvGrpSpPr>
+      <p:grpSpPr>
+        <a:xfrm>
+          <a:off x="0" y="0"/>
+          <a:ext cx="0" cy="0"/>
+          <a:chOff x="0" y="0"/>
+          <a:chExt cx="0" cy="0"/>
+        </a:xfrm>
+      </p:grpSpPr>
+      <p:pic>
+        <p:nvPicPr>
+          <p:cNvPr id="4" name="Content Placeholder 3"/>
+          <p:cNvPicPr>
+            <a:picLocks noGrp="1" noChangeAspect="1"/>
+          </p:cNvPicPr>
+          <p:nvPr>
+            <p:ph idx="1"/>
+          </p:nvPr>
+        </p:nvPicPr>
+        <p:blipFill>
+          <a:blip r:embed="rId3" cstate="print">
+            <a:extLst>
+              <a:ext uri="{28A0092B-C50C-407E-A947-70E740481C1C}">
+                <a14:useLocalDpi xmlns:a14="http://schemas.microsoft.com/office/drawing/2010/main" val="0"/>
+              </a:ext>
+            </a:extLst>
+          </a:blip>
+          <a:stretch>
+            <a:fillRect/>
+          </a:stretch>
+        </p:blipFill>
+        <p:spPr>
+          <a:xfrm>
+            <a:off x="1" y="0"/>
+            <a:ext cx="9180512" cy="6885384"/>
+          </a:xfrm>
+        </p:spPr>
+      </p:pic>
+      <p:sp>
+        <p:nvSpPr>
+          <p:cNvPr id="5" name="Rectangle 1"/>
+          <p:cNvSpPr>
+            <a:spLocks noChangeArrowheads="1"/>
+          </p:cNvSpPr>
+          <p:nvPr/>
+        </p:nvSpPr>
+        <p:spPr bwMode="auto">
+          <a:xfrm>
+            <a:off x="179512" y="151593"/>
+            <a:ext cx="4153701" cy="584775"/>
+          </a:xfrm>
+          <a:prstGeom prst="rect">
+            <a:avLst/>
+          </a:prstGeom>
+          <a:noFill/>
+          <a:ln>
+            <a:noFill/>
+          </a:ln>
+          <a:effectLst/>
+          <a:extLst>
+            <a:ext uri="{909E8E84-426E-40DD-AFC4-6F175D3DCCD1}">
+              <a14:hiddenFill xmlns:a14="http://schemas.microsoft.com/office/drawing/2010/main">
+                <a:solidFill>
+                  <a:schemeClr val="accent1"/>
+                </a:solidFill>
+              </a14:hiddenFill>
+            </a:ext>
+            <a:ext uri="{91240B29-F687-4F45-9708-019B960494DF}">
+              <a14:hiddenLine xmlns:a14="http://schemas.microsoft.com/office/drawing/2010/main" w="9525">
+                <a:solidFill>
+                  <a:schemeClr val="tx1"/>
+                </a:solidFill>
+                <a:miter lim="800000"/>
+                <a:headEnd/>
+                <a:tailEnd/>
+              </a14:hiddenLine>
+            </a:ext>
+            <a:ext uri="{AF507438-7753-43E0-B8FC-AC1667EBCBE1}">
+              <a14:hiddenEffects xmlns:a14="http://schemas.microsoft.com/office/drawing/2010/main">
+                <a:effectLst>
+                  <a:outerShdw dist="35921" dir="2700000" algn="ctr" rotWithShape="0">
+                    <a:schemeClr val="bg2"/>
+                  </a:outerShdw>
+                </a:effectLst>
+              </a14:hiddenEffects>
+            </a:ext>
+          </a:extLst>
+        </p:spPr>
+        <p:txBody>
+          <a:bodyPr vert="horz" wrap="none" lIns="91440" tIns="45720" rIns="91440" bIns="45720" numCol="1" anchor="ctr" anchorCtr="0" compatLnSpc="1">
+            <a:prstTxWarp prst="textNoShape">
+              <a:avLst/>
+            </a:prstTxWarp>
+            <a:spAutoFit/>
+          </a:bodyPr>
+          <a:lstStyle/>
+          <a:p>
+            <a:pPr lvl="0">
+              <a:buSzPct val="25000"/>
+            </a:pPr>
+            <a:r>
+              <a:rPr lang="en-US" sz="3200" b="1" kern="100" dirty="0">
+                <a:effectLst/>
+                <a:latin typeface="Verdana" panose="020B0604030504040204" pitchFamily="34" charset="0"/>
+                <a:ea typeface="Times New Roman" panose="02020603050405020304" pitchFamily="18" charset="0"/>
+                <a:cs typeface="Times New Roman" panose="02020603050405020304" pitchFamily="18" charset="0"/>
+              </a:rPr>
+              <a:t>Project Overview</a:t>
+            </a:r>
+            <a:endParaRPr lang="en-IN" sz="3200" b="1" dirty="0">
+              <a:solidFill>
+                <a:srgbClr val="E31E24"/>
+              </a:solidFill>
+              <a:cs typeface="Times New Roman" panose="02020603050405020304" pitchFamily="18" charset="0"/>
+              <a:sym typeface="Arial"/>
+            </a:endParaRPr>
+          </a:p>
+        </p:txBody>
+      </p:sp>
+      <p:cxnSp>
+        <p:nvCxnSpPr>
+          <p:cNvPr id="7" name="Straight Connector 6"/>
+          <p:cNvCxnSpPr/>
+          <p:nvPr/>
+        </p:nvCxnSpPr>
+        <p:spPr>
+          <a:xfrm>
+            <a:off x="0" y="1061448"/>
+            <a:ext cx="9180513" cy="0"/>
+          </a:xfrm>
+          <a:prstGeom prst="line">
+            <a:avLst/>
+          </a:prstGeom>
+          <a:ln w="25400">
+            <a:solidFill>
+              <a:srgbClr val="0060AA"/>
+            </a:solidFill>
+          </a:ln>
+        </p:spPr>
+        <p:style>
+          <a:lnRef idx="1">
+            <a:schemeClr val="accent1"/>
+          </a:lnRef>
+          <a:fillRef idx="0">
+            <a:schemeClr val="accent1"/>
+          </a:fillRef>
+          <a:effectRef idx="0">
+            <a:schemeClr val="accent1"/>
+          </a:effectRef>
+          <a:fontRef idx="minor">
+            <a:schemeClr val="tx1"/>
+          </a:fontRef>
+        </p:style>
+      </p:cxnSp>
+      <p:pic>
+        <p:nvPicPr>
+          <p:cNvPr id="9" name="Picture 8"/>
+          <p:cNvPicPr>
+            <a:picLocks noChangeAspect="1"/>
+          </p:cNvPicPr>
+          <p:nvPr/>
+        </p:nvPicPr>
+        <p:blipFill>
+          <a:blip r:embed="rId4" cstate="print">
+            <a:extLst>
+              <a:ext uri="{28A0092B-C50C-407E-A947-70E740481C1C}">
+                <a14:useLocalDpi xmlns:a14="http://schemas.microsoft.com/office/drawing/2010/main" val="0"/>
+              </a:ext>
+            </a:extLst>
+          </a:blip>
+          <a:stretch>
+            <a:fillRect/>
+          </a:stretch>
+        </p:blipFill>
+        <p:spPr>
+          <a:xfrm>
+            <a:off x="72008" y="6309320"/>
+            <a:ext cx="2411760" cy="346691"/>
+          </a:xfrm>
+          <a:prstGeom prst="rect">
+            <a:avLst/>
+          </a:prstGeom>
+        </p:spPr>
+      </p:pic>
+      <p:sp>
+        <p:nvSpPr>
+          <p:cNvPr id="2" name="TextBox 1">
+            <a:extLst>
+              <a:ext uri="{FF2B5EF4-FFF2-40B4-BE49-F238E27FC236}">
+                <a16:creationId xmlns:a16="http://schemas.microsoft.com/office/drawing/2014/main" id="{7DDFD6CA-F5B0-C608-B37D-F7DA4EDCAA97}"/>
+              </a:ext>
+            </a:extLst>
+          </p:cNvPr>
+          <p:cNvSpPr txBox="1"/>
+          <p:nvPr/>
+        </p:nvSpPr>
+        <p:spPr>
+          <a:xfrm>
+            <a:off x="72008" y="1734532"/>
+            <a:ext cx="8784976" cy="3416320"/>
+          </a:xfrm>
+          <a:prstGeom prst="rect">
+            <a:avLst/>
+          </a:prstGeom>
+          <a:noFill/>
+        </p:spPr>
+        <p:txBody>
+          <a:bodyPr wrap="square" rtlCol="0">
+            <a:spAutoFit/>
+          </a:bodyPr>
+          <a:lstStyle/>
+          <a:p>
+            <a:pPr marL="285750" indent="-285750">
+              <a:buFont typeface="Arial" panose="020B0604020202020204" pitchFamily="34" charset="0"/>
+              <a:buChar char="•"/>
+            </a:pPr>
+            <a:r>
+              <a:rPr lang="en-US" dirty="0"/>
+              <a:t>The project focuses on developing a Distributed Rate Limiter System to control and manage API request traffic.</a:t>
+            </a:r>
+          </a:p>
+          <a:p>
+            <a:pPr marL="285750" indent="-285750">
+              <a:buFont typeface="Arial" panose="020B0604020202020204" pitchFamily="34" charset="0"/>
+              <a:buChar char="•"/>
+            </a:pPr>
+            <a:endParaRPr lang="en-US" dirty="0"/>
+          </a:p>
+          <a:p>
+            <a:pPr marL="285750" indent="-285750">
+              <a:buFont typeface="Arial" panose="020B0604020202020204" pitchFamily="34" charset="0"/>
+              <a:buChar char="•"/>
+            </a:pPr>
+            <a:r>
+              <a:rPr lang="en-US" dirty="0"/>
+              <a:t>It prevents system overload by limiting requests within a defined time window.</a:t>
+            </a:r>
+          </a:p>
+          <a:p>
+            <a:pPr marL="285750" indent="-285750">
+              <a:buFont typeface="Arial" panose="020B0604020202020204" pitchFamily="34" charset="0"/>
+              <a:buChar char="•"/>
+            </a:pPr>
+            <a:endParaRPr lang="en-US" dirty="0"/>
+          </a:p>
+          <a:p>
+            <a:pPr marL="285750" indent="-285750">
+              <a:buFont typeface="Arial" panose="020B0604020202020204" pitchFamily="34" charset="0"/>
+              <a:buChar char="•"/>
+            </a:pPr>
+            <a:r>
+              <a:rPr lang="en-US" dirty="0"/>
+              <a:t>Spring Boot is used for backend API development and rate limiting logic implementation.</a:t>
+            </a:r>
+          </a:p>
+          <a:p>
+            <a:pPr marL="285750" indent="-285750">
+              <a:buFont typeface="Arial" panose="020B0604020202020204" pitchFamily="34" charset="0"/>
+              <a:buChar char="•"/>
+            </a:pPr>
+            <a:endParaRPr lang="en-US" dirty="0"/>
+          </a:p>
+          <a:p>
+            <a:pPr marL="285750" indent="-285750">
+              <a:buFont typeface="Arial" panose="020B0604020202020204" pitchFamily="34" charset="0"/>
+              <a:buChar char="•"/>
+            </a:pPr>
+            <a:r>
+              <a:rPr lang="en-US" dirty="0"/>
+              <a:t>Redis enables distributed request tracking and high-performance caching.</a:t>
+            </a:r>
+          </a:p>
+          <a:p>
+            <a:pPr marL="285750" indent="-285750">
+              <a:buFont typeface="Arial" panose="020B0604020202020204" pitchFamily="34" charset="0"/>
+              <a:buChar char="•"/>
+            </a:pPr>
+            <a:endParaRPr lang="en-US" dirty="0"/>
+          </a:p>
+          <a:p>
+            <a:pPr marL="285750" indent="-285750">
+              <a:buFont typeface="Arial" panose="020B0604020202020204" pitchFamily="34" charset="0"/>
+              <a:buChar char="•"/>
+            </a:pPr>
+            <a:r>
+              <a:rPr lang="en-US" dirty="0"/>
+              <a:t>Monitoring is implemented using Prometheus and Grafana for real-time system metrics.</a:t>
+            </a:r>
+          </a:p>
+          <a:p>
+            <a:endParaRPr lang="en-US" dirty="0"/>
+          </a:p>
+          <a:p>
+            <a:pPr marL="285750" indent="-285750">
+              <a:buFont typeface="Arial" panose="020B0604020202020204" pitchFamily="34" charset="0"/>
+              <a:buChar char="•"/>
+            </a:pPr>
+            <a:r>
+              <a:rPr lang="en-US" dirty="0"/>
+              <a:t>A React.js frontend is used for interaction and testing purposes.</a:t>
+            </a:r>
+            <a:endParaRPr lang="en-IN" dirty="0"/>
+          </a:p>
+        </p:txBody>
+      </p:sp>
+    </p:spTree>
+    <p:extLst>
+      <p:ext uri="{BB962C8B-B14F-4D97-AF65-F5344CB8AC3E}">
+        <p14:creationId xmlns:p14="http://schemas.microsoft.com/office/powerpoint/2010/main" val="3353784259"/>
+      </p:ext>
+    </p:extLst>
+  </p:cSld>
+  <p:clrMapOvr>
+    <a:masterClrMapping/>
+  </p:clrMapOvr>
+</p:sld>
+</file>
+
+<file path=ppt/slides/slide4.xml><?xml version="1.0" encoding="utf-8"?>
+<p:sld xmlns:a="http://schemas.openxmlformats.org/drawingml/2006/main" xmlns:r="http://schemas.openxmlformats.org/officeDocument/2006/relationships" xmlns:p="http://schemas.openxmlformats.org/presentationml/2006/main">
+  <p:cSld>
+    <p:spTree>
+      <p:nvGrpSpPr>
+        <p:cNvPr id="1" name=""/>
+        <p:cNvGrpSpPr/>
+        <p:nvPr/>
+      </p:nvGrpSpPr>
+      <p:grpSpPr>
+        <a:xfrm>
+          <a:off x="0" y="0"/>
+          <a:ext cx="0" cy="0"/>
+          <a:chOff x="0" y="0"/>
+          <a:chExt cx="0" cy="0"/>
+        </a:xfrm>
+      </p:grpSpPr>
+      <p:pic>
+        <p:nvPicPr>
+          <p:cNvPr id="4" name="Content Placeholder 3"/>
+          <p:cNvPicPr>
+            <a:picLocks noGrp="1" noChangeAspect="1"/>
+          </p:cNvPicPr>
+          <p:nvPr>
+            <p:ph idx="1"/>
+          </p:nvPr>
+        </p:nvPicPr>
+        <p:blipFill>
+          <a:blip r:embed="rId3" cstate="print">
+            <a:extLst>
+              <a:ext uri="{28A0092B-C50C-407E-A947-70E740481C1C}">
+                <a14:useLocalDpi xmlns:a14="http://schemas.microsoft.com/office/drawing/2010/main" val="0"/>
+              </a:ext>
+            </a:extLst>
+          </a:blip>
+          <a:stretch>
+            <a:fillRect/>
+          </a:stretch>
+        </p:blipFill>
+        <p:spPr>
+          <a:xfrm>
+            <a:off x="1" y="0"/>
+            <a:ext cx="9180512" cy="6885384"/>
+          </a:xfrm>
+        </p:spPr>
+      </p:pic>
+      <p:sp>
+        <p:nvSpPr>
+          <p:cNvPr id="5" name="Rectangle 1"/>
+          <p:cNvSpPr>
+            <a:spLocks noChangeArrowheads="1"/>
+          </p:cNvSpPr>
+          <p:nvPr/>
+        </p:nvSpPr>
+        <p:spPr bwMode="auto">
+          <a:xfrm>
+            <a:off x="179512" y="151593"/>
+            <a:ext cx="4543231" cy="584775"/>
+          </a:xfrm>
+          <a:prstGeom prst="rect">
+            <a:avLst/>
+          </a:prstGeom>
+          <a:noFill/>
+          <a:ln>
+            <a:noFill/>
+          </a:ln>
+          <a:effectLst/>
+          <a:extLst>
+            <a:ext uri="{909E8E84-426E-40DD-AFC4-6F175D3DCCD1}">
+              <a14:hiddenFill xmlns:a14="http://schemas.microsoft.com/office/drawing/2010/main">
+                <a:solidFill>
+                  <a:schemeClr val="accent1"/>
+                </a:solidFill>
+              </a14:hiddenFill>
+            </a:ext>
+            <a:ext uri="{91240B29-F687-4F45-9708-019B960494DF}">
+              <a14:hiddenLine xmlns:a14="http://schemas.microsoft.com/office/drawing/2010/main" w="9525">
+                <a:solidFill>
+                  <a:schemeClr val="tx1"/>
+                </a:solidFill>
+                <a:miter lim="800000"/>
+                <a:headEnd/>
+                <a:tailEnd/>
+              </a14:hiddenLine>
+            </a:ext>
+            <a:ext uri="{AF507438-7753-43E0-B8FC-AC1667EBCBE1}">
+              <a14:hiddenEffects xmlns:a14="http://schemas.microsoft.com/office/drawing/2010/main">
+                <a:effectLst>
+                  <a:outerShdw dist="35921" dir="2700000" algn="ctr" rotWithShape="0">
+                    <a:schemeClr val="bg2"/>
+                  </a:outerShdw>
+                </a:effectLst>
+              </a14:hiddenEffects>
+            </a:ext>
+          </a:extLst>
+        </p:spPr>
+        <p:txBody>
+          <a:bodyPr vert="horz" wrap="none" lIns="91440" tIns="45720" rIns="91440" bIns="45720" numCol="1" anchor="ctr" anchorCtr="0" compatLnSpc="1">
+            <a:prstTxWarp prst="textNoShape">
+              <a:avLst/>
+            </a:prstTxWarp>
+            <a:spAutoFit/>
+          </a:bodyPr>
+          <a:lstStyle/>
+          <a:p>
+            <a:pPr lvl="0">
+              <a:buSzPct val="25000"/>
+            </a:pPr>
+            <a:r>
+              <a:rPr lang="en-US" sz="3200" b="1" kern="100" dirty="0">
+                <a:effectLst/>
+                <a:latin typeface="Verdana" panose="020B0604030504040204" pitchFamily="34" charset="0"/>
+                <a:ea typeface="Times New Roman" panose="02020603050405020304" pitchFamily="18" charset="0"/>
+                <a:cs typeface="Times New Roman" panose="02020603050405020304" pitchFamily="18" charset="0"/>
+              </a:rPr>
+              <a:t>Specific Objectives</a:t>
+            </a:r>
+            <a:endParaRPr lang="en-IN" sz="3200" b="1" dirty="0">
+              <a:solidFill>
+                <a:srgbClr val="E31E24"/>
+              </a:solidFill>
+              <a:cs typeface="Times New Roman" panose="02020603050405020304" pitchFamily="18" charset="0"/>
+              <a:sym typeface="Arial"/>
+            </a:endParaRPr>
+          </a:p>
+        </p:txBody>
+      </p:sp>
+      <p:cxnSp>
+        <p:nvCxnSpPr>
+          <p:cNvPr id="7" name="Straight Connector 6"/>
+          <p:cNvCxnSpPr/>
+          <p:nvPr/>
+        </p:nvCxnSpPr>
+        <p:spPr>
+          <a:xfrm>
+            <a:off x="0" y="1061448"/>
+            <a:ext cx="9180513" cy="0"/>
+          </a:xfrm>
+          <a:prstGeom prst="line">
+            <a:avLst/>
+          </a:prstGeom>
+          <a:ln w="25400">
+            <a:solidFill>
+              <a:srgbClr val="0060AA"/>
+            </a:solidFill>
+          </a:ln>
+        </p:spPr>
+        <p:style>
+          <a:lnRef idx="1">
+            <a:schemeClr val="accent1"/>
+          </a:lnRef>
+          <a:fillRef idx="0">
+            <a:schemeClr val="accent1"/>
+          </a:fillRef>
+          <a:effectRef idx="0">
+            <a:schemeClr val="accent1"/>
+          </a:effectRef>
+          <a:fontRef idx="minor">
+            <a:schemeClr val="tx1"/>
+          </a:fontRef>
+        </p:style>
+      </p:cxnSp>
+      <p:pic>
+        <p:nvPicPr>
+          <p:cNvPr id="9" name="Picture 8"/>
+          <p:cNvPicPr>
+            <a:picLocks noChangeAspect="1"/>
+          </p:cNvPicPr>
+          <p:nvPr/>
+        </p:nvPicPr>
+        <p:blipFill>
+          <a:blip r:embed="rId4" cstate="print">
+            <a:extLst>
+              <a:ext uri="{28A0092B-C50C-407E-A947-70E740481C1C}">
+                <a14:useLocalDpi xmlns:a14="http://schemas.microsoft.com/office/drawing/2010/main" val="0"/>
+              </a:ext>
+            </a:extLst>
+          </a:blip>
+          <a:stretch>
+            <a:fillRect/>
+          </a:stretch>
+        </p:blipFill>
+        <p:spPr>
+          <a:xfrm>
+            <a:off x="72008" y="6309320"/>
+            <a:ext cx="2411760" cy="346691"/>
+          </a:xfrm>
+          <a:prstGeom prst="rect">
+            <a:avLst/>
+          </a:prstGeom>
+        </p:spPr>
+      </p:pic>
+      <p:sp>
+        <p:nvSpPr>
+          <p:cNvPr id="6" name="TextBox 5">
+            <a:extLst>
+              <a:ext uri="{FF2B5EF4-FFF2-40B4-BE49-F238E27FC236}">
+                <a16:creationId xmlns:a16="http://schemas.microsoft.com/office/drawing/2014/main" id="{AE24D516-77C6-C96A-5F77-D099623448D8}"/>
+              </a:ext>
+            </a:extLst>
+          </p:cNvPr>
+          <p:cNvSpPr txBox="1"/>
+          <p:nvPr/>
+        </p:nvSpPr>
+        <p:spPr>
+          <a:xfrm>
+            <a:off x="161296" y="1406250"/>
+            <a:ext cx="8784976" cy="372794"/>
+          </a:xfrm>
+          <a:prstGeom prst="rect">
+            <a:avLst/>
+          </a:prstGeom>
+          <a:noFill/>
+        </p:spPr>
+        <p:txBody>
+          <a:bodyPr wrap="square">
+            <a:spAutoFit/>
+          </a:bodyPr>
+          <a:lstStyle/>
+          <a:p>
+            <a:pPr marL="0" marR="0" algn="just" fontAlgn="base">
+              <a:lnSpc>
+                <a:spcPct val="107000"/>
+              </a:lnSpc>
+              <a:spcBef>
+                <a:spcPts val="0"/>
+              </a:spcBef>
+              <a:spcAft>
+                <a:spcPts val="0"/>
+              </a:spcAft>
+            </a:pPr>
+            <a:r>
+              <a:rPr lang="en-US" sz="1800" kern="100" dirty="0">
+                <a:solidFill>
+                  <a:srgbClr val="000000"/>
+                </a:solidFill>
+                <a:effectLst/>
+                <a:latin typeface="Verdana" panose="020B0604030504040204" pitchFamily="34" charset="0"/>
+                <a:ea typeface="Times New Roman" panose="02020603050405020304" pitchFamily="18" charset="0"/>
+                <a:cs typeface="Times New Roman" panose="02020603050405020304" pitchFamily="18" charset="0"/>
+              </a:rPr>
+              <a:t> </a:t>
+            </a:r>
+            <a:endParaRPr lang="en-US" sz="2800" kern="100" dirty="0">
+              <a:effectLst/>
+              <a:latin typeface="+mj-lt"/>
+              <a:ea typeface="Calibri" panose="020F0502020204030204" pitchFamily="34" charset="0"/>
+              <a:cs typeface="Times New Roman" panose="02020603050405020304" pitchFamily="18" charset="0"/>
+            </a:endParaRPr>
+          </a:p>
+        </p:txBody>
+      </p:sp>
+      <p:sp>
+        <p:nvSpPr>
+          <p:cNvPr id="2" name="TextBox 1">
+            <a:extLst>
+              <a:ext uri="{FF2B5EF4-FFF2-40B4-BE49-F238E27FC236}">
+                <a16:creationId xmlns:a16="http://schemas.microsoft.com/office/drawing/2014/main" id="{2CBC6692-5BC5-7A10-A26A-81E7884CB0A9}"/>
+              </a:ext>
+            </a:extLst>
+          </p:cNvPr>
+          <p:cNvSpPr txBox="1"/>
+          <p:nvPr/>
+        </p:nvSpPr>
+        <p:spPr>
+          <a:xfrm>
+            <a:off x="161296" y="1940175"/>
+            <a:ext cx="8568952" cy="3416320"/>
+          </a:xfrm>
+          <a:prstGeom prst="rect">
+            <a:avLst/>
+          </a:prstGeom>
+          <a:noFill/>
+        </p:spPr>
+        <p:txBody>
+          <a:bodyPr wrap="square" rtlCol="0">
+            <a:spAutoFit/>
+          </a:bodyPr>
+          <a:lstStyle/>
+          <a:p>
+            <a:pPr marL="285750" indent="-285750">
+              <a:buFont typeface="Arial" panose="020B0604020202020204" pitchFamily="34" charset="0"/>
+              <a:buChar char="•"/>
+            </a:pPr>
+            <a:r>
+              <a:rPr lang="en-US" dirty="0"/>
+              <a:t>Design and implement a distributed rate limiting system to manage high volumes of API requests.</a:t>
+            </a:r>
+          </a:p>
+          <a:p>
+            <a:pPr marL="285750" indent="-285750">
+              <a:buFont typeface="Arial" panose="020B0604020202020204" pitchFamily="34" charset="0"/>
+              <a:buChar char="•"/>
+            </a:pPr>
+            <a:endParaRPr lang="en-US" dirty="0"/>
+          </a:p>
+          <a:p>
+            <a:pPr marL="285750" indent="-285750">
+              <a:buFont typeface="Arial" panose="020B0604020202020204" pitchFamily="34" charset="0"/>
+              <a:buChar char="•"/>
+            </a:pPr>
+            <a:r>
+              <a:rPr lang="en-US" dirty="0"/>
+              <a:t>Enforce fair usage policies by limiting requests per user, IP address, or API key.</a:t>
+            </a:r>
+          </a:p>
+          <a:p>
+            <a:pPr marL="285750" indent="-285750">
+              <a:buFont typeface="Arial" panose="020B0604020202020204" pitchFamily="34" charset="0"/>
+              <a:buChar char="•"/>
+            </a:pPr>
+            <a:endParaRPr lang="en-US" dirty="0"/>
+          </a:p>
+          <a:p>
+            <a:pPr marL="285750" indent="-285750">
+              <a:buFont typeface="Arial" panose="020B0604020202020204" pitchFamily="34" charset="0"/>
+              <a:buChar char="•"/>
+            </a:pPr>
+            <a:r>
+              <a:rPr lang="en-US" dirty="0"/>
+              <a:t>Implement rate limiting algorithms such as Token Bucket, Fixed Window, and Sliding Window.</a:t>
+            </a:r>
+          </a:p>
+          <a:p>
+            <a:pPr marL="285750" indent="-285750">
+              <a:buFont typeface="Arial" panose="020B0604020202020204" pitchFamily="34" charset="0"/>
+              <a:buChar char="•"/>
+            </a:pPr>
+            <a:endParaRPr lang="en-US" dirty="0"/>
+          </a:p>
+          <a:p>
+            <a:pPr marL="285750" indent="-285750">
+              <a:buFont typeface="Arial" panose="020B0604020202020204" pitchFamily="34" charset="0"/>
+              <a:buChar char="•"/>
+            </a:pPr>
+            <a:r>
+              <a:rPr lang="en-US" dirty="0"/>
+              <a:t>Use Redis as a centralized in-memory datastore for fast and efficient request tracking.</a:t>
+            </a:r>
+          </a:p>
+          <a:p>
+            <a:pPr marL="285750" indent="-285750">
+              <a:buFont typeface="Arial" panose="020B0604020202020204" pitchFamily="34" charset="0"/>
+              <a:buChar char="•"/>
+            </a:pPr>
+            <a:endParaRPr lang="en-US" dirty="0"/>
+          </a:p>
+          <a:p>
+            <a:pPr marL="285750" indent="-285750">
+              <a:buFont typeface="Arial" panose="020B0604020202020204" pitchFamily="34" charset="0"/>
+              <a:buChar char="•"/>
+            </a:pPr>
+            <a:r>
+              <a:rPr lang="en-US" dirty="0"/>
+              <a:t>Provide real-time monitoring and configuration of rate limits through an admin dashboard.</a:t>
+            </a:r>
+            <a:endParaRPr lang="en-IN" dirty="0"/>
+          </a:p>
+        </p:txBody>
+      </p:sp>
+    </p:spTree>
+    <p:extLst>
+      <p:ext uri="{BB962C8B-B14F-4D97-AF65-F5344CB8AC3E}">
+        <p14:creationId xmlns:p14="http://schemas.microsoft.com/office/powerpoint/2010/main" val="1047329288"/>
+      </p:ext>
+    </p:extLst>
+  </p:cSld>
+  <p:clrMapOvr>
+    <a:masterClrMapping/>
+  </p:clrMapOvr>
+</p:sld>
+</file>
+
+<file path=ppt/slides/slide5.xml><?xml version="1.0" encoding="utf-8"?>
+<p:sld xmlns:a="http://schemas.openxmlformats.org/drawingml/2006/main" xmlns:r="http://schemas.openxmlformats.org/officeDocument/2006/relationships" xmlns:p="http://schemas.openxmlformats.org/presentationml/2006/main">
+  <p:cSld>
+    <p:spTree>
+      <p:nvGrpSpPr>
+        <p:cNvPr id="1" name=""/>
+        <p:cNvGrpSpPr/>
+        <p:nvPr/>
+      </p:nvGrpSpPr>
+      <p:grpSpPr>
+        <a:xfrm>
+          <a:off x="0" y="0"/>
+          <a:ext cx="0" cy="0"/>
+          <a:chOff x="0" y="0"/>
+          <a:chExt cx="0" cy="0"/>
+        </a:xfrm>
+      </p:grpSpPr>
+      <p:pic>
+        <p:nvPicPr>
+          <p:cNvPr id="4" name="Content Placeholder 3"/>
+          <p:cNvPicPr>
+            <a:picLocks noGrp="1" noChangeAspect="1"/>
+          </p:cNvPicPr>
+          <p:nvPr>
+            <p:ph idx="1"/>
+          </p:nvPr>
+        </p:nvPicPr>
+        <p:blipFill>
+          <a:blip r:embed="rId3" cstate="print">
+            <a:extLst>
+              <a:ext uri="{28A0092B-C50C-407E-A947-70E740481C1C}">
+                <a14:useLocalDpi xmlns:a14="http://schemas.microsoft.com/office/drawing/2010/main" val="0"/>
+              </a:ext>
+            </a:extLst>
+          </a:blip>
+          <a:stretch>
+            <a:fillRect/>
+          </a:stretch>
+        </p:blipFill>
+        <p:spPr>
+          <a:xfrm>
+            <a:off x="-32964" y="-27384"/>
+            <a:ext cx="9180512" cy="6885384"/>
+          </a:xfrm>
+        </p:spPr>
+      </p:pic>
+      <p:sp>
+        <p:nvSpPr>
+          <p:cNvPr id="5" name="Rectangle 1"/>
+          <p:cNvSpPr>
+            <a:spLocks noChangeArrowheads="1"/>
+          </p:cNvSpPr>
+          <p:nvPr/>
+        </p:nvSpPr>
+        <p:spPr bwMode="auto">
+          <a:xfrm>
+            <a:off x="179512" y="151593"/>
+            <a:ext cx="4392488" cy="584775"/>
+          </a:xfrm>
+          <a:prstGeom prst="rect">
+            <a:avLst/>
+          </a:prstGeom>
+          <a:noFill/>
+          <a:ln>
+            <a:noFill/>
+          </a:ln>
+          <a:effectLst/>
+          <a:extLst>
+            <a:ext uri="{909E8E84-426E-40DD-AFC4-6F175D3DCCD1}">
+              <a14:hiddenFill xmlns:a14="http://schemas.microsoft.com/office/drawing/2010/main">
+                <a:solidFill>
+                  <a:schemeClr val="accent1"/>
+                </a:solidFill>
+              </a14:hiddenFill>
+            </a:ext>
+            <a:ext uri="{91240B29-F687-4F45-9708-019B960494DF}">
+              <a14:hiddenLine xmlns:a14="http://schemas.microsoft.com/office/drawing/2010/main" w="9525">
+                <a:solidFill>
+                  <a:schemeClr val="tx1"/>
+                </a:solidFill>
+                <a:miter lim="800000"/>
+                <a:headEnd/>
+                <a:tailEnd/>
+              </a14:hiddenLine>
+            </a:ext>
+            <a:ext uri="{AF507438-7753-43E0-B8FC-AC1667EBCBE1}">
+              <a14:hiddenEffects xmlns:a14="http://schemas.microsoft.com/office/drawing/2010/main">
+                <a:effectLst>
+                  <a:outerShdw dist="35921" dir="2700000" algn="ctr" rotWithShape="0">
+                    <a:schemeClr val="bg2"/>
+                  </a:outerShdw>
+                </a:effectLst>
+              </a14:hiddenEffects>
+            </a:ext>
+          </a:extLst>
+        </p:spPr>
+        <p:txBody>
+          <a:bodyPr vert="horz" wrap="square" lIns="91440" tIns="45720" rIns="91440" bIns="45720" numCol="1" anchor="ctr" anchorCtr="0" compatLnSpc="1">
+            <a:prstTxWarp prst="textNoShape">
+              <a:avLst/>
+            </a:prstTxWarp>
+            <a:spAutoFit/>
+          </a:bodyPr>
+          <a:lstStyle/>
+          <a:p>
+            <a:pPr lvl="0">
+              <a:buSzPct val="25000"/>
+            </a:pPr>
+            <a:r>
+              <a:rPr lang="en-US" sz="3200" b="1" kern="100" dirty="0">
+                <a:effectLst/>
+                <a:latin typeface="Verdana" panose="020B0604030504040204" pitchFamily="34" charset="0"/>
+                <a:ea typeface="Times New Roman" panose="02020603050405020304" pitchFamily="18" charset="0"/>
+                <a:cs typeface="Times New Roman" panose="02020603050405020304" pitchFamily="18" charset="0"/>
+              </a:rPr>
+              <a:t>Key Features</a:t>
+            </a:r>
+            <a:endParaRPr lang="en-IN" sz="3200" b="1" dirty="0">
+              <a:solidFill>
+                <a:srgbClr val="E31E24"/>
+              </a:solidFill>
+              <a:cs typeface="Times New Roman" panose="02020603050405020304" pitchFamily="18" charset="0"/>
+              <a:sym typeface="Arial"/>
+            </a:endParaRPr>
+          </a:p>
+        </p:txBody>
+      </p:sp>
+      <p:cxnSp>
+        <p:nvCxnSpPr>
+          <p:cNvPr id="7" name="Straight Connector 6"/>
+          <p:cNvCxnSpPr/>
+          <p:nvPr/>
+        </p:nvCxnSpPr>
+        <p:spPr>
+          <a:xfrm>
+            <a:off x="0" y="1061448"/>
+            <a:ext cx="9180513" cy="0"/>
+          </a:xfrm>
+          <a:prstGeom prst="line">
+            <a:avLst/>
+          </a:prstGeom>
+          <a:ln w="25400">
+            <a:solidFill>
+              <a:srgbClr val="0060AA"/>
+            </a:solidFill>
+          </a:ln>
+        </p:spPr>
+        <p:style>
+          <a:lnRef idx="1">
+            <a:schemeClr val="accent1"/>
+          </a:lnRef>
+          <a:fillRef idx="0">
+            <a:schemeClr val="accent1"/>
+          </a:fillRef>
+          <a:effectRef idx="0">
+            <a:schemeClr val="accent1"/>
+          </a:effectRef>
+          <a:fontRef idx="minor">
+            <a:schemeClr val="tx1"/>
+          </a:fontRef>
+        </p:style>
+      </p:cxnSp>
+      <p:pic>
+        <p:nvPicPr>
+          <p:cNvPr id="9" name="Picture 8"/>
+          <p:cNvPicPr>
+            <a:picLocks noChangeAspect="1"/>
+          </p:cNvPicPr>
+          <p:nvPr/>
+        </p:nvPicPr>
+        <p:blipFill>
+          <a:blip r:embed="rId4" cstate="print">
+            <a:extLst>
+              <a:ext uri="{28A0092B-C50C-407E-A947-70E740481C1C}">
+                <a14:useLocalDpi xmlns:a14="http://schemas.microsoft.com/office/drawing/2010/main" val="0"/>
+              </a:ext>
+            </a:extLst>
+          </a:blip>
+          <a:stretch>
+            <a:fillRect/>
+          </a:stretch>
+        </p:blipFill>
+        <p:spPr>
+          <a:xfrm>
+            <a:off x="72008" y="6309320"/>
+            <a:ext cx="2411760" cy="346691"/>
+          </a:xfrm>
+          <a:prstGeom prst="rect">
+            <a:avLst/>
+          </a:prstGeom>
+        </p:spPr>
+      </p:pic>
+      <p:sp>
+        <p:nvSpPr>
+          <p:cNvPr id="6" name="TextBox 5">
+            <a:extLst>
+              <a:ext uri="{FF2B5EF4-FFF2-40B4-BE49-F238E27FC236}">
+                <a16:creationId xmlns:a16="http://schemas.microsoft.com/office/drawing/2014/main" id="{AE24D516-77C6-C96A-5F77-D099623448D8}"/>
+              </a:ext>
+            </a:extLst>
+          </p:cNvPr>
+          <p:cNvSpPr txBox="1"/>
+          <p:nvPr/>
+        </p:nvSpPr>
+        <p:spPr>
+          <a:xfrm>
+            <a:off x="179512" y="1293834"/>
+            <a:ext cx="8784976" cy="372794"/>
+          </a:xfrm>
+          <a:prstGeom prst="rect">
+            <a:avLst/>
+          </a:prstGeom>
+          <a:noFill/>
+        </p:spPr>
+        <p:txBody>
+          <a:bodyPr wrap="square">
+            <a:spAutoFit/>
+          </a:bodyPr>
+          <a:lstStyle/>
+          <a:p>
+            <a:pPr marL="0" marR="0" algn="just" fontAlgn="base">
+              <a:lnSpc>
+                <a:spcPct val="107000"/>
+              </a:lnSpc>
+              <a:spcBef>
+                <a:spcPts val="0"/>
+              </a:spcBef>
+              <a:spcAft>
+                <a:spcPts val="0"/>
+              </a:spcAft>
+            </a:pPr>
+            <a:r>
+              <a:rPr lang="en-US" sz="1800" kern="100" dirty="0">
+                <a:solidFill>
+                  <a:srgbClr val="000000"/>
+                </a:solidFill>
+                <a:effectLst/>
+                <a:latin typeface="Verdana" panose="020B0604030504040204" pitchFamily="34" charset="0"/>
+                <a:ea typeface="Times New Roman" panose="02020603050405020304" pitchFamily="18" charset="0"/>
+                <a:cs typeface="Times New Roman" panose="02020603050405020304" pitchFamily="18" charset="0"/>
+              </a:rPr>
+              <a:t> </a:t>
+            </a:r>
+            <a:endParaRPr lang="en-US" sz="2800" kern="100" dirty="0">
+              <a:effectLst/>
+              <a:latin typeface="+mj-lt"/>
+              <a:ea typeface="Calibri" panose="020F0502020204030204" pitchFamily="34" charset="0"/>
+              <a:cs typeface="Times New Roman" panose="02020603050405020304" pitchFamily="18" charset="0"/>
+            </a:endParaRPr>
+          </a:p>
+        </p:txBody>
+      </p:sp>
+      <p:sp>
+        <p:nvSpPr>
+          <p:cNvPr id="2" name="TextBox 1">
+            <a:extLst>
+              <a:ext uri="{FF2B5EF4-FFF2-40B4-BE49-F238E27FC236}">
+                <a16:creationId xmlns:a16="http://schemas.microsoft.com/office/drawing/2014/main" id="{17BE15F1-0F81-8275-297E-11BC63148096}"/>
+              </a:ext>
+            </a:extLst>
+          </p:cNvPr>
+          <p:cNvSpPr txBox="1"/>
+          <p:nvPr/>
+        </p:nvSpPr>
+        <p:spPr>
+          <a:xfrm>
+            <a:off x="72008" y="1997839"/>
+            <a:ext cx="8784976" cy="2862322"/>
+          </a:xfrm>
+          <a:prstGeom prst="rect">
+            <a:avLst/>
+          </a:prstGeom>
+          <a:noFill/>
+        </p:spPr>
+        <p:txBody>
+          <a:bodyPr wrap="square" rtlCol="0">
+            <a:spAutoFit/>
+          </a:bodyPr>
+          <a:lstStyle/>
+          <a:p>
+            <a:pPr marL="285750" indent="-285750">
+              <a:buFont typeface="Arial" panose="020B0604020202020204" pitchFamily="34" charset="0"/>
+              <a:buChar char="•"/>
+            </a:pPr>
+            <a:r>
+              <a:rPr lang="en-US" dirty="0"/>
+              <a:t>High-performance request handling designed for low latency in high-traffic systems.</a:t>
+            </a:r>
+          </a:p>
+          <a:p>
+            <a:pPr marL="285750" indent="-285750">
+              <a:buFont typeface="Arial" panose="020B0604020202020204" pitchFamily="34" charset="0"/>
+              <a:buChar char="•"/>
+            </a:pPr>
+            <a:endParaRPr lang="en-US" dirty="0"/>
+          </a:p>
+          <a:p>
+            <a:pPr marL="285750" indent="-285750">
+              <a:buFont typeface="Arial" panose="020B0604020202020204" pitchFamily="34" charset="0"/>
+              <a:buChar char="•"/>
+            </a:pPr>
+            <a:r>
+              <a:rPr lang="en-US" dirty="0"/>
+              <a:t>Centralized request tracking using Redis to maintain counters and rate limit data efficiently.</a:t>
+            </a:r>
+          </a:p>
+          <a:p>
+            <a:pPr marL="285750" indent="-285750">
+              <a:buFont typeface="Arial" panose="020B0604020202020204" pitchFamily="34" charset="0"/>
+              <a:buChar char="•"/>
+            </a:pPr>
+            <a:endParaRPr lang="en-US" dirty="0"/>
+          </a:p>
+          <a:p>
+            <a:pPr marL="285750" indent="-285750">
+              <a:buFont typeface="Arial" panose="020B0604020202020204" pitchFamily="34" charset="0"/>
+              <a:buChar char="•"/>
+            </a:pPr>
+            <a:r>
+              <a:rPr lang="en-US" dirty="0"/>
+              <a:t>Configurable rate limits that can be customized for different APIs, users, or environments.</a:t>
+            </a:r>
+          </a:p>
+          <a:p>
+            <a:pPr marL="285750" indent="-285750">
+              <a:buFont typeface="Arial" panose="020B0604020202020204" pitchFamily="34" charset="0"/>
+              <a:buChar char="•"/>
+            </a:pPr>
+            <a:endParaRPr lang="en-US" dirty="0"/>
+          </a:p>
+          <a:p>
+            <a:pPr marL="285750" indent="-285750">
+              <a:buFont typeface="Arial" panose="020B0604020202020204" pitchFamily="34" charset="0"/>
+              <a:buChar char="•"/>
+            </a:pPr>
+            <a:r>
+              <a:rPr lang="en-US" dirty="0"/>
+              <a:t>Scalable architecture that works smoothly in distributed and cloud-based deployments.</a:t>
+            </a:r>
+          </a:p>
+          <a:p>
+            <a:pPr marL="285750" indent="-285750">
+              <a:buFont typeface="Arial" panose="020B0604020202020204" pitchFamily="34" charset="0"/>
+              <a:buChar char="•"/>
+            </a:pPr>
+            <a:endParaRPr lang="en-US" dirty="0"/>
+          </a:p>
+          <a:p>
+            <a:pPr marL="285750" indent="-285750">
+              <a:buFont typeface="Arial" panose="020B0604020202020204" pitchFamily="34" charset="0"/>
+              <a:buChar char="•"/>
+            </a:pPr>
+            <a:r>
+              <a:rPr lang="en-US" dirty="0"/>
+              <a:t>Easy integration with backend services through APIs without major system changes.</a:t>
+            </a:r>
+            <a:endParaRPr lang="en-IN" dirty="0"/>
+          </a:p>
+        </p:txBody>
+      </p:sp>
+    </p:spTree>
+    <p:extLst>
+      <p:ext uri="{BB962C8B-B14F-4D97-AF65-F5344CB8AC3E}">
+        <p14:creationId xmlns:p14="http://schemas.microsoft.com/office/powerpoint/2010/main" val="957423197"/>
+      </p:ext>
+    </p:extLst>
+  </p:cSld>
+  <p:clrMapOvr>
+    <a:masterClrMapping/>
+  </p:clrMapOvr>
+</p:sld>
+</file>
+
+<file path=ppt/slides/slide6.xml><?xml version="1.0" encoding="utf-8"?>
+<p:sld xmlns:a="http://schemas.openxmlformats.org/drawingml/2006/main" xmlns:r="http://schemas.openxmlformats.org/officeDocument/2006/relationships" xmlns:p="http://schemas.openxmlformats.org/presentationml/2006/main">
+  <p:cSld>
+    <p:spTree>
+      <p:nvGrpSpPr>
+        <p:cNvPr id="1" name="">
+          <a:extLst>
+            <a:ext uri="{FF2B5EF4-FFF2-40B4-BE49-F238E27FC236}">
+              <a16:creationId xmlns:a16="http://schemas.microsoft.com/office/drawing/2014/main" id="{D0B33F2B-4274-D144-7093-B867F4CB379E}"/>
+            </a:ext>
+          </a:extLst>
+        </p:cNvPr>
+        <p:cNvGrpSpPr/>
+        <p:nvPr/>
+      </p:nvGrpSpPr>
+      <p:grpSpPr>
+        <a:xfrm>
+          <a:off x="0" y="0"/>
+          <a:ext cx="0" cy="0"/>
+          <a:chOff x="0" y="0"/>
+          <a:chExt cx="0" cy="0"/>
+        </a:xfrm>
+      </p:grpSpPr>
+      <p:pic>
+        <p:nvPicPr>
+          <p:cNvPr id="4" name="Content Placeholder 3">
+            <a:extLst>
+              <a:ext uri="{FF2B5EF4-FFF2-40B4-BE49-F238E27FC236}">
+                <a16:creationId xmlns:a16="http://schemas.microsoft.com/office/drawing/2014/main" id="{A9527858-67DE-3DF8-FF01-8DB1846AEB19}"/>
+              </a:ext>
+            </a:extLst>
+          </p:cNvPr>
+          <p:cNvPicPr>
+            <a:picLocks noGrp="1" noChangeAspect="1"/>
+          </p:cNvPicPr>
+          <p:nvPr>
+            <p:ph idx="1"/>
+          </p:nvPr>
+        </p:nvPicPr>
+        <p:blipFill>
+          <a:blip r:embed="rId3" cstate="print">
+            <a:extLst>
+              <a:ext uri="{28A0092B-C50C-407E-A947-70E740481C1C}">
+                <a14:useLocalDpi xmlns:a14="http://schemas.microsoft.com/office/drawing/2010/main" val="0"/>
+              </a:ext>
+            </a:extLst>
+          </a:blip>
+          <a:stretch>
+            <a:fillRect/>
+          </a:stretch>
+        </p:blipFill>
+        <p:spPr>
+          <a:xfrm>
+            <a:off x="-36513" y="-27384"/>
+            <a:ext cx="9180512" cy="6885384"/>
+          </a:xfrm>
+        </p:spPr>
+      </p:pic>
+      <p:sp>
+        <p:nvSpPr>
+          <p:cNvPr id="5" name="Rectangle 1">
+            <a:extLst>
+              <a:ext uri="{FF2B5EF4-FFF2-40B4-BE49-F238E27FC236}">
+                <a16:creationId xmlns:a16="http://schemas.microsoft.com/office/drawing/2014/main" id="{D2CBC630-DA86-8B5C-8CF1-BBD133225A5E}"/>
+              </a:ext>
+            </a:extLst>
+          </p:cNvPr>
+          <p:cNvSpPr>
+            <a:spLocks noChangeArrowheads="1"/>
+          </p:cNvSpPr>
+          <p:nvPr/>
+        </p:nvSpPr>
+        <p:spPr bwMode="auto">
+          <a:xfrm>
+            <a:off x="179512" y="244288"/>
+            <a:ext cx="5688632" cy="584775"/>
+          </a:xfrm>
+          <a:prstGeom prst="rect">
+            <a:avLst/>
+          </a:prstGeom>
+          <a:noFill/>
+          <a:ln>
+            <a:noFill/>
+          </a:ln>
+          <a:effectLst/>
+          <a:extLst>
+            <a:ext uri="{909E8E84-426E-40DD-AFC4-6F175D3DCCD1}">
+              <a14:hiddenFill xmlns:a14="http://schemas.microsoft.com/office/drawing/2010/main">
+                <a:solidFill>
+                  <a:schemeClr val="accent1"/>
+                </a:solidFill>
+              </a14:hiddenFill>
+            </a:ext>
+            <a:ext uri="{91240B29-F687-4F45-9708-019B960494DF}">
+              <a14:hiddenLine xmlns:a14="http://schemas.microsoft.com/office/drawing/2010/main" w="9525">
+                <a:solidFill>
+                  <a:schemeClr val="tx1"/>
+                </a:solidFill>
+                <a:miter lim="800000"/>
+                <a:headEnd/>
+                <a:tailEnd/>
+              </a14:hiddenLine>
+            </a:ext>
+            <a:ext uri="{AF507438-7753-43E0-B8FC-AC1667EBCBE1}">
+              <a14:hiddenEffects xmlns:a14="http://schemas.microsoft.com/office/drawing/2010/main">
+                <a:effectLst>
+                  <a:outerShdw dist="35921" dir="2700000" algn="ctr" rotWithShape="0">
+                    <a:schemeClr val="bg2"/>
+                  </a:outerShdw>
+                </a:effectLst>
+              </a14:hiddenEffects>
+            </a:ext>
+          </a:extLst>
+        </p:spPr>
+        <p:txBody>
+          <a:bodyPr vert="horz" wrap="square" lIns="91440" tIns="45720" rIns="91440" bIns="45720" numCol="1" anchor="ctr" anchorCtr="0" compatLnSpc="1">
+            <a:prstTxWarp prst="textNoShape">
+              <a:avLst/>
+            </a:prstTxWarp>
+            <a:spAutoFit/>
+          </a:bodyPr>
+          <a:lstStyle/>
+          <a:p>
+            <a:pPr lvl="0">
+              <a:buSzPct val="25000"/>
+            </a:pPr>
+            <a:r>
+              <a:rPr lang="en-US" sz="3200" b="1" kern="100" dirty="0">
+                <a:latin typeface="Verdana" panose="020B0604030504040204" pitchFamily="34" charset="0"/>
+                <a:cs typeface="Times New Roman" panose="02020603050405020304" pitchFamily="18" charset="0"/>
+                <a:sym typeface="Arial"/>
+              </a:rPr>
+              <a:t>Progress Summary</a:t>
+            </a:r>
+            <a:endParaRPr lang="en-IN" sz="3200" b="1" dirty="0">
+              <a:cs typeface="Times New Roman" panose="02020603050405020304" pitchFamily="18" charset="0"/>
+              <a:sym typeface="Arial"/>
+            </a:endParaRPr>
+          </a:p>
+        </p:txBody>
+      </p:sp>
+      <p:cxnSp>
+        <p:nvCxnSpPr>
+          <p:cNvPr id="7" name="Straight Connector 6">
+            <a:extLst>
+              <a:ext uri="{FF2B5EF4-FFF2-40B4-BE49-F238E27FC236}">
+                <a16:creationId xmlns:a16="http://schemas.microsoft.com/office/drawing/2014/main" id="{4FB5C432-E63F-6355-19A5-32B65372F4DD}"/>
+              </a:ext>
+            </a:extLst>
+          </p:cNvPr>
+          <p:cNvCxnSpPr/>
+          <p:nvPr/>
+        </p:nvCxnSpPr>
+        <p:spPr>
+          <a:xfrm>
+            <a:off x="0" y="1061448"/>
+            <a:ext cx="9180513" cy="0"/>
+          </a:xfrm>
+          <a:prstGeom prst="line">
+            <a:avLst/>
+          </a:prstGeom>
+          <a:ln w="25400">
+            <a:solidFill>
+              <a:srgbClr val="0060AA"/>
+            </a:solidFill>
+          </a:ln>
+        </p:spPr>
+        <p:style>
+          <a:lnRef idx="1">
+            <a:schemeClr val="accent1"/>
+          </a:lnRef>
+          <a:fillRef idx="0">
+            <a:schemeClr val="accent1"/>
+          </a:fillRef>
+          <a:effectRef idx="0">
+            <a:schemeClr val="accent1"/>
+          </a:effectRef>
+          <a:fontRef idx="minor">
+            <a:schemeClr val="tx1"/>
+          </a:fontRef>
+        </p:style>
+      </p:cxnSp>
+      <p:pic>
+        <p:nvPicPr>
+          <p:cNvPr id="9" name="Picture 8">
+            <a:extLst>
+              <a:ext uri="{FF2B5EF4-FFF2-40B4-BE49-F238E27FC236}">
+                <a16:creationId xmlns:a16="http://schemas.microsoft.com/office/drawing/2014/main" id="{A6D3DC83-45E5-89A4-957B-69C5B5063223}"/>
+              </a:ext>
+            </a:extLst>
+          </p:cNvPr>
+          <p:cNvPicPr>
+            <a:picLocks noChangeAspect="1"/>
+          </p:cNvPicPr>
+          <p:nvPr/>
+        </p:nvPicPr>
+        <p:blipFill>
+          <a:blip r:embed="rId4" cstate="print">
+            <a:extLst>
+              <a:ext uri="{28A0092B-C50C-407E-A947-70E740481C1C}">
+                <a14:useLocalDpi xmlns:a14="http://schemas.microsoft.com/office/drawing/2010/main" val="0"/>
+              </a:ext>
+            </a:extLst>
+          </a:blip>
+          <a:stretch>
+            <a:fillRect/>
+          </a:stretch>
+        </p:blipFill>
+        <p:spPr>
+          <a:xfrm>
+            <a:off x="72008" y="6309320"/>
+            <a:ext cx="2411760" cy="346691"/>
+          </a:xfrm>
+          <a:prstGeom prst="rect">
+            <a:avLst/>
+          </a:prstGeom>
+        </p:spPr>
+      </p:pic>
+      <p:sp>
+        <p:nvSpPr>
+          <p:cNvPr id="6" name="TextBox 5">
+            <a:extLst>
+              <a:ext uri="{FF2B5EF4-FFF2-40B4-BE49-F238E27FC236}">
+                <a16:creationId xmlns:a16="http://schemas.microsoft.com/office/drawing/2014/main" id="{2E6412DA-6D17-40E5-6A15-8B5AF801558C}"/>
+              </a:ext>
+            </a:extLst>
+          </p:cNvPr>
+          <p:cNvSpPr txBox="1"/>
+          <p:nvPr/>
+        </p:nvSpPr>
+        <p:spPr>
+          <a:xfrm>
+            <a:off x="179512" y="1293834"/>
+            <a:ext cx="8784976" cy="372794"/>
+          </a:xfrm>
+          <a:prstGeom prst="rect">
+            <a:avLst/>
+          </a:prstGeom>
+          <a:noFill/>
+        </p:spPr>
+        <p:txBody>
+          <a:bodyPr wrap="square">
+            <a:spAutoFit/>
+          </a:bodyPr>
+          <a:lstStyle/>
+          <a:p>
+            <a:pPr marL="0" marR="0" algn="just" fontAlgn="base">
+              <a:lnSpc>
+                <a:spcPct val="107000"/>
+              </a:lnSpc>
+              <a:spcBef>
+                <a:spcPts val="0"/>
+              </a:spcBef>
+              <a:spcAft>
+                <a:spcPts val="0"/>
+              </a:spcAft>
+            </a:pPr>
+            <a:r>
+              <a:rPr lang="en-US" sz="1800" kern="100" dirty="0">
+                <a:solidFill>
+                  <a:srgbClr val="000000"/>
+                </a:solidFill>
+                <a:effectLst/>
+                <a:latin typeface="Verdana" panose="020B0604030504040204" pitchFamily="34" charset="0"/>
+                <a:ea typeface="Times New Roman" panose="02020603050405020304" pitchFamily="18" charset="0"/>
+                <a:cs typeface="Times New Roman" panose="02020603050405020304" pitchFamily="18" charset="0"/>
+              </a:rPr>
+              <a:t> </a:t>
+            </a:r>
+            <a:endParaRPr lang="en-US" sz="2800" kern="100" dirty="0">
+              <a:effectLst/>
+              <a:latin typeface="+mj-lt"/>
+              <a:ea typeface="Calibri" panose="020F0502020204030204" pitchFamily="34" charset="0"/>
+              <a:cs typeface="Times New Roman" panose="02020603050405020304" pitchFamily="18" charset="0"/>
+            </a:endParaRPr>
+          </a:p>
+        </p:txBody>
+      </p:sp>
+      <p:sp>
+        <p:nvSpPr>
+          <p:cNvPr id="3" name="TextBox 2">
+            <a:extLst>
+              <a:ext uri="{FF2B5EF4-FFF2-40B4-BE49-F238E27FC236}">
+                <a16:creationId xmlns:a16="http://schemas.microsoft.com/office/drawing/2014/main" id="{A913E1BB-7C0D-8AB9-1DD3-327E3E0EC15D}"/>
+              </a:ext>
+            </a:extLst>
+          </p:cNvPr>
+          <p:cNvSpPr txBox="1"/>
+          <p:nvPr/>
+        </p:nvSpPr>
+        <p:spPr>
+          <a:xfrm>
+            <a:off x="72008" y="2122646"/>
+            <a:ext cx="8784976" cy="2585323"/>
+          </a:xfrm>
+          <a:prstGeom prst="rect">
+            <a:avLst/>
+          </a:prstGeom>
+          <a:noFill/>
+        </p:spPr>
+        <p:txBody>
+          <a:bodyPr wrap="square" rtlCol="0">
+            <a:spAutoFit/>
+          </a:bodyPr>
+          <a:lstStyle/>
+          <a:p>
+            <a:pPr marL="285750" indent="-285750">
+              <a:buFont typeface="Arial" panose="020B0604020202020204" pitchFamily="34" charset="0"/>
+              <a:buChar char="•"/>
+            </a:pPr>
+            <a:r>
+              <a:rPr lang="en-US" dirty="0"/>
+              <a:t>Implemented user authentication to ensure secure system access.</a:t>
+            </a:r>
+          </a:p>
+          <a:p>
+            <a:pPr marL="285750" indent="-285750">
+              <a:buFont typeface="Arial" panose="020B0604020202020204" pitchFamily="34" charset="0"/>
+              <a:buChar char="•"/>
+            </a:pPr>
+            <a:endParaRPr lang="en-US" dirty="0"/>
+          </a:p>
+          <a:p>
+            <a:pPr marL="285750" indent="-285750">
+              <a:buFont typeface="Arial" panose="020B0604020202020204" pitchFamily="34" charset="0"/>
+              <a:buChar char="•"/>
+            </a:pPr>
+            <a:r>
+              <a:rPr lang="en-US" dirty="0"/>
+              <a:t>Developed functionality for API key generation and management.</a:t>
+            </a:r>
+          </a:p>
+          <a:p>
+            <a:pPr marL="285750" indent="-285750">
+              <a:buFont typeface="Arial" panose="020B0604020202020204" pitchFamily="34" charset="0"/>
+              <a:buChar char="•"/>
+            </a:pPr>
+            <a:endParaRPr lang="en-US" dirty="0"/>
+          </a:p>
+          <a:p>
+            <a:pPr marL="285750" indent="-285750">
+              <a:buFont typeface="Arial" panose="020B0604020202020204" pitchFamily="34" charset="0"/>
+              <a:buChar char="•"/>
+            </a:pPr>
+            <a:r>
+              <a:rPr lang="en-IN" dirty="0"/>
+              <a:t>Integrated PostgreSQL database for storing user and system data.</a:t>
+            </a:r>
+          </a:p>
+          <a:p>
+            <a:pPr marL="285750" indent="-285750">
+              <a:buFont typeface="Arial" panose="020B0604020202020204" pitchFamily="34" charset="0"/>
+              <a:buChar char="•"/>
+            </a:pPr>
+            <a:endParaRPr lang="en-IN" dirty="0"/>
+          </a:p>
+          <a:p>
+            <a:pPr marL="285750" indent="-285750">
+              <a:buFont typeface="Arial" panose="020B0604020202020204" pitchFamily="34" charset="0"/>
+              <a:buChar char="•"/>
+            </a:pPr>
+            <a:r>
+              <a:rPr lang="en-US" dirty="0"/>
+              <a:t>Configured Prometheus and Grafana for monitoring and performance metrics.</a:t>
+            </a:r>
+          </a:p>
+          <a:p>
+            <a:pPr marL="285750" indent="-285750">
+              <a:buFont typeface="Arial" panose="020B0604020202020204" pitchFamily="34" charset="0"/>
+              <a:buChar char="•"/>
+            </a:pPr>
+            <a:endParaRPr lang="en-US" dirty="0"/>
+          </a:p>
+          <a:p>
+            <a:pPr marL="285750" indent="-285750">
+              <a:buFont typeface="Arial" panose="020B0604020202020204" pitchFamily="34" charset="0"/>
+              <a:buChar char="•"/>
+            </a:pPr>
+            <a:r>
+              <a:rPr lang="en-US" dirty="0"/>
+              <a:t>Nearly completed the React.js frontend interface for system interaction and testing.</a:t>
+            </a:r>
+            <a:endParaRPr lang="en-IN" dirty="0"/>
+          </a:p>
+        </p:txBody>
+      </p:sp>
+    </p:spTree>
+    <p:extLst>
+      <p:ext uri="{BB962C8B-B14F-4D97-AF65-F5344CB8AC3E}">
+        <p14:creationId xmlns:p14="http://schemas.microsoft.com/office/powerpoint/2010/main" val="1305621213"/>
+      </p:ext>
+    </p:extLst>
+  </p:cSld>
+  <p:clrMapOvr>
+    <a:masterClrMapping/>
+  </p:clrMapOvr>
+</p:sld>
+</file>
+
+<file path=ppt/slides/slide7.xml><?xml version="1.0" encoding="utf-8"?>
+<p:sld xmlns:a="http://schemas.openxmlformats.org/drawingml/2006/main" xmlns:r="http://schemas.openxmlformats.org/officeDocument/2006/relationships" xmlns:p="http://schemas.openxmlformats.org/presentationml/2006/main">
+  <p:cSld>
+    <p:spTree>
+      <p:nvGrpSpPr>
+        <p:cNvPr id="1" name="">
+          <a:extLst>
+            <a:ext uri="{FF2B5EF4-FFF2-40B4-BE49-F238E27FC236}">
+              <a16:creationId xmlns:a16="http://schemas.microsoft.com/office/drawing/2014/main" id="{F175C45B-C9D0-DBF5-811F-0F08DB7B929B}"/>
+            </a:ext>
+          </a:extLst>
+        </p:cNvPr>
+        <p:cNvGrpSpPr/>
+        <p:nvPr/>
+      </p:nvGrpSpPr>
+      <p:grpSpPr>
+        <a:xfrm>
+          <a:off x="0" y="0"/>
+          <a:ext cx="0" cy="0"/>
+          <a:chOff x="0" y="0"/>
+          <a:chExt cx="0" cy="0"/>
+        </a:xfrm>
+      </p:grpSpPr>
+      <p:pic>
+        <p:nvPicPr>
+          <p:cNvPr id="4" name="Content Placeholder 3">
+            <a:extLst>
+              <a:ext uri="{FF2B5EF4-FFF2-40B4-BE49-F238E27FC236}">
+                <a16:creationId xmlns:a16="http://schemas.microsoft.com/office/drawing/2014/main" id="{ACCAFCE0-31E7-9CED-BEF6-9C94A97D7C0B}"/>
+              </a:ext>
+            </a:extLst>
+          </p:cNvPr>
+          <p:cNvPicPr>
+            <a:picLocks noGrp="1" noChangeAspect="1"/>
+          </p:cNvPicPr>
+          <p:nvPr>
+            <p:ph idx="1"/>
+          </p:nvPr>
+        </p:nvPicPr>
+        <p:blipFill>
+          <a:blip r:embed="rId3" cstate="print">
+            <a:extLst>
+              <a:ext uri="{28A0092B-C50C-407E-A947-70E740481C1C}">
+                <a14:useLocalDpi xmlns:a14="http://schemas.microsoft.com/office/drawing/2010/main" val="0"/>
+              </a:ext>
+            </a:extLst>
+          </a:blip>
+          <a:stretch>
+            <a:fillRect/>
+          </a:stretch>
+        </p:blipFill>
+        <p:spPr>
+          <a:xfrm>
+            <a:off x="1" y="0"/>
+            <a:ext cx="9180512" cy="6885384"/>
+          </a:xfrm>
+        </p:spPr>
+      </p:pic>
+      <p:sp>
+        <p:nvSpPr>
+          <p:cNvPr id="5" name="Rectangle 1">
+            <a:extLst>
+              <a:ext uri="{FF2B5EF4-FFF2-40B4-BE49-F238E27FC236}">
+                <a16:creationId xmlns:a16="http://schemas.microsoft.com/office/drawing/2014/main" id="{EC8D1C93-2569-153C-C90B-6D82C35C195E}"/>
+              </a:ext>
+            </a:extLst>
+          </p:cNvPr>
+          <p:cNvSpPr>
+            <a:spLocks noChangeArrowheads="1"/>
+          </p:cNvSpPr>
+          <p:nvPr/>
+        </p:nvSpPr>
+        <p:spPr bwMode="auto">
+          <a:xfrm>
+            <a:off x="179512" y="377423"/>
+            <a:ext cx="8964487" cy="523220"/>
+          </a:xfrm>
+          <a:prstGeom prst="rect">
+            <a:avLst/>
+          </a:prstGeom>
+          <a:noFill/>
+          <a:ln>
+            <a:noFill/>
+          </a:ln>
+          <a:effectLst/>
+          <a:extLst>
+            <a:ext uri="{909E8E84-426E-40DD-AFC4-6F175D3DCCD1}">
+              <a14:hiddenFill xmlns:a14="http://schemas.microsoft.com/office/drawing/2010/main">
+                <a:solidFill>
+                  <a:schemeClr val="accent1"/>
+                </a:solidFill>
+              </a14:hiddenFill>
+            </a:ext>
+            <a:ext uri="{91240B29-F687-4F45-9708-019B960494DF}">
+              <a14:hiddenLine xmlns:a14="http://schemas.microsoft.com/office/drawing/2010/main" w="9525">
+                <a:solidFill>
+                  <a:schemeClr val="tx1"/>
+                </a:solidFill>
+                <a:miter lim="800000"/>
+                <a:headEnd/>
+                <a:tailEnd/>
+              </a14:hiddenLine>
+            </a:ext>
+            <a:ext uri="{AF507438-7753-43E0-B8FC-AC1667EBCBE1}">
+              <a14:hiddenEffects xmlns:a14="http://schemas.microsoft.com/office/drawing/2010/main">
+                <a:effectLst>
+                  <a:outerShdw dist="35921" dir="2700000" algn="ctr" rotWithShape="0">
+                    <a:schemeClr val="bg2"/>
+                  </a:outerShdw>
+                </a:effectLst>
+              </a14:hiddenEffects>
+            </a:ext>
+          </a:extLst>
+        </p:spPr>
+        <p:txBody>
+          <a:bodyPr vert="horz" wrap="square" lIns="91440" tIns="45720" rIns="91440" bIns="45720" numCol="1" anchor="ctr" anchorCtr="0" compatLnSpc="1">
+            <a:prstTxWarp prst="textNoShape">
+              <a:avLst/>
+            </a:prstTxWarp>
+            <a:spAutoFit/>
+          </a:bodyPr>
+          <a:lstStyle/>
+          <a:p>
+            <a:pPr lvl="0">
+              <a:buSzPct val="25000"/>
+            </a:pPr>
+            <a:r>
+              <a:rPr lang="en-US" sz="2800" b="1" kern="100" dirty="0">
+                <a:latin typeface="Verdana" panose="020B0604030504040204" pitchFamily="34" charset="0"/>
+                <a:cs typeface="Times New Roman" panose="02020603050405020304" pitchFamily="18" charset="0"/>
+                <a:sym typeface="Arial"/>
+              </a:rPr>
+              <a:t>Detailed Progress – Development Phase</a:t>
+            </a:r>
+            <a:endParaRPr lang="en-IN" sz="2800" b="1" dirty="0">
+              <a:cs typeface="Times New Roman" panose="02020603050405020304" pitchFamily="18" charset="0"/>
+              <a:sym typeface="Arial"/>
+            </a:endParaRPr>
+          </a:p>
+        </p:txBody>
+      </p:sp>
+      <p:cxnSp>
+        <p:nvCxnSpPr>
+          <p:cNvPr id="7" name="Straight Connector 6">
+            <a:extLst>
+              <a:ext uri="{FF2B5EF4-FFF2-40B4-BE49-F238E27FC236}">
+                <a16:creationId xmlns:a16="http://schemas.microsoft.com/office/drawing/2014/main" id="{D6161CDA-82E4-E4CE-AB8A-F7E4594878E9}"/>
+              </a:ext>
+            </a:extLst>
+          </p:cNvPr>
+          <p:cNvCxnSpPr/>
+          <p:nvPr/>
+        </p:nvCxnSpPr>
+        <p:spPr>
+          <a:xfrm>
+            <a:off x="0" y="1061448"/>
+            <a:ext cx="9180513" cy="0"/>
+          </a:xfrm>
+          <a:prstGeom prst="line">
+            <a:avLst/>
+          </a:prstGeom>
+          <a:ln w="25400">
+            <a:solidFill>
+              <a:srgbClr val="0060AA"/>
+            </a:solidFill>
+          </a:ln>
+        </p:spPr>
+        <p:style>
+          <a:lnRef idx="1">
+            <a:schemeClr val="accent1"/>
+          </a:lnRef>
+          <a:fillRef idx="0">
+            <a:schemeClr val="accent1"/>
+          </a:fillRef>
+          <a:effectRef idx="0">
+            <a:schemeClr val="accent1"/>
+          </a:effectRef>
+          <a:fontRef idx="minor">
+            <a:schemeClr val="tx1"/>
+          </a:fontRef>
+        </p:style>
+      </p:cxnSp>
+      <p:pic>
+        <p:nvPicPr>
+          <p:cNvPr id="9" name="Picture 8">
+            <a:extLst>
+              <a:ext uri="{FF2B5EF4-FFF2-40B4-BE49-F238E27FC236}">
+                <a16:creationId xmlns:a16="http://schemas.microsoft.com/office/drawing/2014/main" id="{BFB65409-50C0-1C48-4C06-AA7695D3A296}"/>
+              </a:ext>
+            </a:extLst>
+          </p:cNvPr>
+          <p:cNvPicPr>
+            <a:picLocks noChangeAspect="1"/>
+          </p:cNvPicPr>
+          <p:nvPr/>
+        </p:nvPicPr>
+        <p:blipFill>
+          <a:blip r:embed="rId4" cstate="print">
+            <a:extLst>
+              <a:ext uri="{28A0092B-C50C-407E-A947-70E740481C1C}">
+                <a14:useLocalDpi xmlns:a14="http://schemas.microsoft.com/office/drawing/2010/main" val="0"/>
+              </a:ext>
+            </a:extLst>
+          </a:blip>
+          <a:stretch>
+            <a:fillRect/>
+          </a:stretch>
+        </p:blipFill>
+        <p:spPr>
+          <a:xfrm>
+            <a:off x="72008" y="6309320"/>
+            <a:ext cx="2411760" cy="346691"/>
+          </a:xfrm>
+          <a:prstGeom prst="rect">
+            <a:avLst/>
+          </a:prstGeom>
+        </p:spPr>
+      </p:pic>
+      <p:sp>
+        <p:nvSpPr>
+          <p:cNvPr id="2" name="TextBox 1">
+            <a:extLst>
+              <a:ext uri="{FF2B5EF4-FFF2-40B4-BE49-F238E27FC236}">
+                <a16:creationId xmlns:a16="http://schemas.microsoft.com/office/drawing/2014/main" id="{E7FA9F7D-EC2E-B088-F2B5-6AAD995D5F76}"/>
+              </a:ext>
+            </a:extLst>
+          </p:cNvPr>
+          <p:cNvSpPr txBox="1"/>
+          <p:nvPr/>
+        </p:nvSpPr>
+        <p:spPr>
+          <a:xfrm>
+            <a:off x="179512" y="1250416"/>
+            <a:ext cx="8568952" cy="5355312"/>
+          </a:xfrm>
+          <a:prstGeom prst="rect">
+            <a:avLst/>
+          </a:prstGeom>
+          <a:noFill/>
+        </p:spPr>
+        <p:txBody>
+          <a:bodyPr wrap="square" rtlCol="0">
+            <a:spAutoFit/>
+          </a:bodyPr>
+          <a:lstStyle/>
+          <a:p>
+            <a:pPr marL="285750" indent="-285750">
+              <a:buFont typeface="Arial" panose="020B0604020202020204" pitchFamily="34" charset="0"/>
+              <a:buChar char="•"/>
+            </a:pPr>
+            <a:r>
+              <a:rPr lang="en-US" dirty="0"/>
+              <a:t>Designed a modular system architecture separating authentication, rate limiting, caching, and monitoring components.</a:t>
+            </a:r>
+          </a:p>
+          <a:p>
+            <a:pPr marL="285750" indent="-285750">
+              <a:buFont typeface="Arial" panose="020B0604020202020204" pitchFamily="34" charset="0"/>
+              <a:buChar char="•"/>
+            </a:pPr>
+            <a:endParaRPr lang="en-US" dirty="0"/>
+          </a:p>
+          <a:p>
+            <a:pPr marL="285750" indent="-285750">
+              <a:buFont typeface="Arial" panose="020B0604020202020204" pitchFamily="34" charset="0"/>
+              <a:buChar char="•"/>
+            </a:pPr>
+            <a:r>
+              <a:rPr lang="en-US" dirty="0"/>
+              <a:t>Developed Spring Boot backend services for authentication and API key management.</a:t>
+            </a:r>
+          </a:p>
+          <a:p>
+            <a:pPr marL="285750" indent="-285750">
+              <a:buFont typeface="Arial" panose="020B0604020202020204" pitchFamily="34" charset="0"/>
+              <a:buChar char="•"/>
+            </a:pPr>
+            <a:endParaRPr lang="en-US" dirty="0"/>
+          </a:p>
+          <a:p>
+            <a:pPr marL="285750" indent="-285750">
+              <a:buFont typeface="Arial" panose="020B0604020202020204" pitchFamily="34" charset="0"/>
+              <a:buChar char="•"/>
+            </a:pPr>
+            <a:r>
+              <a:rPr lang="en-US" dirty="0"/>
+              <a:t>Implemented the Sliding Window rate limiting algorithm for controlling API request frequency.</a:t>
+            </a:r>
+          </a:p>
+          <a:p>
+            <a:pPr marL="285750" indent="-285750">
+              <a:buFont typeface="Arial" panose="020B0604020202020204" pitchFamily="34" charset="0"/>
+              <a:buChar char="•"/>
+            </a:pPr>
+            <a:endParaRPr lang="en-US" dirty="0"/>
+          </a:p>
+          <a:p>
+            <a:pPr marL="285750" indent="-285750">
+              <a:buFont typeface="Arial" panose="020B0604020202020204" pitchFamily="34" charset="0"/>
+              <a:buChar char="•"/>
+            </a:pPr>
+            <a:r>
+              <a:rPr lang="en-US" dirty="0"/>
+              <a:t>Integrated PostgreSQL database for storing user and API key data.</a:t>
+            </a:r>
+          </a:p>
+          <a:p>
+            <a:pPr marL="285750" indent="-285750">
+              <a:buFont typeface="Arial" panose="020B0604020202020204" pitchFamily="34" charset="0"/>
+              <a:buChar char="•"/>
+            </a:pPr>
+            <a:endParaRPr lang="en-US" dirty="0"/>
+          </a:p>
+          <a:p>
+            <a:pPr marL="285750" indent="-285750">
+              <a:buFont typeface="Arial" panose="020B0604020202020204" pitchFamily="34" charset="0"/>
+              <a:buChar char="•"/>
+            </a:pPr>
+            <a:r>
+              <a:rPr lang="en-US" dirty="0"/>
+              <a:t>Implemented Redis caching for distributed request tracking and faster request processing.</a:t>
+            </a:r>
+          </a:p>
+          <a:p>
+            <a:pPr marL="285750" indent="-285750">
+              <a:buFont typeface="Arial" panose="020B0604020202020204" pitchFamily="34" charset="0"/>
+              <a:buChar char="•"/>
+            </a:pPr>
+            <a:endParaRPr lang="en-US" dirty="0"/>
+          </a:p>
+          <a:p>
+            <a:pPr marL="285750" indent="-285750">
+              <a:buFont typeface="Arial" panose="020B0604020202020204" pitchFamily="34" charset="0"/>
+              <a:buChar char="•"/>
+            </a:pPr>
+            <a:r>
+              <a:rPr lang="en-US" dirty="0"/>
+              <a:t>Set up Prometheus and Grafana for monitoring system metrics and visualizing performance data.</a:t>
+            </a:r>
+          </a:p>
+          <a:p>
+            <a:pPr marL="285750" indent="-285750">
+              <a:buFont typeface="Arial" panose="020B0604020202020204" pitchFamily="34" charset="0"/>
+              <a:buChar char="•"/>
+            </a:pPr>
+            <a:endParaRPr lang="en-US" dirty="0"/>
+          </a:p>
+          <a:p>
+            <a:pPr marL="285750" indent="-285750">
+              <a:buFont typeface="Arial" panose="020B0604020202020204" pitchFamily="34" charset="0"/>
+              <a:buChar char="•"/>
+            </a:pPr>
+            <a:r>
+              <a:rPr lang="en-US" dirty="0"/>
+              <a:t>Performed API testing and validation using Postman to verify system functionality.</a:t>
+            </a:r>
+          </a:p>
+          <a:p>
+            <a:endParaRPr lang="en-US" dirty="0"/>
+          </a:p>
+          <a:p>
+            <a:endParaRPr lang="en-IN" dirty="0"/>
+          </a:p>
+        </p:txBody>
+      </p:sp>
+    </p:spTree>
+    <p:extLst>
+      <p:ext uri="{BB962C8B-B14F-4D97-AF65-F5344CB8AC3E}">
+        <p14:creationId xmlns:p14="http://schemas.microsoft.com/office/powerpoint/2010/main" val="1302546169"/>
+      </p:ext>
+    </p:extLst>
+  </p:cSld>
+  <p:clrMapOvr>
+    <a:masterClrMapping/>
+  </p:clrMapOvr>
+</p:sld>
+</file>
+
+<file path=ppt/slides/slide8.xml><?xml version="1.0" encoding="utf-8"?>
+<p:sld xmlns:a="http://schemas.openxmlformats.org/drawingml/2006/main" xmlns:r="http://schemas.openxmlformats.org/officeDocument/2006/relationships" xmlns:p="http://schemas.openxmlformats.org/presentationml/2006/main">
+  <p:cSld>
+    <p:spTree>
+      <p:nvGrpSpPr>
+        <p:cNvPr id="1" name=""/>
+        <p:cNvGrpSpPr/>
+        <p:nvPr/>
+      </p:nvGrpSpPr>
+      <p:grpSpPr>
+        <a:xfrm>
+          <a:off x="0" y="0"/>
+          <a:ext cx="0" cy="0"/>
+          <a:chOff x="0" y="0"/>
+          <a:chExt cx="0" cy="0"/>
+        </a:xfrm>
+      </p:grpSpPr>
+      <p:pic>
+        <p:nvPicPr>
+          <p:cNvPr id="4" name="Content Placeholder 3"/>
+          <p:cNvPicPr>
+            <a:picLocks noGrp="1" noChangeAspect="1"/>
+          </p:cNvPicPr>
+          <p:nvPr>
+            <p:ph idx="1"/>
+          </p:nvPr>
+        </p:nvPicPr>
+        <p:blipFill>
+          <a:blip r:embed="rId3" cstate="print">
+            <a:extLst>
+              <a:ext uri="{28A0092B-C50C-407E-A947-70E740481C1C}">
+                <a14:useLocalDpi xmlns:a14="http://schemas.microsoft.com/office/drawing/2010/main" val="0"/>
+              </a:ext>
+            </a:extLst>
+          </a:blip>
+          <a:stretch>
+            <a:fillRect/>
+          </a:stretch>
+        </p:blipFill>
+        <p:spPr>
+          <a:xfrm>
+            <a:off x="44047" y="0"/>
+            <a:ext cx="9180512" cy="6885384"/>
+          </a:xfrm>
+        </p:spPr>
+      </p:pic>
+      <p:sp>
+        <p:nvSpPr>
+          <p:cNvPr id="5" name="Rectangle 1"/>
+          <p:cNvSpPr>
+            <a:spLocks noChangeArrowheads="1"/>
+          </p:cNvSpPr>
+          <p:nvPr/>
+        </p:nvSpPr>
+        <p:spPr bwMode="auto">
+          <a:xfrm>
+            <a:off x="103415" y="298973"/>
+            <a:ext cx="4392488" cy="584775"/>
+          </a:xfrm>
+          <a:prstGeom prst="rect">
+            <a:avLst/>
+          </a:prstGeom>
+          <a:noFill/>
+          <a:ln>
+            <a:noFill/>
+          </a:ln>
+          <a:effectLst/>
+          <a:extLst>
+            <a:ext uri="{909E8E84-426E-40DD-AFC4-6F175D3DCCD1}">
+              <a14:hiddenFill xmlns:a14="http://schemas.microsoft.com/office/drawing/2010/main">
+                <a:solidFill>
+                  <a:schemeClr val="accent1"/>
+                </a:solidFill>
+              </a14:hiddenFill>
+            </a:ext>
+            <a:ext uri="{91240B29-F687-4F45-9708-019B960494DF}">
+              <a14:hiddenLine xmlns:a14="http://schemas.microsoft.com/office/drawing/2010/main" w="9525">
+                <a:solidFill>
+                  <a:schemeClr val="tx1"/>
+                </a:solidFill>
+                <a:miter lim="800000"/>
+                <a:headEnd/>
+                <a:tailEnd/>
+              </a14:hiddenLine>
+            </a:ext>
+            <a:ext uri="{AF507438-7753-43E0-B8FC-AC1667EBCBE1}">
+              <a14:hiddenEffects xmlns:a14="http://schemas.microsoft.com/office/drawing/2010/main">
+                <a:effectLst>
+                  <a:outerShdw dist="35921" dir="2700000" algn="ctr" rotWithShape="0">
+                    <a:schemeClr val="bg2"/>
+                  </a:outerShdw>
+                </a:effectLst>
+              </a14:hiddenEffects>
+            </a:ext>
+          </a:extLst>
+        </p:spPr>
+        <p:txBody>
+          <a:bodyPr vert="horz" wrap="square" lIns="91440" tIns="45720" rIns="91440" bIns="45720" numCol="1" anchor="ctr" anchorCtr="0" compatLnSpc="1">
+            <a:prstTxWarp prst="textNoShape">
+              <a:avLst/>
+            </a:prstTxWarp>
+            <a:spAutoFit/>
+          </a:bodyPr>
+          <a:lstStyle/>
+          <a:p>
+            <a:pPr lvl="0">
+              <a:buSzPct val="25000"/>
+            </a:pPr>
+            <a:r>
+              <a:rPr lang="en-US" sz="3200" b="1" kern="100" dirty="0">
+                <a:effectLst/>
+                <a:latin typeface="Verdana" panose="020B0604030504040204" pitchFamily="34" charset="0"/>
+                <a:ea typeface="Times New Roman" panose="02020603050405020304" pitchFamily="18" charset="0"/>
+                <a:cs typeface="Times New Roman" panose="02020603050405020304" pitchFamily="18" charset="0"/>
+              </a:rPr>
+              <a:t>Methodology</a:t>
+            </a:r>
+            <a:endParaRPr lang="en-IN" sz="3200" b="1" dirty="0">
+              <a:solidFill>
+                <a:srgbClr val="E31E24"/>
+              </a:solidFill>
+              <a:cs typeface="Times New Roman" panose="02020603050405020304" pitchFamily="18" charset="0"/>
+              <a:sym typeface="Arial"/>
+            </a:endParaRPr>
+          </a:p>
+        </p:txBody>
+      </p:sp>
+      <p:cxnSp>
+        <p:nvCxnSpPr>
+          <p:cNvPr id="7" name="Straight Connector 6"/>
+          <p:cNvCxnSpPr/>
+          <p:nvPr/>
+        </p:nvCxnSpPr>
+        <p:spPr>
+          <a:xfrm>
+            <a:off x="0" y="1061448"/>
+            <a:ext cx="9180513" cy="0"/>
+          </a:xfrm>
+          <a:prstGeom prst="line">
+            <a:avLst/>
+          </a:prstGeom>
+          <a:ln w="25400">
+            <a:solidFill>
+              <a:srgbClr val="0060AA"/>
+            </a:solidFill>
+          </a:ln>
+        </p:spPr>
+        <p:style>
+          <a:lnRef idx="1">
+            <a:schemeClr val="accent1"/>
+          </a:lnRef>
+          <a:fillRef idx="0">
+            <a:schemeClr val="accent1"/>
+          </a:fillRef>
+          <a:effectRef idx="0">
+            <a:schemeClr val="accent1"/>
+          </a:effectRef>
+          <a:fontRef idx="minor">
+            <a:schemeClr val="tx1"/>
+          </a:fontRef>
+        </p:style>
+      </p:cxnSp>
+      <p:pic>
+        <p:nvPicPr>
+          <p:cNvPr id="9" name="Picture 8"/>
+          <p:cNvPicPr>
+            <a:picLocks noChangeAspect="1"/>
+          </p:cNvPicPr>
+          <p:nvPr/>
+        </p:nvPicPr>
+        <p:blipFill>
+          <a:blip r:embed="rId4" cstate="print">
+            <a:extLst>
+              <a:ext uri="{28A0092B-C50C-407E-A947-70E740481C1C}">
+                <a14:useLocalDpi xmlns:a14="http://schemas.microsoft.com/office/drawing/2010/main" val="0"/>
+              </a:ext>
+            </a:extLst>
+          </a:blip>
+          <a:stretch>
+            <a:fillRect/>
+          </a:stretch>
+        </p:blipFill>
+        <p:spPr>
+          <a:xfrm>
+            <a:off x="72008" y="6309320"/>
+            <a:ext cx="2411760" cy="346691"/>
+          </a:xfrm>
+          <a:prstGeom prst="rect">
+            <a:avLst/>
+          </a:prstGeom>
+        </p:spPr>
+      </p:pic>
+      <p:sp>
+        <p:nvSpPr>
+          <p:cNvPr id="6" name="TextBox 5">
+            <a:extLst>
+              <a:ext uri="{FF2B5EF4-FFF2-40B4-BE49-F238E27FC236}">
+                <a16:creationId xmlns:a16="http://schemas.microsoft.com/office/drawing/2014/main" id="{AE24D516-77C6-C96A-5F77-D099623448D8}"/>
+              </a:ext>
+            </a:extLst>
+          </p:cNvPr>
+          <p:cNvSpPr txBox="1"/>
+          <p:nvPr/>
+        </p:nvSpPr>
+        <p:spPr>
+          <a:xfrm>
+            <a:off x="179512" y="1293834"/>
+            <a:ext cx="8784976" cy="372794"/>
+          </a:xfrm>
+          <a:prstGeom prst="rect">
+            <a:avLst/>
+          </a:prstGeom>
+          <a:noFill/>
+        </p:spPr>
+        <p:txBody>
+          <a:bodyPr wrap="square">
+            <a:spAutoFit/>
+          </a:bodyPr>
+          <a:lstStyle/>
+          <a:p>
+            <a:pPr marL="0" marR="0" algn="just" fontAlgn="base">
+              <a:lnSpc>
+                <a:spcPct val="107000"/>
+              </a:lnSpc>
+              <a:spcBef>
+                <a:spcPts val="0"/>
+              </a:spcBef>
+              <a:spcAft>
+                <a:spcPts val="0"/>
+              </a:spcAft>
+            </a:pPr>
+            <a:r>
+              <a:rPr lang="en-US" sz="1800" kern="100" dirty="0">
+                <a:solidFill>
+                  <a:srgbClr val="000000"/>
+                </a:solidFill>
+                <a:effectLst/>
+                <a:latin typeface="Verdana" panose="020B0604030504040204" pitchFamily="34" charset="0"/>
+                <a:ea typeface="Times New Roman" panose="02020603050405020304" pitchFamily="18" charset="0"/>
+                <a:cs typeface="Times New Roman" panose="02020603050405020304" pitchFamily="18" charset="0"/>
+              </a:rPr>
+              <a:t> </a:t>
+            </a:r>
+            <a:endParaRPr lang="en-US" sz="2800" kern="100" dirty="0">
+              <a:effectLst/>
+              <a:latin typeface="+mj-lt"/>
+              <a:ea typeface="Calibri" panose="020F0502020204030204" pitchFamily="34" charset="0"/>
+              <a:cs typeface="Times New Roman" panose="02020603050405020304" pitchFamily="18" charset="0"/>
+            </a:endParaRPr>
+          </a:p>
+        </p:txBody>
+      </p:sp>
+      <p:sp>
+        <p:nvSpPr>
+          <p:cNvPr id="2" name="TextBox 1">
+            <a:extLst>
+              <a:ext uri="{FF2B5EF4-FFF2-40B4-BE49-F238E27FC236}">
+                <a16:creationId xmlns:a16="http://schemas.microsoft.com/office/drawing/2014/main" id="{6E1724BD-CFBC-315D-6CBC-D73BC36B8E05}"/>
+              </a:ext>
+            </a:extLst>
+          </p:cNvPr>
+          <p:cNvSpPr txBox="1"/>
+          <p:nvPr/>
+        </p:nvSpPr>
+        <p:spPr>
+          <a:xfrm>
+            <a:off x="75733" y="1408521"/>
+            <a:ext cx="8920441" cy="3970318"/>
+          </a:xfrm>
+          <a:prstGeom prst="rect">
+            <a:avLst/>
+          </a:prstGeom>
+          <a:noFill/>
+        </p:spPr>
+        <p:txBody>
+          <a:bodyPr wrap="square" rtlCol="0">
+            <a:spAutoFit/>
+          </a:bodyPr>
+          <a:lstStyle/>
+          <a:p>
+            <a:pPr marL="285750" indent="-285750">
+              <a:buFont typeface="Arial" panose="020B0604020202020204" pitchFamily="34" charset="0"/>
+              <a:buChar char="•"/>
+            </a:pPr>
+            <a:r>
+              <a:rPr lang="en-US" dirty="0"/>
+              <a:t>The system follows a distributed client–server architecture to efficiently manage high API traffic.</a:t>
+            </a:r>
+          </a:p>
+          <a:p>
+            <a:pPr marL="285750" indent="-285750">
+              <a:buFont typeface="Arial" panose="020B0604020202020204" pitchFamily="34" charset="0"/>
+              <a:buChar char="•"/>
+            </a:pPr>
+            <a:endParaRPr lang="en-US" dirty="0"/>
+          </a:p>
+          <a:p>
+            <a:pPr marL="285750" indent="-285750">
+              <a:buFont typeface="Arial" panose="020B0604020202020204" pitchFamily="34" charset="0"/>
+              <a:buChar char="•"/>
+            </a:pPr>
+            <a:r>
+              <a:rPr lang="en-US" dirty="0"/>
+              <a:t>Client requests are first received by the Spring Boot application server, which checks rate limits before processing the request.</a:t>
+            </a:r>
+          </a:p>
+          <a:p>
+            <a:pPr marL="285750" indent="-285750">
+              <a:buFont typeface="Arial" panose="020B0604020202020204" pitchFamily="34" charset="0"/>
+              <a:buChar char="•"/>
+            </a:pPr>
+            <a:endParaRPr lang="en-US" dirty="0"/>
+          </a:p>
+          <a:p>
+            <a:pPr marL="285750" indent="-285750">
+              <a:buFont typeface="Arial" panose="020B0604020202020204" pitchFamily="34" charset="0"/>
+              <a:buChar char="•"/>
+            </a:pPr>
+            <a:r>
+              <a:rPr lang="en-US" dirty="0"/>
+              <a:t>The Sliding Window rate limiting algorithm is applied to control the number of requests within a defined time period.</a:t>
+            </a:r>
+          </a:p>
+          <a:p>
+            <a:pPr marL="285750" indent="-285750">
+              <a:buFont typeface="Arial" panose="020B0604020202020204" pitchFamily="34" charset="0"/>
+              <a:buChar char="•"/>
+            </a:pPr>
+            <a:endParaRPr lang="en-US" dirty="0"/>
+          </a:p>
+          <a:p>
+            <a:pPr marL="285750" indent="-285750">
+              <a:buFont typeface="Arial" panose="020B0604020202020204" pitchFamily="34" charset="0"/>
+              <a:buChar char="•"/>
+            </a:pPr>
+            <a:r>
+              <a:rPr lang="en-US" dirty="0"/>
+              <a:t>Redis is used as a centralized in-memory datastore to track request counts and ensure fast processing.</a:t>
+            </a:r>
+          </a:p>
+          <a:p>
+            <a:pPr marL="285750" indent="-285750">
+              <a:buFont typeface="Arial" panose="020B0604020202020204" pitchFamily="34" charset="0"/>
+              <a:buChar char="•"/>
+            </a:pPr>
+            <a:endParaRPr lang="en-US" dirty="0"/>
+          </a:p>
+          <a:p>
+            <a:pPr marL="285750" indent="-285750">
+              <a:buFont typeface="Arial" panose="020B0604020202020204" pitchFamily="34" charset="0"/>
+              <a:buChar char="•"/>
+            </a:pPr>
+            <a:r>
+              <a:rPr lang="en-US" dirty="0"/>
+              <a:t>Prometheus and Grafana are used to collect and visualize system metrics for monitoring performance and request activity.</a:t>
+            </a:r>
+            <a:endParaRPr lang="en-IN" dirty="0"/>
+          </a:p>
+        </p:txBody>
+      </p:sp>
+    </p:spTree>
+    <p:extLst>
+      <p:ext uri="{BB962C8B-B14F-4D97-AF65-F5344CB8AC3E}">
+        <p14:creationId xmlns:p14="http://schemas.microsoft.com/office/powerpoint/2010/main" val="1099878333"/>
+      </p:ext>
+    </p:extLst>
+  </p:cSld>
+  <p:clrMapOvr>
+    <a:masterClrMapping/>
+  </p:clrMapOvr>
+</p:sld>
+</file>
+
+<file path=ppt/slides/slide9.xml><?xml version="1.0" encoding="utf-8"?>
+<p:sld xmlns:a="http://schemas.openxmlformats.org/drawingml/2006/main" xmlns:r="http://schemas.openxmlformats.org/officeDocument/2006/relationships" xmlns:p="http://schemas.openxmlformats.org/presentationml/2006/main">
+  <p:cSld>
+    <p:spTree>
+      <p:nvGrpSpPr>
+        <p:cNvPr id="1" name="">
+          <a:extLst>
+            <a:ext uri="{FF2B5EF4-FFF2-40B4-BE49-F238E27FC236}">
+              <a16:creationId xmlns:a16="http://schemas.microsoft.com/office/drawing/2014/main" id="{C82CBE56-1D41-7167-8FFB-A09C6DDBB472}"/>
+            </a:ext>
+          </a:extLst>
+        </p:cNvPr>
+        <p:cNvGrpSpPr/>
+        <p:nvPr/>
+      </p:nvGrpSpPr>
+      <p:grpSpPr>
+        <a:xfrm>
+          <a:off x="0" y="0"/>
+          <a:ext cx="0" cy="0"/>
+          <a:chOff x="0" y="0"/>
+          <a:chExt cx="0" cy="0"/>
+        </a:xfrm>
+      </p:grpSpPr>
+      <p:pic>
+        <p:nvPicPr>
+          <p:cNvPr id="4" name="Content Placeholder 3">
+            <a:extLst>
+              <a:ext uri="{FF2B5EF4-FFF2-40B4-BE49-F238E27FC236}">
+                <a16:creationId xmlns:a16="http://schemas.microsoft.com/office/drawing/2014/main" id="{AFB3A7BE-7862-048E-951C-86CFD388A532}"/>
+              </a:ext>
+            </a:extLst>
+          </p:cNvPr>
+          <p:cNvPicPr>
+            <a:picLocks noGrp="1" noChangeAspect="1"/>
+          </p:cNvPicPr>
+          <p:nvPr>
+            <p:ph idx="1"/>
+          </p:nvPr>
+        </p:nvPicPr>
+        <p:blipFill>
+          <a:blip r:embed="rId3" cstate="print">
+            <a:extLst>
+              <a:ext uri="{28A0092B-C50C-407E-A947-70E740481C1C}">
+                <a14:useLocalDpi xmlns:a14="http://schemas.microsoft.com/office/drawing/2010/main" val="0"/>
+              </a:ext>
+            </a:extLst>
+          </a:blip>
+          <a:stretch>
+            <a:fillRect/>
+          </a:stretch>
+        </p:blipFill>
+        <p:spPr>
+          <a:xfrm>
+            <a:off x="1" y="0"/>
+            <a:ext cx="9180512" cy="6885384"/>
+          </a:xfrm>
+        </p:spPr>
+      </p:pic>
+      <p:sp>
+        <p:nvSpPr>
+          <p:cNvPr id="5" name="Rectangle 1">
+            <a:extLst>
+              <a:ext uri="{FF2B5EF4-FFF2-40B4-BE49-F238E27FC236}">
+                <a16:creationId xmlns:a16="http://schemas.microsoft.com/office/drawing/2014/main" id="{BF1F4E46-D933-954B-D887-0C743D7A6222}"/>
+              </a:ext>
+            </a:extLst>
+          </p:cNvPr>
+          <p:cNvSpPr>
+            <a:spLocks noChangeArrowheads="1"/>
+          </p:cNvSpPr>
+          <p:nvPr/>
+        </p:nvSpPr>
+        <p:spPr bwMode="auto">
+          <a:xfrm>
+            <a:off x="177133" y="100424"/>
+            <a:ext cx="8280920" cy="1077218"/>
+          </a:xfrm>
+          <a:prstGeom prst="rect">
+            <a:avLst/>
+          </a:prstGeom>
+          <a:noFill/>
+          <a:ln>
+            <a:noFill/>
+          </a:ln>
+          <a:effectLst/>
+          <a:extLst>
+            <a:ext uri="{909E8E84-426E-40DD-AFC4-6F175D3DCCD1}">
+              <a14:hiddenFill xmlns:a14="http://schemas.microsoft.com/office/drawing/2010/main">
+                <a:solidFill>
+                  <a:schemeClr val="accent1"/>
+                </a:solidFill>
+              </a14:hiddenFill>
+            </a:ext>
+            <a:ext uri="{91240B29-F687-4F45-9708-019B960494DF}">
+              <a14:hiddenLine xmlns:a14="http://schemas.microsoft.com/office/drawing/2010/main" w="9525">
+                <a:solidFill>
+                  <a:schemeClr val="tx1"/>
+                </a:solidFill>
+                <a:miter lim="800000"/>
+                <a:headEnd/>
+                <a:tailEnd/>
+              </a14:hiddenLine>
+            </a:ext>
+            <a:ext uri="{AF507438-7753-43E0-B8FC-AC1667EBCBE1}">
+              <a14:hiddenEffects xmlns:a14="http://schemas.microsoft.com/office/drawing/2010/main">
+                <a:effectLst>
+                  <a:outerShdw dist="35921" dir="2700000" algn="ctr" rotWithShape="0">
+                    <a:schemeClr val="bg2"/>
+                  </a:outerShdw>
+                </a:effectLst>
+              </a14:hiddenEffects>
+            </a:ext>
+          </a:extLst>
+        </p:spPr>
+        <p:txBody>
+          <a:bodyPr vert="horz" wrap="square" lIns="91440" tIns="45720" rIns="91440" bIns="45720" numCol="1" anchor="ctr" anchorCtr="0" compatLnSpc="1">
+            <a:prstTxWarp prst="textNoShape">
+              <a:avLst/>
+            </a:prstTxWarp>
+            <a:spAutoFit/>
+          </a:bodyPr>
+          <a:lstStyle/>
+          <a:p>
+            <a:pPr lvl="0">
+              <a:buSzPct val="25000"/>
+            </a:pPr>
+            <a:r>
+              <a:rPr lang="en-US" sz="3200" b="1" kern="100" dirty="0">
+                <a:effectLst/>
+                <a:latin typeface="Verdana" panose="020B0604030504040204" pitchFamily="34" charset="0"/>
+                <a:ea typeface="Times New Roman" panose="02020603050405020304" pitchFamily="18" charset="0"/>
+                <a:cs typeface="Times New Roman" panose="02020603050405020304" pitchFamily="18" charset="0"/>
+              </a:rPr>
+              <a:t>Prototype/Project Flow diagram/Architecture</a:t>
+            </a:r>
+            <a:endParaRPr lang="en-IN" sz="3200" b="1" dirty="0">
+              <a:solidFill>
+                <a:srgbClr val="E31E24"/>
+              </a:solidFill>
+              <a:cs typeface="Times New Roman" panose="02020603050405020304" pitchFamily="18" charset="0"/>
+              <a:sym typeface="Arial"/>
+            </a:endParaRPr>
+          </a:p>
+        </p:txBody>
+      </p:sp>
+      <p:cxnSp>
+        <p:nvCxnSpPr>
+          <p:cNvPr id="7" name="Straight Connector 6">
+            <a:extLst>
+              <a:ext uri="{FF2B5EF4-FFF2-40B4-BE49-F238E27FC236}">
+                <a16:creationId xmlns:a16="http://schemas.microsoft.com/office/drawing/2014/main" id="{DF222086-A20A-7049-0744-A17C1E596D3B}"/>
+              </a:ext>
+            </a:extLst>
+          </p:cNvPr>
+          <p:cNvCxnSpPr/>
+          <p:nvPr/>
+        </p:nvCxnSpPr>
+        <p:spPr>
+          <a:xfrm>
+            <a:off x="0" y="1061448"/>
+            <a:ext cx="9180513" cy="0"/>
+          </a:xfrm>
+          <a:prstGeom prst="line">
+            <a:avLst/>
+          </a:prstGeom>
+          <a:ln w="25400">
+            <a:solidFill>
+              <a:srgbClr val="0060AA"/>
+            </a:solidFill>
+          </a:ln>
+        </p:spPr>
+        <p:style>
+          <a:lnRef idx="1">
+            <a:schemeClr val="accent1"/>
+          </a:lnRef>
+          <a:fillRef idx="0">
+            <a:schemeClr val="accent1"/>
+          </a:fillRef>
+          <a:effectRef idx="0">
+            <a:schemeClr val="accent1"/>
+          </a:effectRef>
+          <a:fontRef idx="minor">
+            <a:schemeClr val="tx1"/>
+          </a:fontRef>
+        </p:style>
+      </p:cxnSp>
+      <p:pic>
+        <p:nvPicPr>
+          <p:cNvPr id="9" name="Picture 8">
+            <a:extLst>
+              <a:ext uri="{FF2B5EF4-FFF2-40B4-BE49-F238E27FC236}">
+                <a16:creationId xmlns:a16="http://schemas.microsoft.com/office/drawing/2014/main" id="{3926CD72-25A6-86DC-34B2-F6A291749F32}"/>
+              </a:ext>
+            </a:extLst>
+          </p:cNvPr>
+          <p:cNvPicPr>
+            <a:picLocks noChangeAspect="1"/>
+          </p:cNvPicPr>
+          <p:nvPr/>
+        </p:nvPicPr>
+        <p:blipFill>
+          <a:blip r:embed="rId4" cstate="print">
+            <a:extLst>
+              <a:ext uri="{28A0092B-C50C-407E-A947-70E740481C1C}">
+                <a14:useLocalDpi xmlns:a14="http://schemas.microsoft.com/office/drawing/2010/main" val="0"/>
+              </a:ext>
+            </a:extLst>
+          </a:blip>
+          <a:stretch>
+            <a:fillRect/>
+          </a:stretch>
+        </p:blipFill>
+        <p:spPr>
+          <a:xfrm>
+            <a:off x="72008" y="6309320"/>
+            <a:ext cx="2411760" cy="346691"/>
+          </a:xfrm>
+          <a:prstGeom prst="rect">
+            <a:avLst/>
+          </a:prstGeom>
+        </p:spPr>
+      </p:pic>
+      <p:sp>
+        <p:nvSpPr>
+          <p:cNvPr id="6" name="TextBox 5">
+            <a:extLst>
+              <a:ext uri="{FF2B5EF4-FFF2-40B4-BE49-F238E27FC236}">
+                <a16:creationId xmlns:a16="http://schemas.microsoft.com/office/drawing/2014/main" id="{D4D0BEBF-445B-BE7B-3FF6-A71A2B587371}"/>
+              </a:ext>
+            </a:extLst>
+          </p:cNvPr>
+          <p:cNvSpPr txBox="1"/>
+          <p:nvPr/>
+        </p:nvSpPr>
+        <p:spPr>
+          <a:xfrm>
+            <a:off x="179512" y="1293834"/>
+            <a:ext cx="8784976" cy="372794"/>
+          </a:xfrm>
+          <a:prstGeom prst="rect">
+            <a:avLst/>
+          </a:prstGeom>
+          <a:noFill/>
+        </p:spPr>
+        <p:txBody>
+          <a:bodyPr wrap="square">
+            <a:spAutoFit/>
+          </a:bodyPr>
+          <a:lstStyle/>
+          <a:p>
+            <a:pPr marL="0" marR="0" algn="just" fontAlgn="base">
+              <a:lnSpc>
+                <a:spcPct val="107000"/>
+              </a:lnSpc>
+              <a:spcBef>
+                <a:spcPts val="0"/>
+              </a:spcBef>
+              <a:spcAft>
+                <a:spcPts val="0"/>
+              </a:spcAft>
+            </a:pPr>
+            <a:r>
+              <a:rPr lang="en-US" sz="1800" kern="100" dirty="0">
+                <a:solidFill>
+                  <a:srgbClr val="000000"/>
+                </a:solidFill>
+                <a:effectLst/>
+                <a:latin typeface="Verdana" panose="020B0604030504040204" pitchFamily="34" charset="0"/>
+                <a:ea typeface="Times New Roman" panose="02020603050405020304" pitchFamily="18" charset="0"/>
+                <a:cs typeface="Times New Roman" panose="02020603050405020304" pitchFamily="18" charset="0"/>
+              </a:rPr>
+              <a:t> </a:t>
+            </a:r>
+            <a:endParaRPr lang="en-US" sz="2800" kern="100" dirty="0">
+              <a:effectLst/>
+              <a:latin typeface="+mj-lt"/>
+              <a:ea typeface="Calibri" panose="020F0502020204030204" pitchFamily="34" charset="0"/>
+              <a:cs typeface="Times New Roman" panose="02020603050405020304" pitchFamily="18" charset="0"/>
+            </a:endParaRPr>
+          </a:p>
+        </p:txBody>
+      </p:sp>
+      <p:sp>
+        <p:nvSpPr>
+          <p:cNvPr id="8" name="Rectangle 1">
+            <a:extLst>
+              <a:ext uri="{FF2B5EF4-FFF2-40B4-BE49-F238E27FC236}">
+                <a16:creationId xmlns:a16="http://schemas.microsoft.com/office/drawing/2014/main" id="{FC27A688-8646-DB1F-FAA1-AE2FA9844252}"/>
+              </a:ext>
+            </a:extLst>
+          </p:cNvPr>
+          <p:cNvSpPr>
+            <a:spLocks noChangeArrowheads="1"/>
+          </p:cNvSpPr>
+          <p:nvPr/>
+        </p:nvSpPr>
+        <p:spPr bwMode="auto">
+          <a:xfrm>
+            <a:off x="0" y="0"/>
+            <a:ext cx="9144000" cy="0"/>
+          </a:xfrm>
+          <a:prstGeom prst="rect">
+            <a:avLst/>
+          </a:prstGeom>
+          <a:noFill/>
+          <a:ln>
+            <a:noFill/>
+          </a:ln>
+          <a:effectLst/>
+          <a:extLst>
+            <a:ext uri="{909E8E84-426E-40DD-AFC4-6F175D3DCCD1}">
+              <a14:hiddenFill xmlns:a14="http://schemas.microsoft.com/office/drawing/2010/main">
+                <a:solidFill>
+                  <a:schemeClr val="accent1"/>
+                </a:solidFill>
+              </a14:hiddenFill>
+            </a:ext>
+            <a:ext uri="{91240B29-F687-4F45-9708-019B960494DF}">
+              <a14:hiddenLine xmlns:a14="http://schemas.microsoft.com/office/drawing/2010/main" w="9525">
+                <a:solidFill>
+                  <a:schemeClr val="tx1"/>
+                </a:solidFill>
+                <a:miter lim="800000"/>
+                <a:headEnd/>
+                <a:tailEnd/>
+              </a14:hiddenLine>
+            </a:ext>
+            <a:ext uri="{AF507438-7753-43E0-B8FC-AC1667EBCBE1}">
+              <a14:hiddenEffects xmlns:a14="http://schemas.microsoft.com/office/drawing/2010/main">
+                <a:effectLst>
+                  <a:outerShdw dist="35921" dir="2700000" algn="ctr" rotWithShape="0">
+                    <a:schemeClr val="bg2"/>
+                  </a:outerShdw>
+                </a:effectLst>
+              </a14:hiddenEffects>
+            </a:ext>
+          </a:extLst>
+        </p:spPr>
+        <p:txBody>
+          <a:bodyPr vert="horz" wrap="none" lIns="91440" tIns="45720" rIns="91440" bIns="45720" numCol="1" anchor="ctr" anchorCtr="0" compatLnSpc="1">
+            <a:prstTxWarp prst="textNoShape">
+              <a:avLst/>
+            </a:prstTxWarp>
+            <a:spAutoFit/>
+          </a:bodyPr>
+          <a:lstStyle/>
+          <a:p>
+            <a:endParaRPr lang="en-IN"/>
+          </a:p>
+        </p:txBody>
+      </p:sp>
+      <p:pic>
+        <p:nvPicPr>
+          <p:cNvPr id="3" name="Picture 2">
+            <a:extLst>
+              <a:ext uri="{FF2B5EF4-FFF2-40B4-BE49-F238E27FC236}">
+                <a16:creationId xmlns:a16="http://schemas.microsoft.com/office/drawing/2014/main" id="{A8C266A9-3DD4-03A3-89C9-78F837A5173B}"/>
+              </a:ext>
+            </a:extLst>
+          </p:cNvPr>
+          <p:cNvPicPr>
+            <a:picLocks noChangeAspect="1"/>
+          </p:cNvPicPr>
+          <p:nvPr/>
+        </p:nvPicPr>
+        <p:blipFill>
+          <a:blip r:embed="rId5">
+            <a:extLst>
+              <a:ext uri="{28A0092B-C50C-407E-A947-70E740481C1C}">
+                <a14:useLocalDpi xmlns:a14="http://schemas.microsoft.com/office/drawing/2010/main" val="0"/>
+              </a:ext>
+            </a:extLst>
+          </a:blip>
+          <a:stretch>
+            <a:fillRect/>
+          </a:stretch>
+        </p:blipFill>
+        <p:spPr>
+          <a:xfrm>
+            <a:off x="0" y="1061446"/>
+            <a:ext cx="9144000" cy="5247873"/>
+          </a:xfrm>
+          <a:prstGeom prst="rect">
+            <a:avLst/>
+          </a:prstGeom>
+        </p:spPr>
+      </p:pic>
+    </p:spTree>
+    <p:extLst>
+      <p:ext uri="{BB962C8B-B14F-4D97-AF65-F5344CB8AC3E}">
+        <p14:creationId xmlns:p14="http://schemas.microsoft.com/office/powerpoint/2010/main" val="292643029"/>
       </p:ext>
     </p:extLst>
   </p:cSld>
